--- a/docs/EFF-IT.pptx
+++ b/docs/EFF-IT.pptx
@@ -19,6 +19,15 @@
     <p:sldId id="267" r:id="rId19"/>
     <p:sldId id="268" r:id="rId20"/>
     <p:sldId id="269" r:id="rId21"/>
+    <p:sldId id="270" r:id="rId22"/>
+    <p:sldId id="271" r:id="rId23"/>
+    <p:sldId id="272" r:id="rId24"/>
+    <p:sldId id="273" r:id="rId25"/>
+    <p:sldId id="274" r:id="rId26"/>
+    <p:sldId id="275" r:id="rId27"/>
+    <p:sldId id="276" r:id="rId28"/>
+    <p:sldId id="277" r:id="rId29"/>
+    <p:sldId id="278" r:id="rId30"/>
   </p:sldIdLst>
   <p:sldSz cx="12191695" cy="6858000" type="screen4x3"/>
   <p:notesSz cx="6858000" cy="9144000"/>
@@ -1097,6 +1106,438 @@
 </p:notes>
 </file>
 
+<file path=ppt/notesSlides/notesSlide15.xml><?xml version="1.0" encoding="utf-8"?>
+<p:notes xmlns:a="http://schemas.openxmlformats.org/drawingml/2006/main" xmlns:p="http://schemas.openxmlformats.org/presentationml/2006/main" xmlns:r="http://schemas.openxmlformats.org/officeDocument/2006/relationships">
+  <p:cSld>
+    <p:spTree>
+      <p:nvGrpSpPr>
+        <p:cNvPr id="1" name=""/>
+        <p:cNvGrpSpPr/>
+        <p:nvPr/>
+      </p:nvGrpSpPr>
+      <p:grpSpPr>
+        <a:xfrm>
+          <a:off x="0" y="0"/>
+          <a:ext cx="0" cy="0"/>
+          <a:chOff x="0" y="0"/>
+          <a:chExt cx="0" cy="0"/>
+        </a:xfrm>
+      </p:grpSpPr>
+      <p:sp>
+        <p:nvSpPr>
+          <p:cNvPr id="2" name="Slide Image Placeholder 1"/>
+          <p:cNvSpPr>
+            <a:spLocks noGrp="1"/>
+          </p:cNvSpPr>
+          <p:nvPr>
+            <p:ph type="sldImg" idx="2"/>
+          </p:nvPr>
+        </p:nvSpPr>
+        <p:spPr/>
+      </p:sp>
+      <p:sp>
+        <p:nvSpPr>
+          <p:cNvPr id="3" name="Notes Placeholder 2"/>
+          <p:cNvSpPr>
+            <a:spLocks noGrp="1"/>
+          </p:cNvSpPr>
+          <p:nvPr>
+            <p:ph type="body" idx="3" sz="quarter"/>
+          </p:nvPr>
+        </p:nvSpPr>
+        <p:spPr/>
+        <p:txBody>
+          <a:bodyPr/>
+          <a:lstStyle/>
+          <a:p>
+            <a:r>
+              <a:t>Pause here. This is the pivot from 'here's the harness' to 'here's a real run of the harness, soup to nuts.'</a:t>
+            </a:r>
+          </a:p>
+          <a:p/>
+          <a:p>
+            <a:r>
+              <a:t>What to say:</a:t>
+            </a:r>
+          </a:p>
+          <a:p>
+            <a:r>
+              <a:t>'The rest of the talk was about the harness. The rest of the deck is what one run looks like in practice. Thirty minutes, twelve agents, one merged PR, five cents in tokens. We're going to walk every stage with the actual screenshots from that session.'</a:t>
+            </a:r>
+          </a:p>
+          <a:p/>
+          <a:p>
+            <a:r>
+              <a:t>If you have time and the audience is engaged, mention you can also play the full screen recording — it's in pptx_refs/ next to the deck. Don't try to embed a 30 MB .mov in the slides; just have it ready in a side window if asked.</a:t>
+            </a:r>
+          </a:p>
+        </p:txBody>
+      </p:sp>
+      <p:sp>
+        <p:nvSpPr>
+          <p:cNvPr id="4" name="Slide Number Placeholder 3"/>
+          <p:cNvSpPr>
+            <a:spLocks noGrp="1"/>
+          </p:cNvSpPr>
+          <p:nvPr>
+            <p:ph type="sldNum" idx="5" sz="quarter"/>
+          </p:nvPr>
+        </p:nvSpPr>
+        <p:spPr/>
+      </p:sp>
+    </p:spTree>
+  </p:cSld>
+  <p:clrMapOvr>
+    <a:masterClrMapping/>
+  </p:clrMapOvr>
+</p:notes>
+</file>
+
+<file path=ppt/notesSlides/notesSlide16.xml><?xml version="1.0" encoding="utf-8"?>
+<p:notes xmlns:a="http://schemas.openxmlformats.org/drawingml/2006/main" xmlns:p="http://schemas.openxmlformats.org/presentationml/2006/main" xmlns:r="http://schemas.openxmlformats.org/officeDocument/2006/relationships">
+  <p:cSld>
+    <p:spTree>
+      <p:nvGrpSpPr>
+        <p:cNvPr id="1" name=""/>
+        <p:cNvGrpSpPr/>
+        <p:nvPr/>
+      </p:nvGrpSpPr>
+      <p:grpSpPr>
+        <a:xfrm>
+          <a:off x="0" y="0"/>
+          <a:ext cx="0" cy="0"/>
+          <a:chOff x="0" y="0"/>
+          <a:chExt cx="0" cy="0"/>
+        </a:xfrm>
+      </p:grpSpPr>
+      <p:sp>
+        <p:nvSpPr>
+          <p:cNvPr id="2" name="Slide Image Placeholder 1"/>
+          <p:cNvSpPr>
+            <a:spLocks noGrp="1"/>
+          </p:cNvSpPr>
+          <p:nvPr>
+            <p:ph type="sldImg" idx="2"/>
+          </p:nvPr>
+        </p:nvSpPr>
+        <p:spPr/>
+      </p:sp>
+      <p:sp>
+        <p:nvSpPr>
+          <p:cNvPr id="3" name="Notes Placeholder 2"/>
+          <p:cNvSpPr>
+            <a:spLocks noGrp="1"/>
+          </p:cNvSpPr>
+          <p:nvPr>
+            <p:ph type="body" idx="3" sz="quarter"/>
+          </p:nvPr>
+        </p:nvSpPr>
+        <p:spPr/>
+        <p:txBody>
+          <a:bodyPr/>
+          <a:lstStyle/>
+          <a:p>
+            <a:r>
+              <a:t>Two screenshots, two beats:</a:t>
+            </a:r>
+          </a:p>
+          <a:p/>
+          <a:p>
+            <a:r>
+              <a:t>LEFT (10:41:53): 'This is what kicking off a run looks like — type /run, Claude Code prompts you to allow the skill. That's the only friction in the whole 30 minutes.'</a:t>
+            </a:r>
+          </a:p>
+          <a:p/>
+          <a:p>
+            <a:r>
+              <a:t>RIGHT (10:43:26): 'A minute and a half later, the interrogator has summarized the idea back to me. Note the prompt at the bottom — Is this the right one-liner, or do you want to refine it? It will not draft a spec until you confirm or correct.'</a:t>
+            </a:r>
+          </a:p>
+          <a:p/>
+          <a:p>
+            <a:r>
+              <a:t>Optional aside: the model badge in the bottom-left switched from Sonnet 4.6 to Opus 4.7 between these two screenshots. The skill actually suggested the swap because Opus does deeper interrogation. Small UX detail, but it tells you the harness is opinionated about model choice per stage.</a:t>
+            </a:r>
+          </a:p>
+        </p:txBody>
+      </p:sp>
+      <p:sp>
+        <p:nvSpPr>
+          <p:cNvPr id="4" name="Slide Number Placeholder 3"/>
+          <p:cNvSpPr>
+            <a:spLocks noGrp="1"/>
+          </p:cNvSpPr>
+          <p:nvPr>
+            <p:ph type="sldNum" idx="5" sz="quarter"/>
+          </p:nvPr>
+        </p:nvSpPr>
+        <p:spPr/>
+      </p:sp>
+    </p:spTree>
+  </p:cSld>
+  <p:clrMapOvr>
+    <a:masterClrMapping/>
+  </p:clrMapOvr>
+</p:notes>
+</file>
+
+<file path=ppt/notesSlides/notesSlide17.xml><?xml version="1.0" encoding="utf-8"?>
+<p:notes xmlns:a="http://schemas.openxmlformats.org/drawingml/2006/main" xmlns:p="http://schemas.openxmlformats.org/presentationml/2006/main" xmlns:r="http://schemas.openxmlformats.org/officeDocument/2006/relationships">
+  <p:cSld>
+    <p:spTree>
+      <p:nvGrpSpPr>
+        <p:cNvPr id="1" name=""/>
+        <p:cNvGrpSpPr/>
+        <p:nvPr/>
+      </p:nvGrpSpPr>
+      <p:grpSpPr>
+        <a:xfrm>
+          <a:off x="0" y="0"/>
+          <a:ext cx="0" cy="0"/>
+          <a:chOff x="0" y="0"/>
+          <a:chExt cx="0" cy="0"/>
+        </a:xfrm>
+      </p:grpSpPr>
+      <p:sp>
+        <p:nvSpPr>
+          <p:cNvPr id="2" name="Slide Image Placeholder 1"/>
+          <p:cNvSpPr>
+            <a:spLocks noGrp="1"/>
+          </p:cNvSpPr>
+          <p:nvPr>
+            <p:ph type="sldImg" idx="2"/>
+          </p:nvPr>
+        </p:nvSpPr>
+        <p:spPr/>
+      </p:sp>
+      <p:sp>
+        <p:nvSpPr>
+          <p:cNvPr id="3" name="Notes Placeholder 2"/>
+          <p:cNvSpPr>
+            <a:spLocks noGrp="1"/>
+          </p:cNvSpPr>
+          <p:nvPr>
+            <p:ph type="body" idx="3" sz="quarter"/>
+          </p:nvPr>
+        </p:nvSpPr>
+        <p:spPr/>
+        <p:txBody>
+          <a:bodyPr/>
+          <a:lstStyle/>
+          <a:p>
+            <a:r>
+              <a:t>Don't read the spec aloud. Let people scan it for ten seconds.</a:t>
+            </a:r>
+          </a:p>
+          <a:p/>
+          <a:p>
+            <a:r>
+              <a:t>What to say:</a:t>
+            </a:r>
+          </a:p>
+          <a:p>
+            <a:r>
+              <a:t>'Every section you see here came out of the interrogator's Q&amp;A. Goals, non-goals, intended users, scope boundaries. This file becomes the contract — karen, the auditor agent at the end of the pipeline, literally diffs the implementation against this spec to decide PASS, PARTIAL, or FAIL.'</a:t>
+            </a:r>
+          </a:p>
+          <a:p/>
+          <a:p>
+            <a:r>
+              <a:t>Land this point: 'In raw vibe coding, the spec lives in chat history and gets lost. Here, it's a file. You can read it, share it, and the agents can re-read it whenever they drift.'</a:t>
+            </a:r>
+          </a:p>
+        </p:txBody>
+      </p:sp>
+      <p:sp>
+        <p:nvSpPr>
+          <p:cNvPr id="4" name="Slide Number Placeholder 3"/>
+          <p:cNvSpPr>
+            <a:spLocks noGrp="1"/>
+          </p:cNvSpPr>
+          <p:nvPr>
+            <p:ph type="sldNum" idx="5" sz="quarter"/>
+          </p:nvPr>
+        </p:nvSpPr>
+        <p:spPr/>
+      </p:sp>
+    </p:spTree>
+  </p:cSld>
+  <p:clrMapOvr>
+    <a:masterClrMapping/>
+  </p:clrMapOvr>
+</p:notes>
+</file>
+
+<file path=ppt/notesSlides/notesSlide18.xml><?xml version="1.0" encoding="utf-8"?>
+<p:notes xmlns:a="http://schemas.openxmlformats.org/drawingml/2006/main" xmlns:p="http://schemas.openxmlformats.org/presentationml/2006/main" xmlns:r="http://schemas.openxmlformats.org/officeDocument/2006/relationships">
+  <p:cSld>
+    <p:spTree>
+      <p:nvGrpSpPr>
+        <p:cNvPr id="1" name=""/>
+        <p:cNvGrpSpPr/>
+        <p:nvPr/>
+      </p:nvGrpSpPr>
+      <p:grpSpPr>
+        <a:xfrm>
+          <a:off x="0" y="0"/>
+          <a:ext cx="0" cy="0"/>
+          <a:chOff x="0" y="0"/>
+          <a:chExt cx="0" cy="0"/>
+        </a:xfrm>
+      </p:grpSpPr>
+      <p:sp>
+        <p:nvSpPr>
+          <p:cNvPr id="2" name="Slide Image Placeholder 1"/>
+          <p:cNvSpPr>
+            <a:spLocks noGrp="1"/>
+          </p:cNvSpPr>
+          <p:nvPr>
+            <p:ph type="sldImg" idx="2"/>
+          </p:nvPr>
+        </p:nvSpPr>
+        <p:spPr/>
+      </p:sp>
+      <p:sp>
+        <p:nvSpPr>
+          <p:cNvPr id="3" name="Notes Placeholder 2"/>
+          <p:cNvSpPr>
+            <a:spLocks noGrp="1"/>
+          </p:cNvSpPr>
+          <p:nvPr>
+            <p:ph type="body" idx="3" sz="quarter"/>
+          </p:nvPr>
+        </p:nvSpPr>
+        <p:spPr/>
+        <p:txBody>
+          <a:bodyPr/>
+          <a:lstStyle/>
+          <a:p>
+            <a:r>
+              <a:t>These two screenshots are SECURITY_CONCERNS.md, top half on the left, bottom half on the right. Walk through what's on screen:</a:t>
+            </a:r>
+          </a:p>
+          <a:p/>
+          <a:p>
+            <a:r>
+              <a:t>'The concern-resolver looked at the SPEC, looked at app_types declared in CLAUDE.md, and produced this merged checklist. SR-1 is timing-safe comparison. SR-2 is replay protection. SR-3 is no-secret-in-logs. Every one of these has a triggered-by reason and a remediation hint.'</a:t>
+            </a:r>
+          </a:p>
+          <a:p/>
+          <a:p>
+            <a:r>
+              <a:t>The key point: this happens BEFORE implementation. The architect agent reads this file and bakes the mitigations into the design. The security-reviewer at the end reads the SAME file to verify nothing was missed. One checklist, three agents.</a:t>
+            </a:r>
+          </a:p>
+        </p:txBody>
+      </p:sp>
+      <p:sp>
+        <p:nvSpPr>
+          <p:cNvPr id="4" name="Slide Number Placeholder 3"/>
+          <p:cNvSpPr>
+            <a:spLocks noGrp="1"/>
+          </p:cNvSpPr>
+          <p:nvPr>
+            <p:ph type="sldNum" idx="5" sz="quarter"/>
+          </p:nvPr>
+        </p:nvSpPr>
+        <p:spPr/>
+      </p:sp>
+    </p:spTree>
+  </p:cSld>
+  <p:clrMapOvr>
+    <a:masterClrMapping/>
+  </p:clrMapOvr>
+</p:notes>
+</file>
+
+<file path=ppt/notesSlides/notesSlide19.xml><?xml version="1.0" encoding="utf-8"?>
+<p:notes xmlns:a="http://schemas.openxmlformats.org/drawingml/2006/main" xmlns:p="http://schemas.openxmlformats.org/presentationml/2006/main" xmlns:r="http://schemas.openxmlformats.org/officeDocument/2006/relationships">
+  <p:cSld>
+    <p:spTree>
+      <p:nvGrpSpPr>
+        <p:cNvPr id="1" name=""/>
+        <p:cNvGrpSpPr/>
+        <p:nvPr/>
+      </p:nvGrpSpPr>
+      <p:grpSpPr>
+        <a:xfrm>
+          <a:off x="0" y="0"/>
+          <a:ext cx="0" cy="0"/>
+          <a:chOff x="0" y="0"/>
+          <a:chExt cx="0" cy="0"/>
+        </a:xfrm>
+      </p:grpSpPr>
+      <p:sp>
+        <p:nvSpPr>
+          <p:cNvPr id="2" name="Slide Image Placeholder 1"/>
+          <p:cNvSpPr>
+            <a:spLocks noGrp="1"/>
+          </p:cNvSpPr>
+          <p:nvPr>
+            <p:ph type="sldImg" idx="2"/>
+          </p:nvPr>
+        </p:nvSpPr>
+        <p:spPr/>
+      </p:sp>
+      <p:sp>
+        <p:nvSpPr>
+          <p:cNvPr id="3" name="Notes Placeholder 2"/>
+          <p:cNvSpPr>
+            <a:spLocks noGrp="1"/>
+          </p:cNvSpPr>
+          <p:nvPr>
+            <p:ph type="body" idx="3" sz="quarter"/>
+          </p:nvPr>
+        </p:nvSpPr>
+        <p:spPr/>
+        <p:txBody>
+          <a:bodyPr/>
+          <a:lstStyle/>
+          <a:p>
+            <a:r>
+              <a:t>Two halves of one architecture doc.</a:t>
+            </a:r>
+          </a:p>
+          <a:p/>
+          <a:p>
+            <a:r>
+              <a:t>LEFT: system context diagram. Note the trust boundary — webhooksig sits INSIDE the caller's request handler, after TLS termination, before business logic. The architect agent drew this. ASCII art, not Mermaid — because it has to render in any markdown viewer, including git diff.</a:t>
+            </a:r>
+          </a:p>
+          <a:p/>
+          <a:p>
+            <a:r>
+              <a:t>RIGHT: the data-flow section. Pseudocode for the call path through verify_github and verify_stripe. This is the algorithm being settled BEFORE any code is written. By the time the coder agent gets a task, all of these decisions are pre-made.</a:t>
+            </a:r>
+          </a:p>
+          <a:p/>
+          <a:p>
+            <a:r>
+              <a:t>Land it: 'Most agent runs go straight from spec to code. The architect step is what stops the coder from re-deciding architecture in every function it writes.'</a:t>
+            </a:r>
+          </a:p>
+        </p:txBody>
+      </p:sp>
+      <p:sp>
+        <p:nvSpPr>
+          <p:cNvPr id="4" name="Slide Number Placeholder 3"/>
+          <p:cNvSpPr>
+            <a:spLocks noGrp="1"/>
+          </p:cNvSpPr>
+          <p:nvPr>
+            <p:ph type="sldNum" idx="5" sz="quarter"/>
+          </p:nvPr>
+        </p:nvSpPr>
+        <p:spPr/>
+      </p:sp>
+    </p:spTree>
+  </p:cSld>
+  <p:clrMapOvr>
+    <a:masterClrMapping/>
+  </p:clrMapOvr>
+</p:notes>
+</file>
+
 <file path=ppt/notesSlides/notesSlide2.xml><?xml version="1.0" encoding="utf-8"?>
 <p:notes xmlns:a="http://schemas.openxmlformats.org/drawingml/2006/main" xmlns:p="http://schemas.openxmlformats.org/presentationml/2006/main" xmlns:r="http://schemas.openxmlformats.org/officeDocument/2006/relationships">
   <p:cSld>
@@ -1181,6 +1622,416 @@
           <a:p>
             <a:r>
               <a:t>Transition: 'So I built something to fix that.'</a:t>
+            </a:r>
+          </a:p>
+        </p:txBody>
+      </p:sp>
+      <p:sp>
+        <p:nvSpPr>
+          <p:cNvPr id="4" name="Slide Number Placeholder 3"/>
+          <p:cNvSpPr>
+            <a:spLocks noGrp="1"/>
+          </p:cNvSpPr>
+          <p:nvPr>
+            <p:ph type="sldNum" idx="5" sz="quarter"/>
+          </p:nvPr>
+        </p:nvSpPr>
+        <p:spPr/>
+      </p:sp>
+    </p:spTree>
+  </p:cSld>
+  <p:clrMapOvr>
+    <a:masterClrMapping/>
+  </p:clrMapOvr>
+</p:notes>
+</file>
+
+<file path=ppt/notesSlides/notesSlide20.xml><?xml version="1.0" encoding="utf-8"?>
+<p:notes xmlns:a="http://schemas.openxmlformats.org/drawingml/2006/main" xmlns:p="http://schemas.openxmlformats.org/presentationml/2006/main" xmlns:r="http://schemas.openxmlformats.org/officeDocument/2006/relationships">
+  <p:cSld>
+    <p:spTree>
+      <p:nvGrpSpPr>
+        <p:cNvPr id="1" name=""/>
+        <p:cNvGrpSpPr/>
+        <p:nvPr/>
+      </p:nvGrpSpPr>
+      <p:grpSpPr>
+        <a:xfrm>
+          <a:off x="0" y="0"/>
+          <a:ext cx="0" cy="0"/>
+          <a:chOff x="0" y="0"/>
+          <a:chExt cx="0" cy="0"/>
+        </a:xfrm>
+      </p:grpSpPr>
+      <p:sp>
+        <p:nvSpPr>
+          <p:cNvPr id="2" name="Slide Image Placeholder 1"/>
+          <p:cNvSpPr>
+            <a:spLocks noGrp="1"/>
+          </p:cNvSpPr>
+          <p:nvPr>
+            <p:ph type="sldImg" idx="2"/>
+          </p:nvPr>
+        </p:nvSpPr>
+        <p:spPr/>
+      </p:sp>
+      <p:sp>
+        <p:nvSpPr>
+          <p:cNvPr id="3" name="Notes Placeholder 2"/>
+          <p:cNvSpPr>
+            <a:spLocks noGrp="1"/>
+          </p:cNvSpPr>
+          <p:nvPr>
+            <p:ph type="body" idx="3" sz="quarter"/>
+          </p:nvPr>
+        </p:nvSpPr>
+        <p:spPr/>
+        <p:txBody>
+          <a:bodyPr/>
+          <a:lstStyle/>
+          <a:p>
+            <a:r>
+              <a:t>LEFT: 'Four agents running in parallel — fixing test mismatches and implementing the P2 module tier.' This is the orchestrator's decomposition paying off — independent tasks fan out to independent coders. Wall-clock for this phase: under five minutes.</a:t>
+            </a:r>
+          </a:p>
+          <a:p/>
+          <a:p>
+            <a:r>
+              <a:t>RIGHT: this is the moment that justifies the advisor tool. The coder hit an ambiguous spec edge — what's the right max_header_length bound? Instead of guessing, it consulted the stronger advisor model. The advisor reviewed the full transcript and confirmed the approach.</a:t>
+            </a:r>
+          </a:p>
+          <a:p/>
+          <a:p>
+            <a:r>
+              <a:t>Key point: 'The advisor isn't a fallback for failure. It's a second-opinion mechanism for decisions that have consequences. The coder used it correctly here — at a branch point, before committing to an interpretation.'</a:t>
+            </a:r>
+          </a:p>
+        </p:txBody>
+      </p:sp>
+      <p:sp>
+        <p:nvSpPr>
+          <p:cNvPr id="4" name="Slide Number Placeholder 3"/>
+          <p:cNvSpPr>
+            <a:spLocks noGrp="1"/>
+          </p:cNvSpPr>
+          <p:nvPr>
+            <p:ph type="sldNum" idx="5" sz="quarter"/>
+          </p:nvPr>
+        </p:nvSpPr>
+        <p:spPr/>
+      </p:sp>
+    </p:spTree>
+  </p:cSld>
+  <p:clrMapOvr>
+    <a:masterClrMapping/>
+  </p:clrMapOvr>
+</p:notes>
+</file>
+
+<file path=ppt/notesSlides/notesSlide21.xml><?xml version="1.0" encoding="utf-8"?>
+<p:notes xmlns:a="http://schemas.openxmlformats.org/drawingml/2006/main" xmlns:p="http://schemas.openxmlformats.org/presentationml/2006/main" xmlns:r="http://schemas.openxmlformats.org/officeDocument/2006/relationships">
+  <p:cSld>
+    <p:spTree>
+      <p:nvGrpSpPr>
+        <p:cNvPr id="1" name=""/>
+        <p:cNvGrpSpPr/>
+        <p:nvPr/>
+      </p:nvGrpSpPr>
+      <p:grpSpPr>
+        <a:xfrm>
+          <a:off x="0" y="0"/>
+          <a:ext cx="0" cy="0"/>
+          <a:chOff x="0" y="0"/>
+          <a:chExt cx="0" cy="0"/>
+        </a:xfrm>
+      </p:grpSpPr>
+      <p:sp>
+        <p:nvSpPr>
+          <p:cNvPr id="2" name="Slide Image Placeholder 1"/>
+          <p:cNvSpPr>
+            <a:spLocks noGrp="1"/>
+          </p:cNvSpPr>
+          <p:nvPr>
+            <p:ph type="sldImg" idx="2"/>
+          </p:nvPr>
+        </p:nvSpPr>
+        <p:spPr/>
+      </p:sp>
+      <p:sp>
+        <p:nvSpPr>
+          <p:cNvPr id="3" name="Notes Placeholder 2"/>
+          <p:cNvSpPr>
+            <a:spLocks noGrp="1"/>
+          </p:cNvSpPr>
+          <p:nvPr>
+            <p:ph type="body" idx="3" sz="quarter"/>
+          </p:nvPr>
+        </p:nvSpPr>
+        <p:spPr/>
+        <p:txBody>
+          <a:bodyPr/>
+          <a:lstStyle/>
+          <a:p>
+            <a:r>
+              <a:t>This is the slide where 'agents in the loop' becomes 'humans still in the loop when it counts.'</a:t>
+            </a:r>
+          </a:p>
+          <a:p/>
+          <a:p>
+            <a:r>
+              <a:t>Walk the screenshot:</a:t>
+            </a:r>
+          </a:p>
+          <a:p>
+            <a:r>
+              <a:t>  - pytest result: 160 passing, 22 failing</a:t>
+            </a:r>
+          </a:p>
+          <a:p>
+            <a:r>
+              <a:t>  - karen identifies: '22 failures — all pre-existing test bugs from     the unit-test-writer (wrong kwargs, wrong provider expectations,     test design mismatches)'</a:t>
+            </a:r>
+          </a:p>
+          <a:p>
+            <a:r>
+              <a:t>  - Karen presents options. The human picked Option C — accept the     pre-existing failures, proceed.</a:t>
+            </a:r>
+          </a:p>
+          <a:p/>
+          <a:p>
+            <a:r>
+              <a:t>What to say:</a:t>
+            </a:r>
+          </a:p>
+          <a:p>
+            <a:r>
+              <a:t>'Karen could have looped forever trying to fix unit-test-writer's bugs. Instead, she recognized the failure pattern, escalated with options, and let me make the call. This is the difference between an autonomous agent that wastes 20 minutes and a harness that knows when to ask.'</a:t>
+            </a:r>
+          </a:p>
+          <a:p/>
+          <a:p>
+            <a:r>
+              <a:t>Optional follow-up: the 22 pre-existing bugs got logged in PROBLEMS.md and PLAN.md for a future run to address. Nothing got swept under the rug.</a:t>
+            </a:r>
+          </a:p>
+        </p:txBody>
+      </p:sp>
+      <p:sp>
+        <p:nvSpPr>
+          <p:cNvPr id="4" name="Slide Number Placeholder 3"/>
+          <p:cNvSpPr>
+            <a:spLocks noGrp="1"/>
+          </p:cNvSpPr>
+          <p:nvPr>
+            <p:ph type="sldNum" idx="5" sz="quarter"/>
+          </p:nvPr>
+        </p:nvSpPr>
+        <p:spPr/>
+      </p:sp>
+    </p:spTree>
+  </p:cSld>
+  <p:clrMapOvr>
+    <a:masterClrMapping/>
+  </p:clrMapOvr>
+</p:notes>
+</file>
+
+<file path=ppt/notesSlides/notesSlide22.xml><?xml version="1.0" encoding="utf-8"?>
+<p:notes xmlns:a="http://schemas.openxmlformats.org/drawingml/2006/main" xmlns:p="http://schemas.openxmlformats.org/presentationml/2006/main" xmlns:r="http://schemas.openxmlformats.org/officeDocument/2006/relationships">
+  <p:cSld>
+    <p:spTree>
+      <p:nvGrpSpPr>
+        <p:cNvPr id="1" name=""/>
+        <p:cNvGrpSpPr/>
+        <p:nvPr/>
+      </p:nvGrpSpPr>
+      <p:grpSpPr>
+        <a:xfrm>
+          <a:off x="0" y="0"/>
+          <a:ext cx="0" cy="0"/>
+          <a:chOff x="0" y="0"/>
+          <a:chExt cx="0" cy="0"/>
+        </a:xfrm>
+      </p:grpSpPr>
+      <p:sp>
+        <p:nvSpPr>
+          <p:cNvPr id="2" name="Slide Image Placeholder 1"/>
+          <p:cNvSpPr>
+            <a:spLocks noGrp="1"/>
+          </p:cNvSpPr>
+          <p:nvPr>
+            <p:ph type="sldImg" idx="2"/>
+          </p:nvPr>
+        </p:nvSpPr>
+        <p:spPr/>
+      </p:sp>
+      <p:sp>
+        <p:nvSpPr>
+          <p:cNvPr id="3" name="Notes Placeholder 2"/>
+          <p:cNvSpPr>
+            <a:spLocks noGrp="1"/>
+          </p:cNvSpPr>
+          <p:nvPr>
+            <p:ph type="body" idx="3" sz="quarter"/>
+          </p:nvPr>
+        </p:nvSpPr>
+        <p:spPr/>
+        <p:txBody>
+          <a:bodyPr/>
+          <a:lstStyle/>
+          <a:p>
+            <a:r>
+              <a:t>This is the money shot. Don't talk over it for the first ten seconds — let people read.</a:t>
+            </a:r>
+          </a:p>
+          <a:p/>
+          <a:p>
+            <a:r>
+              <a:t>When you talk, hit the rows that matter:</a:t>
+            </a:r>
+          </a:p>
+          <a:p>
+            <a:r>
+              <a:t>  - 'TDD red phase: 182 tests written BEFORE implementation. That's     the test-immutability hook earning its keep — agents wrote tests     first, then code to make them pass.'</a:t>
+            </a:r>
+          </a:p>
+          <a:p>
+            <a:r>
+              <a:t>  - 'Parallel + sequential split: the orchestrator decided which work     was safe to parallelize. P1/P2 groups (types, core, providers) in     parallel. S1/S2 (cli, entrypoint) sequential because they depend     on the others.'</a:t>
+            </a:r>
+          </a:p>
+          <a:p>
+            <a:r>
+              <a:t>  - 'Karen: PARTIAL. Why partial and not PASS? She flagged a     .gitignore hiding src/, plus a provider-unknown design note.     Both legitimate, both reviewable.'</a:t>
+            </a:r>
+          </a:p>
+          <a:p>
+            <a:r>
+              <a:t>  - 'Security review: two medium items. SR-1 (UnicodeDecodeError in     Stripe) fixed in the same run. SR-2 (secret visible in process     arg list) documented in PLAN.md for follow-up. Neither shipped     silently.'</a:t>
+            </a:r>
+          </a:p>
+          <a:p/>
+          <a:p>
+            <a:r>
+              <a:t>Land the closer:</a:t>
+            </a:r>
+          </a:p>
+          <a:p>
+            <a:r>
+              <a:t>'30 minutes, 13 seconds. Two commits, PR open. Real working library. This is what the green column of slide 12 actually looks like in wall-clock time.'</a:t>
+            </a:r>
+          </a:p>
+        </p:txBody>
+      </p:sp>
+      <p:sp>
+        <p:nvSpPr>
+          <p:cNvPr id="4" name="Slide Number Placeholder 3"/>
+          <p:cNvSpPr>
+            <a:spLocks noGrp="1"/>
+          </p:cNvSpPr>
+          <p:nvPr>
+            <p:ph type="sldNum" idx="5" sz="quarter"/>
+          </p:nvPr>
+        </p:nvSpPr>
+        <p:spPr/>
+      </p:sp>
+    </p:spTree>
+  </p:cSld>
+  <p:clrMapOvr>
+    <a:masterClrMapping/>
+  </p:clrMapOvr>
+</p:notes>
+</file>
+
+<file path=ppt/notesSlides/notesSlide23.xml><?xml version="1.0" encoding="utf-8"?>
+<p:notes xmlns:a="http://schemas.openxmlformats.org/drawingml/2006/main" xmlns:p="http://schemas.openxmlformats.org/presentationml/2006/main" xmlns:r="http://schemas.openxmlformats.org/officeDocument/2006/relationships">
+  <p:cSld>
+    <p:spTree>
+      <p:nvGrpSpPr>
+        <p:cNvPr id="1" name=""/>
+        <p:cNvGrpSpPr/>
+        <p:nvPr/>
+      </p:nvGrpSpPr>
+      <p:grpSpPr>
+        <a:xfrm>
+          <a:off x="0" y="0"/>
+          <a:ext cx="0" cy="0"/>
+          <a:chOff x="0" y="0"/>
+          <a:chExt cx="0" cy="0"/>
+        </a:xfrm>
+      </p:grpSpPr>
+      <p:sp>
+        <p:nvSpPr>
+          <p:cNvPr id="2" name="Slide Image Placeholder 1"/>
+          <p:cNvSpPr>
+            <a:spLocks noGrp="1"/>
+          </p:cNvSpPr>
+          <p:nvPr>
+            <p:ph type="sldImg" idx="2"/>
+          </p:nvPr>
+        </p:nvSpPr>
+        <p:spPr/>
+      </p:sp>
+      <p:sp>
+        <p:nvSpPr>
+          <p:cNvPr id="3" name="Notes Placeholder 2"/>
+          <p:cNvSpPr>
+            <a:spLocks noGrp="1"/>
+          </p:cNvSpPr>
+          <p:nvPr>
+            <p:ph type="body" idx="3" sz="quarter"/>
+          </p:nvPr>
+        </p:nvSpPr>
+        <p:spPr/>
+        <p:txBody>
+          <a:bodyPr/>
+          <a:lstStyle/>
+          <a:p>
+            <a:r>
+              <a:t>This slide exists for the skeptics. On slide 8 you claimed an audit trail. Here it is.</a:t>
+            </a:r>
+          </a:p>
+          <a:p/>
+          <a:p>
+            <a:r>
+              <a:t>What to say:</a:t>
+            </a:r>
+          </a:p>
+          <a:p>
+            <a:r>
+              <a:t>'These are excerpts from sessions/20260520-2116/session_log.json. Every tool call the agents made during the run got appended to this file. Bash commands, file reads, file writes, sub-agent invocations, everything. When something goes weird in a run — and things do go weird — this is the file you grep.'</a:t>
+            </a:r>
+          </a:p>
+          <a:p/>
+          <a:p>
+            <a:r>
+              <a:t>If asked what you actually do with the log:</a:t>
+            </a:r>
+          </a:p>
+          <a:p>
+            <a:r>
+              <a:t>  - Replay a run mentally without re-running it</a:t>
+            </a:r>
+          </a:p>
+          <a:p>
+            <a:r>
+              <a:t>  - Find which agent touched a specific file</a:t>
+            </a:r>
+          </a:p>
+          <a:p>
+            <a:r>
+              <a:t>  - Measure how often a given tool gets called</a:t>
+            </a:r>
+          </a:p>
+          <a:p>
+            <a:r>
+              <a:t>  - Catch agents trying things they shouldn't (the hooks block most,     but the log shows the attempt)</a:t>
+            </a:r>
+          </a:p>
+          <a:p/>
+          <a:p>
+            <a:r>
+              <a:t>If the audience is non-technical, you can soft-pedal this slide: 'For the engineers in the room — yes, every action is logged. Moving on.' and skip the deep-dive.</a:t>
             </a:r>
           </a:p>
         </p:txBody>
@@ -5928,7 +6779,7 @@
                 </a:solidFill>
                 <a:latin typeface="Segoe UI"/>
               </a:rPr>
-              <a:t>10 / 14</a:t>
+              <a:t>10 / 23</a:t>
             </a:r>
           </a:p>
         </p:txBody>
@@ -6698,7 +7549,7 @@
                 </a:solidFill>
                 <a:latin typeface="Segoe UI"/>
               </a:rPr>
-              <a:t>11 / 14</a:t>
+              <a:t>11 / 23</a:t>
             </a:r>
           </a:p>
         </p:txBody>
@@ -7548,7 +8399,7 @@
                 </a:solidFill>
                 <a:latin typeface="Segoe UI"/>
               </a:rPr>
-              <a:t>12 / 14</a:t>
+              <a:t>12 / 23</a:t>
             </a:r>
           </a:p>
         </p:txBody>
@@ -8411,7 +9262,7 @@
                 </a:solidFill>
                 <a:latin typeface="Segoe UI"/>
               </a:rPr>
-              <a:t>13 / 14</a:t>
+              <a:t>13 / 23</a:t>
             </a:r>
           </a:p>
         </p:txBody>
@@ -9156,7 +10007,2394 @@
                 </a:solidFill>
                 <a:latin typeface="Segoe UI"/>
               </a:rPr>
-              <a:t>14 / 14</a:t>
+              <a:t>14 / 23</a:t>
+            </a:r>
+          </a:p>
+        </p:txBody>
+      </p:sp>
+    </p:spTree>
+  </p:cSld>
+  <p:clrMapOvr>
+    <a:masterClrMapping/>
+  </p:clrMapOvr>
+</p:sld>
+</file>
+
+<file path=ppt/slides/slide15.xml><?xml version="1.0" encoding="utf-8"?>
+<p:sld xmlns:a="http://schemas.openxmlformats.org/drawingml/2006/main" xmlns:p="http://schemas.openxmlformats.org/presentationml/2006/main" xmlns:r="http://schemas.openxmlformats.org/officeDocument/2006/relationships">
+  <p:cSld>
+    <p:spTree>
+      <p:nvGrpSpPr>
+        <p:cNvPr id="1" name=""/>
+        <p:cNvGrpSpPr/>
+        <p:nvPr/>
+      </p:nvGrpSpPr>
+      <p:grpSpPr/>
+      <p:sp>
+        <p:nvSpPr>
+          <p:cNvPr id="2" name="Rectangle 1"/>
+          <p:cNvSpPr/>
+          <p:nvPr/>
+        </p:nvSpPr>
+        <p:spPr>
+          <a:xfrm>
+            <a:off x="0" y="0"/>
+            <a:ext cx="12191695" cy="6858000"/>
+          </a:xfrm>
+          <a:prstGeom prst="rect">
+            <a:avLst/>
+          </a:prstGeom>
+          <a:solidFill>
+            <a:srgbClr val="0F141A"/>
+          </a:solidFill>
+          <a:ln>
+            <a:noFill/>
+          </a:ln>
+          <a:effectLst/>
+        </p:spPr>
+        <p:style>
+          <a:lnRef idx="1">
+            <a:schemeClr val="accent1"/>
+          </a:lnRef>
+          <a:fillRef idx="3">
+            <a:schemeClr val="accent1"/>
+          </a:fillRef>
+          <a:effectRef idx="2">
+            <a:schemeClr val="accent1"/>
+          </a:effectRef>
+          <a:fontRef idx="minor">
+            <a:schemeClr val="lt1"/>
+          </a:fontRef>
+        </p:style>
+        <p:txBody>
+          <a:bodyPr rtlCol="0" anchor="ctr"/>
+          <a:lstStyle/>
+          <a:p>
+            <a:pPr algn="ctr"/>
+          </a:p>
+        </p:txBody>
+      </p:sp>
+      <p:sp>
+        <p:nvSpPr>
+          <p:cNvPr id="3" name="TextBox 2"/>
+          <p:cNvSpPr txBox="1"/>
+          <p:nvPr/>
+        </p:nvSpPr>
+        <p:spPr>
+          <a:xfrm>
+            <a:off x="457200" y="1828800"/>
+            <a:ext cx="11247120" cy="457200"/>
+          </a:xfrm>
+          <a:prstGeom prst="rect">
+            <a:avLst/>
+          </a:prstGeom>
+          <a:noFill/>
+        </p:spPr>
+        <p:txBody>
+          <a:bodyPr wrap="square" lIns="45720" rIns="45720" tIns="18288" bIns="18288">
+            <a:spAutoFit/>
+          </a:bodyPr>
+          <a:lstStyle/>
+          <a:p>
+            <a:pPr algn="ctr"/>
+            <a:r>
+              <a:rPr sz="1800" b="1">
+                <a:solidFill>
+                  <a:srgbClr val="6EE7B7"/>
+                </a:solidFill>
+                <a:latin typeface="Segoe UI"/>
+              </a:rPr>
+              <a:t>APPENDIX</a:t>
+            </a:r>
+          </a:p>
+        </p:txBody>
+      </p:sp>
+      <p:sp>
+        <p:nvSpPr>
+          <p:cNvPr id="4" name="TextBox 3"/>
+          <p:cNvSpPr txBox="1"/>
+          <p:nvPr/>
+        </p:nvSpPr>
+        <p:spPr>
+          <a:xfrm>
+            <a:off x="457200" y="2331720"/>
+            <a:ext cx="11247120" cy="1097280"/>
+          </a:xfrm>
+          <a:prstGeom prst="rect">
+            <a:avLst/>
+          </a:prstGeom>
+          <a:noFill/>
+        </p:spPr>
+        <p:txBody>
+          <a:bodyPr wrap="square" lIns="45720" rIns="45720" tIns="18288" bIns="18288">
+            <a:spAutoFit/>
+          </a:bodyPr>
+          <a:lstStyle/>
+          <a:p>
+            <a:pPr algn="ctr"/>
+            <a:r>
+              <a:rPr sz="4400" b="1">
+                <a:solidFill>
+                  <a:srgbClr val="E8ECF1"/>
+                </a:solidFill>
+                <a:latin typeface="Segoe UI"/>
+              </a:rPr>
+              <a:t>Case study: /run builds webhooksig</a:t>
+            </a:r>
+          </a:p>
+        </p:txBody>
+      </p:sp>
+      <p:sp>
+        <p:nvSpPr>
+          <p:cNvPr id="5" name="TextBox 4"/>
+          <p:cNvSpPr txBox="1"/>
+          <p:nvPr/>
+        </p:nvSpPr>
+        <p:spPr>
+          <a:xfrm>
+            <a:off x="457200" y="3474720"/>
+            <a:ext cx="11247120" cy="457200"/>
+          </a:xfrm>
+          <a:prstGeom prst="rect">
+            <a:avLst/>
+          </a:prstGeom>
+          <a:noFill/>
+        </p:spPr>
+        <p:txBody>
+          <a:bodyPr wrap="square" lIns="45720" rIns="45720" tIns="18288" bIns="18288">
+            <a:spAutoFit/>
+          </a:bodyPr>
+          <a:lstStyle/>
+          <a:p>
+            <a:pPr algn="ctr"/>
+            <a:r>
+              <a:rPr sz="1800" b="0">
+                <a:solidFill>
+                  <a:srgbClr val="9AA3AF"/>
+                </a:solidFill>
+                <a:latin typeface="Segoe UI"/>
+              </a:rPr>
+              <a:t>Idea → merged PR in 30 m 13 s. Every stage. Real receipts.</a:t>
+            </a:r>
+          </a:p>
+        </p:txBody>
+      </p:sp>
+      <p:sp>
+        <p:nvSpPr>
+          <p:cNvPr id="6" name="Rounded Rectangle 5"/>
+          <p:cNvSpPr/>
+          <p:nvPr/>
+        </p:nvSpPr>
+        <p:spPr>
+          <a:xfrm>
+            <a:off x="685800" y="4389120"/>
+            <a:ext cx="2697480" cy="1097280"/>
+          </a:xfrm>
+          <a:prstGeom prst="roundRect">
+            <a:avLst/>
+          </a:prstGeom>
+          <a:solidFill>
+            <a:srgbClr val="181F2A"/>
+          </a:solidFill>
+          <a:ln w="9525">
+            <a:solidFill>
+              <a:srgbClr val="34A87E"/>
+            </a:solidFill>
+          </a:ln>
+          <a:effectLst/>
+        </p:spPr>
+        <p:style>
+          <a:lnRef idx="1">
+            <a:schemeClr val="accent1"/>
+          </a:lnRef>
+          <a:fillRef idx="3">
+            <a:schemeClr val="accent1"/>
+          </a:fillRef>
+          <a:effectRef idx="2">
+            <a:schemeClr val="accent1"/>
+          </a:effectRef>
+          <a:fontRef idx="minor">
+            <a:schemeClr val="lt1"/>
+          </a:fontRef>
+        </p:style>
+        <p:txBody>
+          <a:bodyPr rtlCol="0" anchor="ctr"/>
+          <a:lstStyle/>
+          <a:p>
+            <a:pPr algn="ctr"/>
+          </a:p>
+        </p:txBody>
+      </p:sp>
+      <p:sp>
+        <p:nvSpPr>
+          <p:cNvPr id="7" name="TextBox 6"/>
+          <p:cNvSpPr txBox="1"/>
+          <p:nvPr/>
+        </p:nvSpPr>
+        <p:spPr>
+          <a:xfrm>
+            <a:off x="685800" y="4480560"/>
+            <a:ext cx="2697480" cy="548640"/>
+          </a:xfrm>
+          <a:prstGeom prst="rect">
+            <a:avLst/>
+          </a:prstGeom>
+          <a:noFill/>
+        </p:spPr>
+        <p:txBody>
+          <a:bodyPr wrap="square" lIns="45720" rIns="45720" tIns="18288" bIns="18288">
+            <a:spAutoFit/>
+          </a:bodyPr>
+          <a:lstStyle/>
+          <a:p>
+            <a:pPr algn="ctr"/>
+            <a:r>
+              <a:rPr sz="2800" b="1">
+                <a:solidFill>
+                  <a:srgbClr val="6EE7B7"/>
+                </a:solidFill>
+                <a:latin typeface="Segoe UI"/>
+              </a:rPr>
+              <a:t>30m 13s</a:t>
+            </a:r>
+          </a:p>
+        </p:txBody>
+      </p:sp>
+      <p:sp>
+        <p:nvSpPr>
+          <p:cNvPr id="8" name="TextBox 7"/>
+          <p:cNvSpPr txBox="1"/>
+          <p:nvPr/>
+        </p:nvSpPr>
+        <p:spPr>
+          <a:xfrm>
+            <a:off x="685800" y="5029200"/>
+            <a:ext cx="2697480" cy="365760"/>
+          </a:xfrm>
+          <a:prstGeom prst="rect">
+            <a:avLst/>
+          </a:prstGeom>
+          <a:noFill/>
+        </p:spPr>
+        <p:txBody>
+          <a:bodyPr wrap="square" lIns="45720" rIns="45720" tIns="18288" bIns="18288">
+            <a:spAutoFit/>
+          </a:bodyPr>
+          <a:lstStyle/>
+          <a:p>
+            <a:pPr algn="ctr"/>
+            <a:r>
+              <a:rPr sz="1100" b="0">
+                <a:solidFill>
+                  <a:srgbClr val="9AA3AF"/>
+                </a:solidFill>
+                <a:latin typeface="Segoe UI"/>
+              </a:rPr>
+              <a:t>wall clock</a:t>
+            </a:r>
+          </a:p>
+        </p:txBody>
+      </p:sp>
+      <p:sp>
+        <p:nvSpPr>
+          <p:cNvPr id="9" name="Rounded Rectangle 8"/>
+          <p:cNvSpPr/>
+          <p:nvPr/>
+        </p:nvSpPr>
+        <p:spPr>
+          <a:xfrm>
+            <a:off x="3474720" y="4389120"/>
+            <a:ext cx="2697480" cy="1097280"/>
+          </a:xfrm>
+          <a:prstGeom prst="roundRect">
+            <a:avLst/>
+          </a:prstGeom>
+          <a:solidFill>
+            <a:srgbClr val="181F2A"/>
+          </a:solidFill>
+          <a:ln w="9525">
+            <a:solidFill>
+              <a:srgbClr val="34A87E"/>
+            </a:solidFill>
+          </a:ln>
+          <a:effectLst/>
+        </p:spPr>
+        <p:style>
+          <a:lnRef idx="1">
+            <a:schemeClr val="accent1"/>
+          </a:lnRef>
+          <a:fillRef idx="3">
+            <a:schemeClr val="accent1"/>
+          </a:fillRef>
+          <a:effectRef idx="2">
+            <a:schemeClr val="accent1"/>
+          </a:effectRef>
+          <a:fontRef idx="minor">
+            <a:schemeClr val="lt1"/>
+          </a:fontRef>
+        </p:style>
+        <p:txBody>
+          <a:bodyPr rtlCol="0" anchor="ctr"/>
+          <a:lstStyle/>
+          <a:p>
+            <a:pPr algn="ctr"/>
+          </a:p>
+        </p:txBody>
+      </p:sp>
+      <p:sp>
+        <p:nvSpPr>
+          <p:cNvPr id="10" name="TextBox 9"/>
+          <p:cNvSpPr txBox="1"/>
+          <p:nvPr/>
+        </p:nvSpPr>
+        <p:spPr>
+          <a:xfrm>
+            <a:off x="3474720" y="4480560"/>
+            <a:ext cx="2697480" cy="548640"/>
+          </a:xfrm>
+          <a:prstGeom prst="rect">
+            <a:avLst/>
+          </a:prstGeom>
+          <a:noFill/>
+        </p:spPr>
+        <p:txBody>
+          <a:bodyPr wrap="square" lIns="45720" rIns="45720" tIns="18288" bIns="18288">
+            <a:spAutoFit/>
+          </a:bodyPr>
+          <a:lstStyle/>
+          <a:p>
+            <a:pPr algn="ctr"/>
+            <a:r>
+              <a:rPr sz="2800" b="1">
+                <a:solidFill>
+                  <a:srgbClr val="F5C249"/>
+                </a:solidFill>
+                <a:latin typeface="Segoe UI"/>
+              </a:rPr>
+              <a:t>12</a:t>
+            </a:r>
+          </a:p>
+        </p:txBody>
+      </p:sp>
+      <p:sp>
+        <p:nvSpPr>
+          <p:cNvPr id="11" name="TextBox 10"/>
+          <p:cNvSpPr txBox="1"/>
+          <p:nvPr/>
+        </p:nvSpPr>
+        <p:spPr>
+          <a:xfrm>
+            <a:off x="3474720" y="5029200"/>
+            <a:ext cx="2697480" cy="365760"/>
+          </a:xfrm>
+          <a:prstGeom prst="rect">
+            <a:avLst/>
+          </a:prstGeom>
+          <a:noFill/>
+        </p:spPr>
+        <p:txBody>
+          <a:bodyPr wrap="square" lIns="45720" rIns="45720" tIns="18288" bIns="18288">
+            <a:spAutoFit/>
+          </a:bodyPr>
+          <a:lstStyle/>
+          <a:p>
+            <a:pPr algn="ctr"/>
+            <a:r>
+              <a:rPr sz="1100" b="0">
+                <a:solidFill>
+                  <a:srgbClr val="9AA3AF"/>
+                </a:solidFill>
+                <a:latin typeface="Segoe UI"/>
+              </a:rPr>
+              <a:t>agents invoked</a:t>
+            </a:r>
+          </a:p>
+        </p:txBody>
+      </p:sp>
+      <p:sp>
+        <p:nvSpPr>
+          <p:cNvPr id="12" name="Rounded Rectangle 11"/>
+          <p:cNvSpPr/>
+          <p:nvPr/>
+        </p:nvSpPr>
+        <p:spPr>
+          <a:xfrm>
+            <a:off x="6263640" y="4389120"/>
+            <a:ext cx="2697480" cy="1097280"/>
+          </a:xfrm>
+          <a:prstGeom prst="roundRect">
+            <a:avLst/>
+          </a:prstGeom>
+          <a:solidFill>
+            <a:srgbClr val="181F2A"/>
+          </a:solidFill>
+          <a:ln w="9525">
+            <a:solidFill>
+              <a:srgbClr val="34A87E"/>
+            </a:solidFill>
+          </a:ln>
+          <a:effectLst/>
+        </p:spPr>
+        <p:style>
+          <a:lnRef idx="1">
+            <a:schemeClr val="accent1"/>
+          </a:lnRef>
+          <a:fillRef idx="3">
+            <a:schemeClr val="accent1"/>
+          </a:fillRef>
+          <a:effectRef idx="2">
+            <a:schemeClr val="accent1"/>
+          </a:effectRef>
+          <a:fontRef idx="minor">
+            <a:schemeClr val="lt1"/>
+          </a:fontRef>
+        </p:style>
+        <p:txBody>
+          <a:bodyPr rtlCol="0" anchor="ctr"/>
+          <a:lstStyle/>
+          <a:p>
+            <a:pPr algn="ctr"/>
+          </a:p>
+        </p:txBody>
+      </p:sp>
+      <p:sp>
+        <p:nvSpPr>
+          <p:cNvPr id="13" name="TextBox 12"/>
+          <p:cNvSpPr txBox="1"/>
+          <p:nvPr/>
+        </p:nvSpPr>
+        <p:spPr>
+          <a:xfrm>
+            <a:off x="6263640" y="4480560"/>
+            <a:ext cx="2697480" cy="548640"/>
+          </a:xfrm>
+          <a:prstGeom prst="rect">
+            <a:avLst/>
+          </a:prstGeom>
+          <a:noFill/>
+        </p:spPr>
+        <p:txBody>
+          <a:bodyPr wrap="square" lIns="45720" rIns="45720" tIns="18288" bIns="18288">
+            <a:spAutoFit/>
+          </a:bodyPr>
+          <a:lstStyle/>
+          <a:p>
+            <a:pPr algn="ctr"/>
+            <a:r>
+              <a:rPr sz="2800" b="1">
+                <a:solidFill>
+                  <a:srgbClr val="6EE7B7"/>
+                </a:solidFill>
+                <a:latin typeface="Segoe UI"/>
+              </a:rPr>
+              <a:t>182</a:t>
+            </a:r>
+          </a:p>
+        </p:txBody>
+      </p:sp>
+      <p:sp>
+        <p:nvSpPr>
+          <p:cNvPr id="14" name="TextBox 13"/>
+          <p:cNvSpPr txBox="1"/>
+          <p:nvPr/>
+        </p:nvSpPr>
+        <p:spPr>
+          <a:xfrm>
+            <a:off x="6263640" y="5029200"/>
+            <a:ext cx="2697480" cy="365760"/>
+          </a:xfrm>
+          <a:prstGeom prst="rect">
+            <a:avLst/>
+          </a:prstGeom>
+          <a:noFill/>
+        </p:spPr>
+        <p:txBody>
+          <a:bodyPr wrap="square" lIns="45720" rIns="45720" tIns="18288" bIns="18288">
+            <a:spAutoFit/>
+          </a:bodyPr>
+          <a:lstStyle/>
+          <a:p>
+            <a:pPr algn="ctr"/>
+            <a:r>
+              <a:rPr sz="1100" b="0">
+                <a:solidFill>
+                  <a:srgbClr val="9AA3AF"/>
+                </a:solidFill>
+                <a:latin typeface="Segoe UI"/>
+              </a:rPr>
+              <a:t>tests written</a:t>
+            </a:r>
+          </a:p>
+        </p:txBody>
+      </p:sp>
+      <p:sp>
+        <p:nvSpPr>
+          <p:cNvPr id="15" name="Rounded Rectangle 14"/>
+          <p:cNvSpPr/>
+          <p:nvPr/>
+        </p:nvSpPr>
+        <p:spPr>
+          <a:xfrm>
+            <a:off x="9052560" y="4389120"/>
+            <a:ext cx="2697480" cy="1097280"/>
+          </a:xfrm>
+          <a:prstGeom prst="roundRect">
+            <a:avLst/>
+          </a:prstGeom>
+          <a:solidFill>
+            <a:srgbClr val="181F2A"/>
+          </a:solidFill>
+          <a:ln w="9525">
+            <a:solidFill>
+              <a:srgbClr val="34A87E"/>
+            </a:solidFill>
+          </a:ln>
+          <a:effectLst/>
+        </p:spPr>
+        <p:style>
+          <a:lnRef idx="1">
+            <a:schemeClr val="accent1"/>
+          </a:lnRef>
+          <a:fillRef idx="3">
+            <a:schemeClr val="accent1"/>
+          </a:fillRef>
+          <a:effectRef idx="2">
+            <a:schemeClr val="accent1"/>
+          </a:effectRef>
+          <a:fontRef idx="minor">
+            <a:schemeClr val="lt1"/>
+          </a:fontRef>
+        </p:style>
+        <p:txBody>
+          <a:bodyPr rtlCol="0" anchor="ctr"/>
+          <a:lstStyle/>
+          <a:p>
+            <a:pPr algn="ctr"/>
+          </a:p>
+        </p:txBody>
+      </p:sp>
+      <p:sp>
+        <p:nvSpPr>
+          <p:cNvPr id="16" name="TextBox 15"/>
+          <p:cNvSpPr txBox="1"/>
+          <p:nvPr/>
+        </p:nvSpPr>
+        <p:spPr>
+          <a:xfrm>
+            <a:off x="9052560" y="4480560"/>
+            <a:ext cx="2697480" cy="548640"/>
+          </a:xfrm>
+          <a:prstGeom prst="rect">
+            <a:avLst/>
+          </a:prstGeom>
+          <a:noFill/>
+        </p:spPr>
+        <p:txBody>
+          <a:bodyPr wrap="square" lIns="45720" rIns="45720" tIns="18288" bIns="18288">
+            <a:spAutoFit/>
+          </a:bodyPr>
+          <a:lstStyle/>
+          <a:p>
+            <a:pPr algn="ctr"/>
+            <a:r>
+              <a:rPr sz="2800" b="1">
+                <a:solidFill>
+                  <a:srgbClr val="F87271"/>
+                </a:solidFill>
+                <a:latin typeface="Segoe UI"/>
+              </a:rPr>
+              <a:t>$0.05</a:t>
+            </a:r>
+          </a:p>
+        </p:txBody>
+      </p:sp>
+      <p:sp>
+        <p:nvSpPr>
+          <p:cNvPr id="17" name="TextBox 16"/>
+          <p:cNvSpPr txBox="1"/>
+          <p:nvPr/>
+        </p:nvSpPr>
+        <p:spPr>
+          <a:xfrm>
+            <a:off x="9052560" y="5029200"/>
+            <a:ext cx="2697480" cy="365760"/>
+          </a:xfrm>
+          <a:prstGeom prst="rect">
+            <a:avLst/>
+          </a:prstGeom>
+          <a:noFill/>
+        </p:spPr>
+        <p:txBody>
+          <a:bodyPr wrap="square" lIns="45720" rIns="45720" tIns="18288" bIns="18288">
+            <a:spAutoFit/>
+          </a:bodyPr>
+          <a:lstStyle/>
+          <a:p>
+            <a:pPr algn="ctr"/>
+            <a:r>
+              <a:rPr sz="1100" b="0">
+                <a:solidFill>
+                  <a:srgbClr val="9AA3AF"/>
+                </a:solidFill>
+                <a:latin typeface="Segoe UI"/>
+              </a:rPr>
+              <a:t>approx token cost</a:t>
+            </a:r>
+          </a:p>
+        </p:txBody>
+      </p:sp>
+      <p:sp>
+        <p:nvSpPr>
+          <p:cNvPr id="18" name="TextBox 17"/>
+          <p:cNvSpPr txBox="1"/>
+          <p:nvPr/>
+        </p:nvSpPr>
+        <p:spPr>
+          <a:xfrm>
+            <a:off x="457200" y="5852160"/>
+            <a:ext cx="11247120" cy="365760"/>
+          </a:xfrm>
+          <a:prstGeom prst="rect">
+            <a:avLst/>
+          </a:prstGeom>
+          <a:noFill/>
+        </p:spPr>
+        <p:txBody>
+          <a:bodyPr wrap="square" lIns="45720" rIns="45720" tIns="18288" bIns="18288">
+            <a:spAutoFit/>
+          </a:bodyPr>
+          <a:lstStyle/>
+          <a:p>
+            <a:pPr algn="ctr"/>
+            <a:r>
+              <a:rPr sz="1000" b="0">
+                <a:solidFill>
+                  <a:srgbClr val="9AA3AF"/>
+                </a:solidFill>
+                <a:latin typeface="Consolas"/>
+              </a:rPr>
+              <a:t>Full screen recording available alongside this deck: pptx_refs/Screen Recording 2026-05-22 at 10.51.37 AM.mov</a:t>
+            </a:r>
+          </a:p>
+        </p:txBody>
+      </p:sp>
+      <p:sp>
+        <p:nvSpPr>
+          <p:cNvPr id="19" name="TextBox 18"/>
+          <p:cNvSpPr txBox="1"/>
+          <p:nvPr/>
+        </p:nvSpPr>
+        <p:spPr>
+          <a:xfrm>
+            <a:off x="457200" y="6400800"/>
+            <a:ext cx="5486400" cy="274320"/>
+          </a:xfrm>
+          <a:prstGeom prst="rect">
+            <a:avLst/>
+          </a:prstGeom>
+          <a:noFill/>
+        </p:spPr>
+        <p:txBody>
+          <a:bodyPr wrap="square" lIns="45720" rIns="45720" tIns="18288" bIns="18288">
+            <a:spAutoFit/>
+          </a:bodyPr>
+          <a:lstStyle/>
+          <a:p>
+            <a:pPr algn="l"/>
+            <a:r>
+              <a:rPr sz="1000" b="0">
+                <a:solidFill>
+                  <a:srgbClr val="9AA3AF"/>
+                </a:solidFill>
+                <a:latin typeface="Segoe UI"/>
+              </a:rPr>
+              <a:t>EFF-IT  —  A Claude Code harness</a:t>
+            </a:r>
+          </a:p>
+        </p:txBody>
+      </p:sp>
+      <p:sp>
+        <p:nvSpPr>
+          <p:cNvPr id="20" name="TextBox 19"/>
+          <p:cNvSpPr txBox="1"/>
+          <p:nvPr/>
+        </p:nvSpPr>
+        <p:spPr>
+          <a:xfrm>
+            <a:off x="10515600" y="6400800"/>
+            <a:ext cx="1645920" cy="274320"/>
+          </a:xfrm>
+          <a:prstGeom prst="rect">
+            <a:avLst/>
+          </a:prstGeom>
+          <a:noFill/>
+        </p:spPr>
+        <p:txBody>
+          <a:bodyPr wrap="square" lIns="45720" rIns="45720" tIns="18288" bIns="18288">
+            <a:spAutoFit/>
+          </a:bodyPr>
+          <a:lstStyle/>
+          <a:p>
+            <a:pPr algn="r"/>
+            <a:r>
+              <a:rPr sz="1000" b="0">
+                <a:solidFill>
+                  <a:srgbClr val="9AA3AF"/>
+                </a:solidFill>
+                <a:latin typeface="Segoe UI"/>
+              </a:rPr>
+              <a:t>15 / 23</a:t>
+            </a:r>
+          </a:p>
+        </p:txBody>
+      </p:sp>
+    </p:spTree>
+  </p:cSld>
+  <p:clrMapOvr>
+    <a:masterClrMapping/>
+  </p:clrMapOvr>
+</p:sld>
+</file>
+
+<file path=ppt/slides/slide16.xml><?xml version="1.0" encoding="utf-8"?>
+<p:sld xmlns:a="http://schemas.openxmlformats.org/drawingml/2006/main" xmlns:p="http://schemas.openxmlformats.org/presentationml/2006/main" xmlns:r="http://schemas.openxmlformats.org/officeDocument/2006/relationships">
+  <p:cSld>
+    <p:spTree>
+      <p:nvGrpSpPr>
+        <p:cNvPr id="1" name=""/>
+        <p:cNvGrpSpPr/>
+        <p:nvPr/>
+      </p:nvGrpSpPr>
+      <p:grpSpPr/>
+      <p:sp>
+        <p:nvSpPr>
+          <p:cNvPr id="2" name="Rectangle 1"/>
+          <p:cNvSpPr/>
+          <p:nvPr/>
+        </p:nvSpPr>
+        <p:spPr>
+          <a:xfrm>
+            <a:off x="0" y="0"/>
+            <a:ext cx="12191695" cy="6858000"/>
+          </a:xfrm>
+          <a:prstGeom prst="rect">
+            <a:avLst/>
+          </a:prstGeom>
+          <a:solidFill>
+            <a:srgbClr val="0F141A"/>
+          </a:solidFill>
+          <a:ln>
+            <a:noFill/>
+          </a:ln>
+          <a:effectLst/>
+        </p:spPr>
+        <p:style>
+          <a:lnRef idx="1">
+            <a:schemeClr val="accent1"/>
+          </a:lnRef>
+          <a:fillRef idx="3">
+            <a:schemeClr val="accent1"/>
+          </a:fillRef>
+          <a:effectRef idx="2">
+            <a:schemeClr val="accent1"/>
+          </a:effectRef>
+          <a:fontRef idx="minor">
+            <a:schemeClr val="lt1"/>
+          </a:fontRef>
+        </p:style>
+        <p:txBody>
+          <a:bodyPr rtlCol="0" anchor="ctr"/>
+          <a:lstStyle/>
+          <a:p>
+            <a:pPr algn="ctr"/>
+          </a:p>
+        </p:txBody>
+      </p:sp>
+      <p:sp>
+        <p:nvSpPr>
+          <p:cNvPr id="3" name="Rectangle 2"/>
+          <p:cNvSpPr/>
+          <p:nvPr/>
+        </p:nvSpPr>
+        <p:spPr>
+          <a:xfrm>
+            <a:off x="457200" y="411480"/>
+            <a:ext cx="73152" cy="502920"/>
+          </a:xfrm>
+          <a:prstGeom prst="rect">
+            <a:avLst/>
+          </a:prstGeom>
+          <a:solidFill>
+            <a:srgbClr val="6EE7B7"/>
+          </a:solidFill>
+          <a:ln>
+            <a:noFill/>
+          </a:ln>
+          <a:effectLst/>
+        </p:spPr>
+        <p:style>
+          <a:lnRef idx="1">
+            <a:schemeClr val="accent1"/>
+          </a:lnRef>
+          <a:fillRef idx="3">
+            <a:schemeClr val="accent1"/>
+          </a:fillRef>
+          <a:effectRef idx="2">
+            <a:schemeClr val="accent1"/>
+          </a:effectRef>
+          <a:fontRef idx="minor">
+            <a:schemeClr val="lt1"/>
+          </a:fontRef>
+        </p:style>
+        <p:txBody>
+          <a:bodyPr rtlCol="0" anchor="ctr"/>
+          <a:lstStyle/>
+          <a:p>
+            <a:pPr algn="ctr"/>
+          </a:p>
+        </p:txBody>
+      </p:sp>
+      <p:sp>
+        <p:nvSpPr>
+          <p:cNvPr id="4" name="TextBox 3"/>
+          <p:cNvSpPr txBox="1"/>
+          <p:nvPr/>
+        </p:nvSpPr>
+        <p:spPr>
+          <a:xfrm>
+            <a:off x="685800" y="292608"/>
+            <a:ext cx="1828800" cy="365760"/>
+          </a:xfrm>
+          <a:prstGeom prst="rect">
+            <a:avLst/>
+          </a:prstGeom>
+          <a:noFill/>
+        </p:spPr>
+        <p:txBody>
+          <a:bodyPr wrap="square" lIns="45720" rIns="45720" tIns="18288" bIns="18288">
+            <a:spAutoFit/>
+          </a:bodyPr>
+          <a:lstStyle/>
+          <a:p>
+            <a:pPr algn="l"/>
+            <a:r>
+              <a:rPr sz="1100" b="1">
+                <a:solidFill>
+                  <a:srgbClr val="6EE7B7"/>
+                </a:solidFill>
+                <a:latin typeface="Segoe UI"/>
+              </a:rPr>
+              <a:t>APPENDIX · 1 / 8</a:t>
+            </a:r>
+          </a:p>
+        </p:txBody>
+      </p:sp>
+      <p:sp>
+        <p:nvSpPr>
+          <p:cNvPr id="5" name="TextBox 4"/>
+          <p:cNvSpPr txBox="1"/>
+          <p:nvPr/>
+        </p:nvSpPr>
+        <p:spPr>
+          <a:xfrm>
+            <a:off x="685800" y="594360"/>
+            <a:ext cx="10972800" cy="457200"/>
+          </a:xfrm>
+          <a:prstGeom prst="rect">
+            <a:avLst/>
+          </a:prstGeom>
+          <a:noFill/>
+        </p:spPr>
+        <p:txBody>
+          <a:bodyPr wrap="square" lIns="45720" rIns="45720" tIns="18288" bIns="18288">
+            <a:spAutoFit/>
+          </a:bodyPr>
+          <a:lstStyle/>
+          <a:p>
+            <a:pPr algn="l"/>
+            <a:r>
+              <a:rPr sz="2400" b="1">
+                <a:solidFill>
+                  <a:srgbClr val="E8ECF1"/>
+                </a:solidFill>
+                <a:latin typeface="Segoe UI"/>
+              </a:rPr>
+              <a:t>Step 0–1: Invocation + interrogation</a:t>
+            </a:r>
+          </a:p>
+        </p:txBody>
+      </p:sp>
+      <p:sp>
+        <p:nvSpPr>
+          <p:cNvPr id="6" name="TextBox 5"/>
+          <p:cNvSpPr txBox="1"/>
+          <p:nvPr/>
+        </p:nvSpPr>
+        <p:spPr>
+          <a:xfrm>
+            <a:off x="685800" y="960120"/>
+            <a:ext cx="10972800" cy="320040"/>
+          </a:xfrm>
+          <a:prstGeom prst="rect">
+            <a:avLst/>
+          </a:prstGeom>
+          <a:noFill/>
+        </p:spPr>
+        <p:txBody>
+          <a:bodyPr wrap="square" lIns="45720" rIns="45720" tIns="18288" bIns="18288">
+            <a:spAutoFit/>
+          </a:bodyPr>
+          <a:lstStyle/>
+          <a:p>
+            <a:pPr algn="l"/>
+            <a:r>
+              <a:rPr sz="1200" b="0">
+                <a:solidFill>
+                  <a:srgbClr val="9AA3AF"/>
+                </a:solidFill>
+                <a:latin typeface="Segoe UI"/>
+              </a:rPr>
+              <a:t>From /run to a working pitch in two minutes</a:t>
+            </a:r>
+          </a:p>
+        </p:txBody>
+      </p:sp>
+      <p:pic>
+        <p:nvPicPr>
+          <p:cNvPr id="7" name="Picture 6" descr="01a-invoke.jpg"/>
+          <p:cNvPicPr>
+            <a:picLocks noChangeAspect="1"/>
+          </p:cNvPicPr>
+          <p:nvPr/>
+        </p:nvPicPr>
+        <p:blipFill>
+          <a:blip r:embed="rId2"/>
+          <a:stretch>
+            <a:fillRect/>
+          </a:stretch>
+        </p:blipFill>
+        <p:spPr>
+          <a:xfrm>
+            <a:off x="457200" y="2023025"/>
+            <a:ext cx="5577840" cy="2949108"/>
+          </a:xfrm>
+          <a:prstGeom prst="rect">
+            <a:avLst/>
+          </a:prstGeom>
+          <a:ln w="9525">
+            <a:solidFill>
+              <a:srgbClr val="34A87E"/>
+            </a:solidFill>
+          </a:ln>
+        </p:spPr>
+      </p:pic>
+      <p:pic>
+        <p:nvPicPr>
+          <p:cNvPr id="8" name="Picture 7" descr="01b-interrogator-pitch.jpg"/>
+          <p:cNvPicPr>
+            <a:picLocks noChangeAspect="1"/>
+          </p:cNvPicPr>
+          <p:nvPr/>
+        </p:nvPicPr>
+        <p:blipFill>
+          <a:blip r:embed="rId3"/>
+          <a:stretch>
+            <a:fillRect/>
+          </a:stretch>
+        </p:blipFill>
+        <p:spPr>
+          <a:xfrm>
+            <a:off x="6172200" y="2725263"/>
+            <a:ext cx="5577840" cy="1544632"/>
+          </a:xfrm>
+          <a:prstGeom prst="rect">
+            <a:avLst/>
+          </a:prstGeom>
+          <a:ln w="9525">
+            <a:solidFill>
+              <a:srgbClr val="34A87E"/>
+            </a:solidFill>
+          </a:ln>
+        </p:spPr>
+      </p:pic>
+      <p:sp>
+        <p:nvSpPr>
+          <p:cNvPr id="9" name="Rounded Rectangle 8"/>
+          <p:cNvSpPr/>
+          <p:nvPr/>
+        </p:nvSpPr>
+        <p:spPr>
+          <a:xfrm>
+            <a:off x="457200" y="5806440"/>
+            <a:ext cx="11247120" cy="502920"/>
+          </a:xfrm>
+          <a:prstGeom prst="roundRect">
+            <a:avLst/>
+          </a:prstGeom>
+          <a:solidFill>
+            <a:srgbClr val="181F2A"/>
+          </a:solidFill>
+          <a:ln w="9525">
+            <a:solidFill>
+              <a:srgbClr val="34A87E"/>
+            </a:solidFill>
+          </a:ln>
+          <a:effectLst/>
+        </p:spPr>
+        <p:style>
+          <a:lnRef idx="1">
+            <a:schemeClr val="accent1"/>
+          </a:lnRef>
+          <a:fillRef idx="3">
+            <a:schemeClr val="accent1"/>
+          </a:fillRef>
+          <a:effectRef idx="2">
+            <a:schemeClr val="accent1"/>
+          </a:effectRef>
+          <a:fontRef idx="minor">
+            <a:schemeClr val="lt1"/>
+          </a:fontRef>
+        </p:style>
+        <p:txBody>
+          <a:bodyPr rtlCol="0" anchor="ctr"/>
+          <a:lstStyle/>
+          <a:p>
+            <a:pPr algn="ctr"/>
+          </a:p>
+        </p:txBody>
+      </p:sp>
+      <p:sp>
+        <p:nvSpPr>
+          <p:cNvPr id="10" name="TextBox 9"/>
+          <p:cNvSpPr txBox="1"/>
+          <p:nvPr/>
+        </p:nvSpPr>
+        <p:spPr>
+          <a:xfrm>
+            <a:off x="685800" y="5897880"/>
+            <a:ext cx="10789920" cy="365760"/>
+          </a:xfrm>
+          <a:prstGeom prst="rect">
+            <a:avLst/>
+          </a:prstGeom>
+          <a:noFill/>
+        </p:spPr>
+        <p:txBody>
+          <a:bodyPr wrap="square" lIns="45720" rIns="45720" tIns="18288" bIns="18288">
+            <a:spAutoFit/>
+          </a:bodyPr>
+          <a:lstStyle/>
+          <a:p>
+            <a:pPr algn="l"/>
+            <a:r>
+              <a:rPr sz="1300" b="0">
+                <a:solidFill>
+                  <a:srgbClr val="E8ECF1"/>
+                </a:solidFill>
+                <a:latin typeface="Segoe UI"/>
+              </a:rPr>
+              <a:t>Left: /run skill confirmation.   Right: the interrogator's working pitch — webhooksig was born here.</a:t>
+            </a:r>
+          </a:p>
+        </p:txBody>
+      </p:sp>
+      <p:sp>
+        <p:nvSpPr>
+          <p:cNvPr id="11" name="TextBox 10"/>
+          <p:cNvSpPr txBox="1"/>
+          <p:nvPr/>
+        </p:nvSpPr>
+        <p:spPr>
+          <a:xfrm>
+            <a:off x="457200" y="6400800"/>
+            <a:ext cx="5486400" cy="274320"/>
+          </a:xfrm>
+          <a:prstGeom prst="rect">
+            <a:avLst/>
+          </a:prstGeom>
+          <a:noFill/>
+        </p:spPr>
+        <p:txBody>
+          <a:bodyPr wrap="square" lIns="45720" rIns="45720" tIns="18288" bIns="18288">
+            <a:spAutoFit/>
+          </a:bodyPr>
+          <a:lstStyle/>
+          <a:p>
+            <a:pPr algn="l"/>
+            <a:r>
+              <a:rPr sz="1000" b="0">
+                <a:solidFill>
+                  <a:srgbClr val="9AA3AF"/>
+                </a:solidFill>
+                <a:latin typeface="Segoe UI"/>
+              </a:rPr>
+              <a:t>EFF-IT  —  A Claude Code harness</a:t>
+            </a:r>
+          </a:p>
+        </p:txBody>
+      </p:sp>
+      <p:sp>
+        <p:nvSpPr>
+          <p:cNvPr id="12" name="TextBox 11"/>
+          <p:cNvSpPr txBox="1"/>
+          <p:nvPr/>
+        </p:nvSpPr>
+        <p:spPr>
+          <a:xfrm>
+            <a:off x="10515600" y="6400800"/>
+            <a:ext cx="1645920" cy="274320"/>
+          </a:xfrm>
+          <a:prstGeom prst="rect">
+            <a:avLst/>
+          </a:prstGeom>
+          <a:noFill/>
+        </p:spPr>
+        <p:txBody>
+          <a:bodyPr wrap="square" lIns="45720" rIns="45720" tIns="18288" bIns="18288">
+            <a:spAutoFit/>
+          </a:bodyPr>
+          <a:lstStyle/>
+          <a:p>
+            <a:pPr algn="r"/>
+            <a:r>
+              <a:rPr sz="1000" b="0">
+                <a:solidFill>
+                  <a:srgbClr val="9AA3AF"/>
+                </a:solidFill>
+                <a:latin typeface="Segoe UI"/>
+              </a:rPr>
+              <a:t>16 / 23</a:t>
+            </a:r>
+          </a:p>
+        </p:txBody>
+      </p:sp>
+    </p:spTree>
+  </p:cSld>
+  <p:clrMapOvr>
+    <a:masterClrMapping/>
+  </p:clrMapOvr>
+</p:sld>
+</file>
+
+<file path=ppt/slides/slide17.xml><?xml version="1.0" encoding="utf-8"?>
+<p:sld xmlns:a="http://schemas.openxmlformats.org/drawingml/2006/main" xmlns:p="http://schemas.openxmlformats.org/presentationml/2006/main" xmlns:r="http://schemas.openxmlformats.org/officeDocument/2006/relationships">
+  <p:cSld>
+    <p:spTree>
+      <p:nvGrpSpPr>
+        <p:cNvPr id="1" name=""/>
+        <p:cNvGrpSpPr/>
+        <p:nvPr/>
+      </p:nvGrpSpPr>
+      <p:grpSpPr/>
+      <p:sp>
+        <p:nvSpPr>
+          <p:cNvPr id="2" name="Rectangle 1"/>
+          <p:cNvSpPr/>
+          <p:nvPr/>
+        </p:nvSpPr>
+        <p:spPr>
+          <a:xfrm>
+            <a:off x="0" y="0"/>
+            <a:ext cx="12191695" cy="6858000"/>
+          </a:xfrm>
+          <a:prstGeom prst="rect">
+            <a:avLst/>
+          </a:prstGeom>
+          <a:solidFill>
+            <a:srgbClr val="0F141A"/>
+          </a:solidFill>
+          <a:ln>
+            <a:noFill/>
+          </a:ln>
+          <a:effectLst/>
+        </p:spPr>
+        <p:style>
+          <a:lnRef idx="1">
+            <a:schemeClr val="accent1"/>
+          </a:lnRef>
+          <a:fillRef idx="3">
+            <a:schemeClr val="accent1"/>
+          </a:fillRef>
+          <a:effectRef idx="2">
+            <a:schemeClr val="accent1"/>
+          </a:effectRef>
+          <a:fontRef idx="minor">
+            <a:schemeClr val="lt1"/>
+          </a:fontRef>
+        </p:style>
+        <p:txBody>
+          <a:bodyPr rtlCol="0" anchor="ctr"/>
+          <a:lstStyle/>
+          <a:p>
+            <a:pPr algn="ctr"/>
+          </a:p>
+        </p:txBody>
+      </p:sp>
+      <p:sp>
+        <p:nvSpPr>
+          <p:cNvPr id="3" name="Rectangle 2"/>
+          <p:cNvSpPr/>
+          <p:nvPr/>
+        </p:nvSpPr>
+        <p:spPr>
+          <a:xfrm>
+            <a:off x="457200" y="411480"/>
+            <a:ext cx="73152" cy="502920"/>
+          </a:xfrm>
+          <a:prstGeom prst="rect">
+            <a:avLst/>
+          </a:prstGeom>
+          <a:solidFill>
+            <a:srgbClr val="6EE7B7"/>
+          </a:solidFill>
+          <a:ln>
+            <a:noFill/>
+          </a:ln>
+          <a:effectLst/>
+        </p:spPr>
+        <p:style>
+          <a:lnRef idx="1">
+            <a:schemeClr val="accent1"/>
+          </a:lnRef>
+          <a:fillRef idx="3">
+            <a:schemeClr val="accent1"/>
+          </a:fillRef>
+          <a:effectRef idx="2">
+            <a:schemeClr val="accent1"/>
+          </a:effectRef>
+          <a:fontRef idx="minor">
+            <a:schemeClr val="lt1"/>
+          </a:fontRef>
+        </p:style>
+        <p:txBody>
+          <a:bodyPr rtlCol="0" anchor="ctr"/>
+          <a:lstStyle/>
+          <a:p>
+            <a:pPr algn="ctr"/>
+          </a:p>
+        </p:txBody>
+      </p:sp>
+      <p:sp>
+        <p:nvSpPr>
+          <p:cNvPr id="4" name="TextBox 3"/>
+          <p:cNvSpPr txBox="1"/>
+          <p:nvPr/>
+        </p:nvSpPr>
+        <p:spPr>
+          <a:xfrm>
+            <a:off x="685800" y="292608"/>
+            <a:ext cx="1828800" cy="365760"/>
+          </a:xfrm>
+          <a:prstGeom prst="rect">
+            <a:avLst/>
+          </a:prstGeom>
+          <a:noFill/>
+        </p:spPr>
+        <p:txBody>
+          <a:bodyPr wrap="square" lIns="45720" rIns="45720" tIns="18288" bIns="18288">
+            <a:spAutoFit/>
+          </a:bodyPr>
+          <a:lstStyle/>
+          <a:p>
+            <a:pPr algn="l"/>
+            <a:r>
+              <a:rPr sz="1100" b="1">
+                <a:solidFill>
+                  <a:srgbClr val="6EE7B7"/>
+                </a:solidFill>
+                <a:latin typeface="Segoe UI"/>
+              </a:rPr>
+              <a:t>APPENDIX · 2 / 8</a:t>
+            </a:r>
+          </a:p>
+        </p:txBody>
+      </p:sp>
+      <p:sp>
+        <p:nvSpPr>
+          <p:cNvPr id="5" name="TextBox 4"/>
+          <p:cNvSpPr txBox="1"/>
+          <p:nvPr/>
+        </p:nvSpPr>
+        <p:spPr>
+          <a:xfrm>
+            <a:off x="685800" y="594360"/>
+            <a:ext cx="10972800" cy="457200"/>
+          </a:xfrm>
+          <a:prstGeom prst="rect">
+            <a:avLst/>
+          </a:prstGeom>
+          <a:noFill/>
+        </p:spPr>
+        <p:txBody>
+          <a:bodyPr wrap="square" lIns="45720" rIns="45720" tIns="18288" bIns="18288">
+            <a:spAutoFit/>
+          </a:bodyPr>
+          <a:lstStyle/>
+          <a:p>
+            <a:pPr algn="l"/>
+            <a:r>
+              <a:rPr sz="2400" b="1">
+                <a:solidFill>
+                  <a:srgbClr val="E8ECF1"/>
+                </a:solidFill>
+                <a:latin typeface="Segoe UI"/>
+              </a:rPr>
+              <a:t>Step 2: SPEC.md emerges</a:t>
+            </a:r>
+          </a:p>
+        </p:txBody>
+      </p:sp>
+      <p:sp>
+        <p:nvSpPr>
+          <p:cNvPr id="6" name="TextBox 5"/>
+          <p:cNvSpPr txBox="1"/>
+          <p:nvPr/>
+        </p:nvSpPr>
+        <p:spPr>
+          <a:xfrm>
+            <a:off x="685800" y="960120"/>
+            <a:ext cx="10972800" cy="320040"/>
+          </a:xfrm>
+          <a:prstGeom prst="rect">
+            <a:avLst/>
+          </a:prstGeom>
+          <a:noFill/>
+        </p:spPr>
+        <p:txBody>
+          <a:bodyPr wrap="square" lIns="45720" rIns="45720" tIns="18288" bIns="18288">
+            <a:spAutoFit/>
+          </a:bodyPr>
+          <a:lstStyle/>
+          <a:p>
+            <a:pPr algn="l"/>
+            <a:r>
+              <a:rPr sz="1200" b="0">
+                <a:solidFill>
+                  <a:srgbClr val="9AA3AF"/>
+                </a:solidFill>
+                <a:latin typeface="Segoe UI"/>
+              </a:rPr>
+              <a:t>The contract karen audits against, hours from now</a:t>
+            </a:r>
+          </a:p>
+        </p:txBody>
+      </p:sp>
+      <p:pic>
+        <p:nvPicPr>
+          <p:cNvPr id="7" name="Picture 6" descr="02-spec.jpg"/>
+          <p:cNvPicPr>
+            <a:picLocks noChangeAspect="1"/>
+          </p:cNvPicPr>
+          <p:nvPr/>
+        </p:nvPicPr>
+        <p:blipFill>
+          <a:blip r:embed="rId2"/>
+          <a:stretch>
+            <a:fillRect/>
+          </a:stretch>
+        </p:blipFill>
+        <p:spPr>
+          <a:xfrm>
+            <a:off x="2567178" y="1325880"/>
+            <a:ext cx="7027164" cy="4343400"/>
+          </a:xfrm>
+          <a:prstGeom prst="rect">
+            <a:avLst/>
+          </a:prstGeom>
+          <a:ln w="9525">
+            <a:solidFill>
+              <a:srgbClr val="34A87E"/>
+            </a:solidFill>
+          </a:ln>
+        </p:spPr>
+      </p:pic>
+      <p:sp>
+        <p:nvSpPr>
+          <p:cNvPr id="8" name="Rounded Rectangle 7"/>
+          <p:cNvSpPr/>
+          <p:nvPr/>
+        </p:nvSpPr>
+        <p:spPr>
+          <a:xfrm>
+            <a:off x="457200" y="5806440"/>
+            <a:ext cx="11247120" cy="502920"/>
+          </a:xfrm>
+          <a:prstGeom prst="roundRect">
+            <a:avLst/>
+          </a:prstGeom>
+          <a:solidFill>
+            <a:srgbClr val="181F2A"/>
+          </a:solidFill>
+          <a:ln w="9525">
+            <a:solidFill>
+              <a:srgbClr val="34A87E"/>
+            </a:solidFill>
+          </a:ln>
+          <a:effectLst/>
+        </p:spPr>
+        <p:style>
+          <a:lnRef idx="1">
+            <a:schemeClr val="accent1"/>
+          </a:lnRef>
+          <a:fillRef idx="3">
+            <a:schemeClr val="accent1"/>
+          </a:fillRef>
+          <a:effectRef idx="2">
+            <a:schemeClr val="accent1"/>
+          </a:effectRef>
+          <a:fontRef idx="minor">
+            <a:schemeClr val="lt1"/>
+          </a:fontRef>
+        </p:style>
+        <p:txBody>
+          <a:bodyPr rtlCol="0" anchor="ctr"/>
+          <a:lstStyle/>
+          <a:p>
+            <a:pPr algn="ctr"/>
+          </a:p>
+        </p:txBody>
+      </p:sp>
+      <p:sp>
+        <p:nvSpPr>
+          <p:cNvPr id="9" name="TextBox 8"/>
+          <p:cNvSpPr txBox="1"/>
+          <p:nvPr/>
+        </p:nvSpPr>
+        <p:spPr>
+          <a:xfrm>
+            <a:off x="685800" y="5897880"/>
+            <a:ext cx="10789920" cy="365760"/>
+          </a:xfrm>
+          <a:prstGeom prst="rect">
+            <a:avLst/>
+          </a:prstGeom>
+          <a:noFill/>
+        </p:spPr>
+        <p:txBody>
+          <a:bodyPr wrap="square" lIns="45720" rIns="45720" tIns="18288" bIns="18288">
+            <a:spAutoFit/>
+          </a:bodyPr>
+          <a:lstStyle/>
+          <a:p>
+            <a:pPr algn="l"/>
+            <a:r>
+              <a:rPr sz="1300" b="0">
+                <a:solidFill>
+                  <a:srgbClr val="E8ECF1"/>
+                </a:solidFill>
+                <a:latin typeface="Segoe UI"/>
+              </a:rPr>
+              <a:t>Goals, non-goals, users, scope — drafted before a single source file is touched.</a:t>
+            </a:r>
+          </a:p>
+        </p:txBody>
+      </p:sp>
+      <p:sp>
+        <p:nvSpPr>
+          <p:cNvPr id="10" name="TextBox 9"/>
+          <p:cNvSpPr txBox="1"/>
+          <p:nvPr/>
+        </p:nvSpPr>
+        <p:spPr>
+          <a:xfrm>
+            <a:off x="457200" y="6400800"/>
+            <a:ext cx="5486400" cy="274320"/>
+          </a:xfrm>
+          <a:prstGeom prst="rect">
+            <a:avLst/>
+          </a:prstGeom>
+          <a:noFill/>
+        </p:spPr>
+        <p:txBody>
+          <a:bodyPr wrap="square" lIns="45720" rIns="45720" tIns="18288" bIns="18288">
+            <a:spAutoFit/>
+          </a:bodyPr>
+          <a:lstStyle/>
+          <a:p>
+            <a:pPr algn="l"/>
+            <a:r>
+              <a:rPr sz="1000" b="0">
+                <a:solidFill>
+                  <a:srgbClr val="9AA3AF"/>
+                </a:solidFill>
+                <a:latin typeface="Segoe UI"/>
+              </a:rPr>
+              <a:t>EFF-IT  —  A Claude Code harness</a:t>
+            </a:r>
+          </a:p>
+        </p:txBody>
+      </p:sp>
+      <p:sp>
+        <p:nvSpPr>
+          <p:cNvPr id="11" name="TextBox 10"/>
+          <p:cNvSpPr txBox="1"/>
+          <p:nvPr/>
+        </p:nvSpPr>
+        <p:spPr>
+          <a:xfrm>
+            <a:off x="10515600" y="6400800"/>
+            <a:ext cx="1645920" cy="274320"/>
+          </a:xfrm>
+          <a:prstGeom prst="rect">
+            <a:avLst/>
+          </a:prstGeom>
+          <a:noFill/>
+        </p:spPr>
+        <p:txBody>
+          <a:bodyPr wrap="square" lIns="45720" rIns="45720" tIns="18288" bIns="18288">
+            <a:spAutoFit/>
+          </a:bodyPr>
+          <a:lstStyle/>
+          <a:p>
+            <a:pPr algn="r"/>
+            <a:r>
+              <a:rPr sz="1000" b="0">
+                <a:solidFill>
+                  <a:srgbClr val="9AA3AF"/>
+                </a:solidFill>
+                <a:latin typeface="Segoe UI"/>
+              </a:rPr>
+              <a:t>17 / 23</a:t>
+            </a:r>
+          </a:p>
+        </p:txBody>
+      </p:sp>
+    </p:spTree>
+  </p:cSld>
+  <p:clrMapOvr>
+    <a:masterClrMapping/>
+  </p:clrMapOvr>
+</p:sld>
+</file>
+
+<file path=ppt/slides/slide18.xml><?xml version="1.0" encoding="utf-8"?>
+<p:sld xmlns:a="http://schemas.openxmlformats.org/drawingml/2006/main" xmlns:p="http://schemas.openxmlformats.org/presentationml/2006/main" xmlns:r="http://schemas.openxmlformats.org/officeDocument/2006/relationships">
+  <p:cSld>
+    <p:spTree>
+      <p:nvGrpSpPr>
+        <p:cNvPr id="1" name=""/>
+        <p:cNvGrpSpPr/>
+        <p:nvPr/>
+      </p:nvGrpSpPr>
+      <p:grpSpPr/>
+      <p:sp>
+        <p:nvSpPr>
+          <p:cNvPr id="2" name="Rectangle 1"/>
+          <p:cNvSpPr/>
+          <p:nvPr/>
+        </p:nvSpPr>
+        <p:spPr>
+          <a:xfrm>
+            <a:off x="0" y="0"/>
+            <a:ext cx="12191695" cy="6858000"/>
+          </a:xfrm>
+          <a:prstGeom prst="rect">
+            <a:avLst/>
+          </a:prstGeom>
+          <a:solidFill>
+            <a:srgbClr val="0F141A"/>
+          </a:solidFill>
+          <a:ln>
+            <a:noFill/>
+          </a:ln>
+          <a:effectLst/>
+        </p:spPr>
+        <p:style>
+          <a:lnRef idx="1">
+            <a:schemeClr val="accent1"/>
+          </a:lnRef>
+          <a:fillRef idx="3">
+            <a:schemeClr val="accent1"/>
+          </a:fillRef>
+          <a:effectRef idx="2">
+            <a:schemeClr val="accent1"/>
+          </a:effectRef>
+          <a:fontRef idx="minor">
+            <a:schemeClr val="lt1"/>
+          </a:fontRef>
+        </p:style>
+        <p:txBody>
+          <a:bodyPr rtlCol="0" anchor="ctr"/>
+          <a:lstStyle/>
+          <a:p>
+            <a:pPr algn="ctr"/>
+          </a:p>
+        </p:txBody>
+      </p:sp>
+      <p:sp>
+        <p:nvSpPr>
+          <p:cNvPr id="3" name="Rectangle 2"/>
+          <p:cNvSpPr/>
+          <p:nvPr/>
+        </p:nvSpPr>
+        <p:spPr>
+          <a:xfrm>
+            <a:off x="457200" y="411480"/>
+            <a:ext cx="73152" cy="502920"/>
+          </a:xfrm>
+          <a:prstGeom prst="rect">
+            <a:avLst/>
+          </a:prstGeom>
+          <a:solidFill>
+            <a:srgbClr val="6EE7B7"/>
+          </a:solidFill>
+          <a:ln>
+            <a:noFill/>
+          </a:ln>
+          <a:effectLst/>
+        </p:spPr>
+        <p:style>
+          <a:lnRef idx="1">
+            <a:schemeClr val="accent1"/>
+          </a:lnRef>
+          <a:fillRef idx="3">
+            <a:schemeClr val="accent1"/>
+          </a:fillRef>
+          <a:effectRef idx="2">
+            <a:schemeClr val="accent1"/>
+          </a:effectRef>
+          <a:fontRef idx="minor">
+            <a:schemeClr val="lt1"/>
+          </a:fontRef>
+        </p:style>
+        <p:txBody>
+          <a:bodyPr rtlCol="0" anchor="ctr"/>
+          <a:lstStyle/>
+          <a:p>
+            <a:pPr algn="ctr"/>
+          </a:p>
+        </p:txBody>
+      </p:sp>
+      <p:sp>
+        <p:nvSpPr>
+          <p:cNvPr id="4" name="TextBox 3"/>
+          <p:cNvSpPr txBox="1"/>
+          <p:nvPr/>
+        </p:nvSpPr>
+        <p:spPr>
+          <a:xfrm>
+            <a:off x="685800" y="292608"/>
+            <a:ext cx="1828800" cy="365760"/>
+          </a:xfrm>
+          <a:prstGeom prst="rect">
+            <a:avLst/>
+          </a:prstGeom>
+          <a:noFill/>
+        </p:spPr>
+        <p:txBody>
+          <a:bodyPr wrap="square" lIns="45720" rIns="45720" tIns="18288" bIns="18288">
+            <a:spAutoFit/>
+          </a:bodyPr>
+          <a:lstStyle/>
+          <a:p>
+            <a:pPr algn="l"/>
+            <a:r>
+              <a:rPr sz="1100" b="1">
+                <a:solidFill>
+                  <a:srgbClr val="6EE7B7"/>
+                </a:solidFill>
+                <a:latin typeface="Segoe UI"/>
+              </a:rPr>
+              <a:t>APPENDIX · 3 / 8</a:t>
+            </a:r>
+          </a:p>
+        </p:txBody>
+      </p:sp>
+      <p:sp>
+        <p:nvSpPr>
+          <p:cNvPr id="5" name="TextBox 4"/>
+          <p:cNvSpPr txBox="1"/>
+          <p:nvPr/>
+        </p:nvSpPr>
+        <p:spPr>
+          <a:xfrm>
+            <a:off x="685800" y="594360"/>
+            <a:ext cx="10972800" cy="457200"/>
+          </a:xfrm>
+          <a:prstGeom prst="rect">
+            <a:avLst/>
+          </a:prstGeom>
+          <a:noFill/>
+        </p:spPr>
+        <p:txBody>
+          <a:bodyPr wrap="square" lIns="45720" rIns="45720" tIns="18288" bIns="18288">
+            <a:spAutoFit/>
+          </a:bodyPr>
+          <a:lstStyle/>
+          <a:p>
+            <a:pPr algn="l"/>
+            <a:r>
+              <a:rPr sz="2400" b="1">
+                <a:solidFill>
+                  <a:srgbClr val="E8ECF1"/>
+                </a:solidFill>
+                <a:latin typeface="Segoe UI"/>
+              </a:rPr>
+              <a:t>Step 3: Security concerns, merged per app_type</a:t>
+            </a:r>
+          </a:p>
+        </p:txBody>
+      </p:sp>
+      <p:sp>
+        <p:nvSpPr>
+          <p:cNvPr id="6" name="TextBox 5"/>
+          <p:cNvSpPr txBox="1"/>
+          <p:nvPr/>
+        </p:nvSpPr>
+        <p:spPr>
+          <a:xfrm>
+            <a:off x="685800" y="960120"/>
+            <a:ext cx="10972800" cy="320040"/>
+          </a:xfrm>
+          <a:prstGeom prst="rect">
+            <a:avLst/>
+          </a:prstGeom>
+          <a:noFill/>
+        </p:spPr>
+        <p:txBody>
+          <a:bodyPr wrap="square" lIns="45720" rIns="45720" tIns="18288" bIns="18288">
+            <a:spAutoFit/>
+          </a:bodyPr>
+          <a:lstStyle/>
+          <a:p>
+            <a:pPr algn="l"/>
+            <a:r>
+              <a:rPr sz="1200" b="0">
+                <a:solidFill>
+                  <a:srgbClr val="9AA3AF"/>
+                </a:solidFill>
+                <a:latin typeface="Segoe UI"/>
+              </a:rPr>
+              <a:t>The threat-model story from slide 9 — in production form</a:t>
+            </a:r>
+          </a:p>
+        </p:txBody>
+      </p:sp>
+      <p:pic>
+        <p:nvPicPr>
+          <p:cNvPr id="7" name="Picture 6" descr="03a-security-concerns-1.jpg"/>
+          <p:cNvPicPr>
+            <a:picLocks noChangeAspect="1"/>
+          </p:cNvPicPr>
+          <p:nvPr/>
+        </p:nvPicPr>
+        <p:blipFill>
+          <a:blip r:embed="rId2"/>
+          <a:stretch>
+            <a:fillRect/>
+          </a:stretch>
+        </p:blipFill>
+        <p:spPr>
+          <a:xfrm>
+            <a:off x="457200" y="2337499"/>
+            <a:ext cx="5577840" cy="2320160"/>
+          </a:xfrm>
+          <a:prstGeom prst="rect">
+            <a:avLst/>
+          </a:prstGeom>
+          <a:ln w="9525">
+            <a:solidFill>
+              <a:srgbClr val="34A87E"/>
+            </a:solidFill>
+          </a:ln>
+        </p:spPr>
+      </p:pic>
+      <p:pic>
+        <p:nvPicPr>
+          <p:cNvPr id="8" name="Picture 7" descr="03b-security-concerns-2.jpg"/>
+          <p:cNvPicPr>
+            <a:picLocks noChangeAspect="1"/>
+          </p:cNvPicPr>
+          <p:nvPr/>
+        </p:nvPicPr>
+        <p:blipFill>
+          <a:blip r:embed="rId3"/>
+          <a:stretch>
+            <a:fillRect/>
+          </a:stretch>
+        </p:blipFill>
+        <p:spPr>
+          <a:xfrm>
+            <a:off x="6172200" y="2166452"/>
+            <a:ext cx="5577840" cy="2662255"/>
+          </a:xfrm>
+          <a:prstGeom prst="rect">
+            <a:avLst/>
+          </a:prstGeom>
+          <a:ln w="9525">
+            <a:solidFill>
+              <a:srgbClr val="34A87E"/>
+            </a:solidFill>
+          </a:ln>
+        </p:spPr>
+      </p:pic>
+      <p:sp>
+        <p:nvSpPr>
+          <p:cNvPr id="9" name="Rounded Rectangle 8"/>
+          <p:cNvSpPr/>
+          <p:nvPr/>
+        </p:nvSpPr>
+        <p:spPr>
+          <a:xfrm>
+            <a:off x="457200" y="5806440"/>
+            <a:ext cx="11247120" cy="502920"/>
+          </a:xfrm>
+          <a:prstGeom prst="roundRect">
+            <a:avLst/>
+          </a:prstGeom>
+          <a:solidFill>
+            <a:srgbClr val="181F2A"/>
+          </a:solidFill>
+          <a:ln w="9525">
+            <a:solidFill>
+              <a:srgbClr val="34A87E"/>
+            </a:solidFill>
+          </a:ln>
+          <a:effectLst/>
+        </p:spPr>
+        <p:style>
+          <a:lnRef idx="1">
+            <a:schemeClr val="accent1"/>
+          </a:lnRef>
+          <a:fillRef idx="3">
+            <a:schemeClr val="accent1"/>
+          </a:fillRef>
+          <a:effectRef idx="2">
+            <a:schemeClr val="accent1"/>
+          </a:effectRef>
+          <a:fontRef idx="minor">
+            <a:schemeClr val="lt1"/>
+          </a:fontRef>
+        </p:style>
+        <p:txBody>
+          <a:bodyPr rtlCol="0" anchor="ctr"/>
+          <a:lstStyle/>
+          <a:p>
+            <a:pPr algn="ctr"/>
+          </a:p>
+        </p:txBody>
+      </p:sp>
+      <p:sp>
+        <p:nvSpPr>
+          <p:cNvPr id="10" name="TextBox 9"/>
+          <p:cNvSpPr txBox="1"/>
+          <p:nvPr/>
+        </p:nvSpPr>
+        <p:spPr>
+          <a:xfrm>
+            <a:off x="685800" y="5897880"/>
+            <a:ext cx="10789920" cy="365760"/>
+          </a:xfrm>
+          <a:prstGeom prst="rect">
+            <a:avLst/>
+          </a:prstGeom>
+          <a:noFill/>
+        </p:spPr>
+        <p:txBody>
+          <a:bodyPr wrap="square" lIns="45720" rIns="45720" tIns="18288" bIns="18288">
+            <a:spAutoFit/>
+          </a:bodyPr>
+          <a:lstStyle/>
+          <a:p>
+            <a:pPr algn="l"/>
+            <a:r>
+              <a:rPr sz="1300" b="0">
+                <a:solidFill>
+                  <a:srgbClr val="E8ECF1"/>
+                </a:solidFill>
+                <a:latin typeface="Segoe UI"/>
+              </a:rPr>
+              <a:t>concern-resolver reads security/concerns/*.md and unions per declared app_type → SECURITY_CONCERNS.md.</a:t>
+            </a:r>
+          </a:p>
+        </p:txBody>
+      </p:sp>
+      <p:sp>
+        <p:nvSpPr>
+          <p:cNvPr id="11" name="TextBox 10"/>
+          <p:cNvSpPr txBox="1"/>
+          <p:nvPr/>
+        </p:nvSpPr>
+        <p:spPr>
+          <a:xfrm>
+            <a:off x="457200" y="6400800"/>
+            <a:ext cx="5486400" cy="274320"/>
+          </a:xfrm>
+          <a:prstGeom prst="rect">
+            <a:avLst/>
+          </a:prstGeom>
+          <a:noFill/>
+        </p:spPr>
+        <p:txBody>
+          <a:bodyPr wrap="square" lIns="45720" rIns="45720" tIns="18288" bIns="18288">
+            <a:spAutoFit/>
+          </a:bodyPr>
+          <a:lstStyle/>
+          <a:p>
+            <a:pPr algn="l"/>
+            <a:r>
+              <a:rPr sz="1000" b="0">
+                <a:solidFill>
+                  <a:srgbClr val="9AA3AF"/>
+                </a:solidFill>
+                <a:latin typeface="Segoe UI"/>
+              </a:rPr>
+              <a:t>EFF-IT  —  A Claude Code harness</a:t>
+            </a:r>
+          </a:p>
+        </p:txBody>
+      </p:sp>
+      <p:sp>
+        <p:nvSpPr>
+          <p:cNvPr id="12" name="TextBox 11"/>
+          <p:cNvSpPr txBox="1"/>
+          <p:nvPr/>
+        </p:nvSpPr>
+        <p:spPr>
+          <a:xfrm>
+            <a:off x="10515600" y="6400800"/>
+            <a:ext cx="1645920" cy="274320"/>
+          </a:xfrm>
+          <a:prstGeom prst="rect">
+            <a:avLst/>
+          </a:prstGeom>
+          <a:noFill/>
+        </p:spPr>
+        <p:txBody>
+          <a:bodyPr wrap="square" lIns="45720" rIns="45720" tIns="18288" bIns="18288">
+            <a:spAutoFit/>
+          </a:bodyPr>
+          <a:lstStyle/>
+          <a:p>
+            <a:pPr algn="r"/>
+            <a:r>
+              <a:rPr sz="1000" b="0">
+                <a:solidFill>
+                  <a:srgbClr val="9AA3AF"/>
+                </a:solidFill>
+                <a:latin typeface="Segoe UI"/>
+              </a:rPr>
+              <a:t>18 / 23</a:t>
+            </a:r>
+          </a:p>
+        </p:txBody>
+      </p:sp>
+    </p:spTree>
+  </p:cSld>
+  <p:clrMapOvr>
+    <a:masterClrMapping/>
+  </p:clrMapOvr>
+</p:sld>
+</file>
+
+<file path=ppt/slides/slide19.xml><?xml version="1.0" encoding="utf-8"?>
+<p:sld xmlns:a="http://schemas.openxmlformats.org/drawingml/2006/main" xmlns:p="http://schemas.openxmlformats.org/presentationml/2006/main" xmlns:r="http://schemas.openxmlformats.org/officeDocument/2006/relationships">
+  <p:cSld>
+    <p:spTree>
+      <p:nvGrpSpPr>
+        <p:cNvPr id="1" name=""/>
+        <p:cNvGrpSpPr/>
+        <p:nvPr/>
+      </p:nvGrpSpPr>
+      <p:grpSpPr/>
+      <p:sp>
+        <p:nvSpPr>
+          <p:cNvPr id="2" name="Rectangle 1"/>
+          <p:cNvSpPr/>
+          <p:nvPr/>
+        </p:nvSpPr>
+        <p:spPr>
+          <a:xfrm>
+            <a:off x="0" y="0"/>
+            <a:ext cx="12191695" cy="6858000"/>
+          </a:xfrm>
+          <a:prstGeom prst="rect">
+            <a:avLst/>
+          </a:prstGeom>
+          <a:solidFill>
+            <a:srgbClr val="0F141A"/>
+          </a:solidFill>
+          <a:ln>
+            <a:noFill/>
+          </a:ln>
+          <a:effectLst/>
+        </p:spPr>
+        <p:style>
+          <a:lnRef idx="1">
+            <a:schemeClr val="accent1"/>
+          </a:lnRef>
+          <a:fillRef idx="3">
+            <a:schemeClr val="accent1"/>
+          </a:fillRef>
+          <a:effectRef idx="2">
+            <a:schemeClr val="accent1"/>
+          </a:effectRef>
+          <a:fontRef idx="minor">
+            <a:schemeClr val="lt1"/>
+          </a:fontRef>
+        </p:style>
+        <p:txBody>
+          <a:bodyPr rtlCol="0" anchor="ctr"/>
+          <a:lstStyle/>
+          <a:p>
+            <a:pPr algn="ctr"/>
+          </a:p>
+        </p:txBody>
+      </p:sp>
+      <p:sp>
+        <p:nvSpPr>
+          <p:cNvPr id="3" name="Rectangle 2"/>
+          <p:cNvSpPr/>
+          <p:nvPr/>
+        </p:nvSpPr>
+        <p:spPr>
+          <a:xfrm>
+            <a:off x="457200" y="411480"/>
+            <a:ext cx="73152" cy="502920"/>
+          </a:xfrm>
+          <a:prstGeom prst="rect">
+            <a:avLst/>
+          </a:prstGeom>
+          <a:solidFill>
+            <a:srgbClr val="6EE7B7"/>
+          </a:solidFill>
+          <a:ln>
+            <a:noFill/>
+          </a:ln>
+          <a:effectLst/>
+        </p:spPr>
+        <p:style>
+          <a:lnRef idx="1">
+            <a:schemeClr val="accent1"/>
+          </a:lnRef>
+          <a:fillRef idx="3">
+            <a:schemeClr val="accent1"/>
+          </a:fillRef>
+          <a:effectRef idx="2">
+            <a:schemeClr val="accent1"/>
+          </a:effectRef>
+          <a:fontRef idx="minor">
+            <a:schemeClr val="lt1"/>
+          </a:fontRef>
+        </p:style>
+        <p:txBody>
+          <a:bodyPr rtlCol="0" anchor="ctr"/>
+          <a:lstStyle/>
+          <a:p>
+            <a:pPr algn="ctr"/>
+          </a:p>
+        </p:txBody>
+      </p:sp>
+      <p:sp>
+        <p:nvSpPr>
+          <p:cNvPr id="4" name="TextBox 3"/>
+          <p:cNvSpPr txBox="1"/>
+          <p:nvPr/>
+        </p:nvSpPr>
+        <p:spPr>
+          <a:xfrm>
+            <a:off x="685800" y="292608"/>
+            <a:ext cx="1828800" cy="365760"/>
+          </a:xfrm>
+          <a:prstGeom prst="rect">
+            <a:avLst/>
+          </a:prstGeom>
+          <a:noFill/>
+        </p:spPr>
+        <p:txBody>
+          <a:bodyPr wrap="square" lIns="45720" rIns="45720" tIns="18288" bIns="18288">
+            <a:spAutoFit/>
+          </a:bodyPr>
+          <a:lstStyle/>
+          <a:p>
+            <a:pPr algn="l"/>
+            <a:r>
+              <a:rPr sz="1100" b="1">
+                <a:solidFill>
+                  <a:srgbClr val="6EE7B7"/>
+                </a:solidFill>
+                <a:latin typeface="Segoe UI"/>
+              </a:rPr>
+              <a:t>APPENDIX · 4 / 8</a:t>
+            </a:r>
+          </a:p>
+        </p:txBody>
+      </p:sp>
+      <p:sp>
+        <p:nvSpPr>
+          <p:cNvPr id="5" name="TextBox 4"/>
+          <p:cNvSpPr txBox="1"/>
+          <p:nvPr/>
+        </p:nvSpPr>
+        <p:spPr>
+          <a:xfrm>
+            <a:off x="685800" y="594360"/>
+            <a:ext cx="10972800" cy="457200"/>
+          </a:xfrm>
+          <a:prstGeom prst="rect">
+            <a:avLst/>
+          </a:prstGeom>
+          <a:noFill/>
+        </p:spPr>
+        <p:txBody>
+          <a:bodyPr wrap="square" lIns="45720" rIns="45720" tIns="18288" bIns="18288">
+            <a:spAutoFit/>
+          </a:bodyPr>
+          <a:lstStyle/>
+          <a:p>
+            <a:pPr algn="l"/>
+            <a:r>
+              <a:rPr sz="2400" b="1">
+                <a:solidFill>
+                  <a:srgbClr val="E8ECF1"/>
+                </a:solidFill>
+                <a:latin typeface="Segoe UI"/>
+              </a:rPr>
+              <a:t>Step 4: ARCHITECTURE.md (plan-before-code)</a:t>
+            </a:r>
+          </a:p>
+        </p:txBody>
+      </p:sp>
+      <p:sp>
+        <p:nvSpPr>
+          <p:cNvPr id="6" name="TextBox 5"/>
+          <p:cNvSpPr txBox="1"/>
+          <p:nvPr/>
+        </p:nvSpPr>
+        <p:spPr>
+          <a:xfrm>
+            <a:off x="685800" y="960120"/>
+            <a:ext cx="10972800" cy="320040"/>
+          </a:xfrm>
+          <a:prstGeom prst="rect">
+            <a:avLst/>
+          </a:prstGeom>
+          <a:noFill/>
+        </p:spPr>
+        <p:txBody>
+          <a:bodyPr wrap="square" lIns="45720" rIns="45720" tIns="18288" bIns="18288">
+            <a:spAutoFit/>
+          </a:bodyPr>
+          <a:lstStyle/>
+          <a:p>
+            <a:pPr algn="l"/>
+            <a:r>
+              <a:rPr sz="1200" b="0">
+                <a:solidFill>
+                  <a:srgbClr val="9AA3AF"/>
+                </a:solidFill>
+                <a:latin typeface="Segoe UI"/>
+              </a:rPr>
+              <a:t>Trust boundary + HMAC call path, written before any source file</a:t>
+            </a:r>
+          </a:p>
+        </p:txBody>
+      </p:sp>
+      <p:pic>
+        <p:nvPicPr>
+          <p:cNvPr id="7" name="Picture 6" descr="04a-arch-system-context.jpg"/>
+          <p:cNvPicPr>
+            <a:picLocks noChangeAspect="1"/>
+          </p:cNvPicPr>
+          <p:nvPr/>
+        </p:nvPicPr>
+        <p:blipFill>
+          <a:blip r:embed="rId2"/>
+          <a:stretch>
+            <a:fillRect/>
+          </a:stretch>
+        </p:blipFill>
+        <p:spPr>
+          <a:xfrm>
+            <a:off x="630568" y="1325880"/>
+            <a:ext cx="5231102" cy="4343400"/>
+          </a:xfrm>
+          <a:prstGeom prst="rect">
+            <a:avLst/>
+          </a:prstGeom>
+          <a:ln w="9525">
+            <a:solidFill>
+              <a:srgbClr val="34A87E"/>
+            </a:solidFill>
+          </a:ln>
+        </p:spPr>
+      </p:pic>
+      <p:pic>
+        <p:nvPicPr>
+          <p:cNvPr id="8" name="Picture 7" descr="04b-arch-data-flow.jpg"/>
+          <p:cNvPicPr>
+            <a:picLocks noChangeAspect="1"/>
+          </p:cNvPicPr>
+          <p:nvPr/>
+        </p:nvPicPr>
+        <p:blipFill>
+          <a:blip r:embed="rId3"/>
+          <a:stretch>
+            <a:fillRect/>
+          </a:stretch>
+        </p:blipFill>
+        <p:spPr>
+          <a:xfrm>
+            <a:off x="6172200" y="1465753"/>
+            <a:ext cx="5577840" cy="4063653"/>
+          </a:xfrm>
+          <a:prstGeom prst="rect">
+            <a:avLst/>
+          </a:prstGeom>
+          <a:ln w="9525">
+            <a:solidFill>
+              <a:srgbClr val="34A87E"/>
+            </a:solidFill>
+          </a:ln>
+        </p:spPr>
+      </p:pic>
+      <p:sp>
+        <p:nvSpPr>
+          <p:cNvPr id="9" name="Rounded Rectangle 8"/>
+          <p:cNvSpPr/>
+          <p:nvPr/>
+        </p:nvSpPr>
+        <p:spPr>
+          <a:xfrm>
+            <a:off x="457200" y="5806440"/>
+            <a:ext cx="11247120" cy="502920"/>
+          </a:xfrm>
+          <a:prstGeom prst="roundRect">
+            <a:avLst/>
+          </a:prstGeom>
+          <a:solidFill>
+            <a:srgbClr val="181F2A"/>
+          </a:solidFill>
+          <a:ln w="9525">
+            <a:solidFill>
+              <a:srgbClr val="34A87E"/>
+            </a:solidFill>
+          </a:ln>
+          <a:effectLst/>
+        </p:spPr>
+        <p:style>
+          <a:lnRef idx="1">
+            <a:schemeClr val="accent1"/>
+          </a:lnRef>
+          <a:fillRef idx="3">
+            <a:schemeClr val="accent1"/>
+          </a:fillRef>
+          <a:effectRef idx="2">
+            <a:schemeClr val="accent1"/>
+          </a:effectRef>
+          <a:fontRef idx="minor">
+            <a:schemeClr val="lt1"/>
+          </a:fontRef>
+        </p:style>
+        <p:txBody>
+          <a:bodyPr rtlCol="0" anchor="ctr"/>
+          <a:lstStyle/>
+          <a:p>
+            <a:pPr algn="ctr"/>
+          </a:p>
+        </p:txBody>
+      </p:sp>
+      <p:sp>
+        <p:nvSpPr>
+          <p:cNvPr id="10" name="TextBox 9"/>
+          <p:cNvSpPr txBox="1"/>
+          <p:nvPr/>
+        </p:nvSpPr>
+        <p:spPr>
+          <a:xfrm>
+            <a:off x="685800" y="5897880"/>
+            <a:ext cx="10789920" cy="365760"/>
+          </a:xfrm>
+          <a:prstGeom prst="rect">
+            <a:avLst/>
+          </a:prstGeom>
+          <a:noFill/>
+        </p:spPr>
+        <p:txBody>
+          <a:bodyPr wrap="square" lIns="45720" rIns="45720" tIns="18288" bIns="18288">
+            <a:spAutoFit/>
+          </a:bodyPr>
+          <a:lstStyle/>
+          <a:p>
+            <a:pPr algn="l"/>
+            <a:r>
+              <a:rPr sz="1300" b="0">
+                <a:solidFill>
+                  <a:srgbClr val="E8ECF1"/>
+                </a:solidFill>
+                <a:latin typeface="Segoe UI"/>
+              </a:rPr>
+              <a:t>Left: system context with trust boundary.   Right: HMAC verify pseudocode — the algorithm settled before the code.</a:t>
+            </a:r>
+          </a:p>
+        </p:txBody>
+      </p:sp>
+      <p:sp>
+        <p:nvSpPr>
+          <p:cNvPr id="11" name="TextBox 10"/>
+          <p:cNvSpPr txBox="1"/>
+          <p:nvPr/>
+        </p:nvSpPr>
+        <p:spPr>
+          <a:xfrm>
+            <a:off x="457200" y="6400800"/>
+            <a:ext cx="5486400" cy="274320"/>
+          </a:xfrm>
+          <a:prstGeom prst="rect">
+            <a:avLst/>
+          </a:prstGeom>
+          <a:noFill/>
+        </p:spPr>
+        <p:txBody>
+          <a:bodyPr wrap="square" lIns="45720" rIns="45720" tIns="18288" bIns="18288">
+            <a:spAutoFit/>
+          </a:bodyPr>
+          <a:lstStyle/>
+          <a:p>
+            <a:pPr algn="l"/>
+            <a:r>
+              <a:rPr sz="1000" b="0">
+                <a:solidFill>
+                  <a:srgbClr val="9AA3AF"/>
+                </a:solidFill>
+                <a:latin typeface="Segoe UI"/>
+              </a:rPr>
+              <a:t>EFF-IT  —  A Claude Code harness</a:t>
+            </a:r>
+          </a:p>
+        </p:txBody>
+      </p:sp>
+      <p:sp>
+        <p:nvSpPr>
+          <p:cNvPr id="12" name="TextBox 11"/>
+          <p:cNvSpPr txBox="1"/>
+          <p:nvPr/>
+        </p:nvSpPr>
+        <p:spPr>
+          <a:xfrm>
+            <a:off x="10515600" y="6400800"/>
+            <a:ext cx="1645920" cy="274320"/>
+          </a:xfrm>
+          <a:prstGeom prst="rect">
+            <a:avLst/>
+          </a:prstGeom>
+          <a:noFill/>
+        </p:spPr>
+        <p:txBody>
+          <a:bodyPr wrap="square" lIns="45720" rIns="45720" tIns="18288" bIns="18288">
+            <a:spAutoFit/>
+          </a:bodyPr>
+          <a:lstStyle/>
+          <a:p>
+            <a:pPr algn="r"/>
+            <a:r>
+              <a:rPr sz="1000" b="0">
+                <a:solidFill>
+                  <a:srgbClr val="9AA3AF"/>
+                </a:solidFill>
+                <a:latin typeface="Segoe UI"/>
+              </a:rPr>
+              <a:t>19 / 23</a:t>
             </a:r>
           </a:p>
         </p:txBody>
@@ -9779,7 +13017,1629 @@
                 </a:solidFill>
                 <a:latin typeface="Segoe UI"/>
               </a:rPr>
-              <a:t>2 / 14</a:t>
+              <a:t>2 / 23</a:t>
+            </a:r>
+          </a:p>
+        </p:txBody>
+      </p:sp>
+    </p:spTree>
+  </p:cSld>
+  <p:clrMapOvr>
+    <a:masterClrMapping/>
+  </p:clrMapOvr>
+</p:sld>
+</file>
+
+<file path=ppt/slides/slide20.xml><?xml version="1.0" encoding="utf-8"?>
+<p:sld xmlns:a="http://schemas.openxmlformats.org/drawingml/2006/main" xmlns:p="http://schemas.openxmlformats.org/presentationml/2006/main" xmlns:r="http://schemas.openxmlformats.org/officeDocument/2006/relationships">
+  <p:cSld>
+    <p:spTree>
+      <p:nvGrpSpPr>
+        <p:cNvPr id="1" name=""/>
+        <p:cNvGrpSpPr/>
+        <p:nvPr/>
+      </p:nvGrpSpPr>
+      <p:grpSpPr/>
+      <p:sp>
+        <p:nvSpPr>
+          <p:cNvPr id="2" name="Rectangle 1"/>
+          <p:cNvSpPr/>
+          <p:nvPr/>
+        </p:nvSpPr>
+        <p:spPr>
+          <a:xfrm>
+            <a:off x="0" y="0"/>
+            <a:ext cx="12191695" cy="6858000"/>
+          </a:xfrm>
+          <a:prstGeom prst="rect">
+            <a:avLst/>
+          </a:prstGeom>
+          <a:solidFill>
+            <a:srgbClr val="0F141A"/>
+          </a:solidFill>
+          <a:ln>
+            <a:noFill/>
+          </a:ln>
+          <a:effectLst/>
+        </p:spPr>
+        <p:style>
+          <a:lnRef idx="1">
+            <a:schemeClr val="accent1"/>
+          </a:lnRef>
+          <a:fillRef idx="3">
+            <a:schemeClr val="accent1"/>
+          </a:fillRef>
+          <a:effectRef idx="2">
+            <a:schemeClr val="accent1"/>
+          </a:effectRef>
+          <a:fontRef idx="minor">
+            <a:schemeClr val="lt1"/>
+          </a:fontRef>
+        </p:style>
+        <p:txBody>
+          <a:bodyPr rtlCol="0" anchor="ctr"/>
+          <a:lstStyle/>
+          <a:p>
+            <a:pPr algn="ctr"/>
+          </a:p>
+        </p:txBody>
+      </p:sp>
+      <p:sp>
+        <p:nvSpPr>
+          <p:cNvPr id="3" name="Rectangle 2"/>
+          <p:cNvSpPr/>
+          <p:nvPr/>
+        </p:nvSpPr>
+        <p:spPr>
+          <a:xfrm>
+            <a:off x="457200" y="411480"/>
+            <a:ext cx="73152" cy="502920"/>
+          </a:xfrm>
+          <a:prstGeom prst="rect">
+            <a:avLst/>
+          </a:prstGeom>
+          <a:solidFill>
+            <a:srgbClr val="6EE7B7"/>
+          </a:solidFill>
+          <a:ln>
+            <a:noFill/>
+          </a:ln>
+          <a:effectLst/>
+        </p:spPr>
+        <p:style>
+          <a:lnRef idx="1">
+            <a:schemeClr val="accent1"/>
+          </a:lnRef>
+          <a:fillRef idx="3">
+            <a:schemeClr val="accent1"/>
+          </a:fillRef>
+          <a:effectRef idx="2">
+            <a:schemeClr val="accent1"/>
+          </a:effectRef>
+          <a:fontRef idx="minor">
+            <a:schemeClr val="lt1"/>
+          </a:fontRef>
+        </p:style>
+        <p:txBody>
+          <a:bodyPr rtlCol="0" anchor="ctr"/>
+          <a:lstStyle/>
+          <a:p>
+            <a:pPr algn="ctr"/>
+          </a:p>
+        </p:txBody>
+      </p:sp>
+      <p:sp>
+        <p:nvSpPr>
+          <p:cNvPr id="4" name="TextBox 3"/>
+          <p:cNvSpPr txBox="1"/>
+          <p:nvPr/>
+        </p:nvSpPr>
+        <p:spPr>
+          <a:xfrm>
+            <a:off x="685800" y="292608"/>
+            <a:ext cx="1828800" cy="365760"/>
+          </a:xfrm>
+          <a:prstGeom prst="rect">
+            <a:avLst/>
+          </a:prstGeom>
+          <a:noFill/>
+        </p:spPr>
+        <p:txBody>
+          <a:bodyPr wrap="square" lIns="45720" rIns="45720" tIns="18288" bIns="18288">
+            <a:spAutoFit/>
+          </a:bodyPr>
+          <a:lstStyle/>
+          <a:p>
+            <a:pPr algn="l"/>
+            <a:r>
+              <a:rPr sz="1100" b="1">
+                <a:solidFill>
+                  <a:srgbClr val="6EE7B7"/>
+                </a:solidFill>
+                <a:latin typeface="Segoe UI"/>
+              </a:rPr>
+              <a:t>APPENDIX · 5 / 8</a:t>
+            </a:r>
+          </a:p>
+        </p:txBody>
+      </p:sp>
+      <p:sp>
+        <p:nvSpPr>
+          <p:cNvPr id="5" name="TextBox 4"/>
+          <p:cNvSpPr txBox="1"/>
+          <p:nvPr/>
+        </p:nvSpPr>
+        <p:spPr>
+          <a:xfrm>
+            <a:off x="685800" y="594360"/>
+            <a:ext cx="10972800" cy="457200"/>
+          </a:xfrm>
+          <a:prstGeom prst="rect">
+            <a:avLst/>
+          </a:prstGeom>
+          <a:noFill/>
+        </p:spPr>
+        <p:txBody>
+          <a:bodyPr wrap="square" lIns="45720" rIns="45720" tIns="18288" bIns="18288">
+            <a:spAutoFit/>
+          </a:bodyPr>
+          <a:lstStyle/>
+          <a:p>
+            <a:pPr algn="l"/>
+            <a:r>
+              <a:rPr sz="2400" b="1">
+                <a:solidFill>
+                  <a:srgbClr val="E8ECF1"/>
+                </a:solidFill>
+                <a:latin typeface="Segoe UI"/>
+              </a:rPr>
+              <a:t>Step 5: Parallel coders + advisor escalation</a:t>
+            </a:r>
+          </a:p>
+        </p:txBody>
+      </p:sp>
+      <p:sp>
+        <p:nvSpPr>
+          <p:cNvPr id="6" name="TextBox 5"/>
+          <p:cNvSpPr txBox="1"/>
+          <p:nvPr/>
+        </p:nvSpPr>
+        <p:spPr>
+          <a:xfrm>
+            <a:off x="685800" y="960120"/>
+            <a:ext cx="10972800" cy="320040"/>
+          </a:xfrm>
+          <a:prstGeom prst="rect">
+            <a:avLst/>
+          </a:prstGeom>
+          <a:noFill/>
+        </p:spPr>
+        <p:txBody>
+          <a:bodyPr wrap="square" lIns="45720" rIns="45720" tIns="18288" bIns="18288">
+            <a:spAutoFit/>
+          </a:bodyPr>
+          <a:lstStyle/>
+          <a:p>
+            <a:pPr algn="l"/>
+            <a:r>
+              <a:rPr sz="1200" b="0">
+                <a:solidFill>
+                  <a:srgbClr val="9AA3AF"/>
+                </a:solidFill>
+                <a:latin typeface="Segoe UI"/>
+              </a:rPr>
+              <a:t>Four coders concurrent. One hits an ambiguous edge — calls the advisor.</a:t>
+            </a:r>
+          </a:p>
+        </p:txBody>
+      </p:sp>
+      <p:pic>
+        <p:nvPicPr>
+          <p:cNvPr id="7" name="Picture 6" descr="05a-parallel-coders.jpg"/>
+          <p:cNvPicPr>
+            <a:picLocks noChangeAspect="1"/>
+          </p:cNvPicPr>
+          <p:nvPr/>
+        </p:nvPicPr>
+        <p:blipFill>
+          <a:blip r:embed="rId2"/>
+          <a:stretch>
+            <a:fillRect/>
+          </a:stretch>
+        </p:blipFill>
+        <p:spPr>
+          <a:xfrm>
+            <a:off x="457200" y="1553218"/>
+            <a:ext cx="5577840" cy="3888722"/>
+          </a:xfrm>
+          <a:prstGeom prst="rect">
+            <a:avLst/>
+          </a:prstGeom>
+          <a:ln w="9525">
+            <a:solidFill>
+              <a:srgbClr val="34A87E"/>
+            </a:solidFill>
+          </a:ln>
+        </p:spPr>
+      </p:pic>
+      <p:pic>
+        <p:nvPicPr>
+          <p:cNvPr id="8" name="Picture 7" descr="05b-advisor.jpg"/>
+          <p:cNvPicPr>
+            <a:picLocks noChangeAspect="1"/>
+          </p:cNvPicPr>
+          <p:nvPr/>
+        </p:nvPicPr>
+        <p:blipFill>
+          <a:blip r:embed="rId3"/>
+          <a:stretch>
+            <a:fillRect/>
+          </a:stretch>
+        </p:blipFill>
+        <p:spPr>
+          <a:xfrm>
+            <a:off x="6172200" y="1521452"/>
+            <a:ext cx="5577840" cy="3952254"/>
+          </a:xfrm>
+          <a:prstGeom prst="rect">
+            <a:avLst/>
+          </a:prstGeom>
+          <a:ln w="9525">
+            <a:solidFill>
+              <a:srgbClr val="34A87E"/>
+            </a:solidFill>
+          </a:ln>
+        </p:spPr>
+      </p:pic>
+      <p:sp>
+        <p:nvSpPr>
+          <p:cNvPr id="9" name="Rounded Rectangle 8"/>
+          <p:cNvSpPr/>
+          <p:nvPr/>
+        </p:nvSpPr>
+        <p:spPr>
+          <a:xfrm>
+            <a:off x="457200" y="5806440"/>
+            <a:ext cx="11247120" cy="502920"/>
+          </a:xfrm>
+          <a:prstGeom prst="roundRect">
+            <a:avLst/>
+          </a:prstGeom>
+          <a:solidFill>
+            <a:srgbClr val="181F2A"/>
+          </a:solidFill>
+          <a:ln w="9525">
+            <a:solidFill>
+              <a:srgbClr val="34A87E"/>
+            </a:solidFill>
+          </a:ln>
+          <a:effectLst/>
+        </p:spPr>
+        <p:style>
+          <a:lnRef idx="1">
+            <a:schemeClr val="accent1"/>
+          </a:lnRef>
+          <a:fillRef idx="3">
+            <a:schemeClr val="accent1"/>
+          </a:fillRef>
+          <a:effectRef idx="2">
+            <a:schemeClr val="accent1"/>
+          </a:effectRef>
+          <a:fontRef idx="minor">
+            <a:schemeClr val="lt1"/>
+          </a:fontRef>
+        </p:style>
+        <p:txBody>
+          <a:bodyPr rtlCol="0" anchor="ctr"/>
+          <a:lstStyle/>
+          <a:p>
+            <a:pPr algn="ctr"/>
+          </a:p>
+        </p:txBody>
+      </p:sp>
+      <p:sp>
+        <p:nvSpPr>
+          <p:cNvPr id="10" name="TextBox 9"/>
+          <p:cNvSpPr txBox="1"/>
+          <p:nvPr/>
+        </p:nvSpPr>
+        <p:spPr>
+          <a:xfrm>
+            <a:off x="685800" y="5897880"/>
+            <a:ext cx="10789920" cy="365760"/>
+          </a:xfrm>
+          <a:prstGeom prst="rect">
+            <a:avLst/>
+          </a:prstGeom>
+          <a:noFill/>
+        </p:spPr>
+        <p:txBody>
+          <a:bodyPr wrap="square" lIns="45720" rIns="45720" tIns="18288" bIns="18288">
+            <a:spAutoFit/>
+          </a:bodyPr>
+          <a:lstStyle/>
+          <a:p>
+            <a:pPr algn="l"/>
+            <a:r>
+              <a:rPr sz="1300" b="0">
+                <a:solidFill>
+                  <a:srgbClr val="E8ECF1"/>
+                </a:solidFill>
+                <a:latin typeface="Segoe UI"/>
+              </a:rPr>
+              <a:t>Left: four agents running in parallel.   Right: one of them consults the advisor on a header-length bound.</a:t>
+            </a:r>
+          </a:p>
+        </p:txBody>
+      </p:sp>
+      <p:sp>
+        <p:nvSpPr>
+          <p:cNvPr id="11" name="TextBox 10"/>
+          <p:cNvSpPr txBox="1"/>
+          <p:nvPr/>
+        </p:nvSpPr>
+        <p:spPr>
+          <a:xfrm>
+            <a:off x="457200" y="6400800"/>
+            <a:ext cx="5486400" cy="274320"/>
+          </a:xfrm>
+          <a:prstGeom prst="rect">
+            <a:avLst/>
+          </a:prstGeom>
+          <a:noFill/>
+        </p:spPr>
+        <p:txBody>
+          <a:bodyPr wrap="square" lIns="45720" rIns="45720" tIns="18288" bIns="18288">
+            <a:spAutoFit/>
+          </a:bodyPr>
+          <a:lstStyle/>
+          <a:p>
+            <a:pPr algn="l"/>
+            <a:r>
+              <a:rPr sz="1000" b="0">
+                <a:solidFill>
+                  <a:srgbClr val="9AA3AF"/>
+                </a:solidFill>
+                <a:latin typeface="Segoe UI"/>
+              </a:rPr>
+              <a:t>EFF-IT  —  A Claude Code harness</a:t>
+            </a:r>
+          </a:p>
+        </p:txBody>
+      </p:sp>
+      <p:sp>
+        <p:nvSpPr>
+          <p:cNvPr id="12" name="TextBox 11"/>
+          <p:cNvSpPr txBox="1"/>
+          <p:nvPr/>
+        </p:nvSpPr>
+        <p:spPr>
+          <a:xfrm>
+            <a:off x="10515600" y="6400800"/>
+            <a:ext cx="1645920" cy="274320"/>
+          </a:xfrm>
+          <a:prstGeom prst="rect">
+            <a:avLst/>
+          </a:prstGeom>
+          <a:noFill/>
+        </p:spPr>
+        <p:txBody>
+          <a:bodyPr wrap="square" lIns="45720" rIns="45720" tIns="18288" bIns="18288">
+            <a:spAutoFit/>
+          </a:bodyPr>
+          <a:lstStyle/>
+          <a:p>
+            <a:pPr algn="r"/>
+            <a:r>
+              <a:rPr sz="1000" b="0">
+                <a:solidFill>
+                  <a:srgbClr val="9AA3AF"/>
+                </a:solidFill>
+                <a:latin typeface="Segoe UI"/>
+              </a:rPr>
+              <a:t>20 / 23</a:t>
+            </a:r>
+          </a:p>
+        </p:txBody>
+      </p:sp>
+    </p:spTree>
+  </p:cSld>
+  <p:clrMapOvr>
+    <a:masterClrMapping/>
+  </p:clrMapOvr>
+</p:sld>
+</file>
+
+<file path=ppt/slides/slide21.xml><?xml version="1.0" encoding="utf-8"?>
+<p:sld xmlns:a="http://schemas.openxmlformats.org/drawingml/2006/main" xmlns:p="http://schemas.openxmlformats.org/presentationml/2006/main" xmlns:r="http://schemas.openxmlformats.org/officeDocument/2006/relationships">
+  <p:cSld>
+    <p:spTree>
+      <p:nvGrpSpPr>
+        <p:cNvPr id="1" name=""/>
+        <p:cNvGrpSpPr/>
+        <p:nvPr/>
+      </p:nvGrpSpPr>
+      <p:grpSpPr/>
+      <p:sp>
+        <p:nvSpPr>
+          <p:cNvPr id="2" name="Rectangle 1"/>
+          <p:cNvSpPr/>
+          <p:nvPr/>
+        </p:nvSpPr>
+        <p:spPr>
+          <a:xfrm>
+            <a:off x="0" y="0"/>
+            <a:ext cx="12191695" cy="6858000"/>
+          </a:xfrm>
+          <a:prstGeom prst="rect">
+            <a:avLst/>
+          </a:prstGeom>
+          <a:solidFill>
+            <a:srgbClr val="0F141A"/>
+          </a:solidFill>
+          <a:ln>
+            <a:noFill/>
+          </a:ln>
+          <a:effectLst/>
+        </p:spPr>
+        <p:style>
+          <a:lnRef idx="1">
+            <a:schemeClr val="accent1"/>
+          </a:lnRef>
+          <a:fillRef idx="3">
+            <a:schemeClr val="accent1"/>
+          </a:fillRef>
+          <a:effectRef idx="2">
+            <a:schemeClr val="accent1"/>
+          </a:effectRef>
+          <a:fontRef idx="minor">
+            <a:schemeClr val="lt1"/>
+          </a:fontRef>
+        </p:style>
+        <p:txBody>
+          <a:bodyPr rtlCol="0" anchor="ctr"/>
+          <a:lstStyle/>
+          <a:p>
+            <a:pPr algn="ctr"/>
+          </a:p>
+        </p:txBody>
+      </p:sp>
+      <p:sp>
+        <p:nvSpPr>
+          <p:cNvPr id="3" name="Rectangle 2"/>
+          <p:cNvSpPr/>
+          <p:nvPr/>
+        </p:nvSpPr>
+        <p:spPr>
+          <a:xfrm>
+            <a:off x="457200" y="411480"/>
+            <a:ext cx="73152" cy="502920"/>
+          </a:xfrm>
+          <a:prstGeom prst="rect">
+            <a:avLst/>
+          </a:prstGeom>
+          <a:solidFill>
+            <a:srgbClr val="6EE7B7"/>
+          </a:solidFill>
+          <a:ln>
+            <a:noFill/>
+          </a:ln>
+          <a:effectLst/>
+        </p:spPr>
+        <p:style>
+          <a:lnRef idx="1">
+            <a:schemeClr val="accent1"/>
+          </a:lnRef>
+          <a:fillRef idx="3">
+            <a:schemeClr val="accent1"/>
+          </a:fillRef>
+          <a:effectRef idx="2">
+            <a:schemeClr val="accent1"/>
+          </a:effectRef>
+          <a:fontRef idx="minor">
+            <a:schemeClr val="lt1"/>
+          </a:fontRef>
+        </p:style>
+        <p:txBody>
+          <a:bodyPr rtlCol="0" anchor="ctr"/>
+          <a:lstStyle/>
+          <a:p>
+            <a:pPr algn="ctr"/>
+          </a:p>
+        </p:txBody>
+      </p:sp>
+      <p:sp>
+        <p:nvSpPr>
+          <p:cNvPr id="4" name="TextBox 3"/>
+          <p:cNvSpPr txBox="1"/>
+          <p:nvPr/>
+        </p:nvSpPr>
+        <p:spPr>
+          <a:xfrm>
+            <a:off x="685800" y="292608"/>
+            <a:ext cx="1828800" cy="365760"/>
+          </a:xfrm>
+          <a:prstGeom prst="rect">
+            <a:avLst/>
+          </a:prstGeom>
+          <a:noFill/>
+        </p:spPr>
+        <p:txBody>
+          <a:bodyPr wrap="square" lIns="45720" rIns="45720" tIns="18288" bIns="18288">
+            <a:spAutoFit/>
+          </a:bodyPr>
+          <a:lstStyle/>
+          <a:p>
+            <a:pPr algn="l"/>
+            <a:r>
+              <a:rPr sz="1100" b="1">
+                <a:solidFill>
+                  <a:srgbClr val="6EE7B7"/>
+                </a:solidFill>
+                <a:latin typeface="Segoe UI"/>
+              </a:rPr>
+              <a:t>APPENDIX · 6 / 8</a:t>
+            </a:r>
+          </a:p>
+        </p:txBody>
+      </p:sp>
+      <p:sp>
+        <p:nvSpPr>
+          <p:cNvPr id="5" name="TextBox 4"/>
+          <p:cNvSpPr txBox="1"/>
+          <p:nvPr/>
+        </p:nvSpPr>
+        <p:spPr>
+          <a:xfrm>
+            <a:off x="685800" y="594360"/>
+            <a:ext cx="10972800" cy="457200"/>
+          </a:xfrm>
+          <a:prstGeom prst="rect">
+            <a:avLst/>
+          </a:prstGeom>
+          <a:noFill/>
+        </p:spPr>
+        <p:txBody>
+          <a:bodyPr wrap="square" lIns="45720" rIns="45720" tIns="18288" bIns="18288">
+            <a:spAutoFit/>
+          </a:bodyPr>
+          <a:lstStyle/>
+          <a:p>
+            <a:pPr algn="l"/>
+            <a:r>
+              <a:rPr sz="2400" b="1">
+                <a:solidFill>
+                  <a:srgbClr val="E8ECF1"/>
+                </a:solidFill>
+                <a:latin typeface="Segoe UI"/>
+              </a:rPr>
+              <a:t>Karen + human-in-the-loop triage</a:t>
+            </a:r>
+          </a:p>
+        </p:txBody>
+      </p:sp>
+      <p:sp>
+        <p:nvSpPr>
+          <p:cNvPr id="6" name="TextBox 5"/>
+          <p:cNvSpPr txBox="1"/>
+          <p:nvPr/>
+        </p:nvSpPr>
+        <p:spPr>
+          <a:xfrm>
+            <a:off x="685800" y="960120"/>
+            <a:ext cx="10972800" cy="320040"/>
+          </a:xfrm>
+          <a:prstGeom prst="rect">
+            <a:avLst/>
+          </a:prstGeom>
+          <a:noFill/>
+        </p:spPr>
+        <p:txBody>
+          <a:bodyPr wrap="square" lIns="45720" rIns="45720" tIns="18288" bIns="18288">
+            <a:spAutoFit/>
+          </a:bodyPr>
+          <a:lstStyle/>
+          <a:p>
+            <a:pPr algn="l"/>
+            <a:r>
+              <a:rPr sz="1200" b="0">
+                <a:solidFill>
+                  <a:srgbClr val="9AA3AF"/>
+                </a:solidFill>
+                <a:latin typeface="Segoe UI"/>
+              </a:rPr>
+              <a:t>When the audit surfaces work outside scope, the human stays in control</a:t>
+            </a:r>
+          </a:p>
+        </p:txBody>
+      </p:sp>
+      <p:pic>
+        <p:nvPicPr>
+          <p:cNvPr id="7" name="Picture 6" descr="06-karen-triage.jpg"/>
+          <p:cNvPicPr>
+            <a:picLocks noChangeAspect="1"/>
+          </p:cNvPicPr>
+          <p:nvPr/>
+        </p:nvPicPr>
+        <p:blipFill>
+          <a:blip r:embed="rId2"/>
+          <a:stretch>
+            <a:fillRect/>
+          </a:stretch>
+        </p:blipFill>
+        <p:spPr>
+          <a:xfrm>
+            <a:off x="1884843" y="1325880"/>
+            <a:ext cx="8391832" cy="4343400"/>
+          </a:xfrm>
+          <a:prstGeom prst="rect">
+            <a:avLst/>
+          </a:prstGeom>
+          <a:ln w="9525">
+            <a:solidFill>
+              <a:srgbClr val="34A87E"/>
+            </a:solidFill>
+          </a:ln>
+        </p:spPr>
+      </p:pic>
+      <p:sp>
+        <p:nvSpPr>
+          <p:cNvPr id="8" name="Rounded Rectangle 7"/>
+          <p:cNvSpPr/>
+          <p:nvPr/>
+        </p:nvSpPr>
+        <p:spPr>
+          <a:xfrm>
+            <a:off x="457200" y="5806440"/>
+            <a:ext cx="11247120" cy="502920"/>
+          </a:xfrm>
+          <a:prstGeom prst="roundRect">
+            <a:avLst/>
+          </a:prstGeom>
+          <a:solidFill>
+            <a:srgbClr val="181F2A"/>
+          </a:solidFill>
+          <a:ln w="9525">
+            <a:solidFill>
+              <a:srgbClr val="34A87E"/>
+            </a:solidFill>
+          </a:ln>
+          <a:effectLst/>
+        </p:spPr>
+        <p:style>
+          <a:lnRef idx="1">
+            <a:schemeClr val="accent1"/>
+          </a:lnRef>
+          <a:fillRef idx="3">
+            <a:schemeClr val="accent1"/>
+          </a:fillRef>
+          <a:effectRef idx="2">
+            <a:schemeClr val="accent1"/>
+          </a:effectRef>
+          <a:fontRef idx="minor">
+            <a:schemeClr val="lt1"/>
+          </a:fontRef>
+        </p:style>
+        <p:txBody>
+          <a:bodyPr rtlCol="0" anchor="ctr"/>
+          <a:lstStyle/>
+          <a:p>
+            <a:pPr algn="ctr"/>
+          </a:p>
+        </p:txBody>
+      </p:sp>
+      <p:sp>
+        <p:nvSpPr>
+          <p:cNvPr id="9" name="TextBox 8"/>
+          <p:cNvSpPr txBox="1"/>
+          <p:nvPr/>
+        </p:nvSpPr>
+        <p:spPr>
+          <a:xfrm>
+            <a:off x="685800" y="5897880"/>
+            <a:ext cx="10789920" cy="365760"/>
+          </a:xfrm>
+          <a:prstGeom prst="rect">
+            <a:avLst/>
+          </a:prstGeom>
+          <a:noFill/>
+        </p:spPr>
+        <p:txBody>
+          <a:bodyPr wrap="square" lIns="45720" rIns="45720" tIns="18288" bIns="18288">
+            <a:spAutoFit/>
+          </a:bodyPr>
+          <a:lstStyle/>
+          <a:p>
+            <a:pPr algn="l"/>
+            <a:r>
+              <a:rPr sz="1300" b="0">
+                <a:solidFill>
+                  <a:srgbClr val="E8ECF1"/>
+                </a:solidFill>
+                <a:latin typeface="Segoe UI"/>
+              </a:rPr>
+              <a:t>160 / 182 tests pass. 22 failures = pre-existing test bugs. Karen names the failure mode and proceeds. Human picked Option C.</a:t>
+            </a:r>
+          </a:p>
+        </p:txBody>
+      </p:sp>
+      <p:sp>
+        <p:nvSpPr>
+          <p:cNvPr id="10" name="TextBox 9"/>
+          <p:cNvSpPr txBox="1"/>
+          <p:nvPr/>
+        </p:nvSpPr>
+        <p:spPr>
+          <a:xfrm>
+            <a:off x="457200" y="6400800"/>
+            <a:ext cx="5486400" cy="274320"/>
+          </a:xfrm>
+          <a:prstGeom prst="rect">
+            <a:avLst/>
+          </a:prstGeom>
+          <a:noFill/>
+        </p:spPr>
+        <p:txBody>
+          <a:bodyPr wrap="square" lIns="45720" rIns="45720" tIns="18288" bIns="18288">
+            <a:spAutoFit/>
+          </a:bodyPr>
+          <a:lstStyle/>
+          <a:p>
+            <a:pPr algn="l"/>
+            <a:r>
+              <a:rPr sz="1000" b="0">
+                <a:solidFill>
+                  <a:srgbClr val="9AA3AF"/>
+                </a:solidFill>
+                <a:latin typeface="Segoe UI"/>
+              </a:rPr>
+              <a:t>EFF-IT  —  A Claude Code harness</a:t>
+            </a:r>
+          </a:p>
+        </p:txBody>
+      </p:sp>
+      <p:sp>
+        <p:nvSpPr>
+          <p:cNvPr id="11" name="TextBox 10"/>
+          <p:cNvSpPr txBox="1"/>
+          <p:nvPr/>
+        </p:nvSpPr>
+        <p:spPr>
+          <a:xfrm>
+            <a:off x="10515600" y="6400800"/>
+            <a:ext cx="1645920" cy="274320"/>
+          </a:xfrm>
+          <a:prstGeom prst="rect">
+            <a:avLst/>
+          </a:prstGeom>
+          <a:noFill/>
+        </p:spPr>
+        <p:txBody>
+          <a:bodyPr wrap="square" lIns="45720" rIns="45720" tIns="18288" bIns="18288">
+            <a:spAutoFit/>
+          </a:bodyPr>
+          <a:lstStyle/>
+          <a:p>
+            <a:pPr algn="r"/>
+            <a:r>
+              <a:rPr sz="1000" b="0">
+                <a:solidFill>
+                  <a:srgbClr val="9AA3AF"/>
+                </a:solidFill>
+                <a:latin typeface="Segoe UI"/>
+              </a:rPr>
+              <a:t>21 / 23</a:t>
+            </a:r>
+          </a:p>
+        </p:txBody>
+      </p:sp>
+    </p:spTree>
+  </p:cSld>
+  <p:clrMapOvr>
+    <a:masterClrMapping/>
+  </p:clrMapOvr>
+</p:sld>
+</file>
+
+<file path=ppt/slides/slide22.xml><?xml version="1.0" encoding="utf-8"?>
+<p:sld xmlns:a="http://schemas.openxmlformats.org/drawingml/2006/main" xmlns:p="http://schemas.openxmlformats.org/presentationml/2006/main" xmlns:r="http://schemas.openxmlformats.org/officeDocument/2006/relationships">
+  <p:cSld>
+    <p:spTree>
+      <p:nvGrpSpPr>
+        <p:cNvPr id="1" name=""/>
+        <p:cNvGrpSpPr/>
+        <p:nvPr/>
+      </p:nvGrpSpPr>
+      <p:grpSpPr/>
+      <p:sp>
+        <p:nvSpPr>
+          <p:cNvPr id="2" name="Rectangle 1"/>
+          <p:cNvSpPr/>
+          <p:nvPr/>
+        </p:nvSpPr>
+        <p:spPr>
+          <a:xfrm>
+            <a:off x="0" y="0"/>
+            <a:ext cx="12191695" cy="6858000"/>
+          </a:xfrm>
+          <a:prstGeom prst="rect">
+            <a:avLst/>
+          </a:prstGeom>
+          <a:solidFill>
+            <a:srgbClr val="0F141A"/>
+          </a:solidFill>
+          <a:ln>
+            <a:noFill/>
+          </a:ln>
+          <a:effectLst/>
+        </p:spPr>
+        <p:style>
+          <a:lnRef idx="1">
+            <a:schemeClr val="accent1"/>
+          </a:lnRef>
+          <a:fillRef idx="3">
+            <a:schemeClr val="accent1"/>
+          </a:fillRef>
+          <a:effectRef idx="2">
+            <a:schemeClr val="accent1"/>
+          </a:effectRef>
+          <a:fontRef idx="minor">
+            <a:schemeClr val="lt1"/>
+          </a:fontRef>
+        </p:style>
+        <p:txBody>
+          <a:bodyPr rtlCol="0" anchor="ctr"/>
+          <a:lstStyle/>
+          <a:p>
+            <a:pPr algn="ctr"/>
+          </a:p>
+        </p:txBody>
+      </p:sp>
+      <p:sp>
+        <p:nvSpPr>
+          <p:cNvPr id="3" name="Rectangle 2"/>
+          <p:cNvSpPr/>
+          <p:nvPr/>
+        </p:nvSpPr>
+        <p:spPr>
+          <a:xfrm>
+            <a:off x="457200" y="411480"/>
+            <a:ext cx="73152" cy="502920"/>
+          </a:xfrm>
+          <a:prstGeom prst="rect">
+            <a:avLst/>
+          </a:prstGeom>
+          <a:solidFill>
+            <a:srgbClr val="6EE7B7"/>
+          </a:solidFill>
+          <a:ln>
+            <a:noFill/>
+          </a:ln>
+          <a:effectLst/>
+        </p:spPr>
+        <p:style>
+          <a:lnRef idx="1">
+            <a:schemeClr val="accent1"/>
+          </a:lnRef>
+          <a:fillRef idx="3">
+            <a:schemeClr val="accent1"/>
+          </a:fillRef>
+          <a:effectRef idx="2">
+            <a:schemeClr val="accent1"/>
+          </a:effectRef>
+          <a:fontRef idx="minor">
+            <a:schemeClr val="lt1"/>
+          </a:fontRef>
+        </p:style>
+        <p:txBody>
+          <a:bodyPr rtlCol="0" anchor="ctr"/>
+          <a:lstStyle/>
+          <a:p>
+            <a:pPr algn="ctr"/>
+          </a:p>
+        </p:txBody>
+      </p:sp>
+      <p:sp>
+        <p:nvSpPr>
+          <p:cNvPr id="4" name="TextBox 3"/>
+          <p:cNvSpPr txBox="1"/>
+          <p:nvPr/>
+        </p:nvSpPr>
+        <p:spPr>
+          <a:xfrm>
+            <a:off x="685800" y="292608"/>
+            <a:ext cx="1828800" cy="365760"/>
+          </a:xfrm>
+          <a:prstGeom prst="rect">
+            <a:avLst/>
+          </a:prstGeom>
+          <a:noFill/>
+        </p:spPr>
+        <p:txBody>
+          <a:bodyPr wrap="square" lIns="45720" rIns="45720" tIns="18288" bIns="18288">
+            <a:spAutoFit/>
+          </a:bodyPr>
+          <a:lstStyle/>
+          <a:p>
+            <a:pPr algn="l"/>
+            <a:r>
+              <a:rPr sz="1100" b="1">
+                <a:solidFill>
+                  <a:srgbClr val="6EE7B7"/>
+                </a:solidFill>
+                <a:latin typeface="Segoe UI"/>
+              </a:rPr>
+              <a:t>APPENDIX · 7 / 8</a:t>
+            </a:r>
+          </a:p>
+        </p:txBody>
+      </p:sp>
+      <p:sp>
+        <p:nvSpPr>
+          <p:cNvPr id="5" name="TextBox 4"/>
+          <p:cNvSpPr txBox="1"/>
+          <p:nvPr/>
+        </p:nvSpPr>
+        <p:spPr>
+          <a:xfrm>
+            <a:off x="685800" y="594360"/>
+            <a:ext cx="10972800" cy="457200"/>
+          </a:xfrm>
+          <a:prstGeom prst="rect">
+            <a:avLst/>
+          </a:prstGeom>
+          <a:noFill/>
+        </p:spPr>
+        <p:txBody>
+          <a:bodyPr wrap="square" lIns="45720" rIns="45720" tIns="18288" bIns="18288">
+            <a:spAutoFit/>
+          </a:bodyPr>
+          <a:lstStyle/>
+          <a:p>
+            <a:pPr algn="l"/>
+            <a:r>
+              <a:rPr sz="2400" b="1">
+                <a:solidFill>
+                  <a:srgbClr val="E8ECF1"/>
+                </a:solidFill>
+                <a:latin typeface="Segoe UI"/>
+              </a:rPr>
+              <a:t>The final scoreboard</a:t>
+            </a:r>
+          </a:p>
+        </p:txBody>
+      </p:sp>
+      <p:sp>
+        <p:nvSpPr>
+          <p:cNvPr id="6" name="TextBox 5"/>
+          <p:cNvSpPr txBox="1"/>
+          <p:nvPr/>
+        </p:nvSpPr>
+        <p:spPr>
+          <a:xfrm>
+            <a:off x="685800" y="960120"/>
+            <a:ext cx="10972800" cy="320040"/>
+          </a:xfrm>
+          <a:prstGeom prst="rect">
+            <a:avLst/>
+          </a:prstGeom>
+          <a:noFill/>
+        </p:spPr>
+        <p:txBody>
+          <a:bodyPr wrap="square" lIns="45720" rIns="45720" tIns="18288" bIns="18288">
+            <a:spAutoFit/>
+          </a:bodyPr>
+          <a:lstStyle/>
+          <a:p>
+            <a:pPr algn="l"/>
+            <a:r>
+              <a:rPr sz="1200" b="0">
+                <a:solidFill>
+                  <a:srgbClr val="9AA3AF"/>
+                </a:solidFill>
+                <a:latin typeface="Segoe UI"/>
+              </a:rPr>
+              <a:t>Every stage's result, one screen, baked in 30 m 13 s</a:t>
+            </a:r>
+          </a:p>
+        </p:txBody>
+      </p:sp>
+      <p:pic>
+        <p:nvPicPr>
+          <p:cNvPr id="7" name="Picture 6" descr="07-scoreboard.jpg"/>
+          <p:cNvPicPr>
+            <a:picLocks noChangeAspect="1"/>
+          </p:cNvPicPr>
+          <p:nvPr/>
+        </p:nvPicPr>
+        <p:blipFill>
+          <a:blip r:embed="rId2"/>
+          <a:stretch>
+            <a:fillRect/>
+          </a:stretch>
+        </p:blipFill>
+        <p:spPr>
+          <a:xfrm>
+            <a:off x="1940052" y="1325880"/>
+            <a:ext cx="8281416" cy="4343400"/>
+          </a:xfrm>
+          <a:prstGeom prst="rect">
+            <a:avLst/>
+          </a:prstGeom>
+          <a:ln w="9525">
+            <a:solidFill>
+              <a:srgbClr val="34A87E"/>
+            </a:solidFill>
+          </a:ln>
+        </p:spPr>
+      </p:pic>
+      <p:sp>
+        <p:nvSpPr>
+          <p:cNvPr id="8" name="Rounded Rectangle 7"/>
+          <p:cNvSpPr/>
+          <p:nvPr/>
+        </p:nvSpPr>
+        <p:spPr>
+          <a:xfrm>
+            <a:off x="457200" y="5806440"/>
+            <a:ext cx="11247120" cy="502920"/>
+          </a:xfrm>
+          <a:prstGeom prst="roundRect">
+            <a:avLst/>
+          </a:prstGeom>
+          <a:solidFill>
+            <a:srgbClr val="181F2A"/>
+          </a:solidFill>
+          <a:ln w="9525">
+            <a:solidFill>
+              <a:srgbClr val="34A87E"/>
+            </a:solidFill>
+          </a:ln>
+          <a:effectLst/>
+        </p:spPr>
+        <p:style>
+          <a:lnRef idx="1">
+            <a:schemeClr val="accent1"/>
+          </a:lnRef>
+          <a:fillRef idx="3">
+            <a:schemeClr val="accent1"/>
+          </a:fillRef>
+          <a:effectRef idx="2">
+            <a:schemeClr val="accent1"/>
+          </a:effectRef>
+          <a:fontRef idx="minor">
+            <a:schemeClr val="lt1"/>
+          </a:fontRef>
+        </p:style>
+        <p:txBody>
+          <a:bodyPr rtlCol="0" anchor="ctr"/>
+          <a:lstStyle/>
+          <a:p>
+            <a:pPr algn="ctr"/>
+          </a:p>
+        </p:txBody>
+      </p:sp>
+      <p:sp>
+        <p:nvSpPr>
+          <p:cNvPr id="9" name="TextBox 8"/>
+          <p:cNvSpPr txBox="1"/>
+          <p:nvPr/>
+        </p:nvSpPr>
+        <p:spPr>
+          <a:xfrm>
+            <a:off x="685800" y="5897880"/>
+            <a:ext cx="10789920" cy="365760"/>
+          </a:xfrm>
+          <a:prstGeom prst="rect">
+            <a:avLst/>
+          </a:prstGeom>
+          <a:noFill/>
+        </p:spPr>
+        <p:txBody>
+          <a:bodyPr wrap="square" lIns="45720" rIns="45720" tIns="18288" bIns="18288">
+            <a:spAutoFit/>
+          </a:bodyPr>
+          <a:lstStyle/>
+          <a:p>
+            <a:pPr algn="l"/>
+            <a:r>
+              <a:rPr sz="1300" b="0">
+                <a:solidFill>
+                  <a:srgbClr val="6EE7B7"/>
+                </a:solidFill>
+                <a:latin typeface="Segoe UI"/>
+              </a:rPr>
+              <a:t>TDD red phase · parallel + sequential coders · 22 pre-existing fails accepted · 2 medium security findings · 1 fixed, 1 documented · PR open.</a:t>
+            </a:r>
+          </a:p>
+        </p:txBody>
+      </p:sp>
+      <p:sp>
+        <p:nvSpPr>
+          <p:cNvPr id="10" name="TextBox 9"/>
+          <p:cNvSpPr txBox="1"/>
+          <p:nvPr/>
+        </p:nvSpPr>
+        <p:spPr>
+          <a:xfrm>
+            <a:off x="457200" y="6400800"/>
+            <a:ext cx="5486400" cy="274320"/>
+          </a:xfrm>
+          <a:prstGeom prst="rect">
+            <a:avLst/>
+          </a:prstGeom>
+          <a:noFill/>
+        </p:spPr>
+        <p:txBody>
+          <a:bodyPr wrap="square" lIns="45720" rIns="45720" tIns="18288" bIns="18288">
+            <a:spAutoFit/>
+          </a:bodyPr>
+          <a:lstStyle/>
+          <a:p>
+            <a:pPr algn="l"/>
+            <a:r>
+              <a:rPr sz="1000" b="0">
+                <a:solidFill>
+                  <a:srgbClr val="9AA3AF"/>
+                </a:solidFill>
+                <a:latin typeface="Segoe UI"/>
+              </a:rPr>
+              <a:t>EFF-IT  —  A Claude Code harness</a:t>
+            </a:r>
+          </a:p>
+        </p:txBody>
+      </p:sp>
+      <p:sp>
+        <p:nvSpPr>
+          <p:cNvPr id="11" name="TextBox 10"/>
+          <p:cNvSpPr txBox="1"/>
+          <p:nvPr/>
+        </p:nvSpPr>
+        <p:spPr>
+          <a:xfrm>
+            <a:off x="10515600" y="6400800"/>
+            <a:ext cx="1645920" cy="274320"/>
+          </a:xfrm>
+          <a:prstGeom prst="rect">
+            <a:avLst/>
+          </a:prstGeom>
+          <a:noFill/>
+        </p:spPr>
+        <p:txBody>
+          <a:bodyPr wrap="square" lIns="45720" rIns="45720" tIns="18288" bIns="18288">
+            <a:spAutoFit/>
+          </a:bodyPr>
+          <a:lstStyle/>
+          <a:p>
+            <a:pPr algn="r"/>
+            <a:r>
+              <a:rPr sz="1000" b="0">
+                <a:solidFill>
+                  <a:srgbClr val="9AA3AF"/>
+                </a:solidFill>
+                <a:latin typeface="Segoe UI"/>
+              </a:rPr>
+              <a:t>22 / 23</a:t>
+            </a:r>
+          </a:p>
+        </p:txBody>
+      </p:sp>
+    </p:spTree>
+  </p:cSld>
+  <p:clrMapOvr>
+    <a:masterClrMapping/>
+  </p:clrMapOvr>
+</p:sld>
+</file>
+
+<file path=ppt/slides/slide23.xml><?xml version="1.0" encoding="utf-8"?>
+<p:sld xmlns:a="http://schemas.openxmlformats.org/drawingml/2006/main" xmlns:p="http://schemas.openxmlformats.org/presentationml/2006/main" xmlns:r="http://schemas.openxmlformats.org/officeDocument/2006/relationships">
+  <p:cSld>
+    <p:spTree>
+      <p:nvGrpSpPr>
+        <p:cNvPr id="1" name=""/>
+        <p:cNvGrpSpPr/>
+        <p:nvPr/>
+      </p:nvGrpSpPr>
+      <p:grpSpPr/>
+      <p:sp>
+        <p:nvSpPr>
+          <p:cNvPr id="2" name="Rectangle 1"/>
+          <p:cNvSpPr/>
+          <p:nvPr/>
+        </p:nvSpPr>
+        <p:spPr>
+          <a:xfrm>
+            <a:off x="0" y="0"/>
+            <a:ext cx="12191695" cy="6858000"/>
+          </a:xfrm>
+          <a:prstGeom prst="rect">
+            <a:avLst/>
+          </a:prstGeom>
+          <a:solidFill>
+            <a:srgbClr val="0F141A"/>
+          </a:solidFill>
+          <a:ln>
+            <a:noFill/>
+          </a:ln>
+          <a:effectLst/>
+        </p:spPr>
+        <p:style>
+          <a:lnRef idx="1">
+            <a:schemeClr val="accent1"/>
+          </a:lnRef>
+          <a:fillRef idx="3">
+            <a:schemeClr val="accent1"/>
+          </a:fillRef>
+          <a:effectRef idx="2">
+            <a:schemeClr val="accent1"/>
+          </a:effectRef>
+          <a:fontRef idx="minor">
+            <a:schemeClr val="lt1"/>
+          </a:fontRef>
+        </p:style>
+        <p:txBody>
+          <a:bodyPr rtlCol="0" anchor="ctr"/>
+          <a:lstStyle/>
+          <a:p>
+            <a:pPr algn="ctr"/>
+          </a:p>
+        </p:txBody>
+      </p:sp>
+      <p:sp>
+        <p:nvSpPr>
+          <p:cNvPr id="3" name="Rectangle 2"/>
+          <p:cNvSpPr/>
+          <p:nvPr/>
+        </p:nvSpPr>
+        <p:spPr>
+          <a:xfrm>
+            <a:off x="457200" y="411480"/>
+            <a:ext cx="73152" cy="502920"/>
+          </a:xfrm>
+          <a:prstGeom prst="rect">
+            <a:avLst/>
+          </a:prstGeom>
+          <a:solidFill>
+            <a:srgbClr val="6EE7B7"/>
+          </a:solidFill>
+          <a:ln>
+            <a:noFill/>
+          </a:ln>
+          <a:effectLst/>
+        </p:spPr>
+        <p:style>
+          <a:lnRef idx="1">
+            <a:schemeClr val="accent1"/>
+          </a:lnRef>
+          <a:fillRef idx="3">
+            <a:schemeClr val="accent1"/>
+          </a:fillRef>
+          <a:effectRef idx="2">
+            <a:schemeClr val="accent1"/>
+          </a:effectRef>
+          <a:fontRef idx="minor">
+            <a:schemeClr val="lt1"/>
+          </a:fontRef>
+        </p:style>
+        <p:txBody>
+          <a:bodyPr rtlCol="0" anchor="ctr"/>
+          <a:lstStyle/>
+          <a:p>
+            <a:pPr algn="ctr"/>
+          </a:p>
+        </p:txBody>
+      </p:sp>
+      <p:sp>
+        <p:nvSpPr>
+          <p:cNvPr id="4" name="TextBox 3"/>
+          <p:cNvSpPr txBox="1"/>
+          <p:nvPr/>
+        </p:nvSpPr>
+        <p:spPr>
+          <a:xfrm>
+            <a:off x="685800" y="292608"/>
+            <a:ext cx="1828800" cy="365760"/>
+          </a:xfrm>
+          <a:prstGeom prst="rect">
+            <a:avLst/>
+          </a:prstGeom>
+          <a:noFill/>
+        </p:spPr>
+        <p:txBody>
+          <a:bodyPr wrap="square" lIns="45720" rIns="45720" tIns="18288" bIns="18288">
+            <a:spAutoFit/>
+          </a:bodyPr>
+          <a:lstStyle/>
+          <a:p>
+            <a:pPr algn="l"/>
+            <a:r>
+              <a:rPr sz="1100" b="1">
+                <a:solidFill>
+                  <a:srgbClr val="6EE7B7"/>
+                </a:solidFill>
+                <a:latin typeface="Segoe UI"/>
+              </a:rPr>
+              <a:t>APPENDIX · 8 / 8</a:t>
+            </a:r>
+          </a:p>
+        </p:txBody>
+      </p:sp>
+      <p:sp>
+        <p:nvSpPr>
+          <p:cNvPr id="5" name="TextBox 4"/>
+          <p:cNvSpPr txBox="1"/>
+          <p:nvPr/>
+        </p:nvSpPr>
+        <p:spPr>
+          <a:xfrm>
+            <a:off x="685800" y="594360"/>
+            <a:ext cx="10972800" cy="457200"/>
+          </a:xfrm>
+          <a:prstGeom prst="rect">
+            <a:avLst/>
+          </a:prstGeom>
+          <a:noFill/>
+        </p:spPr>
+        <p:txBody>
+          <a:bodyPr wrap="square" lIns="45720" rIns="45720" tIns="18288" bIns="18288">
+            <a:spAutoFit/>
+          </a:bodyPr>
+          <a:lstStyle/>
+          <a:p>
+            <a:pPr algn="l"/>
+            <a:r>
+              <a:rPr sz="2400" b="1">
+                <a:solidFill>
+                  <a:srgbClr val="E8ECF1"/>
+                </a:solidFill>
+                <a:latin typeface="Segoe UI"/>
+              </a:rPr>
+              <a:t>Receipts under the hood</a:t>
+            </a:r>
+          </a:p>
+        </p:txBody>
+      </p:sp>
+      <p:sp>
+        <p:nvSpPr>
+          <p:cNvPr id="6" name="TextBox 5"/>
+          <p:cNvSpPr txBox="1"/>
+          <p:nvPr/>
+        </p:nvSpPr>
+        <p:spPr>
+          <a:xfrm>
+            <a:off x="685800" y="960120"/>
+            <a:ext cx="10972800" cy="320040"/>
+          </a:xfrm>
+          <a:prstGeom prst="rect">
+            <a:avLst/>
+          </a:prstGeom>
+          <a:noFill/>
+        </p:spPr>
+        <p:txBody>
+          <a:bodyPr wrap="square" lIns="45720" rIns="45720" tIns="18288" bIns="18288">
+            <a:spAutoFit/>
+          </a:bodyPr>
+          <a:lstStyle/>
+          <a:p>
+            <a:pPr algn="l"/>
+            <a:r>
+              <a:rPr sz="1200" b="0">
+                <a:solidFill>
+                  <a:srgbClr val="9AA3AF"/>
+                </a:solidFill>
+                <a:latin typeface="Segoe UI"/>
+              </a:rPr>
+              <a:t>The JSONL audit trail from slide 8, in the wild</a:t>
+            </a:r>
+          </a:p>
+        </p:txBody>
+      </p:sp>
+      <p:pic>
+        <p:nvPicPr>
+          <p:cNvPr id="7" name="Picture 6" descr="08a-jsonl-1.jpg"/>
+          <p:cNvPicPr>
+            <a:picLocks noChangeAspect="1"/>
+          </p:cNvPicPr>
+          <p:nvPr/>
+        </p:nvPicPr>
+        <p:blipFill>
+          <a:blip r:embed="rId2"/>
+          <a:stretch>
+            <a:fillRect/>
+          </a:stretch>
+        </p:blipFill>
+        <p:spPr>
+          <a:xfrm>
+            <a:off x="457200" y="2907817"/>
+            <a:ext cx="5577840" cy="1179524"/>
+          </a:xfrm>
+          <a:prstGeom prst="rect">
+            <a:avLst/>
+          </a:prstGeom>
+          <a:ln w="9525">
+            <a:solidFill>
+              <a:srgbClr val="34A87E"/>
+            </a:solidFill>
+          </a:ln>
+        </p:spPr>
+      </p:pic>
+      <p:pic>
+        <p:nvPicPr>
+          <p:cNvPr id="8" name="Picture 7" descr="08b-jsonl-2.jpg"/>
+          <p:cNvPicPr>
+            <a:picLocks noChangeAspect="1"/>
+          </p:cNvPicPr>
+          <p:nvPr/>
+        </p:nvPicPr>
+        <p:blipFill>
+          <a:blip r:embed="rId3"/>
+          <a:stretch>
+            <a:fillRect/>
+          </a:stretch>
+        </p:blipFill>
+        <p:spPr>
+          <a:xfrm>
+            <a:off x="6450679" y="1325880"/>
+            <a:ext cx="5020880" cy="4343400"/>
+          </a:xfrm>
+          <a:prstGeom prst="rect">
+            <a:avLst/>
+          </a:prstGeom>
+          <a:ln w="9525">
+            <a:solidFill>
+              <a:srgbClr val="34A87E"/>
+            </a:solidFill>
+          </a:ln>
+        </p:spPr>
+      </p:pic>
+      <p:sp>
+        <p:nvSpPr>
+          <p:cNvPr id="9" name="Rounded Rectangle 8"/>
+          <p:cNvSpPr/>
+          <p:nvPr/>
+        </p:nvSpPr>
+        <p:spPr>
+          <a:xfrm>
+            <a:off x="457200" y="5806440"/>
+            <a:ext cx="11247120" cy="502920"/>
+          </a:xfrm>
+          <a:prstGeom prst="roundRect">
+            <a:avLst/>
+          </a:prstGeom>
+          <a:solidFill>
+            <a:srgbClr val="181F2A"/>
+          </a:solidFill>
+          <a:ln w="9525">
+            <a:solidFill>
+              <a:srgbClr val="34A87E"/>
+            </a:solidFill>
+          </a:ln>
+          <a:effectLst/>
+        </p:spPr>
+        <p:style>
+          <a:lnRef idx="1">
+            <a:schemeClr val="accent1"/>
+          </a:lnRef>
+          <a:fillRef idx="3">
+            <a:schemeClr val="accent1"/>
+          </a:fillRef>
+          <a:effectRef idx="2">
+            <a:schemeClr val="accent1"/>
+          </a:effectRef>
+          <a:fontRef idx="minor">
+            <a:schemeClr val="lt1"/>
+          </a:fontRef>
+        </p:style>
+        <p:txBody>
+          <a:bodyPr rtlCol="0" anchor="ctr"/>
+          <a:lstStyle/>
+          <a:p>
+            <a:pPr algn="ctr"/>
+          </a:p>
+        </p:txBody>
+      </p:sp>
+      <p:sp>
+        <p:nvSpPr>
+          <p:cNvPr id="10" name="TextBox 9"/>
+          <p:cNvSpPr txBox="1"/>
+          <p:nvPr/>
+        </p:nvSpPr>
+        <p:spPr>
+          <a:xfrm>
+            <a:off x="685800" y="5897880"/>
+            <a:ext cx="10789920" cy="365760"/>
+          </a:xfrm>
+          <a:prstGeom prst="rect">
+            <a:avLst/>
+          </a:prstGeom>
+          <a:noFill/>
+        </p:spPr>
+        <p:txBody>
+          <a:bodyPr wrap="square" lIns="45720" rIns="45720" tIns="18288" bIns="18288">
+            <a:spAutoFit/>
+          </a:bodyPr>
+          <a:lstStyle/>
+          <a:p>
+            <a:pPr algn="l"/>
+            <a:r>
+              <a:rPr sz="1300" b="0">
+                <a:solidFill>
+                  <a:srgbClr val="E8ECF1"/>
+                </a:solidFill>
+                <a:latin typeface="Segoe UI"/>
+              </a:rPr>
+              <a:t>log_tool_call.sh in action: every Read, Bash, Edit, Agent spawn, web fetch — append-only JSONL.</a:t>
+            </a:r>
+          </a:p>
+        </p:txBody>
+      </p:sp>
+      <p:sp>
+        <p:nvSpPr>
+          <p:cNvPr id="11" name="TextBox 10"/>
+          <p:cNvSpPr txBox="1"/>
+          <p:nvPr/>
+        </p:nvSpPr>
+        <p:spPr>
+          <a:xfrm>
+            <a:off x="457200" y="6400800"/>
+            <a:ext cx="5486400" cy="274320"/>
+          </a:xfrm>
+          <a:prstGeom prst="rect">
+            <a:avLst/>
+          </a:prstGeom>
+          <a:noFill/>
+        </p:spPr>
+        <p:txBody>
+          <a:bodyPr wrap="square" lIns="45720" rIns="45720" tIns="18288" bIns="18288">
+            <a:spAutoFit/>
+          </a:bodyPr>
+          <a:lstStyle/>
+          <a:p>
+            <a:pPr algn="l"/>
+            <a:r>
+              <a:rPr sz="1000" b="0">
+                <a:solidFill>
+                  <a:srgbClr val="9AA3AF"/>
+                </a:solidFill>
+                <a:latin typeface="Segoe UI"/>
+              </a:rPr>
+              <a:t>EFF-IT  —  A Claude Code harness</a:t>
+            </a:r>
+          </a:p>
+        </p:txBody>
+      </p:sp>
+      <p:sp>
+        <p:nvSpPr>
+          <p:cNvPr id="12" name="TextBox 11"/>
+          <p:cNvSpPr txBox="1"/>
+          <p:nvPr/>
+        </p:nvSpPr>
+        <p:spPr>
+          <a:xfrm>
+            <a:off x="10515600" y="6400800"/>
+            <a:ext cx="1645920" cy="274320"/>
+          </a:xfrm>
+          <a:prstGeom prst="rect">
+            <a:avLst/>
+          </a:prstGeom>
+          <a:noFill/>
+        </p:spPr>
+        <p:txBody>
+          <a:bodyPr wrap="square" lIns="45720" rIns="45720" tIns="18288" bIns="18288">
+            <a:spAutoFit/>
+          </a:bodyPr>
+          <a:lstStyle/>
+          <a:p>
+            <a:pPr algn="r"/>
+            <a:r>
+              <a:rPr sz="1000" b="0">
+                <a:solidFill>
+                  <a:srgbClr val="9AA3AF"/>
+                </a:solidFill>
+                <a:latin typeface="Segoe UI"/>
+              </a:rPr>
+              <a:t>23 / 23</a:t>
             </a:r>
           </a:p>
         </p:txBody>
@@ -10408,7 +15268,7 @@
                 </a:solidFill>
                 <a:latin typeface="Segoe UI"/>
               </a:rPr>
-              <a:t>3 / 14</a:t>
+              <a:t>3 / 23</a:t>
             </a:r>
           </a:p>
         </p:txBody>
@@ -11304,7 +16164,7 @@
                 </a:solidFill>
                 <a:latin typeface="Segoe UI"/>
               </a:rPr>
-              <a:t>4 / 14</a:t>
+              <a:t>4 / 23</a:t>
             </a:r>
           </a:p>
         </p:txBody>
@@ -12388,7 +17248,7 @@
                 </a:solidFill>
                 <a:latin typeface="Segoe UI"/>
               </a:rPr>
-              <a:t>5 / 14</a:t>
+              <a:t>5 / 23</a:t>
             </a:r>
           </a:p>
         </p:txBody>
@@ -14054,7 +18914,7 @@
                 </a:solidFill>
                 <a:latin typeface="Segoe UI"/>
               </a:rPr>
-              <a:t>6 / 14</a:t>
+              <a:t>6 / 23</a:t>
             </a:r>
           </a:p>
         </p:txBody>
@@ -14996,7 +19856,7 @@
                 </a:solidFill>
                 <a:latin typeface="Segoe UI"/>
               </a:rPr>
-              <a:t>7 / 14</a:t>
+              <a:t>7 / 23</a:t>
             </a:r>
           </a:p>
         </p:txBody>
@@ -15744,7 +20604,7 @@
                 </a:solidFill>
                 <a:latin typeface="Segoe UI"/>
               </a:rPr>
-              <a:t>8 / 14</a:t>
+              <a:t>8 / 23</a:t>
             </a:r>
           </a:p>
         </p:txBody>
@@ -16572,7 +21432,7 @@
                 </a:solidFill>
                 <a:latin typeface="Segoe UI"/>
               </a:rPr>
-              <a:t>9 / 14</a:t>
+              <a:t>9 / 23</a:t>
             </a:r>
           </a:p>
         </p:txBody>

--- a/docs/EFF-IT.pptx
+++ b/docs/EFF-IT.pptx
@@ -4,32 +4,35 @@
   <p:sldMasterIdLst>
     <p:sldMasterId id="2147483648" r:id="rId1"/>
   </p:sldMasterIdLst>
+  <p:notesMasterIdLst>
+    <p:notesMasterId r:id="rId25"/>
+  </p:notesMasterIdLst>
   <p:sldIdLst>
-    <p:sldId id="256" r:id="rId7"/>
-    <p:sldId id="257" r:id="rId9"/>
-    <p:sldId id="258" r:id="rId10"/>
-    <p:sldId id="259" r:id="rId11"/>
-    <p:sldId id="260" r:id="rId12"/>
-    <p:sldId id="261" r:id="rId13"/>
-    <p:sldId id="262" r:id="rId14"/>
-    <p:sldId id="263" r:id="rId15"/>
-    <p:sldId id="264" r:id="rId16"/>
-    <p:sldId id="265" r:id="rId17"/>
-    <p:sldId id="266" r:id="rId18"/>
-    <p:sldId id="267" r:id="rId19"/>
-    <p:sldId id="268" r:id="rId20"/>
-    <p:sldId id="269" r:id="rId21"/>
-    <p:sldId id="270" r:id="rId22"/>
-    <p:sldId id="271" r:id="rId23"/>
-    <p:sldId id="272" r:id="rId24"/>
-    <p:sldId id="273" r:id="rId25"/>
-    <p:sldId id="274" r:id="rId26"/>
-    <p:sldId id="275" r:id="rId27"/>
-    <p:sldId id="276" r:id="rId28"/>
-    <p:sldId id="277" r:id="rId29"/>
-    <p:sldId id="278" r:id="rId30"/>
+    <p:sldId id="256" r:id="rId2"/>
+    <p:sldId id="257" r:id="rId3"/>
+    <p:sldId id="258" r:id="rId4"/>
+    <p:sldId id="259" r:id="rId5"/>
+    <p:sldId id="260" r:id="rId6"/>
+    <p:sldId id="261" r:id="rId7"/>
+    <p:sldId id="262" r:id="rId8"/>
+    <p:sldId id="263" r:id="rId9"/>
+    <p:sldId id="264" r:id="rId10"/>
+    <p:sldId id="265" r:id="rId11"/>
+    <p:sldId id="266" r:id="rId12"/>
+    <p:sldId id="267" r:id="rId13"/>
+    <p:sldId id="268" r:id="rId14"/>
+    <p:sldId id="269" r:id="rId15"/>
+    <p:sldId id="270" r:id="rId16"/>
+    <p:sldId id="271" r:id="rId17"/>
+    <p:sldId id="272" r:id="rId18"/>
+    <p:sldId id="273" r:id="rId19"/>
+    <p:sldId id="274" r:id="rId20"/>
+    <p:sldId id="275" r:id="rId21"/>
+    <p:sldId id="276" r:id="rId22"/>
+    <p:sldId id="277" r:id="rId23"/>
+    <p:sldId id="278" r:id="rId24"/>
   </p:sldIdLst>
-  <p:sldSz cx="12191695" cy="6858000" type="screen4x3"/>
+  <p:sldSz cx="12192000" cy="6858000"/>
   <p:notesSz cx="6858000" cy="9144000"/>
   <p:defaultTextStyle>
     <a:defPPr>
@@ -126,11 +129,27 @@
       </a:defRPr>
     </a:lvl9pPr>
   </p:defaultTextStyle>
+  <p:extLst>
+    <p:ext uri="{EFAFB233-063F-42B5-8137-9DF3F51BA10A}">
+      <p15:sldGuideLst xmlns:p15="http://schemas.microsoft.com/office/powerpoint/2012/main">
+        <p15:guide id="1" orient="horz" pos="2160">
+          <p15:clr>
+            <a:srgbClr val="A4A3A4"/>
+          </p15:clr>
+        </p15:guide>
+        <p15:guide id="2" pos="2880">
+          <p15:clr>
+            <a:srgbClr val="A4A3A4"/>
+          </p15:clr>
+        </p15:guide>
+      </p15:sldGuideLst>
+    </p:ext>
+  </p:extLst>
 </p:presentation>
 </file>
 
 <file path=ppt/notesMasters/notesMaster1.xml><?xml version="1.0" encoding="utf-8"?>
-<p:notesMaster xmlns:a="http://schemas.openxmlformats.org/drawingml/2006/main" xmlns:p="http://schemas.openxmlformats.org/presentationml/2006/main" xmlns:r="http://schemas.openxmlformats.org/officeDocument/2006/relationships">
+<p:notesMaster xmlns:a="http://schemas.openxmlformats.org/drawingml/2006/main" xmlns:r="http://schemas.openxmlformats.org/officeDocument/2006/relationships" xmlns:p="http://schemas.openxmlformats.org/presentationml/2006/main">
   <p:cSld>
     <p:bg>
       <p:bgRef idx="1001">
@@ -151,241 +170,16 @@
           <a:chExt cx="0" cy="0"/>
         </a:xfrm>
       </p:grpSpPr>
-      <p:sp>
-        <p:nvSpPr>
-          <p:cNvPr id="2" name="Header Placeholder 1"/>
-          <p:cNvSpPr>
-            <a:spLocks noGrp="1"/>
-          </p:cNvSpPr>
-          <p:nvPr>
-            <p:ph type="hdr" sz="quarter"/>
-          </p:nvPr>
-        </p:nvSpPr>
-        <p:spPr>
-          <a:xfrm>
-            <a:off x="0" y="0"/>
-            <a:ext cx="2971800" cy="457200"/>
-          </a:xfrm>
-          <a:prstGeom prst="rect">
-            <a:avLst/>
-          </a:prstGeom>
-        </p:spPr>
-        <p:txBody>
-          <a:bodyPr vert="horz" lIns="91440" tIns="45720" rIns="91440" bIns="45720" rtlCol="0"/>
-          <a:lstStyle>
-            <a:lvl1pPr algn="l">
-              <a:defRPr sz="1200"/>
-            </a:lvl1pPr>
-          </a:lstStyle>
-          <a:p>
-            <a:endParaRPr lang="en-US"/>
-          </a:p>
-        </p:txBody>
-      </p:sp>
-      <p:sp>
-        <p:nvSpPr>
-          <p:cNvPr id="3" name="Date Placeholder 2"/>
-          <p:cNvSpPr>
-            <a:spLocks noGrp="1"/>
-          </p:cNvSpPr>
-          <p:nvPr>
-            <p:ph type="dt" idx="1"/>
-          </p:nvPr>
-        </p:nvSpPr>
-        <p:spPr>
-          <a:xfrm>
-            <a:off x="3884613" y="0"/>
-            <a:ext cx="2971800" cy="457200"/>
-          </a:xfrm>
-          <a:prstGeom prst="rect">
-            <a:avLst/>
-          </a:prstGeom>
-        </p:spPr>
-        <p:txBody>
-          <a:bodyPr vert="horz" lIns="91440" tIns="45720" rIns="91440" bIns="45720" rtlCol="0"/>
-          <a:lstStyle>
-            <a:lvl1pPr algn="r">
-              <a:defRPr sz="1200"/>
-            </a:lvl1pPr>
-          </a:lstStyle>
-          <a:p>
-            <a:fld id="{0F89C1C7-3DCD-1040-A9CF-14679D8B5DDD}" type="datetimeFigureOut">
-              <a:rPr lang="en-US" smtClean="0"/>
-              <a:t>10/17/16</a:t>
-            </a:fld>
-            <a:endParaRPr lang="en-US"/>
-          </a:p>
-        </p:txBody>
-      </p:sp>
-      <p:sp>
-        <p:nvSpPr>
-          <p:cNvPr id="4" name="Slide Image Placeholder 3"/>
-          <p:cNvSpPr>
-            <a:spLocks noGrp="1" noRot="1" noChangeAspect="1"/>
-          </p:cNvSpPr>
-          <p:nvPr>
-            <p:ph type="sldImg" idx="2"/>
-          </p:nvPr>
-        </p:nvSpPr>
-        <p:spPr>
-          <a:xfrm>
-            <a:off x="1143000" y="685800"/>
-            <a:ext cx="4572000" cy="3429000"/>
-          </a:xfrm>
-          <a:prstGeom prst="rect">
-            <a:avLst/>
-          </a:prstGeom>
-          <a:noFill/>
-          <a:ln w="12700">
-            <a:solidFill>
-              <a:prstClr val="black"/>
-            </a:solidFill>
-          </a:ln>
-        </p:spPr>
-        <p:txBody>
-          <a:bodyPr vert="horz" lIns="91440" tIns="45720" rIns="91440" bIns="45720" rtlCol="0" anchor="ctr"/>
-          <a:lstStyle/>
-          <a:p>
-            <a:endParaRPr lang="en-US"/>
-          </a:p>
-        </p:txBody>
-      </p:sp>
-      <p:sp>
-        <p:nvSpPr>
-          <p:cNvPr id="5" name="Notes Placeholder 4"/>
-          <p:cNvSpPr>
-            <a:spLocks noGrp="1"/>
-          </p:cNvSpPr>
-          <p:nvPr>
-            <p:ph type="body" sz="quarter" idx="3"/>
-          </p:nvPr>
-        </p:nvSpPr>
-        <p:spPr>
-          <a:xfrm>
-            <a:off x="685800" y="4343400"/>
-            <a:ext cx="5486400" cy="4114800"/>
-          </a:xfrm>
-          <a:prstGeom prst="rect">
-            <a:avLst/>
-          </a:prstGeom>
-        </p:spPr>
-        <p:txBody>
-          <a:bodyPr vert="horz" lIns="91440" tIns="45720" rIns="91440" bIns="45720" rtlCol="0"/>
-          <a:lstStyle/>
-          <a:p>
-            <a:pPr lvl="0"/>
-            <a:r>
-              <a:rPr lang="en-US" smtClean="0"/>
-              <a:t>Click to edit Master text styles</a:t>
-            </a:r>
-          </a:p>
-          <a:p>
-            <a:pPr lvl="1"/>
-            <a:r>
-              <a:rPr lang="en-US" smtClean="0"/>
-              <a:t>Second level</a:t>
-            </a:r>
-          </a:p>
-          <a:p>
-            <a:pPr lvl="2"/>
-            <a:r>
-              <a:rPr lang="en-US" smtClean="0"/>
-              <a:t>Third level</a:t>
-            </a:r>
-          </a:p>
-          <a:p>
-            <a:pPr lvl="3"/>
-            <a:r>
-              <a:rPr lang="en-US" smtClean="0"/>
-              <a:t>Fourth level</a:t>
-            </a:r>
-          </a:p>
-          <a:p>
-            <a:pPr lvl="4"/>
-            <a:r>
-              <a:rPr lang="en-US" smtClean="0"/>
-              <a:t>Fifth level</a:t>
-            </a:r>
-            <a:endParaRPr lang="en-US"/>
-          </a:p>
-        </p:txBody>
-      </p:sp>
-      <p:sp>
-        <p:nvSpPr>
-          <p:cNvPr id="6" name="Footer Placeholder 5"/>
-          <p:cNvSpPr>
-            <a:spLocks noGrp="1"/>
-          </p:cNvSpPr>
-          <p:nvPr>
-            <p:ph type="ftr" sz="quarter" idx="4"/>
-          </p:nvPr>
-        </p:nvSpPr>
-        <p:spPr>
-          <a:xfrm>
-            <a:off x="0" y="8685213"/>
-            <a:ext cx="2971800" cy="457200"/>
-          </a:xfrm>
-          <a:prstGeom prst="rect">
-            <a:avLst/>
-          </a:prstGeom>
-        </p:spPr>
-        <p:txBody>
-          <a:bodyPr vert="horz" lIns="91440" tIns="45720" rIns="91440" bIns="45720" rtlCol="0" anchor="b"/>
-          <a:lstStyle>
-            <a:lvl1pPr algn="l">
-              <a:defRPr sz="1200"/>
-            </a:lvl1pPr>
-          </a:lstStyle>
-          <a:p>
-            <a:endParaRPr lang="en-US"/>
-          </a:p>
-        </p:txBody>
-      </p:sp>
-      <p:sp>
-        <p:nvSpPr>
-          <p:cNvPr id="7" name="Slide Number Placeholder 6"/>
-          <p:cNvSpPr>
-            <a:spLocks noGrp="1"/>
-          </p:cNvSpPr>
-          <p:nvPr>
-            <p:ph type="sldNum" sz="quarter" idx="5"/>
-          </p:nvPr>
-        </p:nvSpPr>
-        <p:spPr>
-          <a:xfrm>
-            <a:off x="3884613" y="8685213"/>
-            <a:ext cx="2971800" cy="457200"/>
-          </a:xfrm>
-          <a:prstGeom prst="rect">
-            <a:avLst/>
-          </a:prstGeom>
-        </p:spPr>
-        <p:txBody>
-          <a:bodyPr vert="horz" lIns="91440" tIns="45720" rIns="91440" bIns="45720" rtlCol="0" anchor="b"/>
-          <a:lstStyle>
-            <a:lvl1pPr algn="r">
-              <a:defRPr sz="1200"/>
-            </a:lvl1pPr>
-          </a:lstStyle>
-          <a:p>
-            <a:fld id="{BB5E49A5-4136-284D-997B-48E1D791AD67}" type="slidenum">
-              <a:rPr lang="en-US" smtClean="0"/>
-              <a:t>‹#›</a:t>
-            </a:fld>
-            <a:endParaRPr lang="en-US"/>
-          </a:p>
-        </p:txBody>
-      </p:sp>
     </p:spTree>
     <p:extLst>
       <p:ext uri="{BB962C8B-B14F-4D97-AF65-F5344CB8AC3E}">
-        <p14:creationId xmlns:p14="http://schemas.microsoft.com/office/powerpoint/2010/main" val="2623252185"/>
+        <p14:creationId xmlns:p14="http://schemas.microsoft.com/office/powerpoint/2010/main" val="2036674449"/>
       </p:ext>
     </p:extLst>
   </p:cSld>
   <p:clrMap bg1="lt1" tx1="dk1" bg2="lt2" tx2="dk2" accent1="accent1" accent2="accent2" accent3="accent3" accent4="accent4" accent5="accent5" accent6="accent6" hlink="hlink" folHlink="folHlink"/>
   <p:notesStyle>
-    <a:lvl1pPr marL="0" algn="l" defTabSz="457200" rtl="0" eaLnBrk="1" latinLnBrk="0" hangingPunct="1">
+    <a:lvl1pPr marL="0" algn="l" defTabSz="914400" rtl="0" eaLnBrk="1" latinLnBrk="0" hangingPunct="1">
       <a:defRPr sz="1200" kern="1200">
         <a:solidFill>
           <a:schemeClr val="tx1"/>
@@ -395,7 +189,7 @@
         <a:cs typeface="+mn-cs"/>
       </a:defRPr>
     </a:lvl1pPr>
-    <a:lvl2pPr marL="457200" algn="l" defTabSz="457200" rtl="0" eaLnBrk="1" latinLnBrk="0" hangingPunct="1">
+    <a:lvl2pPr marL="457200" algn="l" defTabSz="914400" rtl="0" eaLnBrk="1" latinLnBrk="0" hangingPunct="1">
       <a:defRPr sz="1200" kern="1200">
         <a:solidFill>
           <a:schemeClr val="tx1"/>
@@ -405,7 +199,7 @@
         <a:cs typeface="+mn-cs"/>
       </a:defRPr>
     </a:lvl2pPr>
-    <a:lvl3pPr marL="914400" algn="l" defTabSz="457200" rtl="0" eaLnBrk="1" latinLnBrk="0" hangingPunct="1">
+    <a:lvl3pPr marL="914400" algn="l" defTabSz="914400" rtl="0" eaLnBrk="1" latinLnBrk="0" hangingPunct="1">
       <a:defRPr sz="1200" kern="1200">
         <a:solidFill>
           <a:schemeClr val="tx1"/>
@@ -415,7 +209,7 @@
         <a:cs typeface="+mn-cs"/>
       </a:defRPr>
     </a:lvl3pPr>
-    <a:lvl4pPr marL="1371600" algn="l" defTabSz="457200" rtl="0" eaLnBrk="1" latinLnBrk="0" hangingPunct="1">
+    <a:lvl4pPr marL="1371600" algn="l" defTabSz="914400" rtl="0" eaLnBrk="1" latinLnBrk="0" hangingPunct="1">
       <a:defRPr sz="1200" kern="1200">
         <a:solidFill>
           <a:schemeClr val="tx1"/>
@@ -425,7 +219,7 @@
         <a:cs typeface="+mn-cs"/>
       </a:defRPr>
     </a:lvl4pPr>
-    <a:lvl5pPr marL="1828800" algn="l" defTabSz="457200" rtl="0" eaLnBrk="1" latinLnBrk="0" hangingPunct="1">
+    <a:lvl5pPr marL="1828800" algn="l" defTabSz="914400" rtl="0" eaLnBrk="1" latinLnBrk="0" hangingPunct="1">
       <a:defRPr sz="1200" kern="1200">
         <a:solidFill>
           <a:schemeClr val="tx1"/>
@@ -435,7 +229,7 @@
         <a:cs typeface="+mn-cs"/>
       </a:defRPr>
     </a:lvl5pPr>
-    <a:lvl6pPr marL="2286000" algn="l" defTabSz="457200" rtl="0" eaLnBrk="1" latinLnBrk="0" hangingPunct="1">
+    <a:lvl6pPr marL="2286000" algn="l" defTabSz="914400" rtl="0" eaLnBrk="1" latinLnBrk="0" hangingPunct="1">
       <a:defRPr sz="1200" kern="1200">
         <a:solidFill>
           <a:schemeClr val="tx1"/>
@@ -445,7 +239,7 @@
         <a:cs typeface="+mn-cs"/>
       </a:defRPr>
     </a:lvl6pPr>
-    <a:lvl7pPr marL="2743200" algn="l" defTabSz="457200" rtl="0" eaLnBrk="1" latinLnBrk="0" hangingPunct="1">
+    <a:lvl7pPr marL="2743200" algn="l" defTabSz="914400" rtl="0" eaLnBrk="1" latinLnBrk="0" hangingPunct="1">
       <a:defRPr sz="1200" kern="1200">
         <a:solidFill>
           <a:schemeClr val="tx1"/>
@@ -455,7 +249,7 @@
         <a:cs typeface="+mn-cs"/>
       </a:defRPr>
     </a:lvl7pPr>
-    <a:lvl8pPr marL="3200400" algn="l" defTabSz="457200" rtl="0" eaLnBrk="1" latinLnBrk="0" hangingPunct="1">
+    <a:lvl8pPr marL="3200400" algn="l" defTabSz="914400" rtl="0" eaLnBrk="1" latinLnBrk="0" hangingPunct="1">
       <a:defRPr sz="1200" kern="1200">
         <a:solidFill>
           <a:schemeClr val="tx1"/>
@@ -465,7 +259,7 @@
         <a:cs typeface="+mn-cs"/>
       </a:defRPr>
     </a:lvl8pPr>
-    <a:lvl9pPr marL="3657600" algn="l" defTabSz="457200" rtl="0" eaLnBrk="1" latinLnBrk="0" hangingPunct="1">
+    <a:lvl9pPr marL="3657600" algn="l" defTabSz="914400" rtl="0" eaLnBrk="1" latinLnBrk="0" hangingPunct="1">
       <a:defRPr sz="1200" kern="1200">
         <a:solidFill>
           <a:schemeClr val="tx1"/>
@@ -480,7 +274,7 @@
 </file>
 
 <file path=ppt/notesSlides/notesSlide1.xml><?xml version="1.0" encoding="utf-8"?>
-<p:notes xmlns:a="http://schemas.openxmlformats.org/drawingml/2006/main" xmlns:p="http://schemas.openxmlformats.org/presentationml/2006/main" xmlns:r="http://schemas.openxmlformats.org/officeDocument/2006/relationships">
+<p:notes xmlns:a="http://schemas.openxmlformats.org/drawingml/2006/main" xmlns:r="http://schemas.openxmlformats.org/officeDocument/2006/relationships" xmlns:p="http://schemas.openxmlformats.org/presentationml/2006/main">
   <p:cSld>
     <p:spTree>
       <p:nvGrpSpPr>
@@ -500,7 +294,7 @@
         <p:nvSpPr>
           <p:cNvPr id="2" name="Slide Image Placeholder 1"/>
           <p:cNvSpPr>
-            <a:spLocks noGrp="1"/>
+            <a:spLocks noGrp="1" noRot="1" noChangeAspect="1"/>
           </p:cNvSpPr>
           <p:nvPr>
             <p:ph type="sldImg" idx="2"/>
@@ -515,7 +309,7 @@
             <a:spLocks noGrp="1"/>
           </p:cNvSpPr>
           <p:nvPr>
-            <p:ph type="body" idx="3" sz="quarter"/>
+            <p:ph type="body" sz="quarter" idx="3"/>
           </p:nvPr>
         </p:nvSpPr>
         <p:spPr/>
@@ -527,7 +321,9 @@
               <a:t>Open by saying the name out loud, then the tagline. Pause for the laugh.</a:t>
             </a:r>
           </a:p>
-          <a:p/>
+          <a:p>
+            <a:endParaRPr/>
+          </a:p>
           <a:p>
             <a:r>
               <a:t>Set expectations in two sentences:</a:t>
@@ -538,7 +334,9 @@
               <a:t>"This is a presentation about a scaffold I built on top of Claude Code. It takes the 'vibe coding' experience — describe what you want, let the AI build it — and wraps it with the structure you'd normally have to remember to add yourself: specs, audits, security review, checkpoints, the works."</a:t>
             </a:r>
           </a:p>
-          <a:p/>
+          <a:p>
+            <a:endParaRPr/>
+          </a:p>
           <a:p>
             <a:r>
               <a:t>Don't dive into architecture yet. The next slide explains why this exists at all. Resist the urge to list features here — you have ten slides for that.</a:t>
@@ -553,7 +351,7 @@
             <a:spLocks noGrp="1"/>
           </p:cNvSpPr>
           <p:nvPr>
-            <p:ph type="sldNum" idx="5" sz="quarter"/>
+            <p:ph type="sldNum" sz="quarter" idx="5"/>
           </p:nvPr>
         </p:nvSpPr>
         <p:spPr/>
@@ -567,7 +365,7 @@
 </file>
 
 <file path=ppt/notesSlides/notesSlide10.xml><?xml version="1.0" encoding="utf-8"?>
-<p:notes xmlns:a="http://schemas.openxmlformats.org/drawingml/2006/main" xmlns:p="http://schemas.openxmlformats.org/presentationml/2006/main" xmlns:r="http://schemas.openxmlformats.org/officeDocument/2006/relationships">
+<p:notes xmlns:a="http://schemas.openxmlformats.org/drawingml/2006/main" xmlns:r="http://schemas.openxmlformats.org/officeDocument/2006/relationships" xmlns:p="http://schemas.openxmlformats.org/presentationml/2006/main">
   <p:cSld>
     <p:spTree>
       <p:nvGrpSpPr>
@@ -587,7 +385,7 @@
         <p:nvSpPr>
           <p:cNvPr id="2" name="Slide Image Placeholder 1"/>
           <p:cNvSpPr>
-            <a:spLocks noGrp="1"/>
+            <a:spLocks noGrp="1" noRot="1" noChangeAspect="1"/>
           </p:cNvSpPr>
           <p:nvPr>
             <p:ph type="sldImg" idx="2"/>
@@ -602,7 +400,7 @@
             <a:spLocks noGrp="1"/>
           </p:cNvSpPr>
           <p:nvPr>
-            <p:ph type="body" idx="3" sz="quarter"/>
+            <p:ph type="body" sz="quarter" idx="3"/>
           </p:nvPr>
         </p:nvSpPr>
         <p:spPr/>
@@ -614,31 +412,41 @@
               <a:t>This slide answers: 'Where does all this stuff live?'</a:t>
             </a:r>
           </a:p>
-          <a:p/>
+          <a:p>
+            <a:endParaRPr/>
+          </a:p>
           <a:p>
             <a:r>
               <a:t>The point to land: everything for one run is in one folder. Not scattered across docs/, reports/, .claude/state/, and the git log. One folder.</a:t>
             </a:r>
           </a:p>
-          <a:p/>
+          <a:p>
+            <a:endParaRPr/>
+          </a:p>
           <a:p>
             <a:r>
               <a:t>That single-root design is WHY cleanup, debugging, and resume are all trivial one-liners. The bottom row of the slide is the payoff.</a:t>
             </a:r>
           </a:p>
-          <a:p/>
+          <a:p>
+            <a:endParaRPr/>
+          </a:p>
           <a:p>
             <a:r>
               <a:t>If you have time, point at PROGRESS_TRACKER.md specifically: in team mode that file auto-commits on every write, so a reviewer can pull the branch and watch the agent's progress as if they were pair programming.</a:t>
             </a:r>
           </a:p>
-          <a:p/>
+          <a:p>
+            <a:endParaRPr/>
+          </a:p>
           <a:p>
             <a:r>
               <a:t>Optional: mention the two session modes (local-only vs collaborative) briefly. Local-only adds three lines to .git/info/exclude. Collaborative leaves them out and lets the auto-commit hook do its thing.</a:t>
             </a:r>
           </a:p>
-          <a:p/>
+          <a:p>
+            <a:endParaRPr/>
+          </a:p>
           <a:p>
             <a:r>
               <a:t>Transition: 'OK — how do you actually use this on your own repo?'</a:t>
@@ -653,7 +461,7 @@
             <a:spLocks noGrp="1"/>
           </p:cNvSpPr>
           <p:nvPr>
-            <p:ph type="sldNum" idx="5" sz="quarter"/>
+            <p:ph type="sldNum" sz="quarter" idx="5"/>
           </p:nvPr>
         </p:nvSpPr>
         <p:spPr/>
@@ -667,7 +475,7 @@
 </file>
 
 <file path=ppt/notesSlides/notesSlide11.xml><?xml version="1.0" encoding="utf-8"?>
-<p:notes xmlns:a="http://schemas.openxmlformats.org/drawingml/2006/main" xmlns:p="http://schemas.openxmlformats.org/presentationml/2006/main" xmlns:r="http://schemas.openxmlformats.org/officeDocument/2006/relationships">
+<p:notes xmlns:a="http://schemas.openxmlformats.org/drawingml/2006/main" xmlns:r="http://schemas.openxmlformats.org/officeDocument/2006/relationships" xmlns:p="http://schemas.openxmlformats.org/presentationml/2006/main">
   <p:cSld>
     <p:spTree>
       <p:nvGrpSpPr>
@@ -687,7 +495,7 @@
         <p:nvSpPr>
           <p:cNvPr id="2" name="Slide Image Placeholder 1"/>
           <p:cNvSpPr>
-            <a:spLocks noGrp="1"/>
+            <a:spLocks noGrp="1" noRot="1" noChangeAspect="1"/>
           </p:cNvSpPr>
           <p:nvPr>
             <p:ph type="sldImg" idx="2"/>
@@ -702,7 +510,7 @@
             <a:spLocks noGrp="1"/>
           </p:cNvSpPr>
           <p:nvPr>
-            <p:ph type="body" idx="3" sz="quarter"/>
+            <p:ph type="body" sz="quarter" idx="3"/>
           </p:nvPr>
         </p:nvSpPr>
         <p:spPr/>
@@ -714,19 +522,25 @@
               <a:t>Make this feel small. The barrier to adoption is the message.</a:t>
             </a:r>
           </a:p>
-          <a:p/>
+          <a:p>
+            <a:endParaRPr/>
+          </a:p>
           <a:p>
             <a:r>
               <a:t>'Five steps. Two of them are optional. The other three are copy files, fill in a markdown file, and run a command. If you've used Claude Code at all, you can adopt this in fifteen minutes.'</a:t>
             </a:r>
           </a:p>
-          <a:p/>
+          <a:p>
+            <a:endParaRPr/>
+          </a:p>
           <a:p>
             <a:r>
               <a:t>Specifically call out the no-runtime line. People hear 'harness' and brace for a Docker image, a server, a config file with seventeen YAML keys. None of that. It's markdown and bash.</a:t>
             </a:r>
           </a:p>
-          <a:p/>
+          <a:p>
+            <a:endParaRPr/>
+          </a:p>
           <a:p>
             <a:r>
               <a:t>If anyone asks about CI: the .github/ folder ships with workflows for the standard hooks (secrets scan, test immutability) running on PRs too, so the guarantees extend beyond the local agent loop. Mention this only if asked — it's not the main beat.</a:t>
@@ -741,7 +555,7 @@
             <a:spLocks noGrp="1"/>
           </p:cNvSpPr>
           <p:nvPr>
-            <p:ph type="sldNum" idx="5" sz="quarter"/>
+            <p:ph type="sldNum" sz="quarter" idx="5"/>
           </p:nvPr>
         </p:nvSpPr>
         <p:spPr/>
@@ -755,7 +569,7 @@
 </file>
 
 <file path=ppt/notesSlides/notesSlide12.xml><?xml version="1.0" encoding="utf-8"?>
-<p:notes xmlns:a="http://schemas.openxmlformats.org/drawingml/2006/main" xmlns:p="http://schemas.openxmlformats.org/presentationml/2006/main" xmlns:r="http://schemas.openxmlformats.org/officeDocument/2006/relationships">
+<p:notes xmlns:a="http://schemas.openxmlformats.org/drawingml/2006/main" xmlns:r="http://schemas.openxmlformats.org/officeDocument/2006/relationships" xmlns:p="http://schemas.openxmlformats.org/presentationml/2006/main">
   <p:cSld>
     <p:spTree>
       <p:nvGrpSpPr>
@@ -775,7 +589,7 @@
         <p:nvSpPr>
           <p:cNvPr id="2" name="Slide Image Placeholder 1"/>
           <p:cNvSpPr>
-            <a:spLocks noGrp="1"/>
+            <a:spLocks noGrp="1" noRot="1" noChangeAspect="1"/>
           </p:cNvSpPr>
           <p:nvPr>
             <p:ph type="sldImg" idx="2"/>
@@ -790,7 +604,7 @@
             <a:spLocks noGrp="1"/>
           </p:cNvSpPr>
           <p:nvPr>
-            <p:ph type="body" idx="3" sz="quarter"/>
+            <p:ph type="body" sz="quarter" idx="3"/>
           </p:nvPr>
         </p:nvSpPr>
         <p:spPr/>
@@ -802,7 +616,9 @@
               <a:t>This is the closer before the demo. Don't walk every row — let people read.</a:t>
             </a:r>
           </a:p>
-          <a:p/>
+          <a:p>
+            <a:endParaRPr/>
+          </a:p>
           <a:p>
             <a:r>
               <a:t>What to say while they read:</a:t>
@@ -813,7 +629,9 @@
               <a:t>'Plain Claude Code is incredibly capable. Nothing on this slide is a knock against it. The point is that everything in the right column is WORK — work you'd have to do yourself, every project, every session, with raw Claude Code. EFF-IT just bundles that work into a scaffold so you don't have to redo it.'</a:t>
             </a:r>
           </a:p>
-          <a:p/>
+          <a:p>
+            <a:endParaRPr/>
+          </a:p>
           <a:p>
             <a:r>
               <a:t>If pressed on which row matters most, pick two:</a:t>
@@ -829,7 +647,9 @@
               <a:t>  - 'Session crashes' — because it's the single biggest productivity killer in long agent runs.</a:t>
             </a:r>
           </a:p>
-          <a:p/>
+          <a:p>
+            <a:endParaRPr/>
+          </a:p>
           <a:p>
             <a:r>
               <a:t>Transition to demo:</a:t>
@@ -849,7 +669,7 @@
             <a:spLocks noGrp="1"/>
           </p:cNvSpPr>
           <p:nvPr>
-            <p:ph type="sldNum" idx="5" sz="quarter"/>
+            <p:ph type="sldNum" sz="quarter" idx="5"/>
           </p:nvPr>
         </p:nvSpPr>
         <p:spPr/>
@@ -863,7 +683,7 @@
 </file>
 
 <file path=ppt/notesSlides/notesSlide13.xml><?xml version="1.0" encoding="utf-8"?>
-<p:notes xmlns:a="http://schemas.openxmlformats.org/drawingml/2006/main" xmlns:p="http://schemas.openxmlformats.org/presentationml/2006/main" xmlns:r="http://schemas.openxmlformats.org/officeDocument/2006/relationships">
+<p:notes xmlns:a="http://schemas.openxmlformats.org/drawingml/2006/main" xmlns:r="http://schemas.openxmlformats.org/officeDocument/2006/relationships" xmlns:p="http://schemas.openxmlformats.org/presentationml/2006/main">
   <p:cSld>
     <p:spTree>
       <p:nvGrpSpPr>
@@ -883,7 +703,7 @@
         <p:nvSpPr>
           <p:cNvPr id="2" name="Slide Image Placeholder 1"/>
           <p:cNvSpPr>
-            <a:spLocks noGrp="1"/>
+            <a:spLocks noGrp="1" noRot="1" noChangeAspect="1"/>
           </p:cNvSpPr>
           <p:nvPr>
             <p:ph type="sldImg" idx="2"/>
@@ -898,7 +718,7 @@
             <a:spLocks noGrp="1"/>
           </p:cNvSpPr>
           <p:nvPr>
-            <p:ph type="body" idx="3" sz="quarter"/>
+            <p:ph type="body" sz="quarter" idx="3"/>
           </p:nvPr>
         </p:nvSpPr>
         <p:spPr/>
@@ -930,7 +750,9 @@
               <a:t>  4. Terminal font is large enough to read from the back of the room.</a:t>
             </a:r>
           </a:p>
-          <a:p/>
+          <a:p>
+            <a:endParaRPr/>
+          </a:p>
           <a:p>
             <a:r>
               <a:t>Demo choice guidance:</a:t>
@@ -951,7 +773,9 @@
               <a:t>  - /resume is the rescue option — use this if live runs are flaky.</a:t>
             </a:r>
           </a:p>
-          <a:p/>
+          <a:p>
+            <a:endParaRPr/>
+          </a:p>
           <a:p>
             <a:r>
               <a:t>Narrate as the agent works:</a:t>
@@ -972,7 +796,9 @@
               <a:t>  - When karen returns: 'There's the audit. If she says PARTIAL, we loop.'</a:t>
             </a:r>
           </a:p>
-          <a:p/>
+          <a:p>
+            <a:endParaRPr/>
+          </a:p>
           <a:p>
             <a:r>
               <a:t>Have a fallback: if the demo dies mid-flight, switch to showing sessions/&lt;a-completed-run&gt;/ in the file tree. The artifacts tell the story even without the live run.</a:t>
@@ -987,7 +813,7 @@
             <a:spLocks noGrp="1"/>
           </p:cNvSpPr>
           <p:nvPr>
-            <p:ph type="sldNum" idx="5" sz="quarter"/>
+            <p:ph type="sldNum" sz="quarter" idx="5"/>
           </p:nvPr>
         </p:nvSpPr>
         <p:spPr/>
@@ -1001,7 +827,7 @@
 </file>
 
 <file path=ppt/notesSlides/notesSlide14.xml><?xml version="1.0" encoding="utf-8"?>
-<p:notes xmlns:a="http://schemas.openxmlformats.org/drawingml/2006/main" xmlns:p="http://schemas.openxmlformats.org/presentationml/2006/main" xmlns:r="http://schemas.openxmlformats.org/officeDocument/2006/relationships">
+<p:notes xmlns:a="http://schemas.openxmlformats.org/drawingml/2006/main" xmlns:r="http://schemas.openxmlformats.org/officeDocument/2006/relationships" xmlns:p="http://schemas.openxmlformats.org/presentationml/2006/main">
   <p:cSld>
     <p:spTree>
       <p:nvGrpSpPr>
@@ -1021,7 +847,7 @@
         <p:nvSpPr>
           <p:cNvPr id="2" name="Slide Image Placeholder 1"/>
           <p:cNvSpPr>
-            <a:spLocks noGrp="1"/>
+            <a:spLocks noGrp="1" noRot="1" noChangeAspect="1"/>
           </p:cNvSpPr>
           <p:nvPr>
             <p:ph type="sldImg" idx="2"/>
@@ -1036,7 +862,7 @@
             <a:spLocks noGrp="1"/>
           </p:cNvSpPr>
           <p:nvPr>
-            <p:ph type="body" idx="3" sz="quarter"/>
+            <p:ph type="body" sz="quarter" idx="3"/>
           </p:nvPr>
         </p:nvSpPr>
         <p:spPr/>
@@ -1048,37 +874,49 @@
               <a:t>Read the room. If hands go up immediately, you've nailed the talk. If silence, prime the pump with one of the pre-baked questions on the slide.</a:t>
             </a:r>
           </a:p>
-          <a:p/>
+          <a:p>
+            <a:endParaRPr/>
+          </a:p>
           <a:p>
             <a:r>
               <a:t>Hard questions you might get:</a:t>
             </a:r>
           </a:p>
-          <a:p/>
+          <a:p>
+            <a:endParaRPr/>
+          </a:p>
           <a:p>
             <a:r>
               <a:t>  - 'Have you measured productivity gains?' — Be honest. 'No formal A/B, but the runs I would have abandoned without /resume are the strongest signal. Anecdotally, idea-to-PR for a small feature is under an hour.'</a:t>
             </a:r>
           </a:p>
-          <a:p/>
+          <a:p>
+            <a:endParaRPr/>
+          </a:p>
           <a:p>
             <a:r>
               <a:t>  - 'What about cost? 12 agents per feature must burn tokens.' — Yes. The tradeoff is fewer failed runs and fewer round trips with humans for spec clarification. Net cost vs raw Claude Code is roughly comparable for non-trivial features; worse for trivial ones (use /fast-lane).</a:t>
             </a:r>
           </a:p>
-          <a:p/>
+          <a:p>
+            <a:endParaRPr/>
+          </a:p>
           <a:p>
             <a:r>
               <a:t>  - 'Could the agent disable a hook?' — In principle, by editing .claude/settings.json. In practice, secrets-postwrite would scan the edit, and the agent has no instruction to do this. But: don't run this scaffold against a repo with sensitive secrets you haven't rotated. Defense in depth, not magic.</a:t>
             </a:r>
           </a:p>
-          <a:p/>
+          <a:p>
+            <a:endParaRPr/>
+          </a:p>
           <a:p>
             <a:r>
               <a:t>  - 'Is this open source?' / 'How do I contribute?' — Insert your answers based on the repo's actual license status.</a:t>
             </a:r>
           </a:p>
-          <a:p/>
+          <a:p>
+            <a:endParaRPr/>
+          </a:p>
           <a:p>
             <a:r>
               <a:t>Close with a callback to the title.</a:t>
@@ -1093,7 +931,7 @@
             <a:spLocks noGrp="1"/>
           </p:cNvSpPr>
           <p:nvPr>
-            <p:ph type="sldNum" idx="5" sz="quarter"/>
+            <p:ph type="sldNum" sz="quarter" idx="5"/>
           </p:nvPr>
         </p:nvSpPr>
         <p:spPr/>
@@ -1107,7 +945,7 @@
 </file>
 
 <file path=ppt/notesSlides/notesSlide15.xml><?xml version="1.0" encoding="utf-8"?>
-<p:notes xmlns:a="http://schemas.openxmlformats.org/drawingml/2006/main" xmlns:p="http://schemas.openxmlformats.org/presentationml/2006/main" xmlns:r="http://schemas.openxmlformats.org/officeDocument/2006/relationships">
+<p:notes xmlns:a="http://schemas.openxmlformats.org/drawingml/2006/main" xmlns:r="http://schemas.openxmlformats.org/officeDocument/2006/relationships" xmlns:p="http://schemas.openxmlformats.org/presentationml/2006/main">
   <p:cSld>
     <p:spTree>
       <p:nvGrpSpPr>
@@ -1127,7 +965,7 @@
         <p:nvSpPr>
           <p:cNvPr id="2" name="Slide Image Placeholder 1"/>
           <p:cNvSpPr>
-            <a:spLocks noGrp="1"/>
+            <a:spLocks noGrp="1" noRot="1" noChangeAspect="1"/>
           </p:cNvSpPr>
           <p:nvPr>
             <p:ph type="sldImg" idx="2"/>
@@ -1142,7 +980,7 @@
             <a:spLocks noGrp="1"/>
           </p:cNvSpPr>
           <p:nvPr>
-            <p:ph type="body" idx="3" sz="quarter"/>
+            <p:ph type="body" sz="quarter" idx="3"/>
           </p:nvPr>
         </p:nvSpPr>
         <p:spPr/>
@@ -1154,7 +992,9 @@
               <a:t>Pause here. This is the pivot from 'here's the harness' to 'here's a real run of the harness, soup to nuts.'</a:t>
             </a:r>
           </a:p>
-          <a:p/>
+          <a:p>
+            <a:endParaRPr/>
+          </a:p>
           <a:p>
             <a:r>
               <a:t>What to say:</a:t>
@@ -1165,7 +1005,9 @@
               <a:t>'The rest of the talk was about the harness. The rest of the deck is what one run looks like in practice. Thirty minutes, twelve agents, one merged PR, five cents in tokens. We're going to walk every stage with the actual screenshots from that session.'</a:t>
             </a:r>
           </a:p>
-          <a:p/>
+          <a:p>
+            <a:endParaRPr/>
+          </a:p>
           <a:p>
             <a:r>
               <a:t>If you have time and the audience is engaged, mention you can also play the full screen recording — it's in pptx_refs/ next to the deck. Don't try to embed a 30 MB .mov in the slides; just have it ready in a side window if asked.</a:t>
@@ -1180,7 +1022,7 @@
             <a:spLocks noGrp="1"/>
           </p:cNvSpPr>
           <p:nvPr>
-            <p:ph type="sldNum" idx="5" sz="quarter"/>
+            <p:ph type="sldNum" sz="quarter" idx="5"/>
           </p:nvPr>
         </p:nvSpPr>
         <p:spPr/>
@@ -1194,7 +1036,7 @@
 </file>
 
 <file path=ppt/notesSlides/notesSlide16.xml><?xml version="1.0" encoding="utf-8"?>
-<p:notes xmlns:a="http://schemas.openxmlformats.org/drawingml/2006/main" xmlns:p="http://schemas.openxmlformats.org/presentationml/2006/main" xmlns:r="http://schemas.openxmlformats.org/officeDocument/2006/relationships">
+<p:notes xmlns:a="http://schemas.openxmlformats.org/drawingml/2006/main" xmlns:r="http://schemas.openxmlformats.org/officeDocument/2006/relationships" xmlns:p="http://schemas.openxmlformats.org/presentationml/2006/main">
   <p:cSld>
     <p:spTree>
       <p:nvGrpSpPr>
@@ -1214,7 +1056,7 @@
         <p:nvSpPr>
           <p:cNvPr id="2" name="Slide Image Placeholder 1"/>
           <p:cNvSpPr>
-            <a:spLocks noGrp="1"/>
+            <a:spLocks noGrp="1" noRot="1" noChangeAspect="1"/>
           </p:cNvSpPr>
           <p:nvPr>
             <p:ph type="sldImg" idx="2"/>
@@ -1229,7 +1071,7 @@
             <a:spLocks noGrp="1"/>
           </p:cNvSpPr>
           <p:nvPr>
-            <p:ph type="body" idx="3" sz="quarter"/>
+            <p:ph type="body" sz="quarter" idx="3"/>
           </p:nvPr>
         </p:nvSpPr>
         <p:spPr/>
@@ -1241,19 +1083,25 @@
               <a:t>Two screenshots, two beats:</a:t>
             </a:r>
           </a:p>
-          <a:p/>
+          <a:p>
+            <a:endParaRPr/>
+          </a:p>
           <a:p>
             <a:r>
               <a:t>LEFT (10:41:53): 'This is what kicking off a run looks like — type /run, Claude Code prompts you to allow the skill. That's the only friction in the whole 30 minutes.'</a:t>
             </a:r>
           </a:p>
-          <a:p/>
+          <a:p>
+            <a:endParaRPr/>
+          </a:p>
           <a:p>
             <a:r>
               <a:t>RIGHT (10:43:26): 'A minute and a half later, the interrogator has summarized the idea back to me. Note the prompt at the bottom — Is this the right one-liner, or do you want to refine it? It will not draft a spec until you confirm or correct.'</a:t>
             </a:r>
           </a:p>
-          <a:p/>
+          <a:p>
+            <a:endParaRPr/>
+          </a:p>
           <a:p>
             <a:r>
               <a:t>Optional aside: the model badge in the bottom-left switched from Sonnet 4.6 to Opus 4.7 between these two screenshots. The skill actually suggested the swap because Opus does deeper interrogation. Small UX detail, but it tells you the harness is opinionated about model choice per stage.</a:t>
@@ -1268,7 +1116,7 @@
             <a:spLocks noGrp="1"/>
           </p:cNvSpPr>
           <p:nvPr>
-            <p:ph type="sldNum" idx="5" sz="quarter"/>
+            <p:ph type="sldNum" sz="quarter" idx="5"/>
           </p:nvPr>
         </p:nvSpPr>
         <p:spPr/>
@@ -1282,7 +1130,7 @@
 </file>
 
 <file path=ppt/notesSlides/notesSlide17.xml><?xml version="1.0" encoding="utf-8"?>
-<p:notes xmlns:a="http://schemas.openxmlformats.org/drawingml/2006/main" xmlns:p="http://schemas.openxmlformats.org/presentationml/2006/main" xmlns:r="http://schemas.openxmlformats.org/officeDocument/2006/relationships">
+<p:notes xmlns:a="http://schemas.openxmlformats.org/drawingml/2006/main" xmlns:r="http://schemas.openxmlformats.org/officeDocument/2006/relationships" xmlns:p="http://schemas.openxmlformats.org/presentationml/2006/main">
   <p:cSld>
     <p:spTree>
       <p:nvGrpSpPr>
@@ -1302,7 +1150,7 @@
         <p:nvSpPr>
           <p:cNvPr id="2" name="Slide Image Placeholder 1"/>
           <p:cNvSpPr>
-            <a:spLocks noGrp="1"/>
+            <a:spLocks noGrp="1" noRot="1" noChangeAspect="1"/>
           </p:cNvSpPr>
           <p:nvPr>
             <p:ph type="sldImg" idx="2"/>
@@ -1317,7 +1165,7 @@
             <a:spLocks noGrp="1"/>
           </p:cNvSpPr>
           <p:nvPr>
-            <p:ph type="body" idx="3" sz="quarter"/>
+            <p:ph type="body" sz="quarter" idx="3"/>
           </p:nvPr>
         </p:nvSpPr>
         <p:spPr/>
@@ -1329,7 +1177,9 @@
               <a:t>Don't read the spec aloud. Let people scan it for ten seconds.</a:t>
             </a:r>
           </a:p>
-          <a:p/>
+          <a:p>
+            <a:endParaRPr/>
+          </a:p>
           <a:p>
             <a:r>
               <a:t>What to say:</a:t>
@@ -1340,7 +1190,9 @@
               <a:t>'Every section you see here came out of the interrogator's Q&amp;A. Goals, non-goals, intended users, scope boundaries. This file becomes the contract — karen, the auditor agent at the end of the pipeline, literally diffs the implementation against this spec to decide PASS, PARTIAL, or FAIL.'</a:t>
             </a:r>
           </a:p>
-          <a:p/>
+          <a:p>
+            <a:endParaRPr/>
+          </a:p>
           <a:p>
             <a:r>
               <a:t>Land this point: 'In raw vibe coding, the spec lives in chat history and gets lost. Here, it's a file. You can read it, share it, and the agents can re-read it whenever they drift.'</a:t>
@@ -1355,7 +1207,7 @@
             <a:spLocks noGrp="1"/>
           </p:cNvSpPr>
           <p:nvPr>
-            <p:ph type="sldNum" idx="5" sz="quarter"/>
+            <p:ph type="sldNum" sz="quarter" idx="5"/>
           </p:nvPr>
         </p:nvSpPr>
         <p:spPr/>
@@ -1369,7 +1221,7 @@
 </file>
 
 <file path=ppt/notesSlides/notesSlide18.xml><?xml version="1.0" encoding="utf-8"?>
-<p:notes xmlns:a="http://schemas.openxmlformats.org/drawingml/2006/main" xmlns:p="http://schemas.openxmlformats.org/presentationml/2006/main" xmlns:r="http://schemas.openxmlformats.org/officeDocument/2006/relationships">
+<p:notes xmlns:a="http://schemas.openxmlformats.org/drawingml/2006/main" xmlns:r="http://schemas.openxmlformats.org/officeDocument/2006/relationships" xmlns:p="http://schemas.openxmlformats.org/presentationml/2006/main">
   <p:cSld>
     <p:spTree>
       <p:nvGrpSpPr>
@@ -1389,7 +1241,7 @@
         <p:nvSpPr>
           <p:cNvPr id="2" name="Slide Image Placeholder 1"/>
           <p:cNvSpPr>
-            <a:spLocks noGrp="1"/>
+            <a:spLocks noGrp="1" noRot="1" noChangeAspect="1"/>
           </p:cNvSpPr>
           <p:nvPr>
             <p:ph type="sldImg" idx="2"/>
@@ -1404,7 +1256,7 @@
             <a:spLocks noGrp="1"/>
           </p:cNvSpPr>
           <p:nvPr>
-            <p:ph type="body" idx="3" sz="quarter"/>
+            <p:ph type="body" sz="quarter" idx="3"/>
           </p:nvPr>
         </p:nvSpPr>
         <p:spPr/>
@@ -1416,13 +1268,17 @@
               <a:t>These two screenshots are SECURITY_CONCERNS.md, top half on the left, bottom half on the right. Walk through what's on screen:</a:t>
             </a:r>
           </a:p>
-          <a:p/>
+          <a:p>
+            <a:endParaRPr/>
+          </a:p>
           <a:p>
             <a:r>
               <a:t>'The concern-resolver looked at the SPEC, looked at app_types declared in CLAUDE.md, and produced this merged checklist. SR-1 is timing-safe comparison. SR-2 is replay protection. SR-3 is no-secret-in-logs. Every one of these has a triggered-by reason and a remediation hint.'</a:t>
             </a:r>
           </a:p>
-          <a:p/>
+          <a:p>
+            <a:endParaRPr/>
+          </a:p>
           <a:p>
             <a:r>
               <a:t>The key point: this happens BEFORE implementation. The architect agent reads this file and bakes the mitigations into the design. The security-reviewer at the end reads the SAME file to verify nothing was missed. One checklist, three agents.</a:t>
@@ -1437,7 +1293,7 @@
             <a:spLocks noGrp="1"/>
           </p:cNvSpPr>
           <p:nvPr>
-            <p:ph type="sldNum" idx="5" sz="quarter"/>
+            <p:ph type="sldNum" sz="quarter" idx="5"/>
           </p:nvPr>
         </p:nvSpPr>
         <p:spPr/>
@@ -1451,7 +1307,7 @@
 </file>
 
 <file path=ppt/notesSlides/notesSlide19.xml><?xml version="1.0" encoding="utf-8"?>
-<p:notes xmlns:a="http://schemas.openxmlformats.org/drawingml/2006/main" xmlns:p="http://schemas.openxmlformats.org/presentationml/2006/main" xmlns:r="http://schemas.openxmlformats.org/officeDocument/2006/relationships">
+<p:notes xmlns:a="http://schemas.openxmlformats.org/drawingml/2006/main" xmlns:r="http://schemas.openxmlformats.org/officeDocument/2006/relationships" xmlns:p="http://schemas.openxmlformats.org/presentationml/2006/main">
   <p:cSld>
     <p:spTree>
       <p:nvGrpSpPr>
@@ -1471,7 +1327,7 @@
         <p:nvSpPr>
           <p:cNvPr id="2" name="Slide Image Placeholder 1"/>
           <p:cNvSpPr>
-            <a:spLocks noGrp="1"/>
+            <a:spLocks noGrp="1" noRot="1" noChangeAspect="1"/>
           </p:cNvSpPr>
           <p:nvPr>
             <p:ph type="sldImg" idx="2"/>
@@ -1486,7 +1342,7 @@
             <a:spLocks noGrp="1"/>
           </p:cNvSpPr>
           <p:nvPr>
-            <p:ph type="body" idx="3" sz="quarter"/>
+            <p:ph type="body" sz="quarter" idx="3"/>
           </p:nvPr>
         </p:nvSpPr>
         <p:spPr/>
@@ -1498,19 +1354,25 @@
               <a:t>Two halves of one architecture doc.</a:t>
             </a:r>
           </a:p>
-          <a:p/>
+          <a:p>
+            <a:endParaRPr/>
+          </a:p>
           <a:p>
             <a:r>
               <a:t>LEFT: system context diagram. Note the trust boundary — webhooksig sits INSIDE the caller's request handler, after TLS termination, before business logic. The architect agent drew this. ASCII art, not Mermaid — because it has to render in any markdown viewer, including git diff.</a:t>
             </a:r>
           </a:p>
-          <a:p/>
+          <a:p>
+            <a:endParaRPr/>
+          </a:p>
           <a:p>
             <a:r>
               <a:t>RIGHT: the data-flow section. Pseudocode for the call path through verify_github and verify_stripe. This is the algorithm being settled BEFORE any code is written. By the time the coder agent gets a task, all of these decisions are pre-made.</a:t>
             </a:r>
           </a:p>
-          <a:p/>
+          <a:p>
+            <a:endParaRPr/>
+          </a:p>
           <a:p>
             <a:r>
               <a:t>Land it: 'Most agent runs go straight from spec to code. The architect step is what stops the coder from re-deciding architecture in every function it writes.'</a:t>
@@ -1525,7 +1387,7 @@
             <a:spLocks noGrp="1"/>
           </p:cNvSpPr>
           <p:nvPr>
-            <p:ph type="sldNum" idx="5" sz="quarter"/>
+            <p:ph type="sldNum" sz="quarter" idx="5"/>
           </p:nvPr>
         </p:nvSpPr>
         <p:spPr/>
@@ -1539,7 +1401,7 @@
 </file>
 
 <file path=ppt/notesSlides/notesSlide2.xml><?xml version="1.0" encoding="utf-8"?>
-<p:notes xmlns:a="http://schemas.openxmlformats.org/drawingml/2006/main" xmlns:p="http://schemas.openxmlformats.org/presentationml/2006/main" xmlns:r="http://schemas.openxmlformats.org/officeDocument/2006/relationships">
+<p:notes xmlns:a="http://schemas.openxmlformats.org/drawingml/2006/main" xmlns:r="http://schemas.openxmlformats.org/officeDocument/2006/relationships" xmlns:p="http://schemas.openxmlformats.org/presentationml/2006/main">
   <p:cSld>
     <p:spTree>
       <p:nvGrpSpPr>
@@ -1559,7 +1421,7 @@
         <p:nvSpPr>
           <p:cNvPr id="2" name="Slide Image Placeholder 1"/>
           <p:cNvSpPr>
-            <a:spLocks noGrp="1"/>
+            <a:spLocks noGrp="1" noRot="1" noChangeAspect="1"/>
           </p:cNvSpPr>
           <p:nvPr>
             <p:ph type="sldImg" idx="2"/>
@@ -1574,7 +1436,7 @@
             <a:spLocks noGrp="1"/>
           </p:cNvSpPr>
           <p:nvPr>
-            <p:ph type="body" idx="3" sz="quarter"/>
+            <p:ph type="body" sz="quarter" idx="3"/>
           </p:nvPr>
         </p:nvSpPr>
         <p:spPr/>
@@ -1586,13 +1448,17 @@
               <a:t>Make sure the room agrees on what 'vibe coding' means before you critique it. The term is fresh enough that half the audience will have heard it and half won't. Define it cleanly: you describe intent, the agent executes. That's it.</a:t>
             </a:r>
           </a:p>
-          <a:p/>
+          <a:p>
+            <a:endParaRPr/>
+          </a:p>
           <a:p>
             <a:r>
               <a:t>The pivot in this slide is the last line — 'the reality without guardrails.' Land that beat hard. This is the problem statement for the whole talk. If the audience nods here, the rest of the deck writes itself.</a:t>
             </a:r>
           </a:p>
-          <a:p/>
+          <a:p>
+            <a:endParaRPr/>
+          </a:p>
           <a:p>
             <a:r>
               <a:t>Concrete examples to drop if energy is low:</a:t>
@@ -1618,7 +1484,9 @@
               <a:t>Pick one. Don't list all three.</a:t>
             </a:r>
           </a:p>
-          <a:p/>
+          <a:p>
+            <a:endParaRPr/>
+          </a:p>
           <a:p>
             <a:r>
               <a:t>Transition: 'So I built something to fix that.'</a:t>
@@ -1633,7 +1501,7 @@
             <a:spLocks noGrp="1"/>
           </p:cNvSpPr>
           <p:nvPr>
-            <p:ph type="sldNum" idx="5" sz="quarter"/>
+            <p:ph type="sldNum" sz="quarter" idx="5"/>
           </p:nvPr>
         </p:nvSpPr>
         <p:spPr/>
@@ -1647,7 +1515,7 @@
 </file>
 
 <file path=ppt/notesSlides/notesSlide20.xml><?xml version="1.0" encoding="utf-8"?>
-<p:notes xmlns:a="http://schemas.openxmlformats.org/drawingml/2006/main" xmlns:p="http://schemas.openxmlformats.org/presentationml/2006/main" xmlns:r="http://schemas.openxmlformats.org/officeDocument/2006/relationships">
+<p:notes xmlns:a="http://schemas.openxmlformats.org/drawingml/2006/main" xmlns:r="http://schemas.openxmlformats.org/officeDocument/2006/relationships" xmlns:p="http://schemas.openxmlformats.org/presentationml/2006/main">
   <p:cSld>
     <p:spTree>
       <p:nvGrpSpPr>
@@ -1667,7 +1535,7 @@
         <p:nvSpPr>
           <p:cNvPr id="2" name="Slide Image Placeholder 1"/>
           <p:cNvSpPr>
-            <a:spLocks noGrp="1"/>
+            <a:spLocks noGrp="1" noRot="1" noChangeAspect="1"/>
           </p:cNvSpPr>
           <p:nvPr>
             <p:ph type="sldImg" idx="2"/>
@@ -1682,7 +1550,7 @@
             <a:spLocks noGrp="1"/>
           </p:cNvSpPr>
           <p:nvPr>
-            <p:ph type="body" idx="3" sz="quarter"/>
+            <p:ph type="body" sz="quarter" idx="3"/>
           </p:nvPr>
         </p:nvSpPr>
         <p:spPr/>
@@ -1694,13 +1562,17 @@
               <a:t>LEFT: 'Four agents running in parallel — fixing test mismatches and implementing the P2 module tier.' This is the orchestrator's decomposition paying off — independent tasks fan out to independent coders. Wall-clock for this phase: under five minutes.</a:t>
             </a:r>
           </a:p>
-          <a:p/>
+          <a:p>
+            <a:endParaRPr/>
+          </a:p>
           <a:p>
             <a:r>
               <a:t>RIGHT: this is the moment that justifies the advisor tool. The coder hit an ambiguous spec edge — what's the right max_header_length bound? Instead of guessing, it consulted the stronger advisor model. The advisor reviewed the full transcript and confirmed the approach.</a:t>
             </a:r>
           </a:p>
-          <a:p/>
+          <a:p>
+            <a:endParaRPr/>
+          </a:p>
           <a:p>
             <a:r>
               <a:t>Key point: 'The advisor isn't a fallback for failure. It's a second-opinion mechanism for decisions that have consequences. The coder used it correctly here — at a branch point, before committing to an interpretation.'</a:t>
@@ -1715,7 +1587,7 @@
             <a:spLocks noGrp="1"/>
           </p:cNvSpPr>
           <p:nvPr>
-            <p:ph type="sldNum" idx="5" sz="quarter"/>
+            <p:ph type="sldNum" sz="quarter" idx="5"/>
           </p:nvPr>
         </p:nvSpPr>
         <p:spPr/>
@@ -1729,7 +1601,7 @@
 </file>
 
 <file path=ppt/notesSlides/notesSlide21.xml><?xml version="1.0" encoding="utf-8"?>
-<p:notes xmlns:a="http://schemas.openxmlformats.org/drawingml/2006/main" xmlns:p="http://schemas.openxmlformats.org/presentationml/2006/main" xmlns:r="http://schemas.openxmlformats.org/officeDocument/2006/relationships">
+<p:notes xmlns:a="http://schemas.openxmlformats.org/drawingml/2006/main" xmlns:r="http://schemas.openxmlformats.org/officeDocument/2006/relationships" xmlns:p="http://schemas.openxmlformats.org/presentationml/2006/main">
   <p:cSld>
     <p:spTree>
       <p:nvGrpSpPr>
@@ -1749,7 +1621,7 @@
         <p:nvSpPr>
           <p:cNvPr id="2" name="Slide Image Placeholder 1"/>
           <p:cNvSpPr>
-            <a:spLocks noGrp="1"/>
+            <a:spLocks noGrp="1" noRot="1" noChangeAspect="1"/>
           </p:cNvSpPr>
           <p:nvPr>
             <p:ph type="sldImg" idx="2"/>
@@ -1764,7 +1636,7 @@
             <a:spLocks noGrp="1"/>
           </p:cNvSpPr>
           <p:nvPr>
-            <p:ph type="body" idx="3" sz="quarter"/>
+            <p:ph type="body" sz="quarter" idx="3"/>
           </p:nvPr>
         </p:nvSpPr>
         <p:spPr/>
@@ -1776,7 +1648,9 @@
               <a:t>This is the slide where 'agents in the loop' becomes 'humans still in the loop when it counts.'</a:t>
             </a:r>
           </a:p>
-          <a:p/>
+          <a:p>
+            <a:endParaRPr/>
+          </a:p>
           <a:p>
             <a:r>
               <a:t>Walk the screenshot:</a:t>
@@ -1797,7 +1671,9 @@
               <a:t>  - Karen presents options. The human picked Option C — accept the     pre-existing failures, proceed.</a:t>
             </a:r>
           </a:p>
-          <a:p/>
+          <a:p>
+            <a:endParaRPr/>
+          </a:p>
           <a:p>
             <a:r>
               <a:t>What to say:</a:t>
@@ -1808,7 +1684,9 @@
               <a:t>'Karen could have looped forever trying to fix unit-test-writer's bugs. Instead, she recognized the failure pattern, escalated with options, and let me make the call. This is the difference between an autonomous agent that wastes 20 minutes and a harness that knows when to ask.'</a:t>
             </a:r>
           </a:p>
-          <a:p/>
+          <a:p>
+            <a:endParaRPr/>
+          </a:p>
           <a:p>
             <a:r>
               <a:t>Optional follow-up: the 22 pre-existing bugs got logged in PROBLEMS.md and PLAN.md for a future run to address. Nothing got swept under the rug.</a:t>
@@ -1823,7 +1701,7 @@
             <a:spLocks noGrp="1"/>
           </p:cNvSpPr>
           <p:nvPr>
-            <p:ph type="sldNum" idx="5" sz="quarter"/>
+            <p:ph type="sldNum" sz="quarter" idx="5"/>
           </p:nvPr>
         </p:nvSpPr>
         <p:spPr/>
@@ -1837,7 +1715,7 @@
 </file>
 
 <file path=ppt/notesSlides/notesSlide22.xml><?xml version="1.0" encoding="utf-8"?>
-<p:notes xmlns:a="http://schemas.openxmlformats.org/drawingml/2006/main" xmlns:p="http://schemas.openxmlformats.org/presentationml/2006/main" xmlns:r="http://schemas.openxmlformats.org/officeDocument/2006/relationships">
+<p:notes xmlns:a="http://schemas.openxmlformats.org/drawingml/2006/main" xmlns:r="http://schemas.openxmlformats.org/officeDocument/2006/relationships" xmlns:p="http://schemas.openxmlformats.org/presentationml/2006/main">
   <p:cSld>
     <p:spTree>
       <p:nvGrpSpPr>
@@ -1857,7 +1735,7 @@
         <p:nvSpPr>
           <p:cNvPr id="2" name="Slide Image Placeholder 1"/>
           <p:cNvSpPr>
-            <a:spLocks noGrp="1"/>
+            <a:spLocks noGrp="1" noRot="1" noChangeAspect="1"/>
           </p:cNvSpPr>
           <p:nvPr>
             <p:ph type="sldImg" idx="2"/>
@@ -1872,7 +1750,7 @@
             <a:spLocks noGrp="1"/>
           </p:cNvSpPr>
           <p:nvPr>
-            <p:ph type="body" idx="3" sz="quarter"/>
+            <p:ph type="body" sz="quarter" idx="3"/>
           </p:nvPr>
         </p:nvSpPr>
         <p:spPr/>
@@ -1884,7 +1762,9 @@
               <a:t>This is the money shot. Don't talk over it for the first ten seconds — let people read.</a:t>
             </a:r>
           </a:p>
-          <a:p/>
+          <a:p>
+            <a:endParaRPr/>
+          </a:p>
           <a:p>
             <a:r>
               <a:t>When you talk, hit the rows that matter:</a:t>
@@ -1910,7 +1790,9 @@
               <a:t>  - 'Security review: two medium items. SR-1 (UnicodeDecodeError in     Stripe) fixed in the same run. SR-2 (secret visible in process     arg list) documented in PLAN.md for follow-up. Neither shipped     silently.'</a:t>
             </a:r>
           </a:p>
-          <a:p/>
+          <a:p>
+            <a:endParaRPr/>
+          </a:p>
           <a:p>
             <a:r>
               <a:t>Land the closer:</a:t>
@@ -1930,7 +1812,7 @@
             <a:spLocks noGrp="1"/>
           </p:cNvSpPr>
           <p:nvPr>
-            <p:ph type="sldNum" idx="5" sz="quarter"/>
+            <p:ph type="sldNum" sz="quarter" idx="5"/>
           </p:nvPr>
         </p:nvSpPr>
         <p:spPr/>
@@ -1944,7 +1826,7 @@
 </file>
 
 <file path=ppt/notesSlides/notesSlide23.xml><?xml version="1.0" encoding="utf-8"?>
-<p:notes xmlns:a="http://schemas.openxmlformats.org/drawingml/2006/main" xmlns:p="http://schemas.openxmlformats.org/presentationml/2006/main" xmlns:r="http://schemas.openxmlformats.org/officeDocument/2006/relationships">
+<p:notes xmlns:a="http://schemas.openxmlformats.org/drawingml/2006/main" xmlns:r="http://schemas.openxmlformats.org/officeDocument/2006/relationships" xmlns:p="http://schemas.openxmlformats.org/presentationml/2006/main">
   <p:cSld>
     <p:spTree>
       <p:nvGrpSpPr>
@@ -1964,7 +1846,7 @@
         <p:nvSpPr>
           <p:cNvPr id="2" name="Slide Image Placeholder 1"/>
           <p:cNvSpPr>
-            <a:spLocks noGrp="1"/>
+            <a:spLocks noGrp="1" noRot="1" noChangeAspect="1"/>
           </p:cNvSpPr>
           <p:nvPr>
             <p:ph type="sldImg" idx="2"/>
@@ -1979,7 +1861,7 @@
             <a:spLocks noGrp="1"/>
           </p:cNvSpPr>
           <p:nvPr>
-            <p:ph type="body" idx="3" sz="quarter"/>
+            <p:ph type="body" sz="quarter" idx="3"/>
           </p:nvPr>
         </p:nvSpPr>
         <p:spPr/>
@@ -1991,7 +1873,9 @@
               <a:t>This slide exists for the skeptics. On slide 8 you claimed an audit trail. Here it is.</a:t>
             </a:r>
           </a:p>
-          <a:p/>
+          <a:p>
+            <a:endParaRPr/>
+          </a:p>
           <a:p>
             <a:r>
               <a:t>What to say:</a:t>
@@ -2002,7 +1886,9 @@
               <a:t>'These are excerpts from sessions/20260520-2116/session_log.json. Every tool call the agents made during the run got appended to this file. Bash commands, file reads, file writes, sub-agent invocations, everything. When something goes weird in a run — and things do go weird — this is the file you grep.'</a:t>
             </a:r>
           </a:p>
-          <a:p/>
+          <a:p>
+            <a:endParaRPr/>
+          </a:p>
           <a:p>
             <a:r>
               <a:t>If asked what you actually do with the log:</a:t>
@@ -2028,7 +1914,9 @@
               <a:t>  - Catch agents trying things they shouldn't (the hooks block most,     but the log shows the attempt)</a:t>
             </a:r>
           </a:p>
-          <a:p/>
+          <a:p>
+            <a:endParaRPr/>
+          </a:p>
           <a:p>
             <a:r>
               <a:t>If the audience is non-technical, you can soft-pedal this slide: 'For the engineers in the room — yes, every action is logged. Moving on.' and skip the deep-dive.</a:t>
@@ -2043,7 +1931,7 @@
             <a:spLocks noGrp="1"/>
           </p:cNvSpPr>
           <p:nvPr>
-            <p:ph type="sldNum" idx="5" sz="quarter"/>
+            <p:ph type="sldNum" sz="quarter" idx="5"/>
           </p:nvPr>
         </p:nvSpPr>
         <p:spPr/>
@@ -2057,7 +1945,7 @@
 </file>
 
 <file path=ppt/notesSlides/notesSlide3.xml><?xml version="1.0" encoding="utf-8"?>
-<p:notes xmlns:a="http://schemas.openxmlformats.org/drawingml/2006/main" xmlns:p="http://schemas.openxmlformats.org/presentationml/2006/main" xmlns:r="http://schemas.openxmlformats.org/officeDocument/2006/relationships">
+<p:notes xmlns:a="http://schemas.openxmlformats.org/drawingml/2006/main" xmlns:r="http://schemas.openxmlformats.org/officeDocument/2006/relationships" xmlns:p="http://schemas.openxmlformats.org/presentationml/2006/main">
   <p:cSld>
     <p:spTree>
       <p:nvGrpSpPr>
@@ -2077,7 +1965,7 @@
         <p:nvSpPr>
           <p:cNvPr id="2" name="Slide Image Placeholder 1"/>
           <p:cNvSpPr>
-            <a:spLocks noGrp="1"/>
+            <a:spLocks noGrp="1" noRot="1" noChangeAspect="1"/>
           </p:cNvSpPr>
           <p:nvPr>
             <p:ph type="sldImg" idx="2"/>
@@ -2092,7 +1980,7 @@
             <a:spLocks noGrp="1"/>
           </p:cNvSpPr>
           <p:nvPr>
-            <p:ph type="body" idx="3" sz="quarter"/>
+            <p:ph type="body" sz="quarter" idx="3"/>
           </p:nvPr>
         </p:nvSpPr>
         <p:spPr/>
@@ -2104,7 +1992,9 @@
               <a:t>Walk the table top-to-bottom. One sentence per row, no more:</a:t>
             </a:r>
           </a:p>
-          <a:p/>
+          <a:p>
+            <a:endParaRPr/>
+          </a:p>
           <a:p>
             <a:r>
               <a:t>  1. 'Sessions die. Without a checkpoint, you start from scratch.'</a:t>
@@ -2130,13 +2020,17 @@
               <a:t>  5. 'When the agent does something weird, you want a transcript. Raw Claude Code doesn't keep one by default.'</a:t>
             </a:r>
           </a:p>
-          <a:p/>
+          <a:p>
+            <a:endParaRPr/>
+          </a:p>
           <a:p>
             <a:r>
               <a:t>Land the closing line — the power-tool / jig metaphor — slowly. This is the mental model for the whole rest of the deck. The harness is not a replacement for Claude Code; it's the fixture that holds the work piece steady while the tool does its job.</a:t>
             </a:r>
           </a:p>
-          <a:p/>
+          <a:p>
+            <a:endParaRPr/>
+          </a:p>
           <a:p>
             <a:r>
               <a:t>If anyone asks 'why not just be more careful?' — that's the exact question the next slide answers.</a:t>
@@ -2151,7 +2045,7 @@
             <a:spLocks noGrp="1"/>
           </p:cNvSpPr>
           <p:nvPr>
-            <p:ph type="sldNum" idx="5" sz="quarter"/>
+            <p:ph type="sldNum" sz="quarter" idx="5"/>
           </p:nvPr>
         </p:nvSpPr>
         <p:spPr/>
@@ -2165,7 +2059,7 @@
 </file>
 
 <file path=ppt/notesSlides/notesSlide4.xml><?xml version="1.0" encoding="utf-8"?>
-<p:notes xmlns:a="http://schemas.openxmlformats.org/drawingml/2006/main" xmlns:p="http://schemas.openxmlformats.org/presentationml/2006/main" xmlns:r="http://schemas.openxmlformats.org/officeDocument/2006/relationships">
+<p:notes xmlns:a="http://schemas.openxmlformats.org/drawingml/2006/main" xmlns:r="http://schemas.openxmlformats.org/officeDocument/2006/relationships" xmlns:p="http://schemas.openxmlformats.org/presentationml/2006/main">
   <p:cSld>
     <p:spTree>
       <p:nvGrpSpPr>
@@ -2185,7 +2079,7 @@
         <p:nvSpPr>
           <p:cNvPr id="2" name="Slide Image Placeholder 1"/>
           <p:cNvSpPr>
-            <a:spLocks noGrp="1"/>
+            <a:spLocks noGrp="1" noRot="1" noChangeAspect="1"/>
           </p:cNvSpPr>
           <p:nvPr>
             <p:ph type="sldImg" idx="2"/>
@@ -2200,7 +2094,7 @@
             <a:spLocks noGrp="1"/>
           </p:cNvSpPr>
           <p:nvPr>
-            <p:ph type="body" idx="3" sz="quarter"/>
+            <p:ph type="body" sz="quarter" idx="3"/>
           </p:nvPr>
         </p:nvSpPr>
         <p:spPr/>
@@ -2212,7 +2106,9 @@
               <a:t>Now you can finally show the goods. Five bullets, each pointing at a directory in the repo. Don't read every bullet — point at the slide and call out the three that matter most:</a:t>
             </a:r>
           </a:p>
-          <a:p/>
+          <a:p>
+            <a:endParaRPr/>
+          </a:p>
           <a:p>
             <a:r>
               <a:t>  - 'Commands are how YOU talk to it — slash commands you type.'</a:t>
@@ -2228,13 +2124,17 @@
               <a:t>  - 'Hooks are the safety rails that fire whether the agent remembers to or not.'</a:t>
             </a:r>
           </a:p>
-          <a:p/>
+          <a:p>
+            <a:endParaRPr/>
+          </a:p>
           <a:p>
             <a:r>
               <a:t>The last paragraph is important: this isn't a framework that owns your stack. It's pure Bash and Markdown. It doesn't care if your project is Python, Go, Rust, or TypeScript. That portability is the reason it's worth adopting.</a:t>
             </a:r>
           </a:p>
-          <a:p/>
+          <a:p>
+            <a:endParaRPr/>
+          </a:p>
           <a:p>
             <a:r>
               <a:t>If someone asks 'is this open source / can I copy it?' — yes, that's exactly the point. The README has the copy-paste steps. (Slide 11 covers adoption.)</a:t>
@@ -2249,7 +2149,7 @@
             <a:spLocks noGrp="1"/>
           </p:cNvSpPr>
           <p:nvPr>
-            <p:ph type="sldNum" idx="5" sz="quarter"/>
+            <p:ph type="sldNum" sz="quarter" idx="5"/>
           </p:nvPr>
         </p:nvSpPr>
         <p:spPr/>
@@ -2263,7 +2163,7 @@
 </file>
 
 <file path=ppt/notesSlides/notesSlide5.xml><?xml version="1.0" encoding="utf-8"?>
-<p:notes xmlns:a="http://schemas.openxmlformats.org/drawingml/2006/main" xmlns:p="http://schemas.openxmlformats.org/presentationml/2006/main" xmlns:r="http://schemas.openxmlformats.org/officeDocument/2006/relationships">
+<p:notes xmlns:a="http://schemas.openxmlformats.org/drawingml/2006/main" xmlns:r="http://schemas.openxmlformats.org/officeDocument/2006/relationships" xmlns:p="http://schemas.openxmlformats.org/presentationml/2006/main">
   <p:cSld>
     <p:spTree>
       <p:nvGrpSpPr>
@@ -2283,7 +2183,7 @@
         <p:nvSpPr>
           <p:cNvPr id="2" name="Slide Image Placeholder 1"/>
           <p:cNvSpPr>
-            <a:spLocks noGrp="1"/>
+            <a:spLocks noGrp="1" noRot="1" noChangeAspect="1"/>
           </p:cNvSpPr>
           <p:nvPr>
             <p:ph type="sldImg" idx="2"/>
@@ -2298,7 +2198,7 @@
             <a:spLocks noGrp="1"/>
           </p:cNvSpPr>
           <p:nvPr>
-            <p:ph type="body" idx="3" sz="quarter"/>
+            <p:ph type="body" sz="quarter" idx="3"/>
           </p:nvPr>
         </p:nvSpPr>
         <p:spPr/>
@@ -2310,7 +2210,9 @@
               <a:t>Three commands, three moods. Walk the row:</a:t>
             </a:r>
           </a:p>
-          <a:p/>
+          <a:p>
+            <a:endParaRPr/>
+          </a:p>
           <a:p>
             <a:r>
               <a:t>  - '/run is the front door. Pitch me an idea — even a bad one — and it'll interrogate it into a spec before writing a line of code.'</a:t>
@@ -2326,13 +2228,17 @@
               <a:t>  - '/resume is the unsung hero. Long agent runs die. Network blips, context fills up, you close the laptop. /resume reads checkpoint.json and drops you back in at the exact stage where things stopped.'</a:t>
             </a:r>
           </a:p>
-          <a:p/>
+          <a:p>
+            <a:endParaRPr/>
+          </a:p>
           <a:p>
             <a:r>
               <a:t>The last paragraph is the emotional beat — anyone who's done serious agent work has lost a run at minute 45 and felt that specific kind of despair.</a:t>
             </a:r>
           </a:p>
-          <a:p/>
+          <a:p>
+            <a:endParaRPr/>
+          </a:p>
           <a:p>
             <a:r>
               <a:t>Transition: 'What actually happens inside /run? Next slide.'</a:t>
@@ -2347,7 +2253,7 @@
             <a:spLocks noGrp="1"/>
           </p:cNvSpPr>
           <p:nvPr>
-            <p:ph type="sldNum" idx="5" sz="quarter"/>
+            <p:ph type="sldNum" sz="quarter" idx="5"/>
           </p:nvPr>
         </p:nvSpPr>
         <p:spPr/>
@@ -2361,7 +2267,7 @@
 </file>
 
 <file path=ppt/notesSlides/notesSlide6.xml><?xml version="1.0" encoding="utf-8"?>
-<p:notes xmlns:a="http://schemas.openxmlformats.org/drawingml/2006/main" xmlns:p="http://schemas.openxmlformats.org/presentationml/2006/main" xmlns:r="http://schemas.openxmlformats.org/officeDocument/2006/relationships">
+<p:notes xmlns:a="http://schemas.openxmlformats.org/drawingml/2006/main" xmlns:r="http://schemas.openxmlformats.org/officeDocument/2006/relationships" xmlns:p="http://schemas.openxmlformats.org/presentationml/2006/main">
   <p:cSld>
     <p:spTree>
       <p:nvGrpSpPr>
@@ -2381,7 +2287,7 @@
         <p:nvSpPr>
           <p:cNvPr id="2" name="Slide Image Placeholder 1"/>
           <p:cNvSpPr>
-            <a:spLocks noGrp="1"/>
+            <a:spLocks noGrp="1" noRot="1" noChangeAspect="1"/>
           </p:cNvSpPr>
           <p:nvPr>
             <p:ph type="sldImg" idx="2"/>
@@ -2396,7 +2302,7 @@
             <a:spLocks noGrp="1"/>
           </p:cNvSpPr>
           <p:nvPr>
-            <p:ph type="body" idx="3" sz="quarter"/>
+            <p:ph type="body" sz="quarter" idx="3"/>
           </p:nvPr>
         </p:nvSpPr>
         <p:spPr/>
@@ -2408,7 +2314,9 @@
               <a:t>This is the slide everything else hangs off. Don't rush.</a:t>
             </a:r>
           </a:p>
-          <a:p/>
+          <a:p>
+            <a:endParaRPr/>
+          </a:p>
           <a:p>
             <a:r>
               <a:t>Walk it once at a high level:</a:t>
@@ -2419,13 +2327,17 @@
               <a:t>'Idea on the left, PR on the right. Everything in between is automated, but every stage produces a named artifact you can read and audit.'</a:t>
             </a:r>
           </a:p>
-          <a:p/>
+          <a:p>
+            <a:endParaRPr/>
+          </a:p>
           <a:p>
             <a:r>
               <a:t>Then walk it again calling out the four moments that matter:</a:t>
             </a:r>
           </a:p>
-          <a:p/>
+          <a:p>
+            <a:endParaRPr/>
+          </a:p>
           <a:p>
             <a:r>
               <a:t>  1. interrogator -&gt; spec-drafter: 'This is where vague becomes specific. You can't build the wrong thing if you couldn't articulate it.'</a:t>
@@ -2446,13 +2358,17 @@
               <a:t>  4. karen + security-reviewer: 'Two independent audits at the end. karen checks did we build what was asked. security checks did we ship anything dangerous. Either can block the PR.'</a:t>
             </a:r>
           </a:p>
-          <a:p/>
+          <a:p>
+            <a:endParaRPr/>
+          </a:p>
           <a:p>
             <a:r>
               <a:t>Inevitable question: 'Who's Karen?' — yes, she's named for the meme. She audits ruthlessly and returns PASS, PARTIAL, or FAIL.</a:t>
             </a:r>
           </a:p>
-          <a:p/>
+          <a:p>
+            <a:endParaRPr/>
+          </a:p>
           <a:p>
             <a:r>
               <a:t>Optional aside if you have time: every arrow in this diagram corresponds to a markdown file in .claude/agents/. The whole pipeline is data — no hardcoded orchestration logic. That's why it's portable.</a:t>
@@ -2467,7 +2383,7 @@
             <a:spLocks noGrp="1"/>
           </p:cNvSpPr>
           <p:nvPr>
-            <p:ph type="sldNum" idx="5" sz="quarter"/>
+            <p:ph type="sldNum" sz="quarter" idx="5"/>
           </p:nvPr>
         </p:nvSpPr>
         <p:spPr/>
@@ -2481,7 +2397,7 @@
 </file>
 
 <file path=ppt/notesSlides/notesSlide7.xml><?xml version="1.0" encoding="utf-8"?>
-<p:notes xmlns:a="http://schemas.openxmlformats.org/drawingml/2006/main" xmlns:p="http://schemas.openxmlformats.org/presentationml/2006/main" xmlns:r="http://schemas.openxmlformats.org/officeDocument/2006/relationships">
+<p:notes xmlns:a="http://schemas.openxmlformats.org/drawingml/2006/main" xmlns:r="http://schemas.openxmlformats.org/officeDocument/2006/relationships" xmlns:p="http://schemas.openxmlformats.org/presentationml/2006/main">
   <p:cSld>
     <p:spTree>
       <p:nvGrpSpPr>
@@ -2501,7 +2417,7 @@
         <p:nvSpPr>
           <p:cNvPr id="2" name="Slide Image Placeholder 1"/>
           <p:cNvSpPr>
-            <a:spLocks noGrp="1"/>
+            <a:spLocks noGrp="1" noRot="1" noChangeAspect="1"/>
           </p:cNvSpPr>
           <p:nvPr>
             <p:ph type="sldImg" idx="2"/>
@@ -2516,7 +2432,7 @@
             <a:spLocks noGrp="1"/>
           </p:cNvSpPr>
           <p:nvPr>
-            <p:ph type="body" idx="3" sz="quarter"/>
+            <p:ph type="body" sz="quarter" idx="3"/>
           </p:nvPr>
         </p:nvSpPr>
         <p:spPr/>
@@ -2528,7 +2444,9 @@
               <a:t>Don't read the table. Let the audience scan it.</a:t>
             </a:r>
           </a:p>
-          <a:p/>
+          <a:p>
+            <a:endParaRPr/>
+          </a:p>
           <a:p>
             <a:r>
               <a:t>What to say while they scan:</a:t>
@@ -2539,7 +2457,9 @@
               <a:t>'Twelve agents. Every one of them is under 200 lines of prompt. Every one has a single responsibility. If you've ever written a CLAUDE.md that's two thousand lines long trying to teach one giant agent every skill — this is the alternative. Small, composable, replaceable.'</a:t>
             </a:r>
           </a:p>
-          <a:p/>
+          <a:p>
+            <a:endParaRPr/>
+          </a:p>
           <a:p>
             <a:r>
               <a:t>Then land the rule at the bottom hard:</a:t>
@@ -2550,13 +2470,17 @@
               <a:t>'If you can't describe what an agent does without using the word and, you have two agents pretending to be one. Split them.'</a:t>
             </a:r>
           </a:p>
-          <a:p/>
+          <a:p>
+            <a:endParaRPr/>
+          </a:p>
           <a:p>
             <a:r>
               <a:t>Call out karen and agent-evaluator specifically as the meta-agents — they review the work of other agents. That's how the system catches itself when individual agents go off the rails.</a:t>
             </a:r>
           </a:p>
-          <a:p/>
+          <a:p>
+            <a:endParaRPr/>
+          </a:p>
           <a:p>
             <a:r>
               <a:t>If asked which agent was hardest to write: orchestrator. Task decomposition is the place where vagueness becomes expensive.</a:t>
@@ -2571,7 +2495,7 @@
             <a:spLocks noGrp="1"/>
           </p:cNvSpPr>
           <p:nvPr>
-            <p:ph type="sldNum" idx="5" sz="quarter"/>
+            <p:ph type="sldNum" sz="quarter" idx="5"/>
           </p:nvPr>
         </p:nvSpPr>
         <p:spPr/>
@@ -2585,7 +2509,7 @@
 </file>
 
 <file path=ppt/notesSlides/notesSlide8.xml><?xml version="1.0" encoding="utf-8"?>
-<p:notes xmlns:a="http://schemas.openxmlformats.org/drawingml/2006/main" xmlns:p="http://schemas.openxmlformats.org/presentationml/2006/main" xmlns:r="http://schemas.openxmlformats.org/officeDocument/2006/relationships">
+<p:notes xmlns:a="http://schemas.openxmlformats.org/drawingml/2006/main" xmlns:r="http://schemas.openxmlformats.org/officeDocument/2006/relationships" xmlns:p="http://schemas.openxmlformats.org/presentationml/2006/main">
   <p:cSld>
     <p:spTree>
       <p:nvGrpSpPr>
@@ -2605,7 +2529,7 @@
         <p:nvSpPr>
           <p:cNvPr id="2" name="Slide Image Placeholder 1"/>
           <p:cNvSpPr>
-            <a:spLocks noGrp="1"/>
+            <a:spLocks noGrp="1" noRot="1" noChangeAspect="1"/>
           </p:cNvSpPr>
           <p:nvPr>
             <p:ph type="sldImg" idx="2"/>
@@ -2620,7 +2544,7 @@
             <a:spLocks noGrp="1"/>
           </p:cNvSpPr>
           <p:nvPr>
-            <p:ph type="body" idx="3" sz="quarter"/>
+            <p:ph type="body" sz="quarter" idx="3"/>
           </p:nvPr>
         </p:nvSpPr>
         <p:spPr/>
@@ -2632,13 +2556,17 @@
               <a:t>This is the slide where security and SRE people lean in. Sell it hard.</a:t>
             </a:r>
           </a:p>
-          <a:p/>
+          <a:p>
+            <a:endParaRPr/>
+          </a:p>
           <a:p>
             <a:r>
               <a:t>For each hook, one sentence:</a:t>
             </a:r>
           </a:p>
-          <a:p/>
+          <a:p>
+            <a:endParaRPr/>
+          </a:p>
           <a:p>
             <a:r>
               <a:t>  - log_tool_call.sh: 'Every Bash command, every file edit, every web fetch — appended as JSONL. When the agent does something weird, you have a transcript.'</a:t>
@@ -2664,7 +2592,9 @@
               <a:t>  - session-autocommit.sh: 'Optional team mode — the agent's progress tracker auto-commits, so reviewers can watch the run live.'</a:t>
             </a:r>
           </a:p>
-          <a:p/>
+          <a:p>
+            <a:endParaRPr/>
+          </a:p>
           <a:p>
             <a:r>
               <a:t>The closer is the key sentence: 'These fire whether the agent remembers them or not.' Hooks live in .claude/settings.json — they're harness-level guarantees, not agent-level intentions. The agent literally cannot bypass them; the runtime executes them.</a:t>
@@ -2679,7 +2609,7 @@
             <a:spLocks noGrp="1"/>
           </p:cNvSpPr>
           <p:nvPr>
-            <p:ph type="sldNum" idx="5" sz="quarter"/>
+            <p:ph type="sldNum" sz="quarter" idx="5"/>
           </p:nvPr>
         </p:nvSpPr>
         <p:spPr/>
@@ -2693,7 +2623,7 @@
 </file>
 
 <file path=ppt/notesSlides/notesSlide9.xml><?xml version="1.0" encoding="utf-8"?>
-<p:notes xmlns:a="http://schemas.openxmlformats.org/drawingml/2006/main" xmlns:p="http://schemas.openxmlformats.org/presentationml/2006/main" xmlns:r="http://schemas.openxmlformats.org/officeDocument/2006/relationships">
+<p:notes xmlns:a="http://schemas.openxmlformats.org/drawingml/2006/main" xmlns:r="http://schemas.openxmlformats.org/officeDocument/2006/relationships" xmlns:p="http://schemas.openxmlformats.org/presentationml/2006/main">
   <p:cSld>
     <p:spTree>
       <p:nvGrpSpPr>
@@ -2713,7 +2643,7 @@
         <p:nvSpPr>
           <p:cNvPr id="2" name="Slide Image Placeholder 1"/>
           <p:cNvSpPr>
-            <a:spLocks noGrp="1"/>
+            <a:spLocks noGrp="1" noRot="1" noChangeAspect="1"/>
           </p:cNvSpPr>
           <p:nvPr>
             <p:ph type="sldImg" idx="2"/>
@@ -2728,7 +2658,7 @@
             <a:spLocks noGrp="1"/>
           </p:cNvSpPr>
           <p:nvPr>
-            <p:ph type="body" idx="3" sz="quarter"/>
+            <p:ph type="body" sz="quarter" idx="3"/>
           </p:nvPr>
         </p:nvSpPr>
         <p:spPr/>
@@ -2740,13 +2670,17 @@
               <a:t>This is the 'trust' slide. You're answering the question: 'How do I know the agent didn't ship garbage?'</a:t>
             </a:r>
           </a:p>
-          <a:p/>
+          <a:p>
+            <a:endParaRPr/>
+          </a:p>
           <a:p>
             <a:r>
               <a:t>Three gates, three answers:</a:t>
             </a:r>
           </a:p>
-          <a:p/>
+          <a:p>
+            <a:endParaRPr/>
+          </a:p>
           <a:p>
             <a:r>
               <a:t>  - karen: 'Did we build what the spec asked for? Not does it run — does it match. She compares the diff to SPEC.md and returns a verdict. If she says PARTIAL or FAIL, the implementation loop runs again with her punch list as context.'</a:t>
@@ -2762,7 +2696,9 @@
               <a:t>  - evaluate-run: 'Did each agent actually do its job well? This is the meta-gate — agent-evaluator scores every agent's output against its own criteria. It's how the harness detects when an individual agent is regressing.'</a:t>
             </a:r>
           </a:p>
-          <a:p/>
+          <a:p>
+            <a:endParaRPr/>
+          </a:p>
           <a:p>
             <a:r>
               <a:t>Close with the line on the slide. No PR opens until all three are happy. That's the contract.</a:t>
@@ -2777,7 +2713,7 @@
             <a:spLocks noGrp="1"/>
           </p:cNvSpPr>
           <p:nvPr>
-            <p:ph type="sldNum" idx="5" sz="quarter"/>
+            <p:ph type="sldNum" sz="quarter" idx="5"/>
           </p:nvPr>
         </p:nvSpPr>
         <p:spPr/>
@@ -2828,10 +2764,9 @@
           <a:lstStyle/>
           <a:p>
             <a:r>
-              <a:rPr lang="en-US" smtClean="0"/>
+              <a:rPr lang="en-US"/>
               <a:t>Click to edit Master title style</a:t>
             </a:r>
-            <a:endParaRPr lang="en-US"/>
           </a:p>
         </p:txBody>
       </p:sp>
@@ -2947,10 +2882,9 @@
           </a:lstStyle>
           <a:p>
             <a:r>
-              <a:rPr lang="en-US" smtClean="0"/>
+              <a:rPr lang="en-US"/>
               <a:t>Click to edit Master subtitle style</a:t>
             </a:r>
-            <a:endParaRPr lang="en-US"/>
           </a:p>
         </p:txBody>
       </p:sp>
@@ -2971,7 +2905,7 @@
           <a:p>
             <a:fld id="{5BCAD085-E8A6-8845-BD4E-CB4CCA059FC4}" type="datetimeFigureOut">
               <a:rPr lang="en-US" smtClean="0"/>
-              <a:t>1/27/13</a:t>
+              <a:t>5/22/26</a:t>
             </a:fld>
             <a:endParaRPr lang="en-US"/>
           </a:p>
@@ -3065,10 +2999,9 @@
           <a:lstStyle/>
           <a:p>
             <a:r>
-              <a:rPr lang="en-US" smtClean="0"/>
+              <a:rPr lang="en-US"/>
               <a:t>Click to edit Master title style</a:t>
             </a:r>
-            <a:endParaRPr lang="en-US"/>
           </a:p>
         </p:txBody>
       </p:sp>
@@ -3089,38 +3022,37 @@
           <a:p>
             <a:pPr lvl="0"/>
             <a:r>
-              <a:rPr lang="en-US" smtClean="0"/>
+              <a:rPr lang="en-US"/>
               <a:t>Click to edit Master text styles</a:t>
             </a:r>
           </a:p>
           <a:p>
             <a:pPr lvl="1"/>
             <a:r>
-              <a:rPr lang="en-US" smtClean="0"/>
+              <a:rPr lang="en-US"/>
               <a:t>Second level</a:t>
             </a:r>
           </a:p>
           <a:p>
             <a:pPr lvl="2"/>
             <a:r>
-              <a:rPr lang="en-US" smtClean="0"/>
+              <a:rPr lang="en-US"/>
               <a:t>Third level</a:t>
             </a:r>
           </a:p>
           <a:p>
             <a:pPr lvl="3"/>
             <a:r>
-              <a:rPr lang="en-US" smtClean="0"/>
+              <a:rPr lang="en-US"/>
               <a:t>Fourth level</a:t>
             </a:r>
           </a:p>
           <a:p>
             <a:pPr lvl="4"/>
             <a:r>
-              <a:rPr lang="en-US" smtClean="0"/>
+              <a:rPr lang="en-US"/>
               <a:t>Fifth level</a:t>
             </a:r>
-            <a:endParaRPr lang="en-US"/>
           </a:p>
         </p:txBody>
       </p:sp>
@@ -3141,7 +3073,7 @@
           <a:p>
             <a:fld id="{5BCAD085-E8A6-8845-BD4E-CB4CCA059FC4}" type="datetimeFigureOut">
               <a:rPr lang="en-US" smtClean="0"/>
-              <a:t>1/27/13</a:t>
+              <a:t>5/22/26</a:t>
             </a:fld>
             <a:endParaRPr lang="en-US"/>
           </a:p>
@@ -3240,10 +3172,9 @@
           <a:lstStyle/>
           <a:p>
             <a:r>
-              <a:rPr lang="en-US" smtClean="0"/>
+              <a:rPr lang="en-US"/>
               <a:t>Click to edit Master title style</a:t>
             </a:r>
-            <a:endParaRPr lang="en-US"/>
           </a:p>
         </p:txBody>
       </p:sp>
@@ -3269,38 +3200,37 @@
           <a:p>
             <a:pPr lvl="0"/>
             <a:r>
-              <a:rPr lang="en-US" smtClean="0"/>
+              <a:rPr lang="en-US"/>
               <a:t>Click to edit Master text styles</a:t>
             </a:r>
           </a:p>
           <a:p>
             <a:pPr lvl="1"/>
             <a:r>
-              <a:rPr lang="en-US" smtClean="0"/>
+              <a:rPr lang="en-US"/>
               <a:t>Second level</a:t>
             </a:r>
           </a:p>
           <a:p>
             <a:pPr lvl="2"/>
             <a:r>
-              <a:rPr lang="en-US" smtClean="0"/>
+              <a:rPr lang="en-US"/>
               <a:t>Third level</a:t>
             </a:r>
           </a:p>
           <a:p>
             <a:pPr lvl="3"/>
             <a:r>
-              <a:rPr lang="en-US" smtClean="0"/>
+              <a:rPr lang="en-US"/>
               <a:t>Fourth level</a:t>
             </a:r>
           </a:p>
           <a:p>
             <a:pPr lvl="4"/>
             <a:r>
-              <a:rPr lang="en-US" smtClean="0"/>
+              <a:rPr lang="en-US"/>
               <a:t>Fifth level</a:t>
             </a:r>
-            <a:endParaRPr lang="en-US"/>
           </a:p>
         </p:txBody>
       </p:sp>
@@ -3321,7 +3251,7 @@
           <a:p>
             <a:fld id="{5BCAD085-E8A6-8845-BD4E-CB4CCA059FC4}" type="datetimeFigureOut">
               <a:rPr lang="en-US" smtClean="0"/>
-              <a:t>1/27/13</a:t>
+              <a:t>5/22/26</a:t>
             </a:fld>
             <a:endParaRPr lang="en-US"/>
           </a:p>
@@ -3415,10 +3345,9 @@
           <a:lstStyle/>
           <a:p>
             <a:r>
-              <a:rPr lang="en-US" smtClean="0"/>
+              <a:rPr lang="en-US"/>
               <a:t>Click to edit Master title style</a:t>
             </a:r>
-            <a:endParaRPr lang="en-US"/>
           </a:p>
         </p:txBody>
       </p:sp>
@@ -3439,38 +3368,37 @@
           <a:p>
             <a:pPr lvl="0"/>
             <a:r>
-              <a:rPr lang="en-US" smtClean="0"/>
+              <a:rPr lang="en-US"/>
               <a:t>Click to edit Master text styles</a:t>
             </a:r>
           </a:p>
           <a:p>
             <a:pPr lvl="1"/>
             <a:r>
-              <a:rPr lang="en-US" smtClean="0"/>
+              <a:rPr lang="en-US"/>
               <a:t>Second level</a:t>
             </a:r>
           </a:p>
           <a:p>
             <a:pPr lvl="2"/>
             <a:r>
-              <a:rPr lang="en-US" smtClean="0"/>
+              <a:rPr lang="en-US"/>
               <a:t>Third level</a:t>
             </a:r>
           </a:p>
           <a:p>
             <a:pPr lvl="3"/>
             <a:r>
-              <a:rPr lang="en-US" smtClean="0"/>
+              <a:rPr lang="en-US"/>
               <a:t>Fourth level</a:t>
             </a:r>
           </a:p>
           <a:p>
             <a:pPr lvl="4"/>
             <a:r>
-              <a:rPr lang="en-US" smtClean="0"/>
+              <a:rPr lang="en-US"/>
               <a:t>Fifth level</a:t>
             </a:r>
-            <a:endParaRPr lang="en-US"/>
           </a:p>
         </p:txBody>
       </p:sp>
@@ -3491,7 +3419,7 @@
           <a:p>
             <a:fld id="{5BCAD085-E8A6-8845-BD4E-CB4CCA059FC4}" type="datetimeFigureOut">
               <a:rPr lang="en-US" smtClean="0"/>
-              <a:t>1/27/13</a:t>
+              <a:t>5/22/26</a:t>
             </a:fld>
             <a:endParaRPr lang="en-US"/>
           </a:p>
@@ -3594,10 +3522,9 @@
           </a:lstStyle>
           <a:p>
             <a:r>
-              <a:rPr lang="en-US" smtClean="0"/>
+              <a:rPr lang="en-US"/>
               <a:t>Click to edit Master title style</a:t>
             </a:r>
-            <a:endParaRPr lang="en-US"/>
           </a:p>
         </p:txBody>
       </p:sp>
@@ -3714,7 +3641,7 @@
           <a:p>
             <a:pPr lvl="0"/>
             <a:r>
-              <a:rPr lang="en-US" smtClean="0"/>
+              <a:rPr lang="en-US"/>
               <a:t>Click to edit Master text styles</a:t>
             </a:r>
           </a:p>
@@ -3737,7 +3664,7 @@
           <a:p>
             <a:fld id="{5BCAD085-E8A6-8845-BD4E-CB4CCA059FC4}" type="datetimeFigureOut">
               <a:rPr lang="en-US" smtClean="0"/>
-              <a:t>1/27/13</a:t>
+              <a:t>5/22/26</a:t>
             </a:fld>
             <a:endParaRPr lang="en-US"/>
           </a:p>
@@ -3831,10 +3758,9 @@
           <a:lstStyle/>
           <a:p>
             <a:r>
-              <a:rPr lang="en-US" smtClean="0"/>
+              <a:rPr lang="en-US"/>
               <a:t>Click to edit Master title style</a:t>
             </a:r>
-            <a:endParaRPr lang="en-US"/>
           </a:p>
         </p:txBody>
       </p:sp>
@@ -3888,38 +3814,37 @@
           <a:p>
             <a:pPr lvl="0"/>
             <a:r>
-              <a:rPr lang="en-US" smtClean="0"/>
+              <a:rPr lang="en-US"/>
               <a:t>Click to edit Master text styles</a:t>
             </a:r>
           </a:p>
           <a:p>
             <a:pPr lvl="1"/>
             <a:r>
-              <a:rPr lang="en-US" smtClean="0"/>
+              <a:rPr lang="en-US"/>
               <a:t>Second level</a:t>
             </a:r>
           </a:p>
           <a:p>
             <a:pPr lvl="2"/>
             <a:r>
-              <a:rPr lang="en-US" smtClean="0"/>
+              <a:rPr lang="en-US"/>
               <a:t>Third level</a:t>
             </a:r>
           </a:p>
           <a:p>
             <a:pPr lvl="3"/>
             <a:r>
-              <a:rPr lang="en-US" smtClean="0"/>
+              <a:rPr lang="en-US"/>
               <a:t>Fourth level</a:t>
             </a:r>
           </a:p>
           <a:p>
             <a:pPr lvl="4"/>
             <a:r>
-              <a:rPr lang="en-US" smtClean="0"/>
+              <a:rPr lang="en-US"/>
               <a:t>Fifth level</a:t>
             </a:r>
-            <a:endParaRPr lang="en-US"/>
           </a:p>
         </p:txBody>
       </p:sp>
@@ -3973,38 +3898,37 @@
           <a:p>
             <a:pPr lvl="0"/>
             <a:r>
-              <a:rPr lang="en-US" smtClean="0"/>
+              <a:rPr lang="en-US"/>
               <a:t>Click to edit Master text styles</a:t>
             </a:r>
           </a:p>
           <a:p>
             <a:pPr lvl="1"/>
             <a:r>
-              <a:rPr lang="en-US" smtClean="0"/>
+              <a:rPr lang="en-US"/>
               <a:t>Second level</a:t>
             </a:r>
           </a:p>
           <a:p>
             <a:pPr lvl="2"/>
             <a:r>
-              <a:rPr lang="en-US" smtClean="0"/>
+              <a:rPr lang="en-US"/>
               <a:t>Third level</a:t>
             </a:r>
           </a:p>
           <a:p>
             <a:pPr lvl="3"/>
             <a:r>
-              <a:rPr lang="en-US" smtClean="0"/>
+              <a:rPr lang="en-US"/>
               <a:t>Fourth level</a:t>
             </a:r>
           </a:p>
           <a:p>
             <a:pPr lvl="4"/>
             <a:r>
-              <a:rPr lang="en-US" smtClean="0"/>
+              <a:rPr lang="en-US"/>
               <a:t>Fifth level</a:t>
             </a:r>
-            <a:endParaRPr lang="en-US"/>
           </a:p>
         </p:txBody>
       </p:sp>
@@ -4025,7 +3949,7 @@
           <a:p>
             <a:fld id="{5BCAD085-E8A6-8845-BD4E-CB4CCA059FC4}" type="datetimeFigureOut">
               <a:rPr lang="en-US" smtClean="0"/>
-              <a:t>1/27/13</a:t>
+              <a:t>5/22/26</a:t>
             </a:fld>
             <a:endParaRPr lang="en-US"/>
           </a:p>
@@ -4123,10 +4047,9 @@
           </a:lstStyle>
           <a:p>
             <a:r>
-              <a:rPr lang="en-US" smtClean="0"/>
+              <a:rPr lang="en-US"/>
               <a:t>Click to edit Master title style</a:t>
             </a:r>
-            <a:endParaRPr lang="en-US"/>
           </a:p>
         </p:txBody>
       </p:sp>
@@ -4189,7 +4112,7 @@
           <a:p>
             <a:pPr lvl="0"/>
             <a:r>
-              <a:rPr lang="en-US" smtClean="0"/>
+              <a:rPr lang="en-US"/>
               <a:t>Click to edit Master text styles</a:t>
             </a:r>
           </a:p>
@@ -4245,38 +4168,37 @@
           <a:p>
             <a:pPr lvl="0"/>
             <a:r>
-              <a:rPr lang="en-US" smtClean="0"/>
+              <a:rPr lang="en-US"/>
               <a:t>Click to edit Master text styles</a:t>
             </a:r>
           </a:p>
           <a:p>
             <a:pPr lvl="1"/>
             <a:r>
-              <a:rPr lang="en-US" smtClean="0"/>
+              <a:rPr lang="en-US"/>
               <a:t>Second level</a:t>
             </a:r>
           </a:p>
           <a:p>
             <a:pPr lvl="2"/>
             <a:r>
-              <a:rPr lang="en-US" smtClean="0"/>
+              <a:rPr lang="en-US"/>
               <a:t>Third level</a:t>
             </a:r>
           </a:p>
           <a:p>
             <a:pPr lvl="3"/>
             <a:r>
-              <a:rPr lang="en-US" smtClean="0"/>
+              <a:rPr lang="en-US"/>
               <a:t>Fourth level</a:t>
             </a:r>
           </a:p>
           <a:p>
             <a:pPr lvl="4"/>
             <a:r>
-              <a:rPr lang="en-US" smtClean="0"/>
+              <a:rPr lang="en-US"/>
               <a:t>Fifth level</a:t>
             </a:r>
-            <a:endParaRPr lang="en-US"/>
           </a:p>
         </p:txBody>
       </p:sp>
@@ -4339,7 +4261,7 @@
           <a:p>
             <a:pPr lvl="0"/>
             <a:r>
-              <a:rPr lang="en-US" smtClean="0"/>
+              <a:rPr lang="en-US"/>
               <a:t>Click to edit Master text styles</a:t>
             </a:r>
           </a:p>
@@ -4395,38 +4317,37 @@
           <a:p>
             <a:pPr lvl="0"/>
             <a:r>
-              <a:rPr lang="en-US" smtClean="0"/>
+              <a:rPr lang="en-US"/>
               <a:t>Click to edit Master text styles</a:t>
             </a:r>
           </a:p>
           <a:p>
             <a:pPr lvl="1"/>
             <a:r>
-              <a:rPr lang="en-US" smtClean="0"/>
+              <a:rPr lang="en-US"/>
               <a:t>Second level</a:t>
             </a:r>
           </a:p>
           <a:p>
             <a:pPr lvl="2"/>
             <a:r>
-              <a:rPr lang="en-US" smtClean="0"/>
+              <a:rPr lang="en-US"/>
               <a:t>Third level</a:t>
             </a:r>
           </a:p>
           <a:p>
             <a:pPr lvl="3"/>
             <a:r>
-              <a:rPr lang="en-US" smtClean="0"/>
+              <a:rPr lang="en-US"/>
               <a:t>Fourth level</a:t>
             </a:r>
           </a:p>
           <a:p>
             <a:pPr lvl="4"/>
             <a:r>
-              <a:rPr lang="en-US" smtClean="0"/>
+              <a:rPr lang="en-US"/>
               <a:t>Fifth level</a:t>
             </a:r>
-            <a:endParaRPr lang="en-US"/>
           </a:p>
         </p:txBody>
       </p:sp>
@@ -4447,7 +4368,7 @@
           <a:p>
             <a:fld id="{5BCAD085-E8A6-8845-BD4E-CB4CCA059FC4}" type="datetimeFigureOut">
               <a:rPr lang="en-US" smtClean="0"/>
-              <a:t>1/27/13</a:t>
+              <a:t>5/22/26</a:t>
             </a:fld>
             <a:endParaRPr lang="en-US"/>
           </a:p>
@@ -4541,10 +4462,9 @@
           <a:lstStyle/>
           <a:p>
             <a:r>
-              <a:rPr lang="en-US" smtClean="0"/>
+              <a:rPr lang="en-US"/>
               <a:t>Click to edit Master title style</a:t>
             </a:r>
-            <a:endParaRPr lang="en-US"/>
           </a:p>
         </p:txBody>
       </p:sp>
@@ -4565,7 +4485,7 @@
           <a:p>
             <a:fld id="{5BCAD085-E8A6-8845-BD4E-CB4CCA059FC4}" type="datetimeFigureOut">
               <a:rPr lang="en-US" smtClean="0"/>
-              <a:t>1/27/13</a:t>
+              <a:t>5/22/26</a:t>
             </a:fld>
             <a:endParaRPr lang="en-US"/>
           </a:p>
@@ -4660,7 +4580,7 @@
           <a:p>
             <a:fld id="{5BCAD085-E8A6-8845-BD4E-CB4CCA059FC4}" type="datetimeFigureOut">
               <a:rPr lang="en-US" smtClean="0"/>
-              <a:t>1/27/13</a:t>
+              <a:t>5/22/26</a:t>
             </a:fld>
             <a:endParaRPr lang="en-US"/>
           </a:p>
@@ -4763,10 +4683,9 @@
           </a:lstStyle>
           <a:p>
             <a:r>
-              <a:rPr lang="en-US" smtClean="0"/>
+              <a:rPr lang="en-US"/>
               <a:t>Click to edit Master title style</a:t>
             </a:r>
-            <a:endParaRPr lang="en-US"/>
           </a:p>
         </p:txBody>
       </p:sp>
@@ -4820,38 +4739,37 @@
           <a:p>
             <a:pPr lvl="0"/>
             <a:r>
-              <a:rPr lang="en-US" smtClean="0"/>
+              <a:rPr lang="en-US"/>
               <a:t>Click to edit Master text styles</a:t>
             </a:r>
           </a:p>
           <a:p>
             <a:pPr lvl="1"/>
             <a:r>
-              <a:rPr lang="en-US" smtClean="0"/>
+              <a:rPr lang="en-US"/>
               <a:t>Second level</a:t>
             </a:r>
           </a:p>
           <a:p>
             <a:pPr lvl="2"/>
             <a:r>
-              <a:rPr lang="en-US" smtClean="0"/>
+              <a:rPr lang="en-US"/>
               <a:t>Third level</a:t>
             </a:r>
           </a:p>
           <a:p>
             <a:pPr lvl="3"/>
             <a:r>
-              <a:rPr lang="en-US" smtClean="0"/>
+              <a:rPr lang="en-US"/>
               <a:t>Fourth level</a:t>
             </a:r>
           </a:p>
           <a:p>
             <a:pPr lvl="4"/>
             <a:r>
-              <a:rPr lang="en-US" smtClean="0"/>
+              <a:rPr lang="en-US"/>
               <a:t>Fifth level</a:t>
             </a:r>
-            <a:endParaRPr lang="en-US"/>
           </a:p>
         </p:txBody>
       </p:sp>
@@ -4914,7 +4832,7 @@
           <a:p>
             <a:pPr lvl="0"/>
             <a:r>
-              <a:rPr lang="en-US" smtClean="0"/>
+              <a:rPr lang="en-US"/>
               <a:t>Click to edit Master text styles</a:t>
             </a:r>
           </a:p>
@@ -4937,7 +4855,7 @@
           <a:p>
             <a:fld id="{5BCAD085-E8A6-8845-BD4E-CB4CCA059FC4}" type="datetimeFigureOut">
               <a:rPr lang="en-US" smtClean="0"/>
-              <a:t>1/27/13</a:t>
+              <a:t>5/22/26</a:t>
             </a:fld>
             <a:endParaRPr lang="en-US"/>
           </a:p>
@@ -5040,10 +4958,9 @@
           </a:lstStyle>
           <a:p>
             <a:r>
-              <a:rPr lang="en-US" smtClean="0"/>
+              <a:rPr lang="en-US"/>
               <a:t>Click to edit Master title style</a:t>
             </a:r>
-            <a:endParaRPr lang="en-US"/>
           </a:p>
         </p:txBody>
       </p:sp>
@@ -5167,7 +5084,7 @@
           <a:p>
             <a:pPr lvl="0"/>
             <a:r>
-              <a:rPr lang="en-US" smtClean="0"/>
+              <a:rPr lang="en-US"/>
               <a:t>Click to edit Master text styles</a:t>
             </a:r>
           </a:p>
@@ -5190,7 +5107,7 @@
           <a:p>
             <a:fld id="{5BCAD085-E8A6-8845-BD4E-CB4CCA059FC4}" type="datetimeFigureOut">
               <a:rPr lang="en-US" smtClean="0"/>
-              <a:t>1/27/13</a:t>
+              <a:t>5/22/26</a:t>
             </a:fld>
             <a:endParaRPr lang="en-US"/>
           </a:p>
@@ -5299,10 +5216,9 @@
           <a:lstStyle/>
           <a:p>
             <a:r>
-              <a:rPr lang="en-US" smtClean="0"/>
+              <a:rPr lang="en-US"/>
               <a:t>Click to edit Master title style</a:t>
             </a:r>
-            <a:endParaRPr lang="en-US"/>
           </a:p>
         </p:txBody>
       </p:sp>
@@ -5333,38 +5249,37 @@
           <a:p>
             <a:pPr lvl="0"/>
             <a:r>
-              <a:rPr lang="en-US" smtClean="0"/>
+              <a:rPr lang="en-US"/>
               <a:t>Click to edit Master text styles</a:t>
             </a:r>
           </a:p>
           <a:p>
             <a:pPr lvl="1"/>
             <a:r>
-              <a:rPr lang="en-US" smtClean="0"/>
+              <a:rPr lang="en-US"/>
               <a:t>Second level</a:t>
             </a:r>
           </a:p>
           <a:p>
             <a:pPr lvl="2"/>
             <a:r>
-              <a:rPr lang="en-US" smtClean="0"/>
+              <a:rPr lang="en-US"/>
               <a:t>Third level</a:t>
             </a:r>
           </a:p>
           <a:p>
             <a:pPr lvl="3"/>
             <a:r>
-              <a:rPr lang="en-US" smtClean="0"/>
+              <a:rPr lang="en-US"/>
               <a:t>Fourth level</a:t>
             </a:r>
           </a:p>
           <a:p>
             <a:pPr lvl="4"/>
             <a:r>
-              <a:rPr lang="en-US" smtClean="0"/>
+              <a:rPr lang="en-US"/>
               <a:t>Fifth level</a:t>
             </a:r>
-            <a:endParaRPr lang="en-US"/>
           </a:p>
         </p:txBody>
       </p:sp>
@@ -5403,7 +5318,7 @@
           <a:p>
             <a:fld id="{5BCAD085-E8A6-8845-BD4E-CB4CCA059FC4}" type="datetimeFigureOut">
               <a:rPr lang="en-US" smtClean="0"/>
-              <a:t>1/27/13</a:t>
+              <a:t>5/22/26</a:t>
             </a:fld>
             <a:endParaRPr lang="en-US"/>
           </a:p>
@@ -5762,7 +5677,7 @@
 </file>
 
 <file path=ppt/slides/slide1.xml><?xml version="1.0" encoding="utf-8"?>
-<p:sld xmlns:a="http://schemas.openxmlformats.org/drawingml/2006/main" xmlns:p="http://schemas.openxmlformats.org/presentationml/2006/main" xmlns:r="http://schemas.openxmlformats.org/officeDocument/2006/relationships">
+<p:sld xmlns:a="http://schemas.openxmlformats.org/drawingml/2006/main" xmlns:r="http://schemas.openxmlformats.org/officeDocument/2006/relationships" xmlns:p="http://schemas.openxmlformats.org/presentationml/2006/main">
   <p:cSld>
     <p:spTree>
       <p:nvGrpSpPr>
@@ -5770,7 +5685,14 @@
         <p:cNvGrpSpPr/>
         <p:nvPr/>
       </p:nvGrpSpPr>
-      <p:grpSpPr/>
+      <p:grpSpPr>
+        <a:xfrm>
+          <a:off x="0" y="0"/>
+          <a:ext cx="0" cy="0"/>
+          <a:chOff x="0" y="0"/>
+          <a:chExt cx="0" cy="0"/>
+        </a:xfrm>
+      </p:grpSpPr>
       <p:sp>
         <p:nvSpPr>
           <p:cNvPr id="2" name="Rectangle 1"/>
@@ -5812,6 +5734,7 @@
           <a:lstStyle/>
           <a:p>
             <a:pPr algn="ctr"/>
+            <a:endParaRPr/>
           </a:p>
         </p:txBody>
       </p:sp>
@@ -5832,7 +5755,7 @@
           <a:noFill/>
         </p:spPr>
         <p:txBody>
-          <a:bodyPr wrap="square" lIns="45720" rIns="45720" tIns="18288" bIns="18288">
+          <a:bodyPr wrap="square" lIns="45720" tIns="18288" rIns="45720" bIns="18288">
             <a:spAutoFit/>
           </a:bodyPr>
           <a:lstStyle/>
@@ -5867,7 +5790,7 @@
           <a:noFill/>
         </p:spPr>
         <p:txBody>
-          <a:bodyPr wrap="square" lIns="45720" rIns="45720" tIns="18288" bIns="18288">
+          <a:bodyPr wrap="square" lIns="45720" tIns="18288" rIns="45720" bIns="18288">
             <a:spAutoFit/>
           </a:bodyPr>
           <a:lstStyle/>
@@ -5928,6 +5851,7 @@
           <a:lstStyle/>
           <a:p>
             <a:pPr algn="ctr"/>
+            <a:endParaRPr/>
           </a:p>
         </p:txBody>
       </p:sp>
@@ -5948,7 +5872,7 @@
           <a:noFill/>
         </p:spPr>
         <p:txBody>
-          <a:bodyPr wrap="square" lIns="45720" rIns="45720" tIns="18288" bIns="18288">
+          <a:bodyPr wrap="square" lIns="45720" tIns="18288" rIns="45720" bIns="18288">
             <a:spAutoFit/>
           </a:bodyPr>
           <a:lstStyle/>
@@ -5983,7 +5907,7 @@
           <a:noFill/>
         </p:spPr>
         <p:txBody>
-          <a:bodyPr wrap="square" lIns="45720" rIns="45720" tIns="18288" bIns="18288">
+          <a:bodyPr wrap="square" lIns="45720" tIns="18288" rIns="45720" bIns="18288">
             <a:spAutoFit/>
           </a:bodyPr>
           <a:lstStyle/>
@@ -6010,7 +5934,7 @@
 </file>
 
 <file path=ppt/slides/slide10.xml><?xml version="1.0" encoding="utf-8"?>
-<p:sld xmlns:a="http://schemas.openxmlformats.org/drawingml/2006/main" xmlns:p="http://schemas.openxmlformats.org/presentationml/2006/main" xmlns:r="http://schemas.openxmlformats.org/officeDocument/2006/relationships">
+<p:sld xmlns:a="http://schemas.openxmlformats.org/drawingml/2006/main" xmlns:r="http://schemas.openxmlformats.org/officeDocument/2006/relationships" xmlns:p="http://schemas.openxmlformats.org/presentationml/2006/main">
   <p:cSld>
     <p:spTree>
       <p:nvGrpSpPr>
@@ -6018,7 +5942,14 @@
         <p:cNvGrpSpPr/>
         <p:nvPr/>
       </p:nvGrpSpPr>
-      <p:grpSpPr/>
+      <p:grpSpPr>
+        <a:xfrm>
+          <a:off x="0" y="0"/>
+          <a:ext cx="0" cy="0"/>
+          <a:chOff x="0" y="0"/>
+          <a:chExt cx="0" cy="0"/>
+        </a:xfrm>
+      </p:grpSpPr>
       <p:sp>
         <p:nvSpPr>
           <p:cNvPr id="2" name="Rectangle 1"/>
@@ -6060,6 +5991,7 @@
           <a:lstStyle/>
           <a:p>
             <a:pPr algn="ctr"/>
+            <a:endParaRPr/>
           </a:p>
         </p:txBody>
       </p:sp>
@@ -6104,6 +6036,7 @@
           <a:lstStyle/>
           <a:p>
             <a:pPr algn="ctr"/>
+            <a:endParaRPr/>
           </a:p>
         </p:txBody>
       </p:sp>
@@ -6124,7 +6057,7 @@
           <a:noFill/>
         </p:spPr>
         <p:txBody>
-          <a:bodyPr wrap="square" lIns="45720" rIns="45720" tIns="18288" bIns="18288">
+          <a:bodyPr wrap="square" lIns="45720" tIns="18288" rIns="45720" bIns="18288">
             <a:spAutoFit/>
           </a:bodyPr>
           <a:lstStyle/>
@@ -6159,7 +6092,7 @@
           <a:noFill/>
         </p:spPr>
         <p:txBody>
-          <a:bodyPr wrap="square" lIns="45720" rIns="45720" tIns="18288" bIns="18288">
+          <a:bodyPr wrap="square" lIns="45720" tIns="18288" rIns="45720" bIns="18288">
             <a:spAutoFit/>
           </a:bodyPr>
           <a:lstStyle/>
@@ -6220,6 +6153,7 @@
           <a:lstStyle/>
           <a:p>
             <a:pPr algn="ctr"/>
+            <a:endParaRPr/>
           </a:p>
         </p:txBody>
       </p:sp>
@@ -6240,7 +6174,7 @@
           <a:noFill/>
         </p:spPr>
         <p:txBody>
-          <a:bodyPr wrap="square" lIns="45720" rIns="45720" tIns="18288" bIns="18288">
+          <a:bodyPr wrap="square" lIns="45720" tIns="18288" rIns="45720" bIns="18288">
             <a:spAutoFit/>
           </a:bodyPr>
           <a:lstStyle/>
@@ -6409,6 +6343,7 @@
           <a:lstStyle/>
           <a:p>
             <a:pPr algn="ctr"/>
+            <a:endParaRPr/>
           </a:p>
         </p:txBody>
       </p:sp>
@@ -6429,7 +6364,7 @@
           <a:noFill/>
         </p:spPr>
         <p:txBody>
-          <a:bodyPr wrap="square" lIns="45720" rIns="45720" tIns="18288" bIns="18288">
+          <a:bodyPr wrap="square" lIns="45720" tIns="18288" rIns="45720" bIns="18288">
             <a:spAutoFit/>
           </a:bodyPr>
           <a:lstStyle/>
@@ -6464,7 +6399,7 @@
           <a:noFill/>
         </p:spPr>
         <p:txBody>
-          <a:bodyPr wrap="square" lIns="45720" rIns="45720" tIns="18288" bIns="18288">
+          <a:bodyPr wrap="square" lIns="45720" tIns="18288" rIns="45720" bIns="18288">
             <a:spAutoFit/>
           </a:bodyPr>
           <a:lstStyle/>
@@ -6525,6 +6460,7 @@
           <a:lstStyle/>
           <a:p>
             <a:pPr algn="ctr"/>
+            <a:endParaRPr/>
           </a:p>
         </p:txBody>
       </p:sp>
@@ -6545,7 +6481,7 @@
           <a:noFill/>
         </p:spPr>
         <p:txBody>
-          <a:bodyPr wrap="square" lIns="45720" rIns="45720" tIns="18288" bIns="18288">
+          <a:bodyPr wrap="square" lIns="45720" tIns="18288" rIns="45720" bIns="18288">
             <a:spAutoFit/>
           </a:bodyPr>
           <a:lstStyle/>
@@ -6580,7 +6516,7 @@
           <a:noFill/>
         </p:spPr>
         <p:txBody>
-          <a:bodyPr wrap="square" lIns="45720" rIns="45720" tIns="18288" bIns="18288">
+          <a:bodyPr wrap="square" lIns="45720" tIns="18288" rIns="45720" bIns="18288">
             <a:spAutoFit/>
           </a:bodyPr>
           <a:lstStyle/>
@@ -6641,6 +6577,7 @@
           <a:lstStyle/>
           <a:p>
             <a:pPr algn="ctr"/>
+            <a:endParaRPr/>
           </a:p>
         </p:txBody>
       </p:sp>
@@ -6661,7 +6598,7 @@
           <a:noFill/>
         </p:spPr>
         <p:txBody>
-          <a:bodyPr wrap="square" lIns="45720" rIns="45720" tIns="18288" bIns="18288">
+          <a:bodyPr wrap="square" lIns="45720" tIns="18288" rIns="45720" bIns="18288">
             <a:spAutoFit/>
           </a:bodyPr>
           <a:lstStyle/>
@@ -6696,7 +6633,7 @@
           <a:noFill/>
         </p:spPr>
         <p:txBody>
-          <a:bodyPr wrap="square" lIns="45720" rIns="45720" tIns="18288" bIns="18288">
+          <a:bodyPr wrap="square" lIns="45720" tIns="18288" rIns="45720" bIns="18288">
             <a:spAutoFit/>
           </a:bodyPr>
           <a:lstStyle/>
@@ -6731,7 +6668,7 @@
           <a:noFill/>
         </p:spPr>
         <p:txBody>
-          <a:bodyPr wrap="square" lIns="45720" rIns="45720" tIns="18288" bIns="18288">
+          <a:bodyPr wrap="square" lIns="45720" tIns="18288" rIns="45720" bIns="18288">
             <a:spAutoFit/>
           </a:bodyPr>
           <a:lstStyle/>
@@ -6766,7 +6703,7 @@
           <a:noFill/>
         </p:spPr>
         <p:txBody>
-          <a:bodyPr wrap="square" lIns="45720" rIns="45720" tIns="18288" bIns="18288">
+          <a:bodyPr wrap="square" lIns="45720" tIns="18288" rIns="45720" bIns="18288">
             <a:spAutoFit/>
           </a:bodyPr>
           <a:lstStyle/>
@@ -6793,7 +6730,7 @@
 </file>
 
 <file path=ppt/slides/slide11.xml><?xml version="1.0" encoding="utf-8"?>
-<p:sld xmlns:a="http://schemas.openxmlformats.org/drawingml/2006/main" xmlns:p="http://schemas.openxmlformats.org/presentationml/2006/main" xmlns:r="http://schemas.openxmlformats.org/officeDocument/2006/relationships">
+<p:sld xmlns:a="http://schemas.openxmlformats.org/drawingml/2006/main" xmlns:r="http://schemas.openxmlformats.org/officeDocument/2006/relationships" xmlns:p="http://schemas.openxmlformats.org/presentationml/2006/main">
   <p:cSld>
     <p:spTree>
       <p:nvGrpSpPr>
@@ -6801,7 +6738,14 @@
         <p:cNvGrpSpPr/>
         <p:nvPr/>
       </p:nvGrpSpPr>
-      <p:grpSpPr/>
+      <p:grpSpPr>
+        <a:xfrm>
+          <a:off x="0" y="0"/>
+          <a:ext cx="0" cy="0"/>
+          <a:chOff x="0" y="0"/>
+          <a:chExt cx="0" cy="0"/>
+        </a:xfrm>
+      </p:grpSpPr>
       <p:sp>
         <p:nvSpPr>
           <p:cNvPr id="2" name="Rectangle 1"/>
@@ -6843,6 +6787,7 @@
           <a:lstStyle/>
           <a:p>
             <a:pPr algn="ctr"/>
+            <a:endParaRPr/>
           </a:p>
         </p:txBody>
       </p:sp>
@@ -6887,6 +6832,7 @@
           <a:lstStyle/>
           <a:p>
             <a:pPr algn="ctr"/>
+            <a:endParaRPr/>
           </a:p>
         </p:txBody>
       </p:sp>
@@ -6907,7 +6853,7 @@
           <a:noFill/>
         </p:spPr>
         <p:txBody>
-          <a:bodyPr wrap="square" lIns="45720" rIns="45720" tIns="18288" bIns="18288">
+          <a:bodyPr wrap="square" lIns="45720" tIns="18288" rIns="45720" bIns="18288">
             <a:spAutoFit/>
           </a:bodyPr>
           <a:lstStyle/>
@@ -6942,7 +6888,7 @@
           <a:noFill/>
         </p:spPr>
         <p:txBody>
-          <a:bodyPr wrap="square" lIns="45720" rIns="45720" tIns="18288" bIns="18288">
+          <a:bodyPr wrap="square" lIns="45720" tIns="18288" rIns="45720" bIns="18288">
             <a:spAutoFit/>
           </a:bodyPr>
           <a:lstStyle/>
@@ -6997,7 +6943,7 @@
           </a:fontRef>
         </p:style>
         <p:txBody>
-          <a:bodyPr rtlCol="0" anchor="ctr" lIns="0" rIns="0" tIns="0" bIns="0"/>
+          <a:bodyPr lIns="0" tIns="0" rIns="0" bIns="0" rtlCol="0" anchor="ctr"/>
           <a:lstStyle/>
           <a:p>
             <a:pPr algn="ctr"/>
@@ -7029,7 +6975,7 @@
           <a:noFill/>
         </p:spPr>
         <p:txBody>
-          <a:bodyPr wrap="square" lIns="45720" rIns="45720" tIns="18288" bIns="18288">
+          <a:bodyPr wrap="square" lIns="45720" tIns="18288" rIns="45720" bIns="18288">
             <a:spAutoFit/>
           </a:bodyPr>
           <a:lstStyle/>
@@ -7084,7 +7030,7 @@
           </a:fontRef>
         </p:style>
         <p:txBody>
-          <a:bodyPr rtlCol="0" anchor="ctr" lIns="0" rIns="0" tIns="0" bIns="0"/>
+          <a:bodyPr lIns="0" tIns="0" rIns="0" bIns="0" rtlCol="0" anchor="ctr"/>
           <a:lstStyle/>
           <a:p>
             <a:pPr algn="ctr"/>
@@ -7116,7 +7062,7 @@
           <a:noFill/>
         </p:spPr>
         <p:txBody>
-          <a:bodyPr wrap="square" lIns="45720" rIns="45720" tIns="18288" bIns="18288">
+          <a:bodyPr wrap="square" lIns="45720" tIns="18288" rIns="45720" bIns="18288">
             <a:spAutoFit/>
           </a:bodyPr>
           <a:lstStyle/>
@@ -7171,7 +7117,7 @@
           </a:fontRef>
         </p:style>
         <p:txBody>
-          <a:bodyPr rtlCol="0" anchor="ctr" lIns="0" rIns="0" tIns="0" bIns="0"/>
+          <a:bodyPr lIns="0" tIns="0" rIns="0" bIns="0" rtlCol="0" anchor="ctr"/>
           <a:lstStyle/>
           <a:p>
             <a:pPr algn="ctr"/>
@@ -7203,7 +7149,7 @@
           <a:noFill/>
         </p:spPr>
         <p:txBody>
-          <a:bodyPr wrap="square" lIns="45720" rIns="45720" tIns="18288" bIns="18288">
+          <a:bodyPr wrap="square" lIns="45720" tIns="18288" rIns="45720" bIns="18288">
             <a:spAutoFit/>
           </a:bodyPr>
           <a:lstStyle/>
@@ -7258,7 +7204,7 @@
           </a:fontRef>
         </p:style>
         <p:txBody>
-          <a:bodyPr rtlCol="0" anchor="ctr" lIns="0" rIns="0" tIns="0" bIns="0"/>
+          <a:bodyPr lIns="0" tIns="0" rIns="0" bIns="0" rtlCol="0" anchor="ctr"/>
           <a:lstStyle/>
           <a:p>
             <a:pPr algn="ctr"/>
@@ -7290,7 +7236,7 @@
           <a:noFill/>
         </p:spPr>
         <p:txBody>
-          <a:bodyPr wrap="square" lIns="45720" rIns="45720" tIns="18288" bIns="18288">
+          <a:bodyPr wrap="square" lIns="45720" tIns="18288" rIns="45720" bIns="18288">
             <a:spAutoFit/>
           </a:bodyPr>
           <a:lstStyle/>
@@ -7345,7 +7291,7 @@
           </a:fontRef>
         </p:style>
         <p:txBody>
-          <a:bodyPr rtlCol="0" anchor="ctr" lIns="0" rIns="0" tIns="0" bIns="0"/>
+          <a:bodyPr lIns="0" tIns="0" rIns="0" bIns="0" rtlCol="0" anchor="ctr"/>
           <a:lstStyle/>
           <a:p>
             <a:pPr algn="ctr"/>
@@ -7377,7 +7323,7 @@
           <a:noFill/>
         </p:spPr>
         <p:txBody>
-          <a:bodyPr wrap="square" lIns="45720" rIns="45720" tIns="18288" bIns="18288">
+          <a:bodyPr wrap="square" lIns="45720" tIns="18288" rIns="45720" bIns="18288">
             <a:spAutoFit/>
           </a:bodyPr>
           <a:lstStyle/>
@@ -7438,6 +7384,7 @@
           <a:lstStyle/>
           <a:p>
             <a:pPr algn="ctr"/>
+            <a:endParaRPr/>
           </a:p>
         </p:txBody>
       </p:sp>
@@ -7501,7 +7448,7 @@
           <a:noFill/>
         </p:spPr>
         <p:txBody>
-          <a:bodyPr wrap="square" lIns="45720" rIns="45720" tIns="18288" bIns="18288">
+          <a:bodyPr wrap="square" lIns="45720" tIns="18288" rIns="45720" bIns="18288">
             <a:spAutoFit/>
           </a:bodyPr>
           <a:lstStyle/>
@@ -7536,7 +7483,7 @@
           <a:noFill/>
         </p:spPr>
         <p:txBody>
-          <a:bodyPr wrap="square" lIns="45720" rIns="45720" tIns="18288" bIns="18288">
+          <a:bodyPr wrap="square" lIns="45720" tIns="18288" rIns="45720" bIns="18288">
             <a:spAutoFit/>
           </a:bodyPr>
           <a:lstStyle/>
@@ -7563,7 +7510,7 @@
 </file>
 
 <file path=ppt/slides/slide12.xml><?xml version="1.0" encoding="utf-8"?>
-<p:sld xmlns:a="http://schemas.openxmlformats.org/drawingml/2006/main" xmlns:p="http://schemas.openxmlformats.org/presentationml/2006/main" xmlns:r="http://schemas.openxmlformats.org/officeDocument/2006/relationships">
+<p:sld xmlns:a="http://schemas.openxmlformats.org/drawingml/2006/main" xmlns:r="http://schemas.openxmlformats.org/officeDocument/2006/relationships" xmlns:p="http://schemas.openxmlformats.org/presentationml/2006/main">
   <p:cSld>
     <p:spTree>
       <p:nvGrpSpPr>
@@ -7571,7 +7518,14 @@
         <p:cNvGrpSpPr/>
         <p:nvPr/>
       </p:nvGrpSpPr>
-      <p:grpSpPr/>
+      <p:grpSpPr>
+        <a:xfrm>
+          <a:off x="0" y="0"/>
+          <a:ext cx="0" cy="0"/>
+          <a:chOff x="0" y="0"/>
+          <a:chExt cx="0" cy="0"/>
+        </a:xfrm>
+      </p:grpSpPr>
       <p:sp>
         <p:nvSpPr>
           <p:cNvPr id="2" name="Rectangle 1"/>
@@ -7613,6 +7567,7 @@
           <a:lstStyle/>
           <a:p>
             <a:pPr algn="ctr"/>
+            <a:endParaRPr/>
           </a:p>
         </p:txBody>
       </p:sp>
@@ -7657,6 +7612,7 @@
           <a:lstStyle/>
           <a:p>
             <a:pPr algn="ctr"/>
+            <a:endParaRPr/>
           </a:p>
         </p:txBody>
       </p:sp>
@@ -7677,7 +7633,7 @@
           <a:noFill/>
         </p:spPr>
         <p:txBody>
-          <a:bodyPr wrap="square" lIns="45720" rIns="45720" tIns="18288" bIns="18288">
+          <a:bodyPr wrap="square" lIns="45720" tIns="18288" rIns="45720" bIns="18288">
             <a:spAutoFit/>
           </a:bodyPr>
           <a:lstStyle/>
@@ -7714,14 +7670,32 @@
                 <a:tableStyleId>{5C22544A-7EE6-4342-B048-85BDC9FD1C3A}</a:tableStyleId>
               </a:tblPr>
               <a:tblGrid>
-                <a:gridCol w="3749040"/>
-                <a:gridCol w="3749040"/>
-                <a:gridCol w="3749040"/>
+                <a:gridCol w="3749040">
+                  <a:extLst>
+                    <a:ext uri="{9D8B030D-6E8A-4147-A177-3AD203B41FA5}">
+                      <a16:colId xmlns:a16="http://schemas.microsoft.com/office/drawing/2014/main" val="20000"/>
+                    </a:ext>
+                  </a:extLst>
+                </a:gridCol>
+                <a:gridCol w="3749040">
+                  <a:extLst>
+                    <a:ext uri="{9D8B030D-6E8A-4147-A177-3AD203B41FA5}">
+                      <a16:colId xmlns:a16="http://schemas.microsoft.com/office/drawing/2014/main" val="20001"/>
+                    </a:ext>
+                  </a:extLst>
+                </a:gridCol>
+                <a:gridCol w="3749040">
+                  <a:extLst>
+                    <a:ext uri="{9D8B030D-6E8A-4147-A177-3AD203B41FA5}">
+                      <a16:colId xmlns:a16="http://schemas.microsoft.com/office/drawing/2014/main" val="20002"/>
+                    </a:ext>
+                  </a:extLst>
+                </a:gridCol>
               </a:tblGrid>
               <a:tr h="528320">
                 <a:tc>
                   <a:txBody>
-                    <a:bodyPr wrap="square"/>
+                    <a:bodyPr/>
                     <a:lstStyle/>
                     <a:p>
                       <a:r>
@@ -7743,7 +7717,7 @@
                 </a:tc>
                 <a:tc>
                   <a:txBody>
-                    <a:bodyPr wrap="square"/>
+                    <a:bodyPr/>
                     <a:lstStyle/>
                     <a:p>
                       <a:r>
@@ -7765,7 +7739,7 @@
                 </a:tc>
                 <a:tc>
                   <a:txBody>
-                    <a:bodyPr wrap="square"/>
+                    <a:bodyPr/>
                     <a:lstStyle/>
                     <a:p>
                       <a:r>
@@ -7785,11 +7759,16 @@
                     </a:solidFill>
                   </a:tcPr>
                 </a:tc>
+                <a:extLst>
+                  <a:ext uri="{0D108BD9-81ED-4DB2-BD59-A6C34878D82A}">
+                    <a16:rowId xmlns:a16="http://schemas.microsoft.com/office/drawing/2014/main" val="10000"/>
+                  </a:ext>
+                </a:extLst>
               </a:tr>
               <a:tr h="528320">
                 <a:tc>
                   <a:txBody>
-                    <a:bodyPr wrap="square"/>
+                    <a:bodyPr/>
                     <a:lstStyle/>
                     <a:p>
                       <a:r>
@@ -7811,7 +7790,7 @@
                 </a:tc>
                 <a:tc>
                   <a:txBody>
-                    <a:bodyPr wrap="square"/>
+                    <a:bodyPr/>
                     <a:lstStyle/>
                     <a:p>
                       <a:r>
@@ -7833,7 +7812,7 @@
                 </a:tc>
                 <a:tc>
                   <a:txBody>
-                    <a:bodyPr wrap="square"/>
+                    <a:bodyPr/>
                     <a:lstStyle/>
                     <a:p>
                       <a:r>
@@ -7853,11 +7832,16 @@
                     </a:solidFill>
                   </a:tcPr>
                 </a:tc>
+                <a:extLst>
+                  <a:ext uri="{0D108BD9-81ED-4DB2-BD59-A6C34878D82A}">
+                    <a16:rowId xmlns:a16="http://schemas.microsoft.com/office/drawing/2014/main" val="10001"/>
+                  </a:ext>
+                </a:extLst>
               </a:tr>
               <a:tr h="528320">
                 <a:tc>
                   <a:txBody>
-                    <a:bodyPr wrap="square"/>
+                    <a:bodyPr/>
                     <a:lstStyle/>
                     <a:p>
                       <a:r>
@@ -7879,7 +7863,7 @@
                 </a:tc>
                 <a:tc>
                   <a:txBody>
-                    <a:bodyPr wrap="square"/>
+                    <a:bodyPr/>
                     <a:lstStyle/>
                     <a:p>
                       <a:r>
@@ -7901,7 +7885,7 @@
                 </a:tc>
                 <a:tc>
                   <a:txBody>
-                    <a:bodyPr wrap="square"/>
+                    <a:bodyPr/>
                     <a:lstStyle/>
                     <a:p>
                       <a:r>
@@ -7921,11 +7905,16 @@
                     </a:solidFill>
                   </a:tcPr>
                 </a:tc>
+                <a:extLst>
+                  <a:ext uri="{0D108BD9-81ED-4DB2-BD59-A6C34878D82A}">
+                    <a16:rowId xmlns:a16="http://schemas.microsoft.com/office/drawing/2014/main" val="10002"/>
+                  </a:ext>
+                </a:extLst>
               </a:tr>
               <a:tr h="528320">
                 <a:tc>
                   <a:txBody>
-                    <a:bodyPr wrap="square"/>
+                    <a:bodyPr/>
                     <a:lstStyle/>
                     <a:p>
                       <a:r>
@@ -7947,7 +7936,7 @@
                 </a:tc>
                 <a:tc>
                   <a:txBody>
-                    <a:bodyPr wrap="square"/>
+                    <a:bodyPr/>
                     <a:lstStyle/>
                     <a:p>
                       <a:r>
@@ -7969,7 +7958,7 @@
                 </a:tc>
                 <a:tc>
                   <a:txBody>
-                    <a:bodyPr wrap="square"/>
+                    <a:bodyPr/>
                     <a:lstStyle/>
                     <a:p>
                       <a:r>
@@ -7989,11 +7978,16 @@
                     </a:solidFill>
                   </a:tcPr>
                 </a:tc>
+                <a:extLst>
+                  <a:ext uri="{0D108BD9-81ED-4DB2-BD59-A6C34878D82A}">
+                    <a16:rowId xmlns:a16="http://schemas.microsoft.com/office/drawing/2014/main" val="10003"/>
+                  </a:ext>
+                </a:extLst>
               </a:tr>
               <a:tr h="528320">
                 <a:tc>
                   <a:txBody>
-                    <a:bodyPr wrap="square"/>
+                    <a:bodyPr/>
                     <a:lstStyle/>
                     <a:p>
                       <a:r>
@@ -8015,7 +8009,7 @@
                 </a:tc>
                 <a:tc>
                   <a:txBody>
-                    <a:bodyPr wrap="square"/>
+                    <a:bodyPr/>
                     <a:lstStyle/>
                     <a:p>
                       <a:r>
@@ -8037,7 +8031,7 @@
                 </a:tc>
                 <a:tc>
                   <a:txBody>
-                    <a:bodyPr wrap="square"/>
+                    <a:bodyPr/>
                     <a:lstStyle/>
                     <a:p>
                       <a:r>
@@ -8057,11 +8051,16 @@
                     </a:solidFill>
                   </a:tcPr>
                 </a:tc>
+                <a:extLst>
+                  <a:ext uri="{0D108BD9-81ED-4DB2-BD59-A6C34878D82A}">
+                    <a16:rowId xmlns:a16="http://schemas.microsoft.com/office/drawing/2014/main" val="10004"/>
+                  </a:ext>
+                </a:extLst>
               </a:tr>
               <a:tr h="528320">
                 <a:tc>
                   <a:txBody>
-                    <a:bodyPr wrap="square"/>
+                    <a:bodyPr/>
                     <a:lstStyle/>
                     <a:p>
                       <a:r>
@@ -8083,7 +8082,7 @@
                 </a:tc>
                 <a:tc>
                   <a:txBody>
-                    <a:bodyPr wrap="square"/>
+                    <a:bodyPr/>
                     <a:lstStyle/>
                     <a:p>
                       <a:r>
@@ -8105,7 +8104,7 @@
                 </a:tc>
                 <a:tc>
                   <a:txBody>
-                    <a:bodyPr wrap="square"/>
+                    <a:bodyPr/>
                     <a:lstStyle/>
                     <a:p>
                       <a:r>
@@ -8125,11 +8124,16 @@
                     </a:solidFill>
                   </a:tcPr>
                 </a:tc>
+                <a:extLst>
+                  <a:ext uri="{0D108BD9-81ED-4DB2-BD59-A6C34878D82A}">
+                    <a16:rowId xmlns:a16="http://schemas.microsoft.com/office/drawing/2014/main" val="10005"/>
+                  </a:ext>
+                </a:extLst>
               </a:tr>
               <a:tr h="528320">
                 <a:tc>
                   <a:txBody>
-                    <a:bodyPr wrap="square"/>
+                    <a:bodyPr/>
                     <a:lstStyle/>
                     <a:p>
                       <a:r>
@@ -8151,7 +8155,7 @@
                 </a:tc>
                 <a:tc>
                   <a:txBody>
-                    <a:bodyPr wrap="square"/>
+                    <a:bodyPr/>
                     <a:lstStyle/>
                     <a:p>
                       <a:r>
@@ -8173,7 +8177,7 @@
                 </a:tc>
                 <a:tc>
                   <a:txBody>
-                    <a:bodyPr wrap="square"/>
+                    <a:bodyPr/>
                     <a:lstStyle/>
                     <a:p>
                       <a:r>
@@ -8193,11 +8197,16 @@
                     </a:solidFill>
                   </a:tcPr>
                 </a:tc>
+                <a:extLst>
+                  <a:ext uri="{0D108BD9-81ED-4DB2-BD59-A6C34878D82A}">
+                    <a16:rowId xmlns:a16="http://schemas.microsoft.com/office/drawing/2014/main" val="10006"/>
+                  </a:ext>
+                </a:extLst>
               </a:tr>
               <a:tr h="528320">
                 <a:tc>
                   <a:txBody>
-                    <a:bodyPr wrap="square"/>
+                    <a:bodyPr/>
                     <a:lstStyle/>
                     <a:p>
                       <a:r>
@@ -8219,7 +8228,7 @@
                 </a:tc>
                 <a:tc>
                   <a:txBody>
-                    <a:bodyPr wrap="square"/>
+                    <a:bodyPr/>
                     <a:lstStyle/>
                     <a:p>
                       <a:r>
@@ -8241,7 +8250,7 @@
                 </a:tc>
                 <a:tc>
                   <a:txBody>
-                    <a:bodyPr wrap="square"/>
+                    <a:bodyPr/>
                     <a:lstStyle/>
                     <a:p>
                       <a:r>
@@ -8261,11 +8270,16 @@
                     </a:solidFill>
                   </a:tcPr>
                 </a:tc>
+                <a:extLst>
+                  <a:ext uri="{0D108BD9-81ED-4DB2-BD59-A6C34878D82A}">
+                    <a16:rowId xmlns:a16="http://schemas.microsoft.com/office/drawing/2014/main" val="10007"/>
+                  </a:ext>
+                </a:extLst>
               </a:tr>
               <a:tr h="528320">
                 <a:tc>
                   <a:txBody>
-                    <a:bodyPr wrap="square"/>
+                    <a:bodyPr/>
                     <a:lstStyle/>
                     <a:p>
                       <a:r>
@@ -8287,7 +8301,7 @@
                 </a:tc>
                 <a:tc>
                   <a:txBody>
-                    <a:bodyPr wrap="square"/>
+                    <a:bodyPr/>
                     <a:lstStyle/>
                     <a:p>
                       <a:r>
@@ -8309,7 +8323,7 @@
                 </a:tc>
                 <a:tc>
                   <a:txBody>
-                    <a:bodyPr wrap="square"/>
+                    <a:bodyPr/>
                     <a:lstStyle/>
                     <a:p>
                       <a:r>
@@ -8329,6 +8343,11 @@
                     </a:solidFill>
                   </a:tcPr>
                 </a:tc>
+                <a:extLst>
+                  <a:ext uri="{0D108BD9-81ED-4DB2-BD59-A6C34878D82A}">
+                    <a16:rowId xmlns:a16="http://schemas.microsoft.com/office/drawing/2014/main" val="10008"/>
+                  </a:ext>
+                </a:extLst>
               </a:tr>
             </a:tbl>
           </a:graphicData>
@@ -8351,7 +8370,7 @@
           <a:noFill/>
         </p:spPr>
         <p:txBody>
-          <a:bodyPr wrap="square" lIns="45720" rIns="45720" tIns="18288" bIns="18288">
+          <a:bodyPr wrap="square" lIns="45720" tIns="18288" rIns="45720" bIns="18288">
             <a:spAutoFit/>
           </a:bodyPr>
           <a:lstStyle/>
@@ -8386,7 +8405,7 @@
           <a:noFill/>
         </p:spPr>
         <p:txBody>
-          <a:bodyPr wrap="square" lIns="45720" rIns="45720" tIns="18288" bIns="18288">
+          <a:bodyPr wrap="square" lIns="45720" tIns="18288" rIns="45720" bIns="18288">
             <a:spAutoFit/>
           </a:bodyPr>
           <a:lstStyle/>
@@ -8413,7 +8432,7 @@
 </file>
 
 <file path=ppt/slides/slide13.xml><?xml version="1.0" encoding="utf-8"?>
-<p:sld xmlns:a="http://schemas.openxmlformats.org/drawingml/2006/main" xmlns:p="http://schemas.openxmlformats.org/presentationml/2006/main" xmlns:r="http://schemas.openxmlformats.org/officeDocument/2006/relationships">
+<p:sld xmlns:a="http://schemas.openxmlformats.org/drawingml/2006/main" xmlns:r="http://schemas.openxmlformats.org/officeDocument/2006/relationships" xmlns:p="http://schemas.openxmlformats.org/presentationml/2006/main" show="0">
   <p:cSld>
     <p:spTree>
       <p:nvGrpSpPr>
@@ -8421,7 +8440,14 @@
         <p:cNvGrpSpPr/>
         <p:nvPr/>
       </p:nvGrpSpPr>
-      <p:grpSpPr/>
+      <p:grpSpPr>
+        <a:xfrm>
+          <a:off x="0" y="0"/>
+          <a:ext cx="0" cy="0"/>
+          <a:chOff x="0" y="0"/>
+          <a:chExt cx="0" cy="0"/>
+        </a:xfrm>
+      </p:grpSpPr>
       <p:sp>
         <p:nvSpPr>
           <p:cNvPr id="2" name="Rectangle 1"/>
@@ -8463,6 +8489,7 @@
           <a:lstStyle/>
           <a:p>
             <a:pPr algn="ctr"/>
+            <a:endParaRPr/>
           </a:p>
         </p:txBody>
       </p:sp>
@@ -8507,6 +8534,7 @@
           <a:lstStyle/>
           <a:p>
             <a:pPr algn="ctr"/>
+            <a:endParaRPr/>
           </a:p>
         </p:txBody>
       </p:sp>
@@ -8527,7 +8555,7 @@
           <a:noFill/>
         </p:spPr>
         <p:txBody>
-          <a:bodyPr wrap="square" lIns="45720" rIns="45720" tIns="18288" bIns="18288">
+          <a:bodyPr wrap="square" lIns="45720" tIns="18288" rIns="45720" bIns="18288">
             <a:spAutoFit/>
           </a:bodyPr>
           <a:lstStyle/>
@@ -8562,7 +8590,7 @@
           <a:noFill/>
         </p:spPr>
         <p:txBody>
-          <a:bodyPr wrap="square" lIns="45720" rIns="45720" tIns="18288" bIns="18288">
+          <a:bodyPr wrap="square" lIns="45720" tIns="18288" rIns="45720" bIns="18288">
             <a:spAutoFit/>
           </a:bodyPr>
           <a:lstStyle/>
@@ -8623,6 +8651,7 @@
           <a:lstStyle/>
           <a:p>
             <a:pPr algn="ctr"/>
+            <a:endParaRPr/>
           </a:p>
         </p:txBody>
       </p:sp>
@@ -8666,6 +8695,7 @@
           <a:lstStyle/>
           <a:p>
             <a:pPr algn="ctr"/>
+            <a:endParaRPr/>
           </a:p>
         </p:txBody>
       </p:sp>
@@ -8686,7 +8716,7 @@
           <a:noFill/>
         </p:spPr>
         <p:txBody>
-          <a:bodyPr wrap="square" lIns="45720" rIns="45720" tIns="18288" bIns="18288">
+          <a:bodyPr wrap="square" lIns="45720" tIns="18288" rIns="45720" bIns="18288">
             <a:spAutoFit/>
           </a:bodyPr>
           <a:lstStyle/>
@@ -8721,7 +8751,7 @@
           <a:noFill/>
         </p:spPr>
         <p:txBody>
-          <a:bodyPr wrap="square" lIns="45720" rIns="45720" tIns="18288" bIns="18288">
+          <a:bodyPr wrap="square" lIns="45720" tIns="18288" rIns="45720" bIns="18288">
             <a:spAutoFit/>
           </a:bodyPr>
           <a:lstStyle/>
@@ -8782,6 +8812,7 @@
           <a:lstStyle/>
           <a:p>
             <a:pPr algn="ctr"/>
+            <a:endParaRPr/>
           </a:p>
         </p:txBody>
       </p:sp>
@@ -8825,6 +8856,7 @@
           <a:lstStyle/>
           <a:p>
             <a:pPr algn="ctr"/>
+            <a:endParaRPr/>
           </a:p>
         </p:txBody>
       </p:sp>
@@ -8845,7 +8877,7 @@
           <a:noFill/>
         </p:spPr>
         <p:txBody>
-          <a:bodyPr wrap="square" lIns="45720" rIns="45720" tIns="18288" bIns="18288">
+          <a:bodyPr wrap="square" lIns="45720" tIns="18288" rIns="45720" bIns="18288">
             <a:spAutoFit/>
           </a:bodyPr>
           <a:lstStyle/>
@@ -8880,7 +8912,7 @@
           <a:noFill/>
         </p:spPr>
         <p:txBody>
-          <a:bodyPr wrap="square" lIns="45720" rIns="45720" tIns="18288" bIns="18288">
+          <a:bodyPr wrap="square" lIns="45720" tIns="18288" rIns="45720" bIns="18288">
             <a:spAutoFit/>
           </a:bodyPr>
           <a:lstStyle/>
@@ -8941,6 +8973,7 @@
           <a:lstStyle/>
           <a:p>
             <a:pPr algn="ctr"/>
+            <a:endParaRPr/>
           </a:p>
         </p:txBody>
       </p:sp>
@@ -8984,6 +9017,7 @@
           <a:lstStyle/>
           <a:p>
             <a:pPr algn="ctr"/>
+            <a:endParaRPr/>
           </a:p>
         </p:txBody>
       </p:sp>
@@ -9004,7 +9038,7 @@
           <a:noFill/>
         </p:spPr>
         <p:txBody>
-          <a:bodyPr wrap="square" lIns="45720" rIns="45720" tIns="18288" bIns="18288">
+          <a:bodyPr wrap="square" lIns="45720" tIns="18288" rIns="45720" bIns="18288">
             <a:spAutoFit/>
           </a:bodyPr>
           <a:lstStyle/>
@@ -9039,7 +9073,7 @@
           <a:noFill/>
         </p:spPr>
         <p:txBody>
-          <a:bodyPr wrap="square" lIns="45720" rIns="45720" tIns="18288" bIns="18288">
+          <a:bodyPr wrap="square" lIns="45720" tIns="18288" rIns="45720" bIns="18288">
             <a:spAutoFit/>
           </a:bodyPr>
           <a:lstStyle/>
@@ -9100,6 +9134,7 @@
           <a:lstStyle/>
           <a:p>
             <a:pPr algn="ctr"/>
+            <a:endParaRPr/>
           </a:p>
         </p:txBody>
       </p:sp>
@@ -9120,7 +9155,7 @@
           <a:noFill/>
         </p:spPr>
         <p:txBody>
-          <a:bodyPr wrap="square" lIns="45720" rIns="45720" tIns="18288" bIns="18288">
+          <a:bodyPr wrap="square" lIns="45720" tIns="18288" rIns="45720" bIns="18288">
             <a:spAutoFit/>
           </a:bodyPr>
           <a:lstStyle/>
@@ -9155,7 +9190,7 @@
           <a:noFill/>
         </p:spPr>
         <p:txBody>
-          <a:bodyPr wrap="square" lIns="45720" rIns="45720" tIns="18288" bIns="18288">
+          <a:bodyPr wrap="square" lIns="45720" tIns="18288" rIns="45720" bIns="18288">
             <a:spAutoFit/>
           </a:bodyPr>
           <a:lstStyle/>
@@ -9214,7 +9249,7 @@
           <a:noFill/>
         </p:spPr>
         <p:txBody>
-          <a:bodyPr wrap="square" lIns="45720" rIns="45720" tIns="18288" bIns="18288">
+          <a:bodyPr wrap="square" lIns="45720" tIns="18288" rIns="45720" bIns="18288">
             <a:spAutoFit/>
           </a:bodyPr>
           <a:lstStyle/>
@@ -9249,7 +9284,7 @@
           <a:noFill/>
         </p:spPr>
         <p:txBody>
-          <a:bodyPr wrap="square" lIns="45720" rIns="45720" tIns="18288" bIns="18288">
+          <a:bodyPr wrap="square" lIns="45720" tIns="18288" rIns="45720" bIns="18288">
             <a:spAutoFit/>
           </a:bodyPr>
           <a:lstStyle/>
@@ -9276,7 +9311,7 @@
 </file>
 
 <file path=ppt/slides/slide14.xml><?xml version="1.0" encoding="utf-8"?>
-<p:sld xmlns:a="http://schemas.openxmlformats.org/drawingml/2006/main" xmlns:p="http://schemas.openxmlformats.org/presentationml/2006/main" xmlns:r="http://schemas.openxmlformats.org/officeDocument/2006/relationships">
+<p:sld xmlns:a="http://schemas.openxmlformats.org/drawingml/2006/main" xmlns:r="http://schemas.openxmlformats.org/officeDocument/2006/relationships" xmlns:p="http://schemas.openxmlformats.org/presentationml/2006/main">
   <p:cSld>
     <p:spTree>
       <p:nvGrpSpPr>
@@ -9284,7 +9319,14 @@
         <p:cNvGrpSpPr/>
         <p:nvPr/>
       </p:nvGrpSpPr>
-      <p:grpSpPr/>
+      <p:grpSpPr>
+        <a:xfrm>
+          <a:off x="0" y="0"/>
+          <a:ext cx="0" cy="0"/>
+          <a:chOff x="0" y="0"/>
+          <a:chExt cx="0" cy="0"/>
+        </a:xfrm>
+      </p:grpSpPr>
       <p:sp>
         <p:nvSpPr>
           <p:cNvPr id="2" name="Rectangle 1"/>
@@ -9326,6 +9368,7 @@
           <a:lstStyle/>
           <a:p>
             <a:pPr algn="ctr"/>
+            <a:endParaRPr/>
           </a:p>
         </p:txBody>
       </p:sp>
@@ -9370,6 +9413,7 @@
           <a:lstStyle/>
           <a:p>
             <a:pPr algn="ctr"/>
+            <a:endParaRPr/>
           </a:p>
         </p:txBody>
       </p:sp>
@@ -9390,7 +9434,7 @@
           <a:noFill/>
         </p:spPr>
         <p:txBody>
-          <a:bodyPr wrap="square" lIns="45720" rIns="45720" tIns="18288" bIns="18288">
+          <a:bodyPr wrap="square" lIns="45720" tIns="18288" rIns="45720" bIns="18288">
             <a:spAutoFit/>
           </a:bodyPr>
           <a:lstStyle/>
@@ -9425,7 +9469,7 @@
           <a:noFill/>
         </p:spPr>
         <p:txBody>
-          <a:bodyPr wrap="square" lIns="45720" rIns="45720" tIns="18288" bIns="18288">
+          <a:bodyPr wrap="square" lIns="45720" tIns="18288" rIns="45720" bIns="18288">
             <a:spAutoFit/>
           </a:bodyPr>
           <a:lstStyle/>
@@ -9486,6 +9530,7 @@
           <a:lstStyle/>
           <a:p>
             <a:pPr algn="ctr"/>
+            <a:endParaRPr/>
           </a:p>
         </p:txBody>
       </p:sp>
@@ -9506,7 +9551,7 @@
           <a:noFill/>
         </p:spPr>
         <p:txBody>
-          <a:bodyPr wrap="square" lIns="45720" rIns="45720" tIns="18288" bIns="18288">
+          <a:bodyPr wrap="square" lIns="45720" tIns="18288" rIns="45720" bIns="18288">
             <a:spAutoFit/>
           </a:bodyPr>
           <a:lstStyle/>
@@ -9541,7 +9586,7 @@
           <a:noFill/>
         </p:spPr>
         <p:txBody>
-          <a:bodyPr wrap="square" lIns="45720" rIns="45720" tIns="18288" bIns="18288">
+          <a:bodyPr wrap="square" lIns="45720" tIns="18288" rIns="45720" bIns="18288">
             <a:spAutoFit/>
           </a:bodyPr>
           <a:lstStyle/>
@@ -9602,6 +9647,7 @@
           <a:lstStyle/>
           <a:p>
             <a:pPr algn="ctr"/>
+            <a:endParaRPr/>
           </a:p>
         </p:txBody>
       </p:sp>
@@ -9622,7 +9668,7 @@
           <a:noFill/>
         </p:spPr>
         <p:txBody>
-          <a:bodyPr wrap="square" lIns="45720" rIns="45720" tIns="18288" bIns="18288">
+          <a:bodyPr wrap="square" lIns="45720" tIns="18288" rIns="45720" bIns="18288">
             <a:spAutoFit/>
           </a:bodyPr>
           <a:lstStyle/>
@@ -9657,7 +9703,7 @@
           <a:noFill/>
         </p:spPr>
         <p:txBody>
-          <a:bodyPr wrap="square" lIns="45720" rIns="45720" tIns="18288" bIns="18288">
+          <a:bodyPr wrap="square" lIns="45720" tIns="18288" rIns="45720" bIns="18288">
             <a:spAutoFit/>
           </a:bodyPr>
           <a:lstStyle/>
@@ -9718,6 +9764,7 @@
           <a:lstStyle/>
           <a:p>
             <a:pPr algn="ctr"/>
+            <a:endParaRPr/>
           </a:p>
         </p:txBody>
       </p:sp>
@@ -9738,7 +9785,7 @@
           <a:noFill/>
         </p:spPr>
         <p:txBody>
-          <a:bodyPr wrap="square" lIns="45720" rIns="45720" tIns="18288" bIns="18288">
+          <a:bodyPr wrap="square" lIns="45720" tIns="18288" rIns="45720" bIns="18288">
             <a:spAutoFit/>
           </a:bodyPr>
           <a:lstStyle/>
@@ -9773,7 +9820,7 @@
           <a:noFill/>
         </p:spPr>
         <p:txBody>
-          <a:bodyPr wrap="square" lIns="45720" rIns="45720" tIns="18288" bIns="18288">
+          <a:bodyPr wrap="square" lIns="45720" tIns="18288" rIns="45720" bIns="18288">
             <a:spAutoFit/>
           </a:bodyPr>
           <a:lstStyle/>
@@ -9834,6 +9881,7 @@
           <a:lstStyle/>
           <a:p>
             <a:pPr algn="ctr"/>
+            <a:endParaRPr/>
           </a:p>
         </p:txBody>
       </p:sp>
@@ -9854,7 +9902,7 @@
           <a:noFill/>
         </p:spPr>
         <p:txBody>
-          <a:bodyPr wrap="square" lIns="45720" rIns="45720" tIns="18288" bIns="18288">
+          <a:bodyPr wrap="square" lIns="45720" tIns="18288" rIns="45720" bIns="18288">
             <a:spAutoFit/>
           </a:bodyPr>
           <a:lstStyle/>
@@ -9889,7 +9937,7 @@
           <a:noFill/>
         </p:spPr>
         <p:txBody>
-          <a:bodyPr wrap="square" lIns="45720" rIns="45720" tIns="18288" bIns="18288">
+          <a:bodyPr wrap="square" lIns="45720" tIns="18288" rIns="45720" bIns="18288">
             <a:spAutoFit/>
           </a:bodyPr>
           <a:lstStyle/>
@@ -9924,7 +9972,7 @@
           <a:noFill/>
         </p:spPr>
         <p:txBody>
-          <a:bodyPr wrap="square" lIns="45720" rIns="45720" tIns="18288" bIns="18288">
+          <a:bodyPr wrap="square" lIns="45720" tIns="18288" rIns="45720" bIns="18288">
             <a:spAutoFit/>
           </a:bodyPr>
           <a:lstStyle/>
@@ -9959,7 +10007,7 @@
           <a:noFill/>
         </p:spPr>
         <p:txBody>
-          <a:bodyPr wrap="square" lIns="45720" rIns="45720" tIns="18288" bIns="18288">
+          <a:bodyPr wrap="square" lIns="45720" tIns="18288" rIns="45720" bIns="18288">
             <a:spAutoFit/>
           </a:bodyPr>
           <a:lstStyle/>
@@ -9994,7 +10042,7 @@
           <a:noFill/>
         </p:spPr>
         <p:txBody>
-          <a:bodyPr wrap="square" lIns="45720" rIns="45720" tIns="18288" bIns="18288">
+          <a:bodyPr wrap="square" lIns="45720" tIns="18288" rIns="45720" bIns="18288">
             <a:spAutoFit/>
           </a:bodyPr>
           <a:lstStyle/>
@@ -10021,7 +10069,7 @@
 </file>
 
 <file path=ppt/slides/slide15.xml><?xml version="1.0" encoding="utf-8"?>
-<p:sld xmlns:a="http://schemas.openxmlformats.org/drawingml/2006/main" xmlns:p="http://schemas.openxmlformats.org/presentationml/2006/main" xmlns:r="http://schemas.openxmlformats.org/officeDocument/2006/relationships">
+<p:sld xmlns:a="http://schemas.openxmlformats.org/drawingml/2006/main" xmlns:r="http://schemas.openxmlformats.org/officeDocument/2006/relationships" xmlns:p="http://schemas.openxmlformats.org/presentationml/2006/main">
   <p:cSld>
     <p:spTree>
       <p:nvGrpSpPr>
@@ -10029,7 +10077,14 @@
         <p:cNvGrpSpPr/>
         <p:nvPr/>
       </p:nvGrpSpPr>
-      <p:grpSpPr/>
+      <p:grpSpPr>
+        <a:xfrm>
+          <a:off x="0" y="0"/>
+          <a:ext cx="0" cy="0"/>
+          <a:chOff x="0" y="0"/>
+          <a:chExt cx="0" cy="0"/>
+        </a:xfrm>
+      </p:grpSpPr>
       <p:sp>
         <p:nvSpPr>
           <p:cNvPr id="2" name="Rectangle 1"/>
@@ -10071,6 +10126,7 @@
           <a:lstStyle/>
           <a:p>
             <a:pPr algn="ctr"/>
+            <a:endParaRPr/>
           </a:p>
         </p:txBody>
       </p:sp>
@@ -10091,7 +10147,7 @@
           <a:noFill/>
         </p:spPr>
         <p:txBody>
-          <a:bodyPr wrap="square" lIns="45720" rIns="45720" tIns="18288" bIns="18288">
+          <a:bodyPr wrap="square" lIns="45720" tIns="18288" rIns="45720" bIns="18288">
             <a:spAutoFit/>
           </a:bodyPr>
           <a:lstStyle/>
@@ -10126,7 +10182,7 @@
           <a:noFill/>
         </p:spPr>
         <p:txBody>
-          <a:bodyPr wrap="square" lIns="45720" rIns="45720" tIns="18288" bIns="18288">
+          <a:bodyPr wrap="square" lIns="45720" tIns="18288" rIns="45720" bIns="18288">
             <a:spAutoFit/>
           </a:bodyPr>
           <a:lstStyle/>
@@ -10153,7 +10209,7 @@
         <p:spPr>
           <a:xfrm>
             <a:off x="457200" y="3474720"/>
-            <a:ext cx="11247120" cy="457200"/>
+            <a:ext cx="11247120" cy="313932"/>
           </a:xfrm>
           <a:prstGeom prst="rect">
             <a:avLst/>
@@ -10161,20 +10217,92 @@
           <a:noFill/>
         </p:spPr>
         <p:txBody>
-          <a:bodyPr wrap="square" lIns="45720" rIns="45720" tIns="18288" bIns="18288">
+          <a:bodyPr wrap="square" lIns="45720" tIns="18288" rIns="45720" bIns="18288">
             <a:spAutoFit/>
           </a:bodyPr>
           <a:lstStyle/>
           <a:p>
             <a:pPr algn="ctr"/>
             <a:r>
-              <a:rPr sz="1800" b="0">
+              <a:rPr sz="1800" b="0" dirty="0">
                 <a:solidFill>
                   <a:srgbClr val="9AA3AF"/>
                 </a:solidFill>
                 <a:latin typeface="Segoe UI"/>
               </a:rPr>
-              <a:t>Idea → merged PR in 30 m 13 s. Every stage. Real receipts.</a:t>
+              <a:t>Idea → merged PR in </a:t>
+            </a:r>
+            <a:r>
+              <a:rPr lang="en-US" sz="1800" b="0" dirty="0">
+                <a:solidFill>
+                  <a:srgbClr val="9AA3AF"/>
+                </a:solidFill>
+                <a:latin typeface="Segoe UI"/>
+              </a:rPr>
+              <a:t>1</a:t>
+            </a:r>
+            <a:r>
+              <a:rPr sz="1800" b="0" dirty="0">
+                <a:solidFill>
+                  <a:srgbClr val="9AA3AF"/>
+                </a:solidFill>
+                <a:latin typeface="Segoe UI"/>
+              </a:rPr>
+              <a:t> </a:t>
+            </a:r>
+            <a:r>
+              <a:rPr lang="en-US" sz="1800" b="0" dirty="0" err="1">
+                <a:solidFill>
+                  <a:srgbClr val="9AA3AF"/>
+                </a:solidFill>
+                <a:latin typeface="Segoe UI"/>
+              </a:rPr>
+              <a:t>hr</a:t>
+            </a:r>
+            <a:r>
+              <a:rPr sz="1800" b="0" dirty="0">
+                <a:solidFill>
+                  <a:srgbClr val="9AA3AF"/>
+                </a:solidFill>
+                <a:latin typeface="Segoe UI"/>
+              </a:rPr>
+              <a:t> </a:t>
+            </a:r>
+            <a:r>
+              <a:rPr lang="en-US" sz="1800" b="0" dirty="0">
+                <a:solidFill>
+                  <a:srgbClr val="9AA3AF"/>
+                </a:solidFill>
+                <a:latin typeface="Segoe UI"/>
+              </a:rPr>
+              <a:t>15</a:t>
+            </a:r>
+            <a:r>
+              <a:rPr sz="1800" b="0" dirty="0">
+                <a:solidFill>
+                  <a:srgbClr val="9AA3AF"/>
+                </a:solidFill>
+                <a:latin typeface="Segoe UI"/>
+              </a:rPr>
+              <a:t> </a:t>
+            </a:r>
+            <a:r>
+              <a:rPr lang="en-US" sz="1800" b="0" dirty="0">
+                <a:solidFill>
+                  <a:srgbClr val="9AA3AF"/>
+                </a:solidFill>
+                <a:latin typeface="Segoe UI"/>
+              </a:rPr>
+              <a:t>mins</a:t>
+            </a:r>
+            <a:r>
+              <a:rPr sz="1800" b="0" dirty="0">
+                <a:solidFill>
+                  <a:srgbClr val="9AA3AF"/>
+                </a:solidFill>
+                <a:latin typeface="Segoe UI"/>
+              </a:rPr>
+              <a:t>. Every stage. Real receipts.</a:t>
             </a:r>
           </a:p>
         </p:txBody>
@@ -10222,6 +10350,7 @@
           <a:lstStyle/>
           <a:p>
             <a:pPr algn="ctr"/>
+            <a:endParaRPr/>
           </a:p>
         </p:txBody>
       </p:sp>
@@ -10234,7 +10363,7 @@
         <p:spPr>
           <a:xfrm>
             <a:off x="685800" y="4480560"/>
-            <a:ext cx="2697480" cy="548640"/>
+            <a:ext cx="2697480" cy="467820"/>
           </a:xfrm>
           <a:prstGeom prst="rect">
             <a:avLst/>
@@ -10242,21 +10371,45 @@
           <a:noFill/>
         </p:spPr>
         <p:txBody>
-          <a:bodyPr wrap="square" lIns="45720" rIns="45720" tIns="18288" bIns="18288">
+          <a:bodyPr wrap="square" lIns="45720" tIns="18288" rIns="45720" bIns="18288">
             <a:spAutoFit/>
           </a:bodyPr>
           <a:lstStyle/>
           <a:p>
             <a:pPr algn="ctr"/>
             <a:r>
-              <a:rPr sz="2800" b="1">
+              <a:rPr lang="en-US" sz="2800" b="1" dirty="0">
                 <a:solidFill>
                   <a:srgbClr val="6EE7B7"/>
                 </a:solidFill>
                 <a:latin typeface="Segoe UI"/>
               </a:rPr>
-              <a:t>30m 13s</a:t>
-            </a:r>
+              <a:t>1hr</a:t>
+            </a:r>
+            <a:r>
+              <a:rPr sz="2800" b="1" dirty="0">
+                <a:solidFill>
+                  <a:srgbClr val="6EE7B7"/>
+                </a:solidFill>
+                <a:latin typeface="Segoe UI"/>
+              </a:rPr>
+              <a:t> </a:t>
+            </a:r>
+            <a:r>
+              <a:rPr lang="en-US" sz="2800" b="1" dirty="0">
+                <a:solidFill>
+                  <a:srgbClr val="6EE7B7"/>
+                </a:solidFill>
+                <a:latin typeface="Segoe UI"/>
+              </a:rPr>
+              <a:t>18m</a:t>
+            </a:r>
+            <a:endParaRPr sz="2800" b="1" dirty="0">
+              <a:solidFill>
+                <a:srgbClr val="6EE7B7"/>
+              </a:solidFill>
+              <a:latin typeface="Segoe UI"/>
+            </a:endParaRPr>
           </a:p>
         </p:txBody>
       </p:sp>
@@ -10277,7 +10430,7 @@
           <a:noFill/>
         </p:spPr>
         <p:txBody>
-          <a:bodyPr wrap="square" lIns="45720" rIns="45720" tIns="18288" bIns="18288">
+          <a:bodyPr wrap="square" lIns="45720" tIns="18288" rIns="45720" bIns="18288">
             <a:spAutoFit/>
           </a:bodyPr>
           <a:lstStyle/>
@@ -10338,6 +10491,7 @@
           <a:lstStyle/>
           <a:p>
             <a:pPr algn="ctr"/>
+            <a:endParaRPr/>
           </a:p>
         </p:txBody>
       </p:sp>
@@ -10358,7 +10512,7 @@
           <a:noFill/>
         </p:spPr>
         <p:txBody>
-          <a:bodyPr wrap="square" lIns="45720" rIns="45720" tIns="18288" bIns="18288">
+          <a:bodyPr wrap="square" lIns="45720" tIns="18288" rIns="45720" bIns="18288">
             <a:spAutoFit/>
           </a:bodyPr>
           <a:lstStyle/>
@@ -10393,7 +10547,7 @@
           <a:noFill/>
         </p:spPr>
         <p:txBody>
-          <a:bodyPr wrap="square" lIns="45720" rIns="45720" tIns="18288" bIns="18288">
+          <a:bodyPr wrap="square" lIns="45720" tIns="18288" rIns="45720" bIns="18288">
             <a:spAutoFit/>
           </a:bodyPr>
           <a:lstStyle/>
@@ -10454,6 +10608,7 @@
           <a:lstStyle/>
           <a:p>
             <a:pPr algn="ctr"/>
+            <a:endParaRPr/>
           </a:p>
         </p:txBody>
       </p:sp>
@@ -10474,7 +10629,7 @@
           <a:noFill/>
         </p:spPr>
         <p:txBody>
-          <a:bodyPr wrap="square" lIns="45720" rIns="45720" tIns="18288" bIns="18288">
+          <a:bodyPr wrap="square" lIns="45720" tIns="18288" rIns="45720" bIns="18288">
             <a:spAutoFit/>
           </a:bodyPr>
           <a:lstStyle/>
@@ -10509,7 +10664,7 @@
           <a:noFill/>
         </p:spPr>
         <p:txBody>
-          <a:bodyPr wrap="square" lIns="45720" rIns="45720" tIns="18288" bIns="18288">
+          <a:bodyPr wrap="square" lIns="45720" tIns="18288" rIns="45720" bIns="18288">
             <a:spAutoFit/>
           </a:bodyPr>
           <a:lstStyle/>
@@ -10570,6 +10725,7 @@
           <a:lstStyle/>
           <a:p>
             <a:pPr algn="ctr"/>
+            <a:endParaRPr/>
           </a:p>
         </p:txBody>
       </p:sp>
@@ -10590,7 +10746,7 @@
           <a:noFill/>
         </p:spPr>
         <p:txBody>
-          <a:bodyPr wrap="square" lIns="45720" rIns="45720" tIns="18288" bIns="18288">
+          <a:bodyPr wrap="square" lIns="45720" tIns="18288" rIns="45720" bIns="18288">
             <a:spAutoFit/>
           </a:bodyPr>
           <a:lstStyle/>
@@ -10625,7 +10781,7 @@
           <a:noFill/>
         </p:spPr>
         <p:txBody>
-          <a:bodyPr wrap="square" lIns="45720" rIns="45720" tIns="18288" bIns="18288">
+          <a:bodyPr wrap="square" lIns="45720" tIns="18288" rIns="45720" bIns="18288">
             <a:spAutoFit/>
           </a:bodyPr>
           <a:lstStyle/>
@@ -10660,7 +10816,7 @@
           <a:noFill/>
         </p:spPr>
         <p:txBody>
-          <a:bodyPr wrap="square" lIns="45720" rIns="45720" tIns="18288" bIns="18288">
+          <a:bodyPr wrap="square" lIns="45720" tIns="18288" rIns="45720" bIns="18288">
             <a:spAutoFit/>
           </a:bodyPr>
           <a:lstStyle/>
@@ -10695,7 +10851,7 @@
           <a:noFill/>
         </p:spPr>
         <p:txBody>
-          <a:bodyPr wrap="square" lIns="45720" rIns="45720" tIns="18288" bIns="18288">
+          <a:bodyPr wrap="square" lIns="45720" tIns="18288" rIns="45720" bIns="18288">
             <a:spAutoFit/>
           </a:bodyPr>
           <a:lstStyle/>
@@ -10730,7 +10886,7 @@
           <a:noFill/>
         </p:spPr>
         <p:txBody>
-          <a:bodyPr wrap="square" lIns="45720" rIns="45720" tIns="18288" bIns="18288">
+          <a:bodyPr wrap="square" lIns="45720" tIns="18288" rIns="45720" bIns="18288">
             <a:spAutoFit/>
           </a:bodyPr>
           <a:lstStyle/>
@@ -10757,7 +10913,7 @@
 </file>
 
 <file path=ppt/slides/slide16.xml><?xml version="1.0" encoding="utf-8"?>
-<p:sld xmlns:a="http://schemas.openxmlformats.org/drawingml/2006/main" xmlns:p="http://schemas.openxmlformats.org/presentationml/2006/main" xmlns:r="http://schemas.openxmlformats.org/officeDocument/2006/relationships">
+<p:sld xmlns:a="http://schemas.openxmlformats.org/drawingml/2006/main" xmlns:r="http://schemas.openxmlformats.org/officeDocument/2006/relationships" xmlns:p="http://schemas.openxmlformats.org/presentationml/2006/main">
   <p:cSld>
     <p:spTree>
       <p:nvGrpSpPr>
@@ -10765,7 +10921,14 @@
         <p:cNvGrpSpPr/>
         <p:nvPr/>
       </p:nvGrpSpPr>
-      <p:grpSpPr/>
+      <p:grpSpPr>
+        <a:xfrm>
+          <a:off x="0" y="0"/>
+          <a:ext cx="0" cy="0"/>
+          <a:chOff x="0" y="0"/>
+          <a:chExt cx="0" cy="0"/>
+        </a:xfrm>
+      </p:grpSpPr>
       <p:sp>
         <p:nvSpPr>
           <p:cNvPr id="2" name="Rectangle 1"/>
@@ -10807,6 +10970,7 @@
           <a:lstStyle/>
           <a:p>
             <a:pPr algn="ctr"/>
+            <a:endParaRPr/>
           </a:p>
         </p:txBody>
       </p:sp>
@@ -10851,6 +11015,7 @@
           <a:lstStyle/>
           <a:p>
             <a:pPr algn="ctr"/>
+            <a:endParaRPr/>
           </a:p>
         </p:txBody>
       </p:sp>
@@ -10871,7 +11036,7 @@
           <a:noFill/>
         </p:spPr>
         <p:txBody>
-          <a:bodyPr wrap="square" lIns="45720" rIns="45720" tIns="18288" bIns="18288">
+          <a:bodyPr wrap="square" lIns="45720" tIns="18288" rIns="45720" bIns="18288">
             <a:spAutoFit/>
           </a:bodyPr>
           <a:lstStyle/>
@@ -10906,7 +11071,7 @@
           <a:noFill/>
         </p:spPr>
         <p:txBody>
-          <a:bodyPr wrap="square" lIns="45720" rIns="45720" tIns="18288" bIns="18288">
+          <a:bodyPr wrap="square" lIns="45720" tIns="18288" rIns="45720" bIns="18288">
             <a:spAutoFit/>
           </a:bodyPr>
           <a:lstStyle/>
@@ -10941,7 +11106,7 @@
           <a:noFill/>
         </p:spPr>
         <p:txBody>
-          <a:bodyPr wrap="square" lIns="45720" rIns="45720" tIns="18288" bIns="18288">
+          <a:bodyPr wrap="square" lIns="45720" tIns="18288" rIns="45720" bIns="18288">
             <a:spAutoFit/>
           </a:bodyPr>
           <a:lstStyle/>
@@ -10968,15 +11133,16 @@
           <p:nvPr/>
         </p:nvPicPr>
         <p:blipFill>
-          <a:blip r:embed="rId2"/>
+          <a:blip r:embed="rId3"/>
+          <a:srcRect t="19161" r="40133"/>
           <a:stretch>
             <a:fillRect/>
           </a:stretch>
         </p:blipFill>
         <p:spPr>
           <a:xfrm>
-            <a:off x="457200" y="2023025"/>
-            <a:ext cx="5577840" cy="2949108"/>
+            <a:off x="457200" y="1617668"/>
+            <a:ext cx="4523497" cy="3229473"/>
           </a:xfrm>
           <a:prstGeom prst="rect">
             <a:avLst/>
@@ -10997,15 +11163,16 @@
           <p:nvPr/>
         </p:nvPicPr>
         <p:blipFill>
-          <a:blip r:embed="rId3"/>
+          <a:blip r:embed="rId4"/>
+          <a:srcRect r="41139"/>
           <a:stretch>
             <a:fillRect/>
           </a:stretch>
         </p:blipFill>
         <p:spPr>
           <a:xfrm>
-            <a:off x="6172200" y="2725263"/>
-            <a:ext cx="5577840" cy="1544632"/>
+            <a:off x="5068946" y="1617667"/>
+            <a:ext cx="6864380" cy="3229473"/>
           </a:xfrm>
           <a:prstGeom prst="rect">
             <a:avLst/>
@@ -11060,6 +11227,7 @@
           <a:lstStyle/>
           <a:p>
             <a:pPr algn="ctr"/>
+            <a:endParaRPr/>
           </a:p>
         </p:txBody>
       </p:sp>
@@ -11080,7 +11248,7 @@
           <a:noFill/>
         </p:spPr>
         <p:txBody>
-          <a:bodyPr wrap="square" lIns="45720" rIns="45720" tIns="18288" bIns="18288">
+          <a:bodyPr wrap="square" lIns="45720" tIns="18288" rIns="45720" bIns="18288">
             <a:spAutoFit/>
           </a:bodyPr>
           <a:lstStyle/>
@@ -11115,7 +11283,7 @@
           <a:noFill/>
         </p:spPr>
         <p:txBody>
-          <a:bodyPr wrap="square" lIns="45720" rIns="45720" tIns="18288" bIns="18288">
+          <a:bodyPr wrap="square" lIns="45720" tIns="18288" rIns="45720" bIns="18288">
             <a:spAutoFit/>
           </a:bodyPr>
           <a:lstStyle/>
@@ -11150,7 +11318,7 @@
           <a:noFill/>
         </p:spPr>
         <p:txBody>
-          <a:bodyPr wrap="square" lIns="45720" rIns="45720" tIns="18288" bIns="18288">
+          <a:bodyPr wrap="square" lIns="45720" tIns="18288" rIns="45720" bIns="18288">
             <a:spAutoFit/>
           </a:bodyPr>
           <a:lstStyle/>
@@ -11177,7 +11345,7 @@
 </file>
 
 <file path=ppt/slides/slide17.xml><?xml version="1.0" encoding="utf-8"?>
-<p:sld xmlns:a="http://schemas.openxmlformats.org/drawingml/2006/main" xmlns:p="http://schemas.openxmlformats.org/presentationml/2006/main" xmlns:r="http://schemas.openxmlformats.org/officeDocument/2006/relationships">
+<p:sld xmlns:a="http://schemas.openxmlformats.org/drawingml/2006/main" xmlns:r="http://schemas.openxmlformats.org/officeDocument/2006/relationships" xmlns:p="http://schemas.openxmlformats.org/presentationml/2006/main">
   <p:cSld>
     <p:spTree>
       <p:nvGrpSpPr>
@@ -11185,7 +11353,14 @@
         <p:cNvGrpSpPr/>
         <p:nvPr/>
       </p:nvGrpSpPr>
-      <p:grpSpPr/>
+      <p:grpSpPr>
+        <a:xfrm>
+          <a:off x="0" y="0"/>
+          <a:ext cx="0" cy="0"/>
+          <a:chOff x="0" y="0"/>
+          <a:chExt cx="0" cy="0"/>
+        </a:xfrm>
+      </p:grpSpPr>
       <p:sp>
         <p:nvSpPr>
           <p:cNvPr id="2" name="Rectangle 1"/>
@@ -11227,6 +11402,7 @@
           <a:lstStyle/>
           <a:p>
             <a:pPr algn="ctr"/>
+            <a:endParaRPr/>
           </a:p>
         </p:txBody>
       </p:sp>
@@ -11271,6 +11447,7 @@
           <a:lstStyle/>
           <a:p>
             <a:pPr algn="ctr"/>
+            <a:endParaRPr/>
           </a:p>
         </p:txBody>
       </p:sp>
@@ -11291,7 +11468,7 @@
           <a:noFill/>
         </p:spPr>
         <p:txBody>
-          <a:bodyPr wrap="square" lIns="45720" rIns="45720" tIns="18288" bIns="18288">
+          <a:bodyPr wrap="square" lIns="45720" tIns="18288" rIns="45720" bIns="18288">
             <a:spAutoFit/>
           </a:bodyPr>
           <a:lstStyle/>
@@ -11326,7 +11503,7 @@
           <a:noFill/>
         </p:spPr>
         <p:txBody>
-          <a:bodyPr wrap="square" lIns="45720" rIns="45720" tIns="18288" bIns="18288">
+          <a:bodyPr wrap="square" lIns="45720" tIns="18288" rIns="45720" bIns="18288">
             <a:spAutoFit/>
           </a:bodyPr>
           <a:lstStyle/>
@@ -11361,7 +11538,7 @@
           <a:noFill/>
         </p:spPr>
         <p:txBody>
-          <a:bodyPr wrap="square" lIns="45720" rIns="45720" tIns="18288" bIns="18288">
+          <a:bodyPr wrap="square" lIns="45720" tIns="18288" rIns="45720" bIns="18288">
             <a:spAutoFit/>
           </a:bodyPr>
           <a:lstStyle/>
@@ -11388,7 +11565,7 @@
           <p:nvPr/>
         </p:nvPicPr>
         <p:blipFill>
-          <a:blip r:embed="rId2"/>
+          <a:blip r:embed="rId3"/>
           <a:stretch>
             <a:fillRect/>
           </a:stretch>
@@ -11451,6 +11628,7 @@
           <a:lstStyle/>
           <a:p>
             <a:pPr algn="ctr"/>
+            <a:endParaRPr/>
           </a:p>
         </p:txBody>
       </p:sp>
@@ -11471,7 +11649,7 @@
           <a:noFill/>
         </p:spPr>
         <p:txBody>
-          <a:bodyPr wrap="square" lIns="45720" rIns="45720" tIns="18288" bIns="18288">
+          <a:bodyPr wrap="square" lIns="45720" tIns="18288" rIns="45720" bIns="18288">
             <a:spAutoFit/>
           </a:bodyPr>
           <a:lstStyle/>
@@ -11506,7 +11684,7 @@
           <a:noFill/>
         </p:spPr>
         <p:txBody>
-          <a:bodyPr wrap="square" lIns="45720" rIns="45720" tIns="18288" bIns="18288">
+          <a:bodyPr wrap="square" lIns="45720" tIns="18288" rIns="45720" bIns="18288">
             <a:spAutoFit/>
           </a:bodyPr>
           <a:lstStyle/>
@@ -11541,7 +11719,7 @@
           <a:noFill/>
         </p:spPr>
         <p:txBody>
-          <a:bodyPr wrap="square" lIns="45720" rIns="45720" tIns="18288" bIns="18288">
+          <a:bodyPr wrap="square" lIns="45720" tIns="18288" rIns="45720" bIns="18288">
             <a:spAutoFit/>
           </a:bodyPr>
           <a:lstStyle/>
@@ -11568,7 +11746,7 @@
 </file>
 
 <file path=ppt/slides/slide18.xml><?xml version="1.0" encoding="utf-8"?>
-<p:sld xmlns:a="http://schemas.openxmlformats.org/drawingml/2006/main" xmlns:p="http://schemas.openxmlformats.org/presentationml/2006/main" xmlns:r="http://schemas.openxmlformats.org/officeDocument/2006/relationships">
+<p:sld xmlns:a="http://schemas.openxmlformats.org/drawingml/2006/main" xmlns:r="http://schemas.openxmlformats.org/officeDocument/2006/relationships" xmlns:p="http://schemas.openxmlformats.org/presentationml/2006/main">
   <p:cSld>
     <p:spTree>
       <p:nvGrpSpPr>
@@ -11576,7 +11754,14 @@
         <p:cNvGrpSpPr/>
         <p:nvPr/>
       </p:nvGrpSpPr>
-      <p:grpSpPr/>
+      <p:grpSpPr>
+        <a:xfrm>
+          <a:off x="0" y="0"/>
+          <a:ext cx="0" cy="0"/>
+          <a:chOff x="0" y="0"/>
+          <a:chExt cx="0" cy="0"/>
+        </a:xfrm>
+      </p:grpSpPr>
       <p:sp>
         <p:nvSpPr>
           <p:cNvPr id="2" name="Rectangle 1"/>
@@ -11618,6 +11803,7 @@
           <a:lstStyle/>
           <a:p>
             <a:pPr algn="ctr"/>
+            <a:endParaRPr/>
           </a:p>
         </p:txBody>
       </p:sp>
@@ -11662,6 +11848,7 @@
           <a:lstStyle/>
           <a:p>
             <a:pPr algn="ctr"/>
+            <a:endParaRPr/>
           </a:p>
         </p:txBody>
       </p:sp>
@@ -11682,7 +11869,7 @@
           <a:noFill/>
         </p:spPr>
         <p:txBody>
-          <a:bodyPr wrap="square" lIns="45720" rIns="45720" tIns="18288" bIns="18288">
+          <a:bodyPr wrap="square" lIns="45720" tIns="18288" rIns="45720" bIns="18288">
             <a:spAutoFit/>
           </a:bodyPr>
           <a:lstStyle/>
@@ -11717,7 +11904,7 @@
           <a:noFill/>
         </p:spPr>
         <p:txBody>
-          <a:bodyPr wrap="square" lIns="45720" rIns="45720" tIns="18288" bIns="18288">
+          <a:bodyPr wrap="square" lIns="45720" tIns="18288" rIns="45720" bIns="18288">
             <a:spAutoFit/>
           </a:bodyPr>
           <a:lstStyle/>
@@ -11752,7 +11939,7 @@
           <a:noFill/>
         </p:spPr>
         <p:txBody>
-          <a:bodyPr wrap="square" lIns="45720" rIns="45720" tIns="18288" bIns="18288">
+          <a:bodyPr wrap="square" lIns="45720" tIns="18288" rIns="45720" bIns="18288">
             <a:spAutoFit/>
           </a:bodyPr>
           <a:lstStyle/>
@@ -11779,7 +11966,7 @@
           <p:nvPr/>
         </p:nvPicPr>
         <p:blipFill>
-          <a:blip r:embed="rId2"/>
+          <a:blip r:embed="rId3"/>
           <a:stretch>
             <a:fillRect/>
           </a:stretch>
@@ -11808,7 +11995,7 @@
           <p:nvPr/>
         </p:nvPicPr>
         <p:blipFill>
-          <a:blip r:embed="rId3"/>
+          <a:blip r:embed="rId4"/>
           <a:stretch>
             <a:fillRect/>
           </a:stretch>
@@ -11871,6 +12058,7 @@
           <a:lstStyle/>
           <a:p>
             <a:pPr algn="ctr"/>
+            <a:endParaRPr/>
           </a:p>
         </p:txBody>
       </p:sp>
@@ -11891,7 +12079,7 @@
           <a:noFill/>
         </p:spPr>
         <p:txBody>
-          <a:bodyPr wrap="square" lIns="45720" rIns="45720" tIns="18288" bIns="18288">
+          <a:bodyPr wrap="square" lIns="45720" tIns="18288" rIns="45720" bIns="18288">
             <a:spAutoFit/>
           </a:bodyPr>
           <a:lstStyle/>
@@ -11926,7 +12114,7 @@
           <a:noFill/>
         </p:spPr>
         <p:txBody>
-          <a:bodyPr wrap="square" lIns="45720" rIns="45720" tIns="18288" bIns="18288">
+          <a:bodyPr wrap="square" lIns="45720" tIns="18288" rIns="45720" bIns="18288">
             <a:spAutoFit/>
           </a:bodyPr>
           <a:lstStyle/>
@@ -11961,7 +12149,7 @@
           <a:noFill/>
         </p:spPr>
         <p:txBody>
-          <a:bodyPr wrap="square" lIns="45720" rIns="45720" tIns="18288" bIns="18288">
+          <a:bodyPr wrap="square" lIns="45720" tIns="18288" rIns="45720" bIns="18288">
             <a:spAutoFit/>
           </a:bodyPr>
           <a:lstStyle/>
@@ -11988,7 +12176,7 @@
 </file>
 
 <file path=ppt/slides/slide19.xml><?xml version="1.0" encoding="utf-8"?>
-<p:sld xmlns:a="http://schemas.openxmlformats.org/drawingml/2006/main" xmlns:p="http://schemas.openxmlformats.org/presentationml/2006/main" xmlns:r="http://schemas.openxmlformats.org/officeDocument/2006/relationships">
+<p:sld xmlns:a="http://schemas.openxmlformats.org/drawingml/2006/main" xmlns:r="http://schemas.openxmlformats.org/officeDocument/2006/relationships" xmlns:p="http://schemas.openxmlformats.org/presentationml/2006/main">
   <p:cSld>
     <p:spTree>
       <p:nvGrpSpPr>
@@ -11996,7 +12184,14 @@
         <p:cNvGrpSpPr/>
         <p:nvPr/>
       </p:nvGrpSpPr>
-      <p:grpSpPr/>
+      <p:grpSpPr>
+        <a:xfrm>
+          <a:off x="0" y="0"/>
+          <a:ext cx="0" cy="0"/>
+          <a:chOff x="0" y="0"/>
+          <a:chExt cx="0" cy="0"/>
+        </a:xfrm>
+      </p:grpSpPr>
       <p:sp>
         <p:nvSpPr>
           <p:cNvPr id="2" name="Rectangle 1"/>
@@ -12038,6 +12233,7 @@
           <a:lstStyle/>
           <a:p>
             <a:pPr algn="ctr"/>
+            <a:endParaRPr/>
           </a:p>
         </p:txBody>
       </p:sp>
@@ -12082,6 +12278,7 @@
           <a:lstStyle/>
           <a:p>
             <a:pPr algn="ctr"/>
+            <a:endParaRPr/>
           </a:p>
         </p:txBody>
       </p:sp>
@@ -12102,7 +12299,7 @@
           <a:noFill/>
         </p:spPr>
         <p:txBody>
-          <a:bodyPr wrap="square" lIns="45720" rIns="45720" tIns="18288" bIns="18288">
+          <a:bodyPr wrap="square" lIns="45720" tIns="18288" rIns="45720" bIns="18288">
             <a:spAutoFit/>
           </a:bodyPr>
           <a:lstStyle/>
@@ -12137,7 +12334,7 @@
           <a:noFill/>
         </p:spPr>
         <p:txBody>
-          <a:bodyPr wrap="square" lIns="45720" rIns="45720" tIns="18288" bIns="18288">
+          <a:bodyPr wrap="square" lIns="45720" tIns="18288" rIns="45720" bIns="18288">
             <a:spAutoFit/>
           </a:bodyPr>
           <a:lstStyle/>
@@ -12172,7 +12369,7 @@
           <a:noFill/>
         </p:spPr>
         <p:txBody>
-          <a:bodyPr wrap="square" lIns="45720" rIns="45720" tIns="18288" bIns="18288">
+          <a:bodyPr wrap="square" lIns="45720" tIns="18288" rIns="45720" bIns="18288">
             <a:spAutoFit/>
           </a:bodyPr>
           <a:lstStyle/>
@@ -12199,7 +12396,7 @@
           <p:nvPr/>
         </p:nvPicPr>
         <p:blipFill>
-          <a:blip r:embed="rId2"/>
+          <a:blip r:embed="rId3"/>
           <a:stretch>
             <a:fillRect/>
           </a:stretch>
@@ -12228,7 +12425,7 @@
           <p:nvPr/>
         </p:nvPicPr>
         <p:blipFill>
-          <a:blip r:embed="rId3"/>
+          <a:blip r:embed="rId4"/>
           <a:stretch>
             <a:fillRect/>
           </a:stretch>
@@ -12291,6 +12488,7 @@
           <a:lstStyle/>
           <a:p>
             <a:pPr algn="ctr"/>
+            <a:endParaRPr/>
           </a:p>
         </p:txBody>
       </p:sp>
@@ -12311,7 +12509,7 @@
           <a:noFill/>
         </p:spPr>
         <p:txBody>
-          <a:bodyPr wrap="square" lIns="45720" rIns="45720" tIns="18288" bIns="18288">
+          <a:bodyPr wrap="square" lIns="45720" tIns="18288" rIns="45720" bIns="18288">
             <a:spAutoFit/>
           </a:bodyPr>
           <a:lstStyle/>
@@ -12346,7 +12544,7 @@
           <a:noFill/>
         </p:spPr>
         <p:txBody>
-          <a:bodyPr wrap="square" lIns="45720" rIns="45720" tIns="18288" bIns="18288">
+          <a:bodyPr wrap="square" lIns="45720" tIns="18288" rIns="45720" bIns="18288">
             <a:spAutoFit/>
           </a:bodyPr>
           <a:lstStyle/>
@@ -12381,7 +12579,7 @@
           <a:noFill/>
         </p:spPr>
         <p:txBody>
-          <a:bodyPr wrap="square" lIns="45720" rIns="45720" tIns="18288" bIns="18288">
+          <a:bodyPr wrap="square" lIns="45720" tIns="18288" rIns="45720" bIns="18288">
             <a:spAutoFit/>
           </a:bodyPr>
           <a:lstStyle/>
@@ -12408,7 +12606,7 @@
 </file>
 
 <file path=ppt/slides/slide2.xml><?xml version="1.0" encoding="utf-8"?>
-<p:sld xmlns:a="http://schemas.openxmlformats.org/drawingml/2006/main" xmlns:p="http://schemas.openxmlformats.org/presentationml/2006/main" xmlns:r="http://schemas.openxmlformats.org/officeDocument/2006/relationships">
+<p:sld xmlns:a="http://schemas.openxmlformats.org/drawingml/2006/main" xmlns:r="http://schemas.openxmlformats.org/officeDocument/2006/relationships" xmlns:p="http://schemas.openxmlformats.org/presentationml/2006/main">
   <p:cSld>
     <p:spTree>
       <p:nvGrpSpPr>
@@ -12416,7 +12614,14 @@
         <p:cNvGrpSpPr/>
         <p:nvPr/>
       </p:nvGrpSpPr>
-      <p:grpSpPr/>
+      <p:grpSpPr>
+        <a:xfrm>
+          <a:off x="0" y="0"/>
+          <a:ext cx="0" cy="0"/>
+          <a:chOff x="0" y="0"/>
+          <a:chExt cx="0" cy="0"/>
+        </a:xfrm>
+      </p:grpSpPr>
       <p:sp>
         <p:nvSpPr>
           <p:cNvPr id="2" name="Rectangle 1"/>
@@ -12458,6 +12663,7 @@
           <a:lstStyle/>
           <a:p>
             <a:pPr algn="ctr"/>
+            <a:endParaRPr/>
           </a:p>
         </p:txBody>
       </p:sp>
@@ -12502,6 +12708,7 @@
           <a:lstStyle/>
           <a:p>
             <a:pPr algn="ctr"/>
+            <a:endParaRPr/>
           </a:p>
         </p:txBody>
       </p:sp>
@@ -12522,7 +12729,7 @@
           <a:noFill/>
         </p:spPr>
         <p:txBody>
-          <a:bodyPr wrap="square" lIns="45720" rIns="45720" tIns="18288" bIns="18288">
+          <a:bodyPr wrap="square" lIns="45720" tIns="18288" rIns="45720" bIns="18288">
             <a:spAutoFit/>
           </a:bodyPr>
           <a:lstStyle/>
@@ -12580,6 +12787,7 @@
           <a:lstStyle/>
           <a:p>
             <a:pPr algn="ctr"/>
+            <a:endParaRPr/>
           </a:p>
         </p:txBody>
       </p:sp>
@@ -12600,7 +12808,7 @@
           <a:noFill/>
         </p:spPr>
         <p:txBody>
-          <a:bodyPr wrap="square" lIns="45720" rIns="45720" tIns="18288" bIns="18288">
+          <a:bodyPr wrap="square" lIns="45720" tIns="18288" rIns="45720" bIns="18288">
             <a:spAutoFit/>
           </a:bodyPr>
           <a:lstStyle/>
@@ -12658,6 +12866,7 @@
           <a:lstStyle/>
           <a:p>
             <a:pPr algn="ctr"/>
+            <a:endParaRPr/>
           </a:p>
         </p:txBody>
       </p:sp>
@@ -12678,7 +12887,7 @@
           <a:noFill/>
         </p:spPr>
         <p:txBody>
-          <a:bodyPr wrap="square" lIns="45720" rIns="45720" tIns="18288" bIns="18288">
+          <a:bodyPr wrap="square" lIns="45720" tIns="18288" rIns="45720" bIns="18288">
             <a:spAutoFit/>
           </a:bodyPr>
           <a:lstStyle/>
@@ -12736,6 +12945,7 @@
           <a:lstStyle/>
           <a:p>
             <a:pPr algn="ctr"/>
+            <a:endParaRPr/>
           </a:p>
         </p:txBody>
       </p:sp>
@@ -12756,7 +12966,7 @@
           <a:noFill/>
         </p:spPr>
         <p:txBody>
-          <a:bodyPr wrap="square" lIns="45720" rIns="45720" tIns="18288" bIns="18288">
+          <a:bodyPr wrap="square" lIns="45720" tIns="18288" rIns="45720" bIns="18288">
             <a:spAutoFit/>
           </a:bodyPr>
           <a:lstStyle/>
@@ -12817,6 +13027,7 @@
           <a:lstStyle/>
           <a:p>
             <a:pPr algn="ctr"/>
+            <a:endParaRPr/>
           </a:p>
         </p:txBody>
       </p:sp>
@@ -12906,6 +13117,7 @@
           <a:lstStyle/>
           <a:p>
             <a:pPr algn="ctr"/>
+            <a:endParaRPr/>
           </a:p>
         </p:txBody>
       </p:sp>
@@ -12969,7 +13181,7 @@
           <a:noFill/>
         </p:spPr>
         <p:txBody>
-          <a:bodyPr wrap="square" lIns="45720" rIns="45720" tIns="18288" bIns="18288">
+          <a:bodyPr wrap="square" lIns="45720" tIns="18288" rIns="45720" bIns="18288">
             <a:spAutoFit/>
           </a:bodyPr>
           <a:lstStyle/>
@@ -13004,7 +13216,7 @@
           <a:noFill/>
         </p:spPr>
         <p:txBody>
-          <a:bodyPr wrap="square" lIns="45720" rIns="45720" tIns="18288" bIns="18288">
+          <a:bodyPr wrap="square" lIns="45720" tIns="18288" rIns="45720" bIns="18288">
             <a:spAutoFit/>
           </a:bodyPr>
           <a:lstStyle/>
@@ -13031,7 +13243,7 @@
 </file>
 
 <file path=ppt/slides/slide20.xml><?xml version="1.0" encoding="utf-8"?>
-<p:sld xmlns:a="http://schemas.openxmlformats.org/drawingml/2006/main" xmlns:p="http://schemas.openxmlformats.org/presentationml/2006/main" xmlns:r="http://schemas.openxmlformats.org/officeDocument/2006/relationships">
+<p:sld xmlns:a="http://schemas.openxmlformats.org/drawingml/2006/main" xmlns:r="http://schemas.openxmlformats.org/officeDocument/2006/relationships" xmlns:p="http://schemas.openxmlformats.org/presentationml/2006/main">
   <p:cSld>
     <p:spTree>
       <p:nvGrpSpPr>
@@ -13039,7 +13251,14 @@
         <p:cNvGrpSpPr/>
         <p:nvPr/>
       </p:nvGrpSpPr>
-      <p:grpSpPr/>
+      <p:grpSpPr>
+        <a:xfrm>
+          <a:off x="0" y="0"/>
+          <a:ext cx="0" cy="0"/>
+          <a:chOff x="0" y="0"/>
+          <a:chExt cx="0" cy="0"/>
+        </a:xfrm>
+      </p:grpSpPr>
       <p:sp>
         <p:nvSpPr>
           <p:cNvPr id="2" name="Rectangle 1"/>
@@ -13081,6 +13300,7 @@
           <a:lstStyle/>
           <a:p>
             <a:pPr algn="ctr"/>
+            <a:endParaRPr/>
           </a:p>
         </p:txBody>
       </p:sp>
@@ -13125,6 +13345,7 @@
           <a:lstStyle/>
           <a:p>
             <a:pPr algn="ctr"/>
+            <a:endParaRPr/>
           </a:p>
         </p:txBody>
       </p:sp>
@@ -13145,7 +13366,7 @@
           <a:noFill/>
         </p:spPr>
         <p:txBody>
-          <a:bodyPr wrap="square" lIns="45720" rIns="45720" tIns="18288" bIns="18288">
+          <a:bodyPr wrap="square" lIns="45720" tIns="18288" rIns="45720" bIns="18288">
             <a:spAutoFit/>
           </a:bodyPr>
           <a:lstStyle/>
@@ -13180,7 +13401,7 @@
           <a:noFill/>
         </p:spPr>
         <p:txBody>
-          <a:bodyPr wrap="square" lIns="45720" rIns="45720" tIns="18288" bIns="18288">
+          <a:bodyPr wrap="square" lIns="45720" tIns="18288" rIns="45720" bIns="18288">
             <a:spAutoFit/>
           </a:bodyPr>
           <a:lstStyle/>
@@ -13215,7 +13436,7 @@
           <a:noFill/>
         </p:spPr>
         <p:txBody>
-          <a:bodyPr wrap="square" lIns="45720" rIns="45720" tIns="18288" bIns="18288">
+          <a:bodyPr wrap="square" lIns="45720" tIns="18288" rIns="45720" bIns="18288">
             <a:spAutoFit/>
           </a:bodyPr>
           <a:lstStyle/>
@@ -13242,7 +13463,7 @@
           <p:nvPr/>
         </p:nvPicPr>
         <p:blipFill>
-          <a:blip r:embed="rId2"/>
+          <a:blip r:embed="rId3"/>
           <a:stretch>
             <a:fillRect/>
           </a:stretch>
@@ -13271,7 +13492,7 @@
           <p:nvPr/>
         </p:nvPicPr>
         <p:blipFill>
-          <a:blip r:embed="rId3"/>
+          <a:blip r:embed="rId4"/>
           <a:stretch>
             <a:fillRect/>
           </a:stretch>
@@ -13334,6 +13555,7 @@
           <a:lstStyle/>
           <a:p>
             <a:pPr algn="ctr"/>
+            <a:endParaRPr/>
           </a:p>
         </p:txBody>
       </p:sp>
@@ -13354,7 +13576,7 @@
           <a:noFill/>
         </p:spPr>
         <p:txBody>
-          <a:bodyPr wrap="square" lIns="45720" rIns="45720" tIns="18288" bIns="18288">
+          <a:bodyPr wrap="square" lIns="45720" tIns="18288" rIns="45720" bIns="18288">
             <a:spAutoFit/>
           </a:bodyPr>
           <a:lstStyle/>
@@ -13389,7 +13611,7 @@
           <a:noFill/>
         </p:spPr>
         <p:txBody>
-          <a:bodyPr wrap="square" lIns="45720" rIns="45720" tIns="18288" bIns="18288">
+          <a:bodyPr wrap="square" lIns="45720" tIns="18288" rIns="45720" bIns="18288">
             <a:spAutoFit/>
           </a:bodyPr>
           <a:lstStyle/>
@@ -13424,7 +13646,7 @@
           <a:noFill/>
         </p:spPr>
         <p:txBody>
-          <a:bodyPr wrap="square" lIns="45720" rIns="45720" tIns="18288" bIns="18288">
+          <a:bodyPr wrap="square" lIns="45720" tIns="18288" rIns="45720" bIns="18288">
             <a:spAutoFit/>
           </a:bodyPr>
           <a:lstStyle/>
@@ -13451,7 +13673,7 @@
 </file>
 
 <file path=ppt/slides/slide21.xml><?xml version="1.0" encoding="utf-8"?>
-<p:sld xmlns:a="http://schemas.openxmlformats.org/drawingml/2006/main" xmlns:p="http://schemas.openxmlformats.org/presentationml/2006/main" xmlns:r="http://schemas.openxmlformats.org/officeDocument/2006/relationships">
+<p:sld xmlns:a="http://schemas.openxmlformats.org/drawingml/2006/main" xmlns:r="http://schemas.openxmlformats.org/officeDocument/2006/relationships" xmlns:p="http://schemas.openxmlformats.org/presentationml/2006/main">
   <p:cSld>
     <p:spTree>
       <p:nvGrpSpPr>
@@ -13459,7 +13681,14 @@
         <p:cNvGrpSpPr/>
         <p:nvPr/>
       </p:nvGrpSpPr>
-      <p:grpSpPr/>
+      <p:grpSpPr>
+        <a:xfrm>
+          <a:off x="0" y="0"/>
+          <a:ext cx="0" cy="0"/>
+          <a:chOff x="0" y="0"/>
+          <a:chExt cx="0" cy="0"/>
+        </a:xfrm>
+      </p:grpSpPr>
       <p:sp>
         <p:nvSpPr>
           <p:cNvPr id="2" name="Rectangle 1"/>
@@ -13501,6 +13730,7 @@
           <a:lstStyle/>
           <a:p>
             <a:pPr algn="ctr"/>
+            <a:endParaRPr/>
           </a:p>
         </p:txBody>
       </p:sp>
@@ -13545,6 +13775,7 @@
           <a:lstStyle/>
           <a:p>
             <a:pPr algn="ctr"/>
+            <a:endParaRPr/>
           </a:p>
         </p:txBody>
       </p:sp>
@@ -13565,7 +13796,7 @@
           <a:noFill/>
         </p:spPr>
         <p:txBody>
-          <a:bodyPr wrap="square" lIns="45720" rIns="45720" tIns="18288" bIns="18288">
+          <a:bodyPr wrap="square" lIns="45720" tIns="18288" rIns="45720" bIns="18288">
             <a:spAutoFit/>
           </a:bodyPr>
           <a:lstStyle/>
@@ -13600,7 +13831,7 @@
           <a:noFill/>
         </p:spPr>
         <p:txBody>
-          <a:bodyPr wrap="square" lIns="45720" rIns="45720" tIns="18288" bIns="18288">
+          <a:bodyPr wrap="square" lIns="45720" tIns="18288" rIns="45720" bIns="18288">
             <a:spAutoFit/>
           </a:bodyPr>
           <a:lstStyle/>
@@ -13635,7 +13866,7 @@
           <a:noFill/>
         </p:spPr>
         <p:txBody>
-          <a:bodyPr wrap="square" lIns="45720" rIns="45720" tIns="18288" bIns="18288">
+          <a:bodyPr wrap="square" lIns="45720" tIns="18288" rIns="45720" bIns="18288">
             <a:spAutoFit/>
           </a:bodyPr>
           <a:lstStyle/>
@@ -13662,7 +13893,7 @@
           <p:nvPr/>
         </p:nvPicPr>
         <p:blipFill>
-          <a:blip r:embed="rId2"/>
+          <a:blip r:embed="rId3"/>
           <a:stretch>
             <a:fillRect/>
           </a:stretch>
@@ -13725,6 +13956,7 @@
           <a:lstStyle/>
           <a:p>
             <a:pPr algn="ctr"/>
+            <a:endParaRPr/>
           </a:p>
         </p:txBody>
       </p:sp>
@@ -13745,7 +13977,7 @@
           <a:noFill/>
         </p:spPr>
         <p:txBody>
-          <a:bodyPr wrap="square" lIns="45720" rIns="45720" tIns="18288" bIns="18288">
+          <a:bodyPr wrap="square" lIns="45720" tIns="18288" rIns="45720" bIns="18288">
             <a:spAutoFit/>
           </a:bodyPr>
           <a:lstStyle/>
@@ -13780,7 +14012,7 @@
           <a:noFill/>
         </p:spPr>
         <p:txBody>
-          <a:bodyPr wrap="square" lIns="45720" rIns="45720" tIns="18288" bIns="18288">
+          <a:bodyPr wrap="square" lIns="45720" tIns="18288" rIns="45720" bIns="18288">
             <a:spAutoFit/>
           </a:bodyPr>
           <a:lstStyle/>
@@ -13815,7 +14047,7 @@
           <a:noFill/>
         </p:spPr>
         <p:txBody>
-          <a:bodyPr wrap="square" lIns="45720" rIns="45720" tIns="18288" bIns="18288">
+          <a:bodyPr wrap="square" lIns="45720" tIns="18288" rIns="45720" bIns="18288">
             <a:spAutoFit/>
           </a:bodyPr>
           <a:lstStyle/>
@@ -13842,7 +14074,7 @@
 </file>
 
 <file path=ppt/slides/slide22.xml><?xml version="1.0" encoding="utf-8"?>
-<p:sld xmlns:a="http://schemas.openxmlformats.org/drawingml/2006/main" xmlns:p="http://schemas.openxmlformats.org/presentationml/2006/main" xmlns:r="http://schemas.openxmlformats.org/officeDocument/2006/relationships">
+<p:sld xmlns:a="http://schemas.openxmlformats.org/drawingml/2006/main" xmlns:r="http://schemas.openxmlformats.org/officeDocument/2006/relationships" xmlns:p="http://schemas.openxmlformats.org/presentationml/2006/main">
   <p:cSld>
     <p:spTree>
       <p:nvGrpSpPr>
@@ -13850,7 +14082,14 @@
         <p:cNvGrpSpPr/>
         <p:nvPr/>
       </p:nvGrpSpPr>
-      <p:grpSpPr/>
+      <p:grpSpPr>
+        <a:xfrm>
+          <a:off x="0" y="0"/>
+          <a:ext cx="0" cy="0"/>
+          <a:chOff x="0" y="0"/>
+          <a:chExt cx="0" cy="0"/>
+        </a:xfrm>
+      </p:grpSpPr>
       <p:sp>
         <p:nvSpPr>
           <p:cNvPr id="2" name="Rectangle 1"/>
@@ -13892,6 +14131,7 @@
           <a:lstStyle/>
           <a:p>
             <a:pPr algn="ctr"/>
+            <a:endParaRPr/>
           </a:p>
         </p:txBody>
       </p:sp>
@@ -13936,6 +14176,7 @@
           <a:lstStyle/>
           <a:p>
             <a:pPr algn="ctr"/>
+            <a:endParaRPr/>
           </a:p>
         </p:txBody>
       </p:sp>
@@ -13956,7 +14197,7 @@
           <a:noFill/>
         </p:spPr>
         <p:txBody>
-          <a:bodyPr wrap="square" lIns="45720" rIns="45720" tIns="18288" bIns="18288">
+          <a:bodyPr wrap="square" lIns="45720" tIns="18288" rIns="45720" bIns="18288">
             <a:spAutoFit/>
           </a:bodyPr>
           <a:lstStyle/>
@@ -13991,7 +14232,7 @@
           <a:noFill/>
         </p:spPr>
         <p:txBody>
-          <a:bodyPr wrap="square" lIns="45720" rIns="45720" tIns="18288" bIns="18288">
+          <a:bodyPr wrap="square" lIns="45720" tIns="18288" rIns="45720" bIns="18288">
             <a:spAutoFit/>
           </a:bodyPr>
           <a:lstStyle/>
@@ -14026,7 +14267,7 @@
           <a:noFill/>
         </p:spPr>
         <p:txBody>
-          <a:bodyPr wrap="square" lIns="45720" rIns="45720" tIns="18288" bIns="18288">
+          <a:bodyPr wrap="square" lIns="45720" tIns="18288" rIns="45720" bIns="18288">
             <a:spAutoFit/>
           </a:bodyPr>
           <a:lstStyle/>
@@ -14053,7 +14294,7 @@
           <p:nvPr/>
         </p:nvPicPr>
         <p:blipFill>
-          <a:blip r:embed="rId2"/>
+          <a:blip r:embed="rId3"/>
           <a:stretch>
             <a:fillRect/>
           </a:stretch>
@@ -14116,6 +14357,7 @@
           <a:lstStyle/>
           <a:p>
             <a:pPr algn="ctr"/>
+            <a:endParaRPr/>
           </a:p>
         </p:txBody>
       </p:sp>
@@ -14136,7 +14378,7 @@
           <a:noFill/>
         </p:spPr>
         <p:txBody>
-          <a:bodyPr wrap="square" lIns="45720" rIns="45720" tIns="18288" bIns="18288">
+          <a:bodyPr wrap="square" lIns="45720" tIns="18288" rIns="45720" bIns="18288">
             <a:spAutoFit/>
           </a:bodyPr>
           <a:lstStyle/>
@@ -14171,7 +14413,7 @@
           <a:noFill/>
         </p:spPr>
         <p:txBody>
-          <a:bodyPr wrap="square" lIns="45720" rIns="45720" tIns="18288" bIns="18288">
+          <a:bodyPr wrap="square" lIns="45720" tIns="18288" rIns="45720" bIns="18288">
             <a:spAutoFit/>
           </a:bodyPr>
           <a:lstStyle/>
@@ -14206,7 +14448,7 @@
           <a:noFill/>
         </p:spPr>
         <p:txBody>
-          <a:bodyPr wrap="square" lIns="45720" rIns="45720" tIns="18288" bIns="18288">
+          <a:bodyPr wrap="square" lIns="45720" tIns="18288" rIns="45720" bIns="18288">
             <a:spAutoFit/>
           </a:bodyPr>
           <a:lstStyle/>
@@ -14233,7 +14475,7 @@
 </file>
 
 <file path=ppt/slides/slide23.xml><?xml version="1.0" encoding="utf-8"?>
-<p:sld xmlns:a="http://schemas.openxmlformats.org/drawingml/2006/main" xmlns:p="http://schemas.openxmlformats.org/presentationml/2006/main" xmlns:r="http://schemas.openxmlformats.org/officeDocument/2006/relationships">
+<p:sld xmlns:a="http://schemas.openxmlformats.org/drawingml/2006/main" xmlns:r="http://schemas.openxmlformats.org/officeDocument/2006/relationships" xmlns:p="http://schemas.openxmlformats.org/presentationml/2006/main">
   <p:cSld>
     <p:spTree>
       <p:nvGrpSpPr>
@@ -14241,7 +14483,14 @@
         <p:cNvGrpSpPr/>
         <p:nvPr/>
       </p:nvGrpSpPr>
-      <p:grpSpPr/>
+      <p:grpSpPr>
+        <a:xfrm>
+          <a:off x="0" y="0"/>
+          <a:ext cx="0" cy="0"/>
+          <a:chOff x="0" y="0"/>
+          <a:chExt cx="0" cy="0"/>
+        </a:xfrm>
+      </p:grpSpPr>
       <p:sp>
         <p:nvSpPr>
           <p:cNvPr id="2" name="Rectangle 1"/>
@@ -14250,7 +14499,7 @@
         </p:nvSpPr>
         <p:spPr>
           <a:xfrm>
-            <a:off x="0" y="0"/>
+            <a:off x="30480" y="0"/>
             <a:ext cx="12191695" cy="6858000"/>
           </a:xfrm>
           <a:prstGeom prst="rect">
@@ -14283,6 +14532,7 @@
           <a:lstStyle/>
           <a:p>
             <a:pPr algn="ctr"/>
+            <a:endParaRPr/>
           </a:p>
         </p:txBody>
       </p:sp>
@@ -14327,6 +14577,7 @@
           <a:lstStyle/>
           <a:p>
             <a:pPr algn="ctr"/>
+            <a:endParaRPr/>
           </a:p>
         </p:txBody>
       </p:sp>
@@ -14347,7 +14598,7 @@
           <a:noFill/>
         </p:spPr>
         <p:txBody>
-          <a:bodyPr wrap="square" lIns="45720" rIns="45720" tIns="18288" bIns="18288">
+          <a:bodyPr wrap="square" lIns="45720" tIns="18288" rIns="45720" bIns="18288">
             <a:spAutoFit/>
           </a:bodyPr>
           <a:lstStyle/>
@@ -14382,7 +14633,7 @@
           <a:noFill/>
         </p:spPr>
         <p:txBody>
-          <a:bodyPr wrap="square" lIns="45720" rIns="45720" tIns="18288" bIns="18288">
+          <a:bodyPr wrap="square" lIns="45720" tIns="18288" rIns="45720" bIns="18288">
             <a:spAutoFit/>
           </a:bodyPr>
           <a:lstStyle/>
@@ -14417,7 +14668,7 @@
           <a:noFill/>
         </p:spPr>
         <p:txBody>
-          <a:bodyPr wrap="square" lIns="45720" rIns="45720" tIns="18288" bIns="18288">
+          <a:bodyPr wrap="square" lIns="45720" tIns="18288" rIns="45720" bIns="18288">
             <a:spAutoFit/>
           </a:bodyPr>
           <a:lstStyle/>
@@ -14435,35 +14686,6 @@
           </a:p>
         </p:txBody>
       </p:sp>
-      <p:pic>
-        <p:nvPicPr>
-          <p:cNvPr id="7" name="Picture 6" descr="08a-jsonl-1.jpg"/>
-          <p:cNvPicPr>
-            <a:picLocks noChangeAspect="1"/>
-          </p:cNvPicPr>
-          <p:nvPr/>
-        </p:nvPicPr>
-        <p:blipFill>
-          <a:blip r:embed="rId2"/>
-          <a:stretch>
-            <a:fillRect/>
-          </a:stretch>
-        </p:blipFill>
-        <p:spPr>
-          <a:xfrm>
-            <a:off x="457200" y="2907817"/>
-            <a:ext cx="5577840" cy="1179524"/>
-          </a:xfrm>
-          <a:prstGeom prst="rect">
-            <a:avLst/>
-          </a:prstGeom>
-          <a:ln w="9525">
-            <a:solidFill>
-              <a:srgbClr val="34A87E"/>
-            </a:solidFill>
-          </a:ln>
-        </p:spPr>
-      </p:pic>
       <p:pic>
         <p:nvPicPr>
           <p:cNvPr id="8" name="Picture 7" descr="08b-jsonl-2.jpg"/>
@@ -14480,7 +14702,7 @@
         </p:blipFill>
         <p:spPr>
           <a:xfrm>
-            <a:off x="6450679" y="1325880"/>
+            <a:off x="3090791" y="1257300"/>
             <a:ext cx="5020880" cy="4343400"/>
           </a:xfrm>
           <a:prstGeom prst="rect">
@@ -14536,6 +14758,7 @@
           <a:lstStyle/>
           <a:p>
             <a:pPr algn="ctr"/>
+            <a:endParaRPr/>
           </a:p>
         </p:txBody>
       </p:sp>
@@ -14556,7 +14779,7 @@
           <a:noFill/>
         </p:spPr>
         <p:txBody>
-          <a:bodyPr wrap="square" lIns="45720" rIns="45720" tIns="18288" bIns="18288">
+          <a:bodyPr wrap="square" lIns="45720" tIns="18288" rIns="45720" bIns="18288">
             <a:spAutoFit/>
           </a:bodyPr>
           <a:lstStyle/>
@@ -14591,7 +14814,7 @@
           <a:noFill/>
         </p:spPr>
         <p:txBody>
-          <a:bodyPr wrap="square" lIns="45720" rIns="45720" tIns="18288" bIns="18288">
+          <a:bodyPr wrap="square" lIns="45720" tIns="18288" rIns="45720" bIns="18288">
             <a:spAutoFit/>
           </a:bodyPr>
           <a:lstStyle/>
@@ -14626,7 +14849,7 @@
           <a:noFill/>
         </p:spPr>
         <p:txBody>
-          <a:bodyPr wrap="square" lIns="45720" rIns="45720" tIns="18288" bIns="18288">
+          <a:bodyPr wrap="square" lIns="45720" tIns="18288" rIns="45720" bIns="18288">
             <a:spAutoFit/>
           </a:bodyPr>
           <a:lstStyle/>
@@ -14653,7 +14876,7 @@
 </file>
 
 <file path=ppt/slides/slide3.xml><?xml version="1.0" encoding="utf-8"?>
-<p:sld xmlns:a="http://schemas.openxmlformats.org/drawingml/2006/main" xmlns:p="http://schemas.openxmlformats.org/presentationml/2006/main" xmlns:r="http://schemas.openxmlformats.org/officeDocument/2006/relationships">
+<p:sld xmlns:a="http://schemas.openxmlformats.org/drawingml/2006/main" xmlns:r="http://schemas.openxmlformats.org/officeDocument/2006/relationships" xmlns:p="http://schemas.openxmlformats.org/presentationml/2006/main">
   <p:cSld>
     <p:spTree>
       <p:nvGrpSpPr>
@@ -14661,7 +14884,14 @@
         <p:cNvGrpSpPr/>
         <p:nvPr/>
       </p:nvGrpSpPr>
-      <p:grpSpPr/>
+      <p:grpSpPr>
+        <a:xfrm>
+          <a:off x="0" y="0"/>
+          <a:ext cx="0" cy="0"/>
+          <a:chOff x="0" y="0"/>
+          <a:chExt cx="0" cy="0"/>
+        </a:xfrm>
+      </p:grpSpPr>
       <p:sp>
         <p:nvSpPr>
           <p:cNvPr id="2" name="Rectangle 1"/>
@@ -14703,6 +14933,7 @@
           <a:lstStyle/>
           <a:p>
             <a:pPr algn="ctr"/>
+            <a:endParaRPr/>
           </a:p>
         </p:txBody>
       </p:sp>
@@ -14747,6 +14978,7 @@
           <a:lstStyle/>
           <a:p>
             <a:pPr algn="ctr"/>
+            <a:endParaRPr/>
           </a:p>
         </p:txBody>
       </p:sp>
@@ -14767,7 +14999,7 @@
           <a:noFill/>
         </p:spPr>
         <p:txBody>
-          <a:bodyPr wrap="square" lIns="45720" rIns="45720" tIns="18288" bIns="18288">
+          <a:bodyPr wrap="square" lIns="45720" tIns="18288" rIns="45720" bIns="18288">
             <a:spAutoFit/>
           </a:bodyPr>
           <a:lstStyle/>
@@ -14804,13 +15036,25 @@
                 <a:tableStyleId>{5C22544A-7EE6-4342-B048-85BDC9FD1C3A}</a:tableStyleId>
               </a:tblPr>
               <a:tblGrid>
-                <a:gridCol w="5394960"/>
-                <a:gridCol w="5394960"/>
+                <a:gridCol w="5394960">
+                  <a:extLst>
+                    <a:ext uri="{9D8B030D-6E8A-4147-A177-3AD203B41FA5}">
+                      <a16:colId xmlns:a16="http://schemas.microsoft.com/office/drawing/2014/main" val="20000"/>
+                    </a:ext>
+                  </a:extLst>
+                </a:gridCol>
+                <a:gridCol w="5394960">
+                  <a:extLst>
+                    <a:ext uri="{9D8B030D-6E8A-4147-A177-3AD203B41FA5}">
+                      <a16:colId xmlns:a16="http://schemas.microsoft.com/office/drawing/2014/main" val="20001"/>
+                    </a:ext>
+                  </a:extLst>
+                </a:gridCol>
               </a:tblGrid>
               <a:tr h="533400">
                 <a:tc>
                   <a:txBody>
-                    <a:bodyPr wrap="square"/>
+                    <a:bodyPr/>
                     <a:lstStyle/>
                     <a:p>
                       <a:r>
@@ -14832,7 +15076,7 @@
                 </a:tc>
                 <a:tc>
                   <a:txBody>
-                    <a:bodyPr wrap="square"/>
+                    <a:bodyPr/>
                     <a:lstStyle/>
                     <a:p>
                       <a:r>
@@ -14852,11 +15096,16 @@
                     </a:solidFill>
                   </a:tcPr>
                 </a:tc>
+                <a:extLst>
+                  <a:ext uri="{0D108BD9-81ED-4DB2-BD59-A6C34878D82A}">
+                    <a16:rowId xmlns:a16="http://schemas.microsoft.com/office/drawing/2014/main" val="10000"/>
+                  </a:ext>
+                </a:extLst>
               </a:tr>
               <a:tr h="533400">
                 <a:tc>
                   <a:txBody>
-                    <a:bodyPr wrap="square"/>
+                    <a:bodyPr/>
                     <a:lstStyle/>
                     <a:p>
                       <a:r>
@@ -14878,7 +15127,7 @@
                 </a:tc>
                 <a:tc>
                   <a:txBody>
-                    <a:bodyPr wrap="square"/>
+                    <a:bodyPr/>
                     <a:lstStyle/>
                     <a:p>
                       <a:r>
@@ -14898,11 +15147,16 @@
                     </a:solidFill>
                   </a:tcPr>
                 </a:tc>
+                <a:extLst>
+                  <a:ext uri="{0D108BD9-81ED-4DB2-BD59-A6C34878D82A}">
+                    <a16:rowId xmlns:a16="http://schemas.microsoft.com/office/drawing/2014/main" val="10001"/>
+                  </a:ext>
+                </a:extLst>
               </a:tr>
               <a:tr h="533400">
                 <a:tc>
                   <a:txBody>
-                    <a:bodyPr wrap="square"/>
+                    <a:bodyPr/>
                     <a:lstStyle/>
                     <a:p>
                       <a:r>
@@ -14924,7 +15178,7 @@
                 </a:tc>
                 <a:tc>
                   <a:txBody>
-                    <a:bodyPr wrap="square"/>
+                    <a:bodyPr/>
                     <a:lstStyle/>
                     <a:p>
                       <a:r>
@@ -14944,11 +15198,16 @@
                     </a:solidFill>
                   </a:tcPr>
                 </a:tc>
+                <a:extLst>
+                  <a:ext uri="{0D108BD9-81ED-4DB2-BD59-A6C34878D82A}">
+                    <a16:rowId xmlns:a16="http://schemas.microsoft.com/office/drawing/2014/main" val="10002"/>
+                  </a:ext>
+                </a:extLst>
               </a:tr>
               <a:tr h="533400">
                 <a:tc>
                   <a:txBody>
-                    <a:bodyPr wrap="square"/>
+                    <a:bodyPr/>
                     <a:lstStyle/>
                     <a:p>
                       <a:r>
@@ -14970,7 +15229,7 @@
                 </a:tc>
                 <a:tc>
                   <a:txBody>
-                    <a:bodyPr wrap="square"/>
+                    <a:bodyPr/>
                     <a:lstStyle/>
                     <a:p>
                       <a:r>
@@ -14990,11 +15249,16 @@
                     </a:solidFill>
                   </a:tcPr>
                 </a:tc>
+                <a:extLst>
+                  <a:ext uri="{0D108BD9-81ED-4DB2-BD59-A6C34878D82A}">
+                    <a16:rowId xmlns:a16="http://schemas.microsoft.com/office/drawing/2014/main" val="10003"/>
+                  </a:ext>
+                </a:extLst>
               </a:tr>
               <a:tr h="533400">
                 <a:tc>
                   <a:txBody>
-                    <a:bodyPr wrap="square"/>
+                    <a:bodyPr/>
                     <a:lstStyle/>
                     <a:p>
                       <a:r>
@@ -15016,7 +15280,7 @@
                 </a:tc>
                 <a:tc>
                   <a:txBody>
-                    <a:bodyPr wrap="square"/>
+                    <a:bodyPr/>
                     <a:lstStyle/>
                     <a:p>
                       <a:r>
@@ -15036,11 +15300,16 @@
                     </a:solidFill>
                   </a:tcPr>
                 </a:tc>
+                <a:extLst>
+                  <a:ext uri="{0D108BD9-81ED-4DB2-BD59-A6C34878D82A}">
+                    <a16:rowId xmlns:a16="http://schemas.microsoft.com/office/drawing/2014/main" val="10004"/>
+                  </a:ext>
+                </a:extLst>
               </a:tr>
               <a:tr h="533400">
                 <a:tc>
                   <a:txBody>
-                    <a:bodyPr wrap="square"/>
+                    <a:bodyPr/>
                     <a:lstStyle/>
                     <a:p>
                       <a:r>
@@ -15062,7 +15331,7 @@
                 </a:tc>
                 <a:tc>
                   <a:txBody>
-                    <a:bodyPr wrap="square"/>
+                    <a:bodyPr/>
                     <a:lstStyle/>
                     <a:p>
                       <a:r>
@@ -15082,6 +15351,11 @@
                     </a:solidFill>
                   </a:tcPr>
                 </a:tc>
+                <a:extLst>
+                  <a:ext uri="{0D108BD9-81ED-4DB2-BD59-A6C34878D82A}">
+                    <a16:rowId xmlns:a16="http://schemas.microsoft.com/office/drawing/2014/main" val="10005"/>
+                  </a:ext>
+                </a:extLst>
               </a:tr>
             </a:tbl>
           </a:graphicData>
@@ -15130,6 +15404,7 @@
           <a:lstStyle/>
           <a:p>
             <a:pPr algn="ctr"/>
+            <a:endParaRPr/>
           </a:p>
         </p:txBody>
       </p:sp>
@@ -15220,7 +15495,7 @@
           <a:noFill/>
         </p:spPr>
         <p:txBody>
-          <a:bodyPr wrap="square" lIns="45720" rIns="45720" tIns="18288" bIns="18288">
+          <a:bodyPr wrap="square" lIns="45720" tIns="18288" rIns="45720" bIns="18288">
             <a:spAutoFit/>
           </a:bodyPr>
           <a:lstStyle/>
@@ -15255,7 +15530,7 @@
           <a:noFill/>
         </p:spPr>
         <p:txBody>
-          <a:bodyPr wrap="square" lIns="45720" rIns="45720" tIns="18288" bIns="18288">
+          <a:bodyPr wrap="square" lIns="45720" tIns="18288" rIns="45720" bIns="18288">
             <a:spAutoFit/>
           </a:bodyPr>
           <a:lstStyle/>
@@ -15282,7 +15557,7 @@
 </file>
 
 <file path=ppt/slides/slide4.xml><?xml version="1.0" encoding="utf-8"?>
-<p:sld xmlns:a="http://schemas.openxmlformats.org/drawingml/2006/main" xmlns:p="http://schemas.openxmlformats.org/presentationml/2006/main" xmlns:r="http://schemas.openxmlformats.org/officeDocument/2006/relationships">
+<p:sld xmlns:a="http://schemas.openxmlformats.org/drawingml/2006/main" xmlns:r="http://schemas.openxmlformats.org/officeDocument/2006/relationships" xmlns:p="http://schemas.openxmlformats.org/presentationml/2006/main">
   <p:cSld>
     <p:spTree>
       <p:nvGrpSpPr>
@@ -15290,7 +15565,14 @@
         <p:cNvGrpSpPr/>
         <p:nvPr/>
       </p:nvGrpSpPr>
-      <p:grpSpPr/>
+      <p:grpSpPr>
+        <a:xfrm>
+          <a:off x="0" y="0"/>
+          <a:ext cx="0" cy="0"/>
+          <a:chOff x="0" y="0"/>
+          <a:chExt cx="0" cy="0"/>
+        </a:xfrm>
+      </p:grpSpPr>
       <p:sp>
         <p:nvSpPr>
           <p:cNvPr id="2" name="Rectangle 1"/>
@@ -15332,6 +15614,7 @@
           <a:lstStyle/>
           <a:p>
             <a:pPr algn="ctr"/>
+            <a:endParaRPr/>
           </a:p>
         </p:txBody>
       </p:sp>
@@ -15376,6 +15659,7 @@
           <a:lstStyle/>
           <a:p>
             <a:pPr algn="ctr"/>
+            <a:endParaRPr/>
           </a:p>
         </p:txBody>
       </p:sp>
@@ -15396,7 +15680,7 @@
           <a:noFill/>
         </p:spPr>
         <p:txBody>
-          <a:bodyPr wrap="square" lIns="45720" rIns="45720" tIns="18288" bIns="18288">
+          <a:bodyPr wrap="square" lIns="45720" tIns="18288" rIns="45720" bIns="18288">
             <a:spAutoFit/>
           </a:bodyPr>
           <a:lstStyle/>
@@ -15431,7 +15715,7 @@
           <a:noFill/>
         </p:spPr>
         <p:txBody>
-          <a:bodyPr wrap="square" lIns="45720" rIns="45720" tIns="18288" bIns="18288">
+          <a:bodyPr wrap="square" lIns="45720" tIns="18288" rIns="45720" bIns="18288">
             <a:spAutoFit/>
           </a:bodyPr>
           <a:lstStyle/>
@@ -15492,6 +15776,7 @@
           <a:lstStyle/>
           <a:p>
             <a:pPr algn="ctr"/>
+            <a:endParaRPr/>
           </a:p>
         </p:txBody>
       </p:sp>
@@ -15512,7 +15797,7 @@
           <a:noFill/>
         </p:spPr>
         <p:txBody>
-          <a:bodyPr wrap="square" lIns="45720" rIns="45720" tIns="18288" bIns="18288">
+          <a:bodyPr wrap="square" lIns="45720" tIns="18288" rIns="45720" bIns="18288">
             <a:spAutoFit/>
           </a:bodyPr>
           <a:lstStyle/>
@@ -15547,7 +15832,7 @@
           <a:noFill/>
         </p:spPr>
         <p:txBody>
-          <a:bodyPr wrap="square" lIns="45720" rIns="45720" tIns="18288" bIns="18288">
+          <a:bodyPr wrap="square" lIns="45720" tIns="18288" rIns="45720" bIns="18288">
             <a:spAutoFit/>
           </a:bodyPr>
           <a:lstStyle/>
@@ -15608,6 +15893,7 @@
           <a:lstStyle/>
           <a:p>
             <a:pPr algn="ctr"/>
+            <a:endParaRPr/>
           </a:p>
         </p:txBody>
       </p:sp>
@@ -15628,7 +15914,7 @@
           <a:noFill/>
         </p:spPr>
         <p:txBody>
-          <a:bodyPr wrap="square" lIns="45720" rIns="45720" tIns="18288" bIns="18288">
+          <a:bodyPr wrap="square" lIns="45720" tIns="18288" rIns="45720" bIns="18288">
             <a:spAutoFit/>
           </a:bodyPr>
           <a:lstStyle/>
@@ -15663,7 +15949,7 @@
           <a:noFill/>
         </p:spPr>
         <p:txBody>
-          <a:bodyPr wrap="square" lIns="45720" rIns="45720" tIns="18288" bIns="18288">
+          <a:bodyPr wrap="square" lIns="45720" tIns="18288" rIns="45720" bIns="18288">
             <a:spAutoFit/>
           </a:bodyPr>
           <a:lstStyle/>
@@ -15724,6 +16010,7 @@
           <a:lstStyle/>
           <a:p>
             <a:pPr algn="ctr"/>
+            <a:endParaRPr/>
           </a:p>
         </p:txBody>
       </p:sp>
@@ -15744,7 +16031,7 @@
           <a:noFill/>
         </p:spPr>
         <p:txBody>
-          <a:bodyPr wrap="square" lIns="45720" rIns="45720" tIns="18288" bIns="18288">
+          <a:bodyPr wrap="square" lIns="45720" tIns="18288" rIns="45720" bIns="18288">
             <a:spAutoFit/>
           </a:bodyPr>
           <a:lstStyle/>
@@ -15779,7 +16066,7 @@
           <a:noFill/>
         </p:spPr>
         <p:txBody>
-          <a:bodyPr wrap="square" lIns="45720" rIns="45720" tIns="18288" bIns="18288">
+          <a:bodyPr wrap="square" lIns="45720" tIns="18288" rIns="45720" bIns="18288">
             <a:spAutoFit/>
           </a:bodyPr>
           <a:lstStyle/>
@@ -15840,6 +16127,7 @@
           <a:lstStyle/>
           <a:p>
             <a:pPr algn="ctr"/>
+            <a:endParaRPr/>
           </a:p>
         </p:txBody>
       </p:sp>
@@ -15860,7 +16148,7 @@
           <a:noFill/>
         </p:spPr>
         <p:txBody>
-          <a:bodyPr wrap="square" lIns="45720" rIns="45720" tIns="18288" bIns="18288">
+          <a:bodyPr wrap="square" lIns="45720" tIns="18288" rIns="45720" bIns="18288">
             <a:spAutoFit/>
           </a:bodyPr>
           <a:lstStyle/>
@@ -15895,7 +16183,7 @@
           <a:noFill/>
         </p:spPr>
         <p:txBody>
-          <a:bodyPr wrap="square" lIns="45720" rIns="45720" tIns="18288" bIns="18288">
+          <a:bodyPr wrap="square" lIns="45720" tIns="18288" rIns="45720" bIns="18288">
             <a:spAutoFit/>
           </a:bodyPr>
           <a:lstStyle/>
@@ -15956,6 +16244,7 @@
           <a:lstStyle/>
           <a:p>
             <a:pPr algn="ctr"/>
+            <a:endParaRPr/>
           </a:p>
         </p:txBody>
       </p:sp>
@@ -15976,7 +16265,7 @@
           <a:noFill/>
         </p:spPr>
         <p:txBody>
-          <a:bodyPr wrap="square" lIns="45720" rIns="45720" tIns="18288" bIns="18288">
+          <a:bodyPr wrap="square" lIns="45720" tIns="18288" rIns="45720" bIns="18288">
             <a:spAutoFit/>
           </a:bodyPr>
           <a:lstStyle/>
@@ -16011,7 +16300,7 @@
           <a:noFill/>
         </p:spPr>
         <p:txBody>
-          <a:bodyPr wrap="square" lIns="45720" rIns="45720" tIns="18288" bIns="18288">
+          <a:bodyPr wrap="square" lIns="45720" tIns="18288" rIns="45720" bIns="18288">
             <a:spAutoFit/>
           </a:bodyPr>
           <a:lstStyle/>
@@ -16046,7 +16335,7 @@
           <a:noFill/>
         </p:spPr>
         <p:txBody>
-          <a:bodyPr wrap="square" lIns="45720" rIns="45720" tIns="18288" bIns="18288">
+          <a:bodyPr wrap="square" lIns="45720" tIns="18288" rIns="45720" bIns="18288">
             <a:spAutoFit/>
           </a:bodyPr>
           <a:lstStyle/>
@@ -16081,7 +16370,7 @@
           <a:noFill/>
         </p:spPr>
         <p:txBody>
-          <a:bodyPr wrap="square" lIns="45720" rIns="45720" tIns="18288" bIns="18288">
+          <a:bodyPr wrap="square" lIns="45720" tIns="18288" rIns="45720" bIns="18288">
             <a:spAutoFit/>
           </a:bodyPr>
           <a:lstStyle/>
@@ -16116,7 +16405,7 @@
           <a:noFill/>
         </p:spPr>
         <p:txBody>
-          <a:bodyPr wrap="square" lIns="45720" rIns="45720" tIns="18288" bIns="18288">
+          <a:bodyPr wrap="square" lIns="45720" tIns="18288" rIns="45720" bIns="18288">
             <a:spAutoFit/>
           </a:bodyPr>
           <a:lstStyle/>
@@ -16151,7 +16440,7 @@
           <a:noFill/>
         </p:spPr>
         <p:txBody>
-          <a:bodyPr wrap="square" lIns="45720" rIns="45720" tIns="18288" bIns="18288">
+          <a:bodyPr wrap="square" lIns="45720" tIns="18288" rIns="45720" bIns="18288">
             <a:spAutoFit/>
           </a:bodyPr>
           <a:lstStyle/>
@@ -16178,7 +16467,7 @@
 </file>
 
 <file path=ppt/slides/slide5.xml><?xml version="1.0" encoding="utf-8"?>
-<p:sld xmlns:a="http://schemas.openxmlformats.org/drawingml/2006/main" xmlns:p="http://schemas.openxmlformats.org/presentationml/2006/main" xmlns:r="http://schemas.openxmlformats.org/officeDocument/2006/relationships">
+<p:sld xmlns:a="http://schemas.openxmlformats.org/drawingml/2006/main" xmlns:r="http://schemas.openxmlformats.org/officeDocument/2006/relationships" xmlns:p="http://schemas.openxmlformats.org/presentationml/2006/main">
   <p:cSld>
     <p:spTree>
       <p:nvGrpSpPr>
@@ -16186,7 +16475,14 @@
         <p:cNvGrpSpPr/>
         <p:nvPr/>
       </p:nvGrpSpPr>
-      <p:grpSpPr/>
+      <p:grpSpPr>
+        <a:xfrm>
+          <a:off x="0" y="0"/>
+          <a:ext cx="0" cy="0"/>
+          <a:chOff x="0" y="0"/>
+          <a:chExt cx="0" cy="0"/>
+        </a:xfrm>
+      </p:grpSpPr>
       <p:sp>
         <p:nvSpPr>
           <p:cNvPr id="2" name="Rectangle 1"/>
@@ -16228,6 +16524,7 @@
           <a:lstStyle/>
           <a:p>
             <a:pPr algn="ctr"/>
+            <a:endParaRPr/>
           </a:p>
         </p:txBody>
       </p:sp>
@@ -16272,6 +16569,7 @@
           <a:lstStyle/>
           <a:p>
             <a:pPr algn="ctr"/>
+            <a:endParaRPr/>
           </a:p>
         </p:txBody>
       </p:sp>
@@ -16292,7 +16590,7 @@
           <a:noFill/>
         </p:spPr>
         <p:txBody>
-          <a:bodyPr wrap="square" lIns="45720" rIns="45720" tIns="18288" bIns="18288">
+          <a:bodyPr wrap="square" lIns="45720" tIns="18288" rIns="45720" bIns="18288">
             <a:spAutoFit/>
           </a:bodyPr>
           <a:lstStyle/>
@@ -16353,6 +16651,7 @@
           <a:lstStyle/>
           <a:p>
             <a:pPr algn="ctr"/>
+            <a:endParaRPr/>
           </a:p>
         </p:txBody>
       </p:sp>
@@ -16396,6 +16695,7 @@
           <a:lstStyle/>
           <a:p>
             <a:pPr algn="ctr"/>
+            <a:endParaRPr/>
           </a:p>
         </p:txBody>
       </p:sp>
@@ -16416,7 +16716,7 @@
           <a:noFill/>
         </p:spPr>
         <p:txBody>
-          <a:bodyPr wrap="square" lIns="45720" rIns="45720" tIns="18288" bIns="18288">
+          <a:bodyPr wrap="square" lIns="45720" tIns="18288" rIns="45720" bIns="18288">
             <a:spAutoFit/>
           </a:bodyPr>
           <a:lstStyle/>
@@ -16451,7 +16751,7 @@
           <a:noFill/>
         </p:spPr>
         <p:txBody>
-          <a:bodyPr wrap="square" lIns="45720" rIns="45720" tIns="18288" bIns="18288">
+          <a:bodyPr wrap="square" lIns="45720" tIns="18288" rIns="45720" bIns="18288">
             <a:spAutoFit/>
           </a:bodyPr>
           <a:lstStyle/>
@@ -16486,7 +16786,7 @@
           <a:noFill/>
         </p:spPr>
         <p:txBody>
-          <a:bodyPr wrap="square" lIns="45720" rIns="45720" tIns="18288" bIns="18288">
+          <a:bodyPr wrap="square" lIns="45720" tIns="18288" rIns="45720" bIns="18288">
             <a:spAutoFit/>
           </a:bodyPr>
           <a:lstStyle/>
@@ -16521,7 +16821,7 @@
           <a:noFill/>
         </p:spPr>
         <p:txBody>
-          <a:bodyPr wrap="square" lIns="45720" rIns="45720" tIns="18288" bIns="18288">
+          <a:bodyPr wrap="square" lIns="45720" tIns="18288" rIns="45720" bIns="18288">
             <a:spAutoFit/>
           </a:bodyPr>
           <a:lstStyle/>
@@ -16556,7 +16856,7 @@
           <a:noFill/>
         </p:spPr>
         <p:txBody>
-          <a:bodyPr wrap="square" lIns="45720" rIns="45720" tIns="18288" bIns="18288">
+          <a:bodyPr wrap="square" lIns="45720" tIns="18288" rIns="45720" bIns="18288">
             <a:spAutoFit/>
           </a:bodyPr>
           <a:lstStyle/>
@@ -16617,6 +16917,7 @@
           <a:lstStyle/>
           <a:p>
             <a:pPr algn="ctr"/>
+            <a:endParaRPr/>
           </a:p>
         </p:txBody>
       </p:sp>
@@ -16660,6 +16961,7 @@
           <a:lstStyle/>
           <a:p>
             <a:pPr algn="ctr"/>
+            <a:endParaRPr/>
           </a:p>
         </p:txBody>
       </p:sp>
@@ -16680,7 +16982,7 @@
           <a:noFill/>
         </p:spPr>
         <p:txBody>
-          <a:bodyPr wrap="square" lIns="45720" rIns="45720" tIns="18288" bIns="18288">
+          <a:bodyPr wrap="square" lIns="45720" tIns="18288" rIns="45720" bIns="18288">
             <a:spAutoFit/>
           </a:bodyPr>
           <a:lstStyle/>
@@ -16715,7 +17017,7 @@
           <a:noFill/>
         </p:spPr>
         <p:txBody>
-          <a:bodyPr wrap="square" lIns="45720" rIns="45720" tIns="18288" bIns="18288">
+          <a:bodyPr wrap="square" lIns="45720" tIns="18288" rIns="45720" bIns="18288">
             <a:spAutoFit/>
           </a:bodyPr>
           <a:lstStyle/>
@@ -16750,7 +17052,7 @@
           <a:noFill/>
         </p:spPr>
         <p:txBody>
-          <a:bodyPr wrap="square" lIns="45720" rIns="45720" tIns="18288" bIns="18288">
+          <a:bodyPr wrap="square" lIns="45720" tIns="18288" rIns="45720" bIns="18288">
             <a:spAutoFit/>
           </a:bodyPr>
           <a:lstStyle/>
@@ -16785,7 +17087,7 @@
           <a:noFill/>
         </p:spPr>
         <p:txBody>
-          <a:bodyPr wrap="square" lIns="45720" rIns="45720" tIns="18288" bIns="18288">
+          <a:bodyPr wrap="square" lIns="45720" tIns="18288" rIns="45720" bIns="18288">
             <a:spAutoFit/>
           </a:bodyPr>
           <a:lstStyle/>
@@ -16820,7 +17122,7 @@
           <a:noFill/>
         </p:spPr>
         <p:txBody>
-          <a:bodyPr wrap="square" lIns="45720" rIns="45720" tIns="18288" bIns="18288">
+          <a:bodyPr wrap="square" lIns="45720" tIns="18288" rIns="45720" bIns="18288">
             <a:spAutoFit/>
           </a:bodyPr>
           <a:lstStyle/>
@@ -16881,6 +17183,7 @@
           <a:lstStyle/>
           <a:p>
             <a:pPr algn="ctr"/>
+            <a:endParaRPr/>
           </a:p>
         </p:txBody>
       </p:sp>
@@ -16924,6 +17227,7 @@
           <a:lstStyle/>
           <a:p>
             <a:pPr algn="ctr"/>
+            <a:endParaRPr/>
           </a:p>
         </p:txBody>
       </p:sp>
@@ -16944,7 +17248,7 @@
           <a:noFill/>
         </p:spPr>
         <p:txBody>
-          <a:bodyPr wrap="square" lIns="45720" rIns="45720" tIns="18288" bIns="18288">
+          <a:bodyPr wrap="square" lIns="45720" tIns="18288" rIns="45720" bIns="18288">
             <a:spAutoFit/>
           </a:bodyPr>
           <a:lstStyle/>
@@ -16979,7 +17283,7 @@
           <a:noFill/>
         </p:spPr>
         <p:txBody>
-          <a:bodyPr wrap="square" lIns="45720" rIns="45720" tIns="18288" bIns="18288">
+          <a:bodyPr wrap="square" lIns="45720" tIns="18288" rIns="45720" bIns="18288">
             <a:spAutoFit/>
           </a:bodyPr>
           <a:lstStyle/>
@@ -17014,7 +17318,7 @@
           <a:noFill/>
         </p:spPr>
         <p:txBody>
-          <a:bodyPr wrap="square" lIns="45720" rIns="45720" tIns="18288" bIns="18288">
+          <a:bodyPr wrap="square" lIns="45720" tIns="18288" rIns="45720" bIns="18288">
             <a:spAutoFit/>
           </a:bodyPr>
           <a:lstStyle/>
@@ -17049,7 +17353,7 @@
           <a:noFill/>
         </p:spPr>
         <p:txBody>
-          <a:bodyPr wrap="square" lIns="45720" rIns="45720" tIns="18288" bIns="18288">
+          <a:bodyPr wrap="square" lIns="45720" tIns="18288" rIns="45720" bIns="18288">
             <a:spAutoFit/>
           </a:bodyPr>
           <a:lstStyle/>
@@ -17084,7 +17388,7 @@
           <a:noFill/>
         </p:spPr>
         <p:txBody>
-          <a:bodyPr wrap="square" lIns="45720" rIns="45720" tIns="18288" bIns="18288">
+          <a:bodyPr wrap="square" lIns="45720" tIns="18288" rIns="45720" bIns="18288">
             <a:spAutoFit/>
           </a:bodyPr>
           <a:lstStyle/>
@@ -17145,6 +17449,7 @@
           <a:lstStyle/>
           <a:p>
             <a:pPr algn="ctr"/>
+            <a:endParaRPr/>
           </a:p>
         </p:txBody>
       </p:sp>
@@ -17165,7 +17470,7 @@
           <a:noFill/>
         </p:spPr>
         <p:txBody>
-          <a:bodyPr wrap="square" lIns="45720" rIns="45720" tIns="18288" bIns="18288">
+          <a:bodyPr wrap="square" lIns="45720" tIns="18288" rIns="45720" bIns="18288">
             <a:spAutoFit/>
           </a:bodyPr>
           <a:lstStyle/>
@@ -17200,7 +17505,7 @@
           <a:noFill/>
         </p:spPr>
         <p:txBody>
-          <a:bodyPr wrap="square" lIns="45720" rIns="45720" tIns="18288" bIns="18288">
+          <a:bodyPr wrap="square" lIns="45720" tIns="18288" rIns="45720" bIns="18288">
             <a:spAutoFit/>
           </a:bodyPr>
           <a:lstStyle/>
@@ -17235,7 +17540,7 @@
           <a:noFill/>
         </p:spPr>
         <p:txBody>
-          <a:bodyPr wrap="square" lIns="45720" rIns="45720" tIns="18288" bIns="18288">
+          <a:bodyPr wrap="square" lIns="45720" tIns="18288" rIns="45720" bIns="18288">
             <a:spAutoFit/>
           </a:bodyPr>
           <a:lstStyle/>
@@ -17262,7 +17567,7 @@
 </file>
 
 <file path=ppt/slides/slide6.xml><?xml version="1.0" encoding="utf-8"?>
-<p:sld xmlns:a="http://schemas.openxmlformats.org/drawingml/2006/main" xmlns:p="http://schemas.openxmlformats.org/presentationml/2006/main" xmlns:r="http://schemas.openxmlformats.org/officeDocument/2006/relationships">
+<p:sld xmlns:a="http://schemas.openxmlformats.org/drawingml/2006/main" xmlns:r="http://schemas.openxmlformats.org/officeDocument/2006/relationships" xmlns:p="http://schemas.openxmlformats.org/presentationml/2006/main">
   <p:cSld>
     <p:spTree>
       <p:nvGrpSpPr>
@@ -17270,7 +17575,14 @@
         <p:cNvGrpSpPr/>
         <p:nvPr/>
       </p:nvGrpSpPr>
-      <p:grpSpPr/>
+      <p:grpSpPr>
+        <a:xfrm>
+          <a:off x="0" y="0"/>
+          <a:ext cx="0" cy="0"/>
+          <a:chOff x="0" y="0"/>
+          <a:chExt cx="0" cy="0"/>
+        </a:xfrm>
+      </p:grpSpPr>
       <p:sp>
         <p:nvSpPr>
           <p:cNvPr id="2" name="Rectangle 1"/>
@@ -17312,6 +17624,7 @@
           <a:lstStyle/>
           <a:p>
             <a:pPr algn="ctr"/>
+            <a:endParaRPr/>
           </a:p>
         </p:txBody>
       </p:sp>
@@ -17356,6 +17669,7 @@
           <a:lstStyle/>
           <a:p>
             <a:pPr algn="ctr"/>
+            <a:endParaRPr/>
           </a:p>
         </p:txBody>
       </p:sp>
@@ -17376,7 +17690,7 @@
           <a:noFill/>
         </p:spPr>
         <p:txBody>
-          <a:bodyPr wrap="square" lIns="45720" rIns="45720" tIns="18288" bIns="18288">
+          <a:bodyPr wrap="square" lIns="45720" tIns="18288" rIns="45720" bIns="18288">
             <a:spAutoFit/>
           </a:bodyPr>
           <a:lstStyle/>
@@ -17411,7 +17725,7 @@
           <a:noFill/>
         </p:spPr>
         <p:txBody>
-          <a:bodyPr wrap="square" lIns="45720" rIns="45720" tIns="18288" bIns="18288">
+          <a:bodyPr wrap="square" lIns="45720" tIns="18288" rIns="45720" bIns="18288">
             <a:spAutoFit/>
           </a:bodyPr>
           <a:lstStyle/>
@@ -17468,7 +17782,7 @@
           </a:fontRef>
         </p:style>
         <p:txBody>
-          <a:bodyPr rtlCol="0" anchor="ctr" lIns="137160"/>
+          <a:bodyPr lIns="137160" rtlCol="0" anchor="ctr"/>
           <a:lstStyle/>
           <a:p>
             <a:pPr algn="l"/>
@@ -17501,7 +17815,7 @@
           <a:noFill/>
         </p:spPr>
         <p:txBody>
-          <a:bodyPr wrap="square" lIns="45720" rIns="45720" tIns="18288" bIns="18288">
+          <a:bodyPr wrap="square" lIns="45720" tIns="18288" rIns="45720" bIns="18288">
             <a:spAutoFit/>
           </a:bodyPr>
           <a:lstStyle/>
@@ -17559,6 +17873,7 @@
           <a:lstStyle/>
           <a:p>
             <a:pPr algn="ctr"/>
+            <a:endParaRPr/>
           </a:p>
         </p:txBody>
       </p:sp>
@@ -17601,7 +17916,7 @@
           </a:fontRef>
         </p:style>
         <p:txBody>
-          <a:bodyPr rtlCol="0" anchor="ctr" lIns="137160"/>
+          <a:bodyPr lIns="137160" rtlCol="0" anchor="ctr"/>
           <a:lstStyle/>
           <a:p>
             <a:pPr algn="l"/>
@@ -17634,7 +17949,7 @@
           <a:noFill/>
         </p:spPr>
         <p:txBody>
-          <a:bodyPr wrap="square" lIns="45720" rIns="45720" tIns="18288" bIns="18288">
+          <a:bodyPr wrap="square" lIns="45720" tIns="18288" rIns="45720" bIns="18288">
             <a:spAutoFit/>
           </a:bodyPr>
           <a:lstStyle/>
@@ -17692,6 +18007,7 @@
           <a:lstStyle/>
           <a:p>
             <a:pPr algn="ctr"/>
+            <a:endParaRPr/>
           </a:p>
         </p:txBody>
       </p:sp>
@@ -17734,7 +18050,7 @@
           </a:fontRef>
         </p:style>
         <p:txBody>
-          <a:bodyPr rtlCol="0" anchor="ctr" lIns="137160"/>
+          <a:bodyPr lIns="137160" rtlCol="0" anchor="ctr"/>
           <a:lstStyle/>
           <a:p>
             <a:pPr algn="l"/>
@@ -17767,7 +18083,7 @@
           <a:noFill/>
         </p:spPr>
         <p:txBody>
-          <a:bodyPr wrap="square" lIns="45720" rIns="45720" tIns="18288" bIns="18288">
+          <a:bodyPr wrap="square" lIns="45720" tIns="18288" rIns="45720" bIns="18288">
             <a:spAutoFit/>
           </a:bodyPr>
           <a:lstStyle/>
@@ -17825,6 +18141,7 @@
           <a:lstStyle/>
           <a:p>
             <a:pPr algn="ctr"/>
+            <a:endParaRPr/>
           </a:p>
         </p:txBody>
       </p:sp>
@@ -17867,7 +18184,7 @@
           </a:fontRef>
         </p:style>
         <p:txBody>
-          <a:bodyPr rtlCol="0" anchor="ctr" lIns="137160"/>
+          <a:bodyPr lIns="137160" rtlCol="0" anchor="ctr"/>
           <a:lstStyle/>
           <a:p>
             <a:pPr algn="l"/>
@@ -17900,7 +18217,7 @@
           <a:noFill/>
         </p:spPr>
         <p:txBody>
-          <a:bodyPr wrap="square" lIns="45720" rIns="45720" tIns="18288" bIns="18288">
+          <a:bodyPr wrap="square" lIns="45720" tIns="18288" rIns="45720" bIns="18288">
             <a:spAutoFit/>
           </a:bodyPr>
           <a:lstStyle/>
@@ -17958,6 +18275,7 @@
           <a:lstStyle/>
           <a:p>
             <a:pPr algn="ctr"/>
+            <a:endParaRPr/>
           </a:p>
         </p:txBody>
       </p:sp>
@@ -18000,7 +18318,7 @@
           </a:fontRef>
         </p:style>
         <p:txBody>
-          <a:bodyPr rtlCol="0" anchor="ctr" lIns="137160"/>
+          <a:bodyPr lIns="137160" rtlCol="0" anchor="ctr"/>
           <a:lstStyle/>
           <a:p>
             <a:pPr algn="l"/>
@@ -18033,7 +18351,7 @@
           <a:noFill/>
         </p:spPr>
         <p:txBody>
-          <a:bodyPr wrap="square" lIns="45720" rIns="45720" tIns="18288" bIns="18288">
+          <a:bodyPr wrap="square" lIns="45720" tIns="18288" rIns="45720" bIns="18288">
             <a:spAutoFit/>
           </a:bodyPr>
           <a:lstStyle/>
@@ -18091,6 +18409,7 @@
           <a:lstStyle/>
           <a:p>
             <a:pPr algn="ctr"/>
+            <a:endParaRPr/>
           </a:p>
         </p:txBody>
       </p:sp>
@@ -18133,7 +18452,7 @@
           </a:fontRef>
         </p:style>
         <p:txBody>
-          <a:bodyPr rtlCol="0" anchor="ctr" lIns="137160"/>
+          <a:bodyPr lIns="137160" rtlCol="0" anchor="ctr"/>
           <a:lstStyle/>
           <a:p>
             <a:pPr algn="l"/>
@@ -18166,7 +18485,7 @@
           <a:noFill/>
         </p:spPr>
         <p:txBody>
-          <a:bodyPr wrap="square" lIns="45720" rIns="45720" tIns="18288" bIns="18288">
+          <a:bodyPr wrap="square" lIns="45720" tIns="18288" rIns="45720" bIns="18288">
             <a:spAutoFit/>
           </a:bodyPr>
           <a:lstStyle/>
@@ -18224,6 +18543,7 @@
           <a:lstStyle/>
           <a:p>
             <a:pPr algn="ctr"/>
+            <a:endParaRPr/>
           </a:p>
         </p:txBody>
       </p:sp>
@@ -18266,7 +18586,7 @@
           </a:fontRef>
         </p:style>
         <p:txBody>
-          <a:bodyPr rtlCol="0" anchor="ctr" lIns="137160"/>
+          <a:bodyPr lIns="137160" rtlCol="0" anchor="ctr"/>
           <a:lstStyle/>
           <a:p>
             <a:pPr algn="l"/>
@@ -18299,7 +18619,7 @@
           <a:noFill/>
         </p:spPr>
         <p:txBody>
-          <a:bodyPr wrap="square" lIns="45720" rIns="45720" tIns="18288" bIns="18288">
+          <a:bodyPr wrap="square" lIns="45720" tIns="18288" rIns="45720" bIns="18288">
             <a:spAutoFit/>
           </a:bodyPr>
           <a:lstStyle/>
@@ -18357,6 +18677,7 @@
           <a:lstStyle/>
           <a:p>
             <a:pPr algn="ctr"/>
+            <a:endParaRPr/>
           </a:p>
         </p:txBody>
       </p:sp>
@@ -18399,7 +18720,7 @@
           </a:fontRef>
         </p:style>
         <p:txBody>
-          <a:bodyPr rtlCol="0" anchor="ctr" lIns="137160"/>
+          <a:bodyPr lIns="137160" rtlCol="0" anchor="ctr"/>
           <a:lstStyle/>
           <a:p>
             <a:pPr algn="l"/>
@@ -18432,7 +18753,7 @@
           <a:noFill/>
         </p:spPr>
         <p:txBody>
-          <a:bodyPr wrap="square" lIns="45720" rIns="45720" tIns="18288" bIns="18288">
+          <a:bodyPr wrap="square" lIns="45720" tIns="18288" rIns="45720" bIns="18288">
             <a:spAutoFit/>
           </a:bodyPr>
           <a:lstStyle/>
@@ -18490,6 +18811,7 @@
           <a:lstStyle/>
           <a:p>
             <a:pPr algn="ctr"/>
+            <a:endParaRPr/>
           </a:p>
         </p:txBody>
       </p:sp>
@@ -18532,7 +18854,7 @@
           </a:fontRef>
         </p:style>
         <p:txBody>
-          <a:bodyPr rtlCol="0" anchor="ctr" lIns="137160"/>
+          <a:bodyPr lIns="137160" rtlCol="0" anchor="ctr"/>
           <a:lstStyle/>
           <a:p>
             <a:pPr algn="l"/>
@@ -18565,7 +18887,7 @@
           <a:noFill/>
         </p:spPr>
         <p:txBody>
-          <a:bodyPr wrap="square" lIns="45720" rIns="45720" tIns="18288" bIns="18288">
+          <a:bodyPr wrap="square" lIns="45720" tIns="18288" rIns="45720" bIns="18288">
             <a:spAutoFit/>
           </a:bodyPr>
           <a:lstStyle/>
@@ -18623,6 +18945,7 @@
           <a:lstStyle/>
           <a:p>
             <a:pPr algn="ctr"/>
+            <a:endParaRPr/>
           </a:p>
         </p:txBody>
       </p:sp>
@@ -18665,7 +18988,7 @@
           </a:fontRef>
         </p:style>
         <p:txBody>
-          <a:bodyPr rtlCol="0" anchor="ctr" lIns="137160"/>
+          <a:bodyPr lIns="137160" rtlCol="0" anchor="ctr"/>
           <a:lstStyle/>
           <a:p>
             <a:pPr algn="l"/>
@@ -18698,7 +19021,7 @@
           <a:noFill/>
         </p:spPr>
         <p:txBody>
-          <a:bodyPr wrap="square" lIns="45720" rIns="45720" tIns="18288" bIns="18288">
+          <a:bodyPr wrap="square" lIns="45720" tIns="18288" rIns="45720" bIns="18288">
             <a:spAutoFit/>
           </a:bodyPr>
           <a:lstStyle/>
@@ -18756,6 +19079,7 @@
           <a:lstStyle/>
           <a:p>
             <a:pPr algn="ctr"/>
+            <a:endParaRPr/>
           </a:p>
         </p:txBody>
       </p:sp>
@@ -18798,7 +19122,7 @@
           </a:fontRef>
         </p:style>
         <p:txBody>
-          <a:bodyPr rtlCol="0" anchor="ctr" lIns="137160"/>
+          <a:bodyPr lIns="137160" rtlCol="0" anchor="ctr"/>
           <a:lstStyle/>
           <a:p>
             <a:pPr algn="l"/>
@@ -18831,7 +19155,7 @@
           <a:noFill/>
         </p:spPr>
         <p:txBody>
-          <a:bodyPr wrap="square" lIns="45720" rIns="45720" tIns="18288" bIns="18288">
+          <a:bodyPr wrap="square" lIns="45720" tIns="18288" rIns="45720" bIns="18288">
             <a:spAutoFit/>
           </a:bodyPr>
           <a:lstStyle/>
@@ -18866,7 +19190,7 @@
           <a:noFill/>
         </p:spPr>
         <p:txBody>
-          <a:bodyPr wrap="square" lIns="45720" rIns="45720" tIns="18288" bIns="18288">
+          <a:bodyPr wrap="square" lIns="45720" tIns="18288" rIns="45720" bIns="18288">
             <a:spAutoFit/>
           </a:bodyPr>
           <a:lstStyle/>
@@ -18901,7 +19225,7 @@
           <a:noFill/>
         </p:spPr>
         <p:txBody>
-          <a:bodyPr wrap="square" lIns="45720" rIns="45720" tIns="18288" bIns="18288">
+          <a:bodyPr wrap="square" lIns="45720" tIns="18288" rIns="45720" bIns="18288">
             <a:spAutoFit/>
           </a:bodyPr>
           <a:lstStyle/>
@@ -18928,7 +19252,7 @@
 </file>
 
 <file path=ppt/slides/slide7.xml><?xml version="1.0" encoding="utf-8"?>
-<p:sld xmlns:a="http://schemas.openxmlformats.org/drawingml/2006/main" xmlns:p="http://schemas.openxmlformats.org/presentationml/2006/main" xmlns:r="http://schemas.openxmlformats.org/officeDocument/2006/relationships">
+<p:sld xmlns:a="http://schemas.openxmlformats.org/drawingml/2006/main" xmlns:r="http://schemas.openxmlformats.org/officeDocument/2006/relationships" xmlns:p="http://schemas.openxmlformats.org/presentationml/2006/main">
   <p:cSld>
     <p:spTree>
       <p:nvGrpSpPr>
@@ -18936,7 +19260,14 @@
         <p:cNvGrpSpPr/>
         <p:nvPr/>
       </p:nvGrpSpPr>
-      <p:grpSpPr/>
+      <p:grpSpPr>
+        <a:xfrm>
+          <a:off x="0" y="0"/>
+          <a:ext cx="0" cy="0"/>
+          <a:chOff x="0" y="0"/>
+          <a:chExt cx="0" cy="0"/>
+        </a:xfrm>
+      </p:grpSpPr>
       <p:sp>
         <p:nvSpPr>
           <p:cNvPr id="2" name="Rectangle 1"/>
@@ -18978,6 +19309,7 @@
           <a:lstStyle/>
           <a:p>
             <a:pPr algn="ctr"/>
+            <a:endParaRPr/>
           </a:p>
         </p:txBody>
       </p:sp>
@@ -19022,6 +19354,7 @@
           <a:lstStyle/>
           <a:p>
             <a:pPr algn="ctr"/>
+            <a:endParaRPr/>
           </a:p>
         </p:txBody>
       </p:sp>
@@ -19042,7 +19375,7 @@
           <a:noFill/>
         </p:spPr>
         <p:txBody>
-          <a:bodyPr wrap="square" lIns="45720" rIns="45720" tIns="18288" bIns="18288">
+          <a:bodyPr wrap="square" lIns="45720" tIns="18288" rIns="45720" bIns="18288">
             <a:spAutoFit/>
           </a:bodyPr>
           <a:lstStyle/>
@@ -19079,13 +19412,25 @@
                 <a:tableStyleId>{5C22544A-7EE6-4342-B048-85BDC9FD1C3A}</a:tableStyleId>
               </a:tblPr>
               <a:tblGrid>
-                <a:gridCol w="3082834"/>
-                <a:gridCol w="7707085"/>
+                <a:gridCol w="3082834">
+                  <a:extLst>
+                    <a:ext uri="{9D8B030D-6E8A-4147-A177-3AD203B41FA5}">
+                      <a16:colId xmlns:a16="http://schemas.microsoft.com/office/drawing/2014/main" val="20000"/>
+                    </a:ext>
+                  </a:extLst>
+                </a:gridCol>
+                <a:gridCol w="7707085">
+                  <a:extLst>
+                    <a:ext uri="{9D8B030D-6E8A-4147-A177-3AD203B41FA5}">
+                      <a16:colId xmlns:a16="http://schemas.microsoft.com/office/drawing/2014/main" val="20001"/>
+                    </a:ext>
+                  </a:extLst>
+                </a:gridCol>
               </a:tblGrid>
               <a:tr h="330590">
                 <a:tc>
                   <a:txBody>
-                    <a:bodyPr wrap="square"/>
+                    <a:bodyPr/>
                     <a:lstStyle/>
                     <a:p>
                       <a:r>
@@ -19107,7 +19452,7 @@
                 </a:tc>
                 <a:tc>
                   <a:txBody>
-                    <a:bodyPr wrap="square"/>
+                    <a:bodyPr/>
                     <a:lstStyle/>
                     <a:p>
                       <a:r>
@@ -19127,11 +19472,16 @@
                     </a:solidFill>
                   </a:tcPr>
                 </a:tc>
+                <a:extLst>
+                  <a:ext uri="{0D108BD9-81ED-4DB2-BD59-A6C34878D82A}">
+                    <a16:rowId xmlns:a16="http://schemas.microsoft.com/office/drawing/2014/main" val="10000"/>
+                  </a:ext>
+                </a:extLst>
               </a:tr>
               <a:tr h="330590">
                 <a:tc>
                   <a:txBody>
-                    <a:bodyPr wrap="square"/>
+                    <a:bodyPr/>
                     <a:lstStyle/>
                     <a:p>
                       <a:r>
@@ -19153,7 +19503,7 @@
                 </a:tc>
                 <a:tc>
                   <a:txBody>
-                    <a:bodyPr wrap="square"/>
+                    <a:bodyPr/>
                     <a:lstStyle/>
                     <a:p>
                       <a:r>
@@ -19173,11 +19523,16 @@
                     </a:solidFill>
                   </a:tcPr>
                 </a:tc>
+                <a:extLst>
+                  <a:ext uri="{0D108BD9-81ED-4DB2-BD59-A6C34878D82A}">
+                    <a16:rowId xmlns:a16="http://schemas.microsoft.com/office/drawing/2014/main" val="10001"/>
+                  </a:ext>
+                </a:extLst>
               </a:tr>
               <a:tr h="330590">
                 <a:tc>
                   <a:txBody>
-                    <a:bodyPr wrap="square"/>
+                    <a:bodyPr/>
                     <a:lstStyle/>
                     <a:p>
                       <a:r>
@@ -19199,7 +19554,7 @@
                 </a:tc>
                 <a:tc>
                   <a:txBody>
-                    <a:bodyPr wrap="square"/>
+                    <a:bodyPr/>
                     <a:lstStyle/>
                     <a:p>
                       <a:r>
@@ -19219,11 +19574,16 @@
                     </a:solidFill>
                   </a:tcPr>
                 </a:tc>
+                <a:extLst>
+                  <a:ext uri="{0D108BD9-81ED-4DB2-BD59-A6C34878D82A}">
+                    <a16:rowId xmlns:a16="http://schemas.microsoft.com/office/drawing/2014/main" val="10002"/>
+                  </a:ext>
+                </a:extLst>
               </a:tr>
               <a:tr h="330590">
                 <a:tc>
                   <a:txBody>
-                    <a:bodyPr wrap="square"/>
+                    <a:bodyPr/>
                     <a:lstStyle/>
                     <a:p>
                       <a:r>
@@ -19245,7 +19605,7 @@
                 </a:tc>
                 <a:tc>
                   <a:txBody>
-                    <a:bodyPr wrap="square"/>
+                    <a:bodyPr/>
                     <a:lstStyle/>
                     <a:p>
                       <a:r>
@@ -19265,11 +19625,16 @@
                     </a:solidFill>
                   </a:tcPr>
                 </a:tc>
+                <a:extLst>
+                  <a:ext uri="{0D108BD9-81ED-4DB2-BD59-A6C34878D82A}">
+                    <a16:rowId xmlns:a16="http://schemas.microsoft.com/office/drawing/2014/main" val="10003"/>
+                  </a:ext>
+                </a:extLst>
               </a:tr>
               <a:tr h="330590">
                 <a:tc>
                   <a:txBody>
-                    <a:bodyPr wrap="square"/>
+                    <a:bodyPr/>
                     <a:lstStyle/>
                     <a:p>
                       <a:r>
@@ -19291,7 +19656,7 @@
                 </a:tc>
                 <a:tc>
                   <a:txBody>
-                    <a:bodyPr wrap="square"/>
+                    <a:bodyPr/>
                     <a:lstStyle/>
                     <a:p>
                       <a:r>
@@ -19311,11 +19676,16 @@
                     </a:solidFill>
                   </a:tcPr>
                 </a:tc>
+                <a:extLst>
+                  <a:ext uri="{0D108BD9-81ED-4DB2-BD59-A6C34878D82A}">
+                    <a16:rowId xmlns:a16="http://schemas.microsoft.com/office/drawing/2014/main" val="10004"/>
+                  </a:ext>
+                </a:extLst>
               </a:tr>
               <a:tr h="330590">
                 <a:tc>
                   <a:txBody>
-                    <a:bodyPr wrap="square"/>
+                    <a:bodyPr/>
                     <a:lstStyle/>
                     <a:p>
                       <a:r>
@@ -19337,7 +19707,7 @@
                 </a:tc>
                 <a:tc>
                   <a:txBody>
-                    <a:bodyPr wrap="square"/>
+                    <a:bodyPr/>
                     <a:lstStyle/>
                     <a:p>
                       <a:r>
@@ -19357,11 +19727,16 @@
                     </a:solidFill>
                   </a:tcPr>
                 </a:tc>
+                <a:extLst>
+                  <a:ext uri="{0D108BD9-81ED-4DB2-BD59-A6C34878D82A}">
+                    <a16:rowId xmlns:a16="http://schemas.microsoft.com/office/drawing/2014/main" val="10005"/>
+                  </a:ext>
+                </a:extLst>
               </a:tr>
               <a:tr h="330590">
                 <a:tc>
                   <a:txBody>
-                    <a:bodyPr wrap="square"/>
+                    <a:bodyPr/>
                     <a:lstStyle/>
                     <a:p>
                       <a:r>
@@ -19383,7 +19758,7 @@
                 </a:tc>
                 <a:tc>
                   <a:txBody>
-                    <a:bodyPr wrap="square"/>
+                    <a:bodyPr/>
                     <a:lstStyle/>
                     <a:p>
                       <a:r>
@@ -19403,11 +19778,16 @@
                     </a:solidFill>
                   </a:tcPr>
                 </a:tc>
+                <a:extLst>
+                  <a:ext uri="{0D108BD9-81ED-4DB2-BD59-A6C34878D82A}">
+                    <a16:rowId xmlns:a16="http://schemas.microsoft.com/office/drawing/2014/main" val="10006"/>
+                  </a:ext>
+                </a:extLst>
               </a:tr>
               <a:tr h="330590">
                 <a:tc>
                   <a:txBody>
-                    <a:bodyPr wrap="square"/>
+                    <a:bodyPr/>
                     <a:lstStyle/>
                     <a:p>
                       <a:r>
@@ -19429,7 +19809,7 @@
                 </a:tc>
                 <a:tc>
                   <a:txBody>
-                    <a:bodyPr wrap="square"/>
+                    <a:bodyPr/>
                     <a:lstStyle/>
                     <a:p>
                       <a:r>
@@ -19449,11 +19829,16 @@
                     </a:solidFill>
                   </a:tcPr>
                 </a:tc>
+                <a:extLst>
+                  <a:ext uri="{0D108BD9-81ED-4DB2-BD59-A6C34878D82A}">
+                    <a16:rowId xmlns:a16="http://schemas.microsoft.com/office/drawing/2014/main" val="10007"/>
+                  </a:ext>
+                </a:extLst>
               </a:tr>
               <a:tr h="330590">
                 <a:tc>
                   <a:txBody>
-                    <a:bodyPr wrap="square"/>
+                    <a:bodyPr/>
                     <a:lstStyle/>
                     <a:p>
                       <a:r>
@@ -19475,7 +19860,7 @@
                 </a:tc>
                 <a:tc>
                   <a:txBody>
-                    <a:bodyPr wrap="square"/>
+                    <a:bodyPr/>
                     <a:lstStyle/>
                     <a:p>
                       <a:r>
@@ -19495,11 +19880,16 @@
                     </a:solidFill>
                   </a:tcPr>
                 </a:tc>
+                <a:extLst>
+                  <a:ext uri="{0D108BD9-81ED-4DB2-BD59-A6C34878D82A}">
+                    <a16:rowId xmlns:a16="http://schemas.microsoft.com/office/drawing/2014/main" val="10008"/>
+                  </a:ext>
+                </a:extLst>
               </a:tr>
               <a:tr h="330590">
                 <a:tc>
                   <a:txBody>
-                    <a:bodyPr wrap="square"/>
+                    <a:bodyPr/>
                     <a:lstStyle/>
                     <a:p>
                       <a:r>
@@ -19521,7 +19911,7 @@
                 </a:tc>
                 <a:tc>
                   <a:txBody>
-                    <a:bodyPr wrap="square"/>
+                    <a:bodyPr/>
                     <a:lstStyle/>
                     <a:p>
                       <a:r>
@@ -19541,11 +19931,16 @@
                     </a:solidFill>
                   </a:tcPr>
                 </a:tc>
+                <a:extLst>
+                  <a:ext uri="{0D108BD9-81ED-4DB2-BD59-A6C34878D82A}">
+                    <a16:rowId xmlns:a16="http://schemas.microsoft.com/office/drawing/2014/main" val="10009"/>
+                  </a:ext>
+                </a:extLst>
               </a:tr>
               <a:tr h="330590">
                 <a:tc>
                   <a:txBody>
-                    <a:bodyPr wrap="square"/>
+                    <a:bodyPr/>
                     <a:lstStyle/>
                     <a:p>
                       <a:r>
@@ -19567,7 +19962,7 @@
                 </a:tc>
                 <a:tc>
                   <a:txBody>
-                    <a:bodyPr wrap="square"/>
+                    <a:bodyPr/>
                     <a:lstStyle/>
                     <a:p>
                       <a:r>
@@ -19587,11 +19982,16 @@
                     </a:solidFill>
                   </a:tcPr>
                 </a:tc>
+                <a:extLst>
+                  <a:ext uri="{0D108BD9-81ED-4DB2-BD59-A6C34878D82A}">
+                    <a16:rowId xmlns:a16="http://schemas.microsoft.com/office/drawing/2014/main" val="10010"/>
+                  </a:ext>
+                </a:extLst>
               </a:tr>
               <a:tr h="330590">
                 <a:tc>
                   <a:txBody>
-                    <a:bodyPr wrap="square"/>
+                    <a:bodyPr/>
                     <a:lstStyle/>
                     <a:p>
                       <a:r>
@@ -19613,7 +20013,7 @@
                 </a:tc>
                 <a:tc>
                   <a:txBody>
-                    <a:bodyPr wrap="square"/>
+                    <a:bodyPr/>
                     <a:lstStyle/>
                     <a:p>
                       <a:r>
@@ -19633,11 +20033,16 @@
                     </a:solidFill>
                   </a:tcPr>
                 </a:tc>
+                <a:extLst>
+                  <a:ext uri="{0D108BD9-81ED-4DB2-BD59-A6C34878D82A}">
+                    <a16:rowId xmlns:a16="http://schemas.microsoft.com/office/drawing/2014/main" val="10011"/>
+                  </a:ext>
+                </a:extLst>
               </a:tr>
               <a:tr h="330600">
                 <a:tc>
                   <a:txBody>
-                    <a:bodyPr wrap="square"/>
+                    <a:bodyPr/>
                     <a:lstStyle/>
                     <a:p>
                       <a:r>
@@ -19659,7 +20064,7 @@
                 </a:tc>
                 <a:tc>
                   <a:txBody>
-                    <a:bodyPr wrap="square"/>
+                    <a:bodyPr/>
                     <a:lstStyle/>
                     <a:p>
                       <a:r>
@@ -19679,6 +20084,11 @@
                     </a:solidFill>
                   </a:tcPr>
                 </a:tc>
+                <a:extLst>
+                  <a:ext uri="{0D108BD9-81ED-4DB2-BD59-A6C34878D82A}">
+                    <a16:rowId xmlns:a16="http://schemas.microsoft.com/office/drawing/2014/main" val="10012"/>
+                  </a:ext>
+                </a:extLst>
               </a:tr>
             </a:tbl>
           </a:graphicData>
@@ -19727,6 +20137,7 @@
           <a:lstStyle/>
           <a:p>
             <a:pPr algn="ctr"/>
+            <a:endParaRPr/>
           </a:p>
         </p:txBody>
       </p:sp>
@@ -19808,7 +20219,7 @@
           <a:noFill/>
         </p:spPr>
         <p:txBody>
-          <a:bodyPr wrap="square" lIns="45720" rIns="45720" tIns="18288" bIns="18288">
+          <a:bodyPr wrap="square" lIns="45720" tIns="18288" rIns="45720" bIns="18288">
             <a:spAutoFit/>
           </a:bodyPr>
           <a:lstStyle/>
@@ -19843,7 +20254,7 @@
           <a:noFill/>
         </p:spPr>
         <p:txBody>
-          <a:bodyPr wrap="square" lIns="45720" rIns="45720" tIns="18288" bIns="18288">
+          <a:bodyPr wrap="square" lIns="45720" tIns="18288" rIns="45720" bIns="18288">
             <a:spAutoFit/>
           </a:bodyPr>
           <a:lstStyle/>
@@ -19870,7 +20281,7 @@
 </file>
 
 <file path=ppt/slides/slide8.xml><?xml version="1.0" encoding="utf-8"?>
-<p:sld xmlns:a="http://schemas.openxmlformats.org/drawingml/2006/main" xmlns:p="http://schemas.openxmlformats.org/presentationml/2006/main" xmlns:r="http://schemas.openxmlformats.org/officeDocument/2006/relationships">
+<p:sld xmlns:a="http://schemas.openxmlformats.org/drawingml/2006/main" xmlns:r="http://schemas.openxmlformats.org/officeDocument/2006/relationships" xmlns:p="http://schemas.openxmlformats.org/presentationml/2006/main">
   <p:cSld>
     <p:spTree>
       <p:nvGrpSpPr>
@@ -19878,7 +20289,14 @@
         <p:cNvGrpSpPr/>
         <p:nvPr/>
       </p:nvGrpSpPr>
-      <p:grpSpPr/>
+      <p:grpSpPr>
+        <a:xfrm>
+          <a:off x="0" y="0"/>
+          <a:ext cx="0" cy="0"/>
+          <a:chOff x="0" y="0"/>
+          <a:chExt cx="0" cy="0"/>
+        </a:xfrm>
+      </p:grpSpPr>
       <p:sp>
         <p:nvSpPr>
           <p:cNvPr id="2" name="Rectangle 1"/>
@@ -19920,6 +20338,7 @@
           <a:lstStyle/>
           <a:p>
             <a:pPr algn="ctr"/>
+            <a:endParaRPr/>
           </a:p>
         </p:txBody>
       </p:sp>
@@ -19964,6 +20383,7 @@
           <a:lstStyle/>
           <a:p>
             <a:pPr algn="ctr"/>
+            <a:endParaRPr/>
           </a:p>
         </p:txBody>
       </p:sp>
@@ -19984,7 +20404,7 @@
           <a:noFill/>
         </p:spPr>
         <p:txBody>
-          <a:bodyPr wrap="square" lIns="45720" rIns="45720" tIns="18288" bIns="18288">
+          <a:bodyPr wrap="square" lIns="45720" tIns="18288" rIns="45720" bIns="18288">
             <a:spAutoFit/>
           </a:bodyPr>
           <a:lstStyle/>
@@ -20021,14 +20441,32 @@
                 <a:tableStyleId>{5C22544A-7EE6-4342-B048-85BDC9FD1C3A}</a:tableStyleId>
               </a:tblPr>
               <a:tblGrid>
-                <a:gridCol w="3213462"/>
-                <a:gridCol w="2677885"/>
-                <a:gridCol w="5355771"/>
+                <a:gridCol w="3213462">
+                  <a:extLst>
+                    <a:ext uri="{9D8B030D-6E8A-4147-A177-3AD203B41FA5}">
+                      <a16:colId xmlns:a16="http://schemas.microsoft.com/office/drawing/2014/main" val="20000"/>
+                    </a:ext>
+                  </a:extLst>
+                </a:gridCol>
+                <a:gridCol w="2677885">
+                  <a:extLst>
+                    <a:ext uri="{9D8B030D-6E8A-4147-A177-3AD203B41FA5}">
+                      <a16:colId xmlns:a16="http://schemas.microsoft.com/office/drawing/2014/main" val="20001"/>
+                    </a:ext>
+                  </a:extLst>
+                </a:gridCol>
+                <a:gridCol w="5355771">
+                  <a:extLst>
+                    <a:ext uri="{9D8B030D-6E8A-4147-A177-3AD203B41FA5}">
+                      <a16:colId xmlns:a16="http://schemas.microsoft.com/office/drawing/2014/main" val="20002"/>
+                    </a:ext>
+                  </a:extLst>
+                </a:gridCol>
               </a:tblGrid>
               <a:tr h="533400">
                 <a:tc>
                   <a:txBody>
-                    <a:bodyPr wrap="square"/>
+                    <a:bodyPr/>
                     <a:lstStyle/>
                     <a:p>
                       <a:r>
@@ -20050,7 +20488,7 @@
                 </a:tc>
                 <a:tc>
                   <a:txBody>
-                    <a:bodyPr wrap="square"/>
+                    <a:bodyPr/>
                     <a:lstStyle/>
                     <a:p>
                       <a:r>
@@ -20072,7 +20510,7 @@
                 </a:tc>
                 <a:tc>
                   <a:txBody>
-                    <a:bodyPr wrap="square"/>
+                    <a:bodyPr/>
                     <a:lstStyle/>
                     <a:p>
                       <a:r>
@@ -20092,11 +20530,16 @@
                     </a:solidFill>
                   </a:tcPr>
                 </a:tc>
+                <a:extLst>
+                  <a:ext uri="{0D108BD9-81ED-4DB2-BD59-A6C34878D82A}">
+                    <a16:rowId xmlns:a16="http://schemas.microsoft.com/office/drawing/2014/main" val="10000"/>
+                  </a:ext>
+                </a:extLst>
               </a:tr>
               <a:tr h="533400">
                 <a:tc>
                   <a:txBody>
-                    <a:bodyPr wrap="square"/>
+                    <a:bodyPr/>
                     <a:lstStyle/>
                     <a:p>
                       <a:r>
@@ -20118,7 +20561,7 @@
                 </a:tc>
                 <a:tc>
                   <a:txBody>
-                    <a:bodyPr wrap="square"/>
+                    <a:bodyPr/>
                     <a:lstStyle/>
                     <a:p>
                       <a:r>
@@ -20140,7 +20583,7 @@
                 </a:tc>
                 <a:tc>
                   <a:txBody>
-                    <a:bodyPr wrap="square"/>
+                    <a:bodyPr/>
                     <a:lstStyle/>
                     <a:p>
                       <a:r>
@@ -20160,11 +20603,16 @@
                     </a:solidFill>
                   </a:tcPr>
                 </a:tc>
+                <a:extLst>
+                  <a:ext uri="{0D108BD9-81ED-4DB2-BD59-A6C34878D82A}">
+                    <a16:rowId xmlns:a16="http://schemas.microsoft.com/office/drawing/2014/main" val="10001"/>
+                  </a:ext>
+                </a:extLst>
               </a:tr>
               <a:tr h="533400">
                 <a:tc>
                   <a:txBody>
-                    <a:bodyPr wrap="square"/>
+                    <a:bodyPr/>
                     <a:lstStyle/>
                     <a:p>
                       <a:r>
@@ -20186,7 +20634,7 @@
                 </a:tc>
                 <a:tc>
                   <a:txBody>
-                    <a:bodyPr wrap="square"/>
+                    <a:bodyPr/>
                     <a:lstStyle/>
                     <a:p>
                       <a:r>
@@ -20208,7 +20656,7 @@
                 </a:tc>
                 <a:tc>
                   <a:txBody>
-                    <a:bodyPr wrap="square"/>
+                    <a:bodyPr/>
                     <a:lstStyle/>
                     <a:p>
                       <a:r>
@@ -20228,11 +20676,16 @@
                     </a:solidFill>
                   </a:tcPr>
                 </a:tc>
+                <a:extLst>
+                  <a:ext uri="{0D108BD9-81ED-4DB2-BD59-A6C34878D82A}">
+                    <a16:rowId xmlns:a16="http://schemas.microsoft.com/office/drawing/2014/main" val="10002"/>
+                  </a:ext>
+                </a:extLst>
               </a:tr>
               <a:tr h="533400">
                 <a:tc>
                   <a:txBody>
-                    <a:bodyPr wrap="square"/>
+                    <a:bodyPr/>
                     <a:lstStyle/>
                     <a:p>
                       <a:r>
@@ -20254,7 +20707,7 @@
                 </a:tc>
                 <a:tc>
                   <a:txBody>
-                    <a:bodyPr wrap="square"/>
+                    <a:bodyPr/>
                     <a:lstStyle/>
                     <a:p>
                       <a:r>
@@ -20276,7 +20729,7 @@
                 </a:tc>
                 <a:tc>
                   <a:txBody>
-                    <a:bodyPr wrap="square"/>
+                    <a:bodyPr/>
                     <a:lstStyle/>
                     <a:p>
                       <a:r>
@@ -20296,11 +20749,16 @@
                     </a:solidFill>
                   </a:tcPr>
                 </a:tc>
+                <a:extLst>
+                  <a:ext uri="{0D108BD9-81ED-4DB2-BD59-A6C34878D82A}">
+                    <a16:rowId xmlns:a16="http://schemas.microsoft.com/office/drawing/2014/main" val="10003"/>
+                  </a:ext>
+                </a:extLst>
               </a:tr>
               <a:tr h="533400">
                 <a:tc>
                   <a:txBody>
-                    <a:bodyPr wrap="square"/>
+                    <a:bodyPr/>
                     <a:lstStyle/>
                     <a:p>
                       <a:r>
@@ -20322,7 +20780,7 @@
                 </a:tc>
                 <a:tc>
                   <a:txBody>
-                    <a:bodyPr wrap="square"/>
+                    <a:bodyPr/>
                     <a:lstStyle/>
                     <a:p>
                       <a:r>
@@ -20344,7 +20802,7 @@
                 </a:tc>
                 <a:tc>
                   <a:txBody>
-                    <a:bodyPr wrap="square"/>
+                    <a:bodyPr/>
                     <a:lstStyle/>
                     <a:p>
                       <a:r>
@@ -20364,11 +20822,16 @@
                     </a:solidFill>
                   </a:tcPr>
                 </a:tc>
+                <a:extLst>
+                  <a:ext uri="{0D108BD9-81ED-4DB2-BD59-A6C34878D82A}">
+                    <a16:rowId xmlns:a16="http://schemas.microsoft.com/office/drawing/2014/main" val="10004"/>
+                  </a:ext>
+                </a:extLst>
               </a:tr>
               <a:tr h="533400">
                 <a:tc>
                   <a:txBody>
-                    <a:bodyPr wrap="square"/>
+                    <a:bodyPr/>
                     <a:lstStyle/>
                     <a:p>
                       <a:r>
@@ -20390,7 +20853,7 @@
                 </a:tc>
                 <a:tc>
                   <a:txBody>
-                    <a:bodyPr wrap="square"/>
+                    <a:bodyPr/>
                     <a:lstStyle/>
                     <a:p>
                       <a:r>
@@ -20412,7 +20875,7 @@
                 </a:tc>
                 <a:tc>
                   <a:txBody>
-                    <a:bodyPr wrap="square"/>
+                    <a:bodyPr/>
                     <a:lstStyle/>
                     <a:p>
                       <a:r>
@@ -20432,6 +20895,11 @@
                     </a:solidFill>
                   </a:tcPr>
                 </a:tc>
+                <a:extLst>
+                  <a:ext uri="{0D108BD9-81ED-4DB2-BD59-A6C34878D82A}">
+                    <a16:rowId xmlns:a16="http://schemas.microsoft.com/office/drawing/2014/main" val="10005"/>
+                  </a:ext>
+                </a:extLst>
               </a:tr>
             </a:tbl>
           </a:graphicData>
@@ -20480,6 +20948,7 @@
           <a:lstStyle/>
           <a:p>
             <a:pPr algn="ctr"/>
+            <a:endParaRPr/>
           </a:p>
         </p:txBody>
       </p:sp>
@@ -20516,15 +20985,12 @@
             </a:r>
           </a:p>
           <a:p>
-            <a:r>
-              <a:rPr sz="600" b="0" i="0">
-                <a:solidFill>
-                  <a:srgbClr val="E8ECF1"/>
-                </a:solidFill>
-                <a:latin typeface="Segoe UI"/>
-              </a:rPr>
-              <a:t/>
-            </a:r>
+            <a:endParaRPr sz="2000" b="1" i="0">
+              <a:solidFill>
+                <a:srgbClr val="6EE7B7"/>
+              </a:solidFill>
+              <a:latin typeface="Segoe UI"/>
+            </a:endParaRPr>
           </a:p>
           <a:p>
             <a:r>
@@ -20556,7 +21022,7 @@
           <a:noFill/>
         </p:spPr>
         <p:txBody>
-          <a:bodyPr wrap="square" lIns="45720" rIns="45720" tIns="18288" bIns="18288">
+          <a:bodyPr wrap="square" lIns="45720" tIns="18288" rIns="45720" bIns="18288">
             <a:spAutoFit/>
           </a:bodyPr>
           <a:lstStyle/>
@@ -20591,7 +21057,7 @@
           <a:noFill/>
         </p:spPr>
         <p:txBody>
-          <a:bodyPr wrap="square" lIns="45720" rIns="45720" tIns="18288" bIns="18288">
+          <a:bodyPr wrap="square" lIns="45720" tIns="18288" rIns="45720" bIns="18288">
             <a:spAutoFit/>
           </a:bodyPr>
           <a:lstStyle/>
@@ -20618,7 +21084,7 @@
 </file>
 
 <file path=ppt/slides/slide9.xml><?xml version="1.0" encoding="utf-8"?>
-<p:sld xmlns:a="http://schemas.openxmlformats.org/drawingml/2006/main" xmlns:p="http://schemas.openxmlformats.org/presentationml/2006/main" xmlns:r="http://schemas.openxmlformats.org/officeDocument/2006/relationships">
+<p:sld xmlns:a="http://schemas.openxmlformats.org/drawingml/2006/main" xmlns:r="http://schemas.openxmlformats.org/officeDocument/2006/relationships" xmlns:p="http://schemas.openxmlformats.org/presentationml/2006/main">
   <p:cSld>
     <p:spTree>
       <p:nvGrpSpPr>
@@ -20626,7 +21092,14 @@
         <p:cNvGrpSpPr/>
         <p:nvPr/>
       </p:nvGrpSpPr>
-      <p:grpSpPr/>
+      <p:grpSpPr>
+        <a:xfrm>
+          <a:off x="0" y="0"/>
+          <a:ext cx="0" cy="0"/>
+          <a:chOff x="0" y="0"/>
+          <a:chExt cx="0" cy="0"/>
+        </a:xfrm>
+      </p:grpSpPr>
       <p:sp>
         <p:nvSpPr>
           <p:cNvPr id="2" name="Rectangle 1"/>
@@ -20668,6 +21141,7 @@
           <a:lstStyle/>
           <a:p>
             <a:pPr algn="ctr"/>
+            <a:endParaRPr/>
           </a:p>
         </p:txBody>
       </p:sp>
@@ -20712,6 +21186,7 @@
           <a:lstStyle/>
           <a:p>
             <a:pPr algn="ctr"/>
+            <a:endParaRPr/>
           </a:p>
         </p:txBody>
       </p:sp>
@@ -20732,7 +21207,7 @@
           <a:noFill/>
         </p:spPr>
         <p:txBody>
-          <a:bodyPr wrap="square" lIns="45720" rIns="45720" tIns="18288" bIns="18288">
+          <a:bodyPr wrap="square" lIns="45720" tIns="18288" rIns="45720" bIns="18288">
             <a:spAutoFit/>
           </a:bodyPr>
           <a:lstStyle/>
@@ -20793,6 +21268,7 @@
           <a:lstStyle/>
           <a:p>
             <a:pPr algn="ctr"/>
+            <a:endParaRPr/>
           </a:p>
         </p:txBody>
       </p:sp>
@@ -20836,6 +21312,7 @@
           <a:lstStyle/>
           <a:p>
             <a:pPr algn="ctr"/>
+            <a:endParaRPr/>
           </a:p>
         </p:txBody>
       </p:sp>
@@ -20856,7 +21333,7 @@
           <a:noFill/>
         </p:spPr>
         <p:txBody>
-          <a:bodyPr wrap="square" lIns="45720" rIns="45720" tIns="18288" bIns="18288">
+          <a:bodyPr wrap="square" lIns="45720" tIns="18288" rIns="45720" bIns="18288">
             <a:spAutoFit/>
           </a:bodyPr>
           <a:lstStyle/>
@@ -20891,7 +21368,7 @@
           <a:noFill/>
         </p:spPr>
         <p:txBody>
-          <a:bodyPr wrap="square" lIns="45720" rIns="45720" tIns="18288" bIns="18288">
+          <a:bodyPr wrap="square" lIns="45720" tIns="18288" rIns="45720" bIns="18288">
             <a:spAutoFit/>
           </a:bodyPr>
           <a:lstStyle/>
@@ -20926,7 +21403,7 @@
           <a:noFill/>
         </p:spPr>
         <p:txBody>
-          <a:bodyPr wrap="square" lIns="45720" rIns="45720" tIns="18288" bIns="18288">
+          <a:bodyPr wrap="square" lIns="45720" tIns="18288" rIns="45720" bIns="18288">
             <a:spAutoFit/>
           </a:bodyPr>
           <a:lstStyle/>
@@ -20987,6 +21464,7 @@
           <a:lstStyle/>
           <a:p>
             <a:pPr algn="ctr"/>
+            <a:endParaRPr/>
           </a:p>
         </p:txBody>
       </p:sp>
@@ -21030,6 +21508,7 @@
           <a:lstStyle/>
           <a:p>
             <a:pPr algn="ctr"/>
+            <a:endParaRPr/>
           </a:p>
         </p:txBody>
       </p:sp>
@@ -21050,7 +21529,7 @@
           <a:noFill/>
         </p:spPr>
         <p:txBody>
-          <a:bodyPr wrap="square" lIns="45720" rIns="45720" tIns="18288" bIns="18288">
+          <a:bodyPr wrap="square" lIns="45720" tIns="18288" rIns="45720" bIns="18288">
             <a:spAutoFit/>
           </a:bodyPr>
           <a:lstStyle/>
@@ -21085,7 +21564,7 @@
           <a:noFill/>
         </p:spPr>
         <p:txBody>
-          <a:bodyPr wrap="square" lIns="45720" rIns="45720" tIns="18288" bIns="18288">
+          <a:bodyPr wrap="square" lIns="45720" tIns="18288" rIns="45720" bIns="18288">
             <a:spAutoFit/>
           </a:bodyPr>
           <a:lstStyle/>
@@ -21120,7 +21599,7 @@
           <a:noFill/>
         </p:spPr>
         <p:txBody>
-          <a:bodyPr wrap="square" lIns="45720" rIns="45720" tIns="18288" bIns="18288">
+          <a:bodyPr wrap="square" lIns="45720" tIns="18288" rIns="45720" bIns="18288">
             <a:spAutoFit/>
           </a:bodyPr>
           <a:lstStyle/>
@@ -21181,6 +21660,7 @@
           <a:lstStyle/>
           <a:p>
             <a:pPr algn="ctr"/>
+            <a:endParaRPr/>
           </a:p>
         </p:txBody>
       </p:sp>
@@ -21224,6 +21704,7 @@
           <a:lstStyle/>
           <a:p>
             <a:pPr algn="ctr"/>
+            <a:endParaRPr/>
           </a:p>
         </p:txBody>
       </p:sp>
@@ -21244,7 +21725,7 @@
           <a:noFill/>
         </p:spPr>
         <p:txBody>
-          <a:bodyPr wrap="square" lIns="45720" rIns="45720" tIns="18288" bIns="18288">
+          <a:bodyPr wrap="square" lIns="45720" tIns="18288" rIns="45720" bIns="18288">
             <a:spAutoFit/>
           </a:bodyPr>
           <a:lstStyle/>
@@ -21279,7 +21760,7 @@
           <a:noFill/>
         </p:spPr>
         <p:txBody>
-          <a:bodyPr wrap="square" lIns="45720" rIns="45720" tIns="18288" bIns="18288">
+          <a:bodyPr wrap="square" lIns="45720" tIns="18288" rIns="45720" bIns="18288">
             <a:spAutoFit/>
           </a:bodyPr>
           <a:lstStyle/>
@@ -21314,7 +21795,7 @@
           <a:noFill/>
         </p:spPr>
         <p:txBody>
-          <a:bodyPr wrap="square" lIns="45720" rIns="45720" tIns="18288" bIns="18288">
+          <a:bodyPr wrap="square" lIns="45720" tIns="18288" rIns="45720" bIns="18288">
             <a:spAutoFit/>
           </a:bodyPr>
           <a:lstStyle/>
@@ -21349,7 +21830,7 @@
           <a:noFill/>
         </p:spPr>
         <p:txBody>
-          <a:bodyPr wrap="square" lIns="45720" rIns="45720" tIns="18288" bIns="18288">
+          <a:bodyPr wrap="square" lIns="45720" tIns="18288" rIns="45720" bIns="18288">
             <a:spAutoFit/>
           </a:bodyPr>
           <a:lstStyle/>
@@ -21384,7 +21865,7 @@
           <a:noFill/>
         </p:spPr>
         <p:txBody>
-          <a:bodyPr wrap="square" lIns="45720" rIns="45720" tIns="18288" bIns="18288">
+          <a:bodyPr wrap="square" lIns="45720" tIns="18288" rIns="45720" bIns="18288">
             <a:spAutoFit/>
           </a:bodyPr>
           <a:lstStyle/>
@@ -21419,7 +21900,7 @@
           <a:noFill/>
         </p:spPr>
         <p:txBody>
-          <a:bodyPr wrap="square" lIns="45720" rIns="45720" tIns="18288" bIns="18288">
+          <a:bodyPr wrap="square" lIns="45720" tIns="18288" rIns="45720" bIns="18288">
             <a:spAutoFit/>
           </a:bodyPr>
           <a:lstStyle/>
@@ -21776,44 +22257,44 @@
         <a:sysClr val="window" lastClr="FFFFFF"/>
       </a:lt1>
       <a:dk2>
-        <a:srgbClr val="1F497D"/>
+        <a:srgbClr val="0E2841"/>
       </a:dk2>
       <a:lt2>
-        <a:srgbClr val="EEECE1"/>
+        <a:srgbClr val="E8E8E8"/>
       </a:lt2>
       <a:accent1>
-        <a:srgbClr val="4F81BD"/>
+        <a:srgbClr val="156082"/>
       </a:accent1>
       <a:accent2>
-        <a:srgbClr val="C0504D"/>
+        <a:srgbClr val="E97132"/>
       </a:accent2>
       <a:accent3>
-        <a:srgbClr val="9BBB59"/>
+        <a:srgbClr val="196B24"/>
       </a:accent3>
       <a:accent4>
-        <a:srgbClr val="8064A2"/>
+        <a:srgbClr val="0F9ED5"/>
       </a:accent4>
       <a:accent5>
-        <a:srgbClr val="4BACC6"/>
+        <a:srgbClr val="A02B93"/>
       </a:accent5>
       <a:accent6>
-        <a:srgbClr val="F79646"/>
+        <a:srgbClr val="4EA72E"/>
       </a:accent6>
       <a:hlink>
-        <a:srgbClr val="0000FF"/>
+        <a:srgbClr val="467886"/>
       </a:hlink>
       <a:folHlink>
-        <a:srgbClr val="800080"/>
+        <a:srgbClr val="96607D"/>
       </a:folHlink>
     </a:clrScheme>
     <a:fontScheme name="Office">
       <a:majorFont>
-        <a:latin typeface="Calibri"/>
+        <a:latin typeface="Aptos Display" panose="02110004020202020204"/>
         <a:ea typeface=""/>
         <a:cs typeface=""/>
-        <a:font script="Jpan" typeface="ＭＳ Ｐゴシック"/>
+        <a:font script="Jpan" typeface="游ゴシック Light"/>
         <a:font script="Hang" typeface="맑은 고딕"/>
-        <a:font script="Hans" typeface="宋体"/>
+        <a:font script="Hans" typeface="等线 Light"/>
         <a:font script="Hant" typeface="新細明體"/>
         <a:font script="Arab" typeface="Times New Roman"/>
         <a:font script="Hebr" typeface="Times New Roman"/>
@@ -21841,14 +22322,31 @@
         <a:font script="Viet" typeface="Times New Roman"/>
         <a:font script="Uigh" typeface="Microsoft Uighur"/>
         <a:font script="Geor" typeface="Sylfaen"/>
+        <a:font script="Armn" typeface="Arial"/>
+        <a:font script="Bugi" typeface="Leelawadee UI"/>
+        <a:font script="Bopo" typeface="Microsoft JhengHei"/>
+        <a:font script="Java" typeface="Javanese Text"/>
+        <a:font script="Lisu" typeface="Segoe UI"/>
+        <a:font script="Mymr" typeface="Myanmar Text"/>
+        <a:font script="Nkoo" typeface="Ebrima"/>
+        <a:font script="Olck" typeface="Nirmala UI"/>
+        <a:font script="Osma" typeface="Ebrima"/>
+        <a:font script="Phag" typeface="Phagspa"/>
+        <a:font script="Syrn" typeface="Estrangelo Edessa"/>
+        <a:font script="Syrj" typeface="Estrangelo Edessa"/>
+        <a:font script="Syre" typeface="Estrangelo Edessa"/>
+        <a:font script="Sora" typeface="Nirmala UI"/>
+        <a:font script="Tale" typeface="Microsoft Tai Le"/>
+        <a:font script="Talu" typeface="Microsoft New Tai Lue"/>
+        <a:font script="Tfng" typeface="Ebrima"/>
       </a:majorFont>
       <a:minorFont>
-        <a:latin typeface="Calibri"/>
+        <a:latin typeface="Aptos" panose="02110004020202020204"/>
         <a:ea typeface=""/>
         <a:cs typeface=""/>
-        <a:font script="Jpan" typeface="ＭＳ Ｐゴシック"/>
+        <a:font script="Jpan" typeface="游ゴシック"/>
         <a:font script="Hang" typeface="맑은 고딕"/>
-        <a:font script="Hans" typeface="宋体"/>
+        <a:font script="Hans" typeface="等线"/>
         <a:font script="Hant" typeface="新細明體"/>
         <a:font script="Arab" typeface="Arial"/>
         <a:font script="Hebr" typeface="Arial"/>
@@ -21876,6 +22374,23 @@
         <a:font script="Viet" typeface="Arial"/>
         <a:font script="Uigh" typeface="Microsoft Uighur"/>
         <a:font script="Geor" typeface="Sylfaen"/>
+        <a:font script="Armn" typeface="Arial"/>
+        <a:font script="Bugi" typeface="Leelawadee UI"/>
+        <a:font script="Bopo" typeface="Microsoft JhengHei"/>
+        <a:font script="Java" typeface="Javanese Text"/>
+        <a:font script="Lisu" typeface="Segoe UI"/>
+        <a:font script="Mymr" typeface="Myanmar Text"/>
+        <a:font script="Nkoo" typeface="Ebrima"/>
+        <a:font script="Olck" typeface="Nirmala UI"/>
+        <a:font script="Osma" typeface="Ebrima"/>
+        <a:font script="Phag" typeface="Phagspa"/>
+        <a:font script="Syrn" typeface="Estrangelo Edessa"/>
+        <a:font script="Syrj" typeface="Estrangelo Edessa"/>
+        <a:font script="Syre" typeface="Estrangelo Edessa"/>
+        <a:font script="Sora" typeface="Nirmala UI"/>
+        <a:font script="Tale" typeface="Microsoft Tai Le"/>
+        <a:font script="Talu" typeface="Microsoft New Tai Lue"/>
+        <a:font script="Tfng" typeface="Ebrima"/>
       </a:minorFont>
     </a:fontScheme>
     <a:fmtScheme name="Office">
@@ -21887,180 +22402,136 @@
           <a:gsLst>
             <a:gs pos="0">
               <a:schemeClr val="phClr">
-                <a:tint val="50000"/>
-                <a:satMod val="300000"/>
+                <a:lumMod val="110000"/>
+                <a:satMod val="105000"/>
+                <a:tint val="67000"/>
               </a:schemeClr>
             </a:gs>
-            <a:gs pos="35000">
+            <a:gs pos="50000">
               <a:schemeClr val="phClr">
-                <a:tint val="37000"/>
-                <a:satMod val="300000"/>
+                <a:lumMod val="105000"/>
+                <a:satMod val="103000"/>
+                <a:tint val="73000"/>
               </a:schemeClr>
             </a:gs>
             <a:gs pos="100000">
               <a:schemeClr val="phClr">
-                <a:tint val="15000"/>
-                <a:satMod val="350000"/>
+                <a:lumMod val="105000"/>
+                <a:satMod val="109000"/>
+                <a:tint val="81000"/>
               </a:schemeClr>
             </a:gs>
           </a:gsLst>
-          <a:lin ang="16200000" scaled="1"/>
+          <a:lin ang="5400000" scaled="0"/>
         </a:gradFill>
         <a:gradFill rotWithShape="1">
           <a:gsLst>
             <a:gs pos="0">
               <a:schemeClr val="phClr">
-                <a:tint val="100000"/>
+                <a:satMod val="103000"/>
+                <a:lumMod val="102000"/>
+                <a:tint val="94000"/>
+              </a:schemeClr>
+            </a:gs>
+            <a:gs pos="50000">
+              <a:schemeClr val="phClr">
+                <a:satMod val="110000"/>
+                <a:lumMod val="100000"/>
                 <a:shade val="100000"/>
-                <a:satMod val="130000"/>
               </a:schemeClr>
             </a:gs>
             <a:gs pos="100000">
               <a:schemeClr val="phClr">
-                <a:tint val="50000"/>
-                <a:shade val="100000"/>
-                <a:satMod val="350000"/>
+                <a:lumMod val="99000"/>
+                <a:satMod val="120000"/>
+                <a:shade val="78000"/>
               </a:schemeClr>
             </a:gs>
           </a:gsLst>
-          <a:lin ang="16200000" scaled="0"/>
+          <a:lin ang="5400000" scaled="0"/>
         </a:gradFill>
       </a:fillStyleLst>
       <a:lnStyleLst>
-        <a:ln w="9525" cap="flat" cmpd="sng" algn="ctr">
+        <a:ln w="12700" cap="flat" cmpd="sng" algn="ctr">
           <a:solidFill>
-            <a:schemeClr val="phClr">
-              <a:shade val="95000"/>
-              <a:satMod val="105000"/>
-            </a:schemeClr>
+            <a:schemeClr val="phClr"/>
           </a:solidFill>
           <a:prstDash val="solid"/>
+          <a:miter lim="800000"/>
+        </a:ln>
+        <a:ln w="19050" cap="flat" cmpd="sng" algn="ctr">
+          <a:solidFill>
+            <a:schemeClr val="phClr"/>
+          </a:solidFill>
+          <a:prstDash val="solid"/>
+          <a:miter lim="800000"/>
         </a:ln>
         <a:ln w="25400" cap="flat" cmpd="sng" algn="ctr">
           <a:solidFill>
             <a:schemeClr val="phClr"/>
           </a:solidFill>
           <a:prstDash val="solid"/>
-        </a:ln>
-        <a:ln w="38100" cap="flat" cmpd="sng" algn="ctr">
-          <a:solidFill>
-            <a:schemeClr val="phClr"/>
-          </a:solidFill>
-          <a:prstDash val="solid"/>
+          <a:miter lim="800000"/>
         </a:ln>
       </a:lnStyleLst>
       <a:effectStyleLst>
         <a:effectStyle>
+          <a:effectLst/>
+        </a:effectStyle>
+        <a:effectStyle>
+          <a:effectLst/>
+        </a:effectStyle>
+        <a:effectStyle>
           <a:effectLst>
-            <a:outerShdw blurRad="40000" dist="20000" dir="5400000" rotWithShape="0">
+            <a:outerShdw blurRad="57150" dist="19050" dir="5400000" algn="ctr" rotWithShape="0">
               <a:srgbClr val="000000">
-                <a:alpha val="38000"/>
+                <a:alpha val="63000"/>
               </a:srgbClr>
             </a:outerShdw>
           </a:effectLst>
-        </a:effectStyle>
-        <a:effectStyle>
-          <a:effectLst>
-            <a:outerShdw blurRad="40000" dist="23000" dir="5400000" rotWithShape="0">
-              <a:srgbClr val="000000">
-                <a:alpha val="35000"/>
-              </a:srgbClr>
-            </a:outerShdw>
-          </a:effectLst>
-        </a:effectStyle>
-        <a:effectStyle>
-          <a:effectLst>
-            <a:outerShdw blurRad="40000" dist="23000" dir="5400000" rotWithShape="0">
-              <a:srgbClr val="000000">
-                <a:alpha val="35000"/>
-              </a:srgbClr>
-            </a:outerShdw>
-          </a:effectLst>
-          <a:scene3d>
-            <a:camera prst="orthographicFront">
-              <a:rot lat="0" lon="0" rev="0"/>
-            </a:camera>
-            <a:lightRig rig="threePt" dir="t">
-              <a:rot lat="0" lon="0" rev="1200000"/>
-            </a:lightRig>
-          </a:scene3d>
-          <a:sp3d>
-            <a:bevelT w="63500" h="25400"/>
-          </a:sp3d>
         </a:effectStyle>
       </a:effectStyleLst>
       <a:bgFillStyleLst>
         <a:solidFill>
           <a:schemeClr val="phClr"/>
         </a:solidFill>
+        <a:solidFill>
+          <a:schemeClr val="phClr">
+            <a:tint val="95000"/>
+            <a:satMod val="170000"/>
+          </a:schemeClr>
+        </a:solidFill>
         <a:gradFill rotWithShape="1">
           <a:gsLst>
             <a:gs pos="0">
               <a:schemeClr val="phClr">
-                <a:tint val="40000"/>
-                <a:satMod val="350000"/>
+                <a:tint val="93000"/>
+                <a:satMod val="150000"/>
+                <a:shade val="98000"/>
+                <a:lumMod val="102000"/>
               </a:schemeClr>
             </a:gs>
-            <a:gs pos="40000">
+            <a:gs pos="50000">
               <a:schemeClr val="phClr">
-                <a:tint val="45000"/>
-                <a:shade val="99000"/>
-                <a:satMod val="350000"/>
+                <a:tint val="98000"/>
+                <a:satMod val="130000"/>
+                <a:shade val="90000"/>
+                <a:lumMod val="103000"/>
               </a:schemeClr>
             </a:gs>
             <a:gs pos="100000">
               <a:schemeClr val="phClr">
-                <a:shade val="20000"/>
-                <a:satMod val="255000"/>
+                <a:shade val="63000"/>
+                <a:satMod val="120000"/>
               </a:schemeClr>
             </a:gs>
           </a:gsLst>
-          <a:path path="circle">
-            <a:fillToRect l="50000" t="-80000" r="50000" b="180000"/>
-          </a:path>
-        </a:gradFill>
-        <a:gradFill rotWithShape="1">
-          <a:gsLst>
-            <a:gs pos="0">
-              <a:schemeClr val="phClr">
-                <a:tint val="80000"/>
-                <a:satMod val="300000"/>
-              </a:schemeClr>
-            </a:gs>
-            <a:gs pos="100000">
-              <a:schemeClr val="phClr">
-                <a:shade val="30000"/>
-                <a:satMod val="200000"/>
-              </a:schemeClr>
-            </a:gs>
-          </a:gsLst>
-          <a:path path="circle">
-            <a:fillToRect l="50000" t="50000" r="50000" b="50000"/>
-          </a:path>
+          <a:lin ang="5400000" scaled="0"/>
         </a:gradFill>
       </a:bgFillStyleLst>
     </a:fmtScheme>
   </a:themeElements>
   <a:objectDefaults>
-    <a:spDef>
-      <a:spPr/>
-      <a:bodyPr/>
-      <a:lstStyle/>
-      <a:style>
-        <a:lnRef idx="1">
-          <a:schemeClr val="accent1"/>
-        </a:lnRef>
-        <a:fillRef idx="3">
-          <a:schemeClr val="accent1"/>
-        </a:fillRef>
-        <a:effectRef idx="2">
-          <a:schemeClr val="accent1"/>
-        </a:effectRef>
-        <a:fontRef idx="minor">
-          <a:schemeClr val="lt1"/>
-        </a:fontRef>
-      </a:style>
-    </a:spDef>
     <a:lnDef>
       <a:spPr/>
       <a:bodyPr/>
@@ -22082,5 +22553,16 @@
     </a:lnDef>
   </a:objectDefaults>
   <a:extraClrSchemeLst/>
+  <a:extLst>
+    <a:ext uri="{05A4C25C-085E-4340-85A3-A5531E510DB2}">
+      <thm15:themeFamily xmlns:thm15="http://schemas.microsoft.com/office/thememl/2012/main" name="Office Theme" id="{2E142A2C-CD16-42D6-873A-C26D2A0506FA}" vid="{1BDDFF52-6CD6-40A5-AB3C-68EB2F1E4D0A}"/>
+    </a:ext>
+  </a:extLst>
 </a:theme>
+</file>
+
+<file path=docMetadata/LabelInfo.xml><?xml version="1.0" encoding="utf-8"?>
+<clbl:labelList xmlns:clbl="http://schemas.microsoft.com/office/2020/mipLabelMetadata">
+  <clbl:label id="{0efe6398-783c-48a1-b7d1-175bb2d1ab5a}" enabled="1" method="Privileged" siteId="{d48875fa-fd21-468f-b1d1-5a6f9c288768}" contentBits="0" removed="0"/>
+</clbl:labelList>
 </file>